--- a/Steam遊戲市場分析報告.pptx
+++ b/Steam遊戲市場分析報告.pptx
@@ -4,8 +4,23 @@
   <p:sldMasterIdLst>
     <p:sldMasterId id="2147483648" r:id="rId1"/>
   </p:sldMasterIdLst>
+  <p:notesMasterIdLst>
+    <p:notesMasterId r:id="rId15"/>
+  </p:notesMasterIdLst>
   <p:sldIdLst>
     <p:sldId id="256" r:id="rId2"/>
+    <p:sldId id="257" r:id="rId3"/>
+    <p:sldId id="266" r:id="rId4"/>
+    <p:sldId id="267" r:id="rId5"/>
+    <p:sldId id="268" r:id="rId6"/>
+    <p:sldId id="269" r:id="rId7"/>
+    <p:sldId id="270" r:id="rId8"/>
+    <p:sldId id="271" r:id="rId9"/>
+    <p:sldId id="272" r:id="rId10"/>
+    <p:sldId id="273" r:id="rId11"/>
+    <p:sldId id="274" r:id="rId12"/>
+    <p:sldId id="263" r:id="rId13"/>
+    <p:sldId id="264" r:id="rId14"/>
   </p:sldIdLst>
   <p:sldSz cx="12192000" cy="6858000"/>
   <p:notesSz cx="6858000" cy="9144000"/>
@@ -112,6 +127,439 @@
 </p:presentation>
 </file>
 
+<file path=ppt/notesMasters/notesMaster1.xml><?xml version="1.0" encoding="utf-8"?>
+<p:notesMaster xmlns:a="http://schemas.openxmlformats.org/drawingml/2006/main" xmlns:r="http://schemas.openxmlformats.org/officeDocument/2006/relationships" xmlns:p="http://schemas.openxmlformats.org/presentationml/2006/main">
+  <p:cSld>
+    <p:bg>
+      <p:bgRef idx="1001">
+        <a:schemeClr val="bg1"/>
+      </p:bgRef>
+    </p:bg>
+    <p:spTree>
+      <p:nvGrpSpPr>
+        <p:cNvPr id="1" name=""/>
+        <p:cNvGrpSpPr/>
+        <p:nvPr/>
+      </p:nvGrpSpPr>
+      <p:grpSpPr>
+        <a:xfrm>
+          <a:off x="0" y="0"/>
+          <a:ext cx="0" cy="0"/>
+          <a:chOff x="0" y="0"/>
+          <a:chExt cx="0" cy="0"/>
+        </a:xfrm>
+      </p:grpSpPr>
+      <p:sp>
+        <p:nvSpPr>
+          <p:cNvPr id="2" name="頁首版面配置區 1"/>
+          <p:cNvSpPr>
+            <a:spLocks noGrp="1"/>
+          </p:cNvSpPr>
+          <p:nvPr>
+            <p:ph type="hdr" sz="quarter"/>
+          </p:nvPr>
+        </p:nvSpPr>
+        <p:spPr>
+          <a:xfrm>
+            <a:off x="0" y="0"/>
+            <a:ext cx="2971800" cy="458788"/>
+          </a:xfrm>
+          <a:prstGeom prst="rect">
+            <a:avLst/>
+          </a:prstGeom>
+        </p:spPr>
+        <p:txBody>
+          <a:bodyPr vert="horz" lIns="91440" tIns="45720" rIns="91440" bIns="45720" rtlCol="0"/>
+          <a:lstStyle>
+            <a:lvl1pPr algn="l">
+              <a:defRPr sz="1200"/>
+            </a:lvl1pPr>
+          </a:lstStyle>
+          <a:p>
+            <a:endParaRPr lang="zh-TW" altLang="en-US"/>
+          </a:p>
+        </p:txBody>
+      </p:sp>
+      <p:sp>
+        <p:nvSpPr>
+          <p:cNvPr id="3" name="日期版面配置區 2"/>
+          <p:cNvSpPr>
+            <a:spLocks noGrp="1"/>
+          </p:cNvSpPr>
+          <p:nvPr>
+            <p:ph type="dt" idx="1"/>
+          </p:nvPr>
+        </p:nvSpPr>
+        <p:spPr>
+          <a:xfrm>
+            <a:off x="3884613" y="0"/>
+            <a:ext cx="2971800" cy="458788"/>
+          </a:xfrm>
+          <a:prstGeom prst="rect">
+            <a:avLst/>
+          </a:prstGeom>
+        </p:spPr>
+        <p:txBody>
+          <a:bodyPr vert="horz" lIns="91440" tIns="45720" rIns="91440" bIns="45720" rtlCol="0"/>
+          <a:lstStyle>
+            <a:lvl1pPr algn="r">
+              <a:defRPr sz="1200"/>
+            </a:lvl1pPr>
+          </a:lstStyle>
+          <a:p>
+            <a:fld id="{4248A3BC-A2A9-4AF2-859B-7C5E966DF741}" type="datetimeFigureOut">
+              <a:rPr lang="zh-TW" altLang="en-US" smtClean="0"/>
+              <a:t>2026/4/15</a:t>
+            </a:fld>
+            <a:endParaRPr lang="zh-TW" altLang="en-US"/>
+          </a:p>
+        </p:txBody>
+      </p:sp>
+      <p:sp>
+        <p:nvSpPr>
+          <p:cNvPr id="4" name="投影片影像版面配置區 3"/>
+          <p:cNvSpPr>
+            <a:spLocks noGrp="1" noRot="1" noChangeAspect="1"/>
+          </p:cNvSpPr>
+          <p:nvPr>
+            <p:ph type="sldImg" idx="2"/>
+          </p:nvPr>
+        </p:nvSpPr>
+        <p:spPr>
+          <a:xfrm>
+            <a:off x="685800" y="1143000"/>
+            <a:ext cx="5486400" cy="3086100"/>
+          </a:xfrm>
+          <a:prstGeom prst="rect">
+            <a:avLst/>
+          </a:prstGeom>
+          <a:noFill/>
+          <a:ln w="12700">
+            <a:solidFill>
+              <a:prstClr val="black"/>
+            </a:solidFill>
+          </a:ln>
+        </p:spPr>
+        <p:txBody>
+          <a:bodyPr vert="horz" lIns="91440" tIns="45720" rIns="91440" bIns="45720" rtlCol="0" anchor="ctr"/>
+          <a:lstStyle/>
+          <a:p>
+            <a:endParaRPr lang="zh-TW" altLang="en-US"/>
+          </a:p>
+        </p:txBody>
+      </p:sp>
+      <p:sp>
+        <p:nvSpPr>
+          <p:cNvPr id="5" name="備忘稿版面配置區 4"/>
+          <p:cNvSpPr>
+            <a:spLocks noGrp="1"/>
+          </p:cNvSpPr>
+          <p:nvPr>
+            <p:ph type="body" sz="quarter" idx="3"/>
+          </p:nvPr>
+        </p:nvSpPr>
+        <p:spPr>
+          <a:xfrm>
+            <a:off x="685800" y="4400550"/>
+            <a:ext cx="5486400" cy="3600450"/>
+          </a:xfrm>
+          <a:prstGeom prst="rect">
+            <a:avLst/>
+          </a:prstGeom>
+        </p:spPr>
+        <p:txBody>
+          <a:bodyPr vert="horz" lIns="91440" tIns="45720" rIns="91440" bIns="45720" rtlCol="0"/>
+          <a:lstStyle/>
+          <a:p>
+            <a:pPr lvl="0"/>
+            <a:r>
+              <a:rPr lang="zh-TW" altLang="en-US"/>
+              <a:t>按一下以編輯母片文字樣式</a:t>
+            </a:r>
+          </a:p>
+          <a:p>
+            <a:pPr lvl="1"/>
+            <a:r>
+              <a:rPr lang="zh-TW" altLang="en-US"/>
+              <a:t>第二層</a:t>
+            </a:r>
+          </a:p>
+          <a:p>
+            <a:pPr lvl="2"/>
+            <a:r>
+              <a:rPr lang="zh-TW" altLang="en-US"/>
+              <a:t>第三層</a:t>
+            </a:r>
+          </a:p>
+          <a:p>
+            <a:pPr lvl="3"/>
+            <a:r>
+              <a:rPr lang="zh-TW" altLang="en-US"/>
+              <a:t>第四層</a:t>
+            </a:r>
+          </a:p>
+          <a:p>
+            <a:pPr lvl="4"/>
+            <a:r>
+              <a:rPr lang="zh-TW" altLang="en-US"/>
+              <a:t>第五層</a:t>
+            </a:r>
+          </a:p>
+        </p:txBody>
+      </p:sp>
+      <p:sp>
+        <p:nvSpPr>
+          <p:cNvPr id="6" name="頁尾版面配置區 5"/>
+          <p:cNvSpPr>
+            <a:spLocks noGrp="1"/>
+          </p:cNvSpPr>
+          <p:nvPr>
+            <p:ph type="ftr" sz="quarter" idx="4"/>
+          </p:nvPr>
+        </p:nvSpPr>
+        <p:spPr>
+          <a:xfrm>
+            <a:off x="0" y="8685213"/>
+            <a:ext cx="2971800" cy="458787"/>
+          </a:xfrm>
+          <a:prstGeom prst="rect">
+            <a:avLst/>
+          </a:prstGeom>
+        </p:spPr>
+        <p:txBody>
+          <a:bodyPr vert="horz" lIns="91440" tIns="45720" rIns="91440" bIns="45720" rtlCol="0" anchor="b"/>
+          <a:lstStyle>
+            <a:lvl1pPr algn="l">
+              <a:defRPr sz="1200"/>
+            </a:lvl1pPr>
+          </a:lstStyle>
+          <a:p>
+            <a:endParaRPr lang="zh-TW" altLang="en-US"/>
+          </a:p>
+        </p:txBody>
+      </p:sp>
+      <p:sp>
+        <p:nvSpPr>
+          <p:cNvPr id="7" name="投影片編號版面配置區 6"/>
+          <p:cNvSpPr>
+            <a:spLocks noGrp="1"/>
+          </p:cNvSpPr>
+          <p:nvPr>
+            <p:ph type="sldNum" sz="quarter" idx="5"/>
+          </p:nvPr>
+        </p:nvSpPr>
+        <p:spPr>
+          <a:xfrm>
+            <a:off x="3884613" y="8685213"/>
+            <a:ext cx="2971800" cy="458787"/>
+          </a:xfrm>
+          <a:prstGeom prst="rect">
+            <a:avLst/>
+          </a:prstGeom>
+        </p:spPr>
+        <p:txBody>
+          <a:bodyPr vert="horz" lIns="91440" tIns="45720" rIns="91440" bIns="45720" rtlCol="0" anchor="b"/>
+          <a:lstStyle>
+            <a:lvl1pPr algn="r">
+              <a:defRPr sz="1200"/>
+            </a:lvl1pPr>
+          </a:lstStyle>
+          <a:p>
+            <a:fld id="{76F50F68-E9E7-4BC1-B527-560F3585FD1B}" type="slidenum">
+              <a:rPr lang="zh-TW" altLang="en-US" smtClean="0"/>
+              <a:t>‹#›</a:t>
+            </a:fld>
+            <a:endParaRPr lang="zh-TW" altLang="en-US"/>
+          </a:p>
+        </p:txBody>
+      </p:sp>
+    </p:spTree>
+    <p:extLst>
+      <p:ext uri="{BB962C8B-B14F-4D97-AF65-F5344CB8AC3E}">
+        <p14:creationId xmlns:p14="http://schemas.microsoft.com/office/powerpoint/2010/main" val="2859912834"/>
+      </p:ext>
+    </p:extLst>
+  </p:cSld>
+  <p:clrMap bg1="lt1" tx1="dk1" bg2="lt2" tx2="dk2" accent1="accent1" accent2="accent2" accent3="accent3" accent4="accent4" accent5="accent5" accent6="accent6" hlink="hlink" folHlink="folHlink"/>
+  <p:notesStyle>
+    <a:lvl1pPr marL="0" algn="l" defTabSz="914400" rtl="0" eaLnBrk="1" latinLnBrk="0" hangingPunct="1">
+      <a:defRPr sz="1200" kern="1200">
+        <a:solidFill>
+          <a:schemeClr val="tx1"/>
+        </a:solidFill>
+        <a:latin typeface="+mn-lt"/>
+        <a:ea typeface="+mn-ea"/>
+        <a:cs typeface="+mn-cs"/>
+      </a:defRPr>
+    </a:lvl1pPr>
+    <a:lvl2pPr marL="457200" algn="l" defTabSz="914400" rtl="0" eaLnBrk="1" latinLnBrk="0" hangingPunct="1">
+      <a:defRPr sz="1200" kern="1200">
+        <a:solidFill>
+          <a:schemeClr val="tx1"/>
+        </a:solidFill>
+        <a:latin typeface="+mn-lt"/>
+        <a:ea typeface="+mn-ea"/>
+        <a:cs typeface="+mn-cs"/>
+      </a:defRPr>
+    </a:lvl2pPr>
+    <a:lvl3pPr marL="914400" algn="l" defTabSz="914400" rtl="0" eaLnBrk="1" latinLnBrk="0" hangingPunct="1">
+      <a:defRPr sz="1200" kern="1200">
+        <a:solidFill>
+          <a:schemeClr val="tx1"/>
+        </a:solidFill>
+        <a:latin typeface="+mn-lt"/>
+        <a:ea typeface="+mn-ea"/>
+        <a:cs typeface="+mn-cs"/>
+      </a:defRPr>
+    </a:lvl3pPr>
+    <a:lvl4pPr marL="1371600" algn="l" defTabSz="914400" rtl="0" eaLnBrk="1" latinLnBrk="0" hangingPunct="1">
+      <a:defRPr sz="1200" kern="1200">
+        <a:solidFill>
+          <a:schemeClr val="tx1"/>
+        </a:solidFill>
+        <a:latin typeface="+mn-lt"/>
+        <a:ea typeface="+mn-ea"/>
+        <a:cs typeface="+mn-cs"/>
+      </a:defRPr>
+    </a:lvl4pPr>
+    <a:lvl5pPr marL="1828800" algn="l" defTabSz="914400" rtl="0" eaLnBrk="1" latinLnBrk="0" hangingPunct="1">
+      <a:defRPr sz="1200" kern="1200">
+        <a:solidFill>
+          <a:schemeClr val="tx1"/>
+        </a:solidFill>
+        <a:latin typeface="+mn-lt"/>
+        <a:ea typeface="+mn-ea"/>
+        <a:cs typeface="+mn-cs"/>
+      </a:defRPr>
+    </a:lvl5pPr>
+    <a:lvl6pPr marL="2286000" algn="l" defTabSz="914400" rtl="0" eaLnBrk="1" latinLnBrk="0" hangingPunct="1">
+      <a:defRPr sz="1200" kern="1200">
+        <a:solidFill>
+          <a:schemeClr val="tx1"/>
+        </a:solidFill>
+        <a:latin typeface="+mn-lt"/>
+        <a:ea typeface="+mn-ea"/>
+        <a:cs typeface="+mn-cs"/>
+      </a:defRPr>
+    </a:lvl6pPr>
+    <a:lvl7pPr marL="2743200" algn="l" defTabSz="914400" rtl="0" eaLnBrk="1" latinLnBrk="0" hangingPunct="1">
+      <a:defRPr sz="1200" kern="1200">
+        <a:solidFill>
+          <a:schemeClr val="tx1"/>
+        </a:solidFill>
+        <a:latin typeface="+mn-lt"/>
+        <a:ea typeface="+mn-ea"/>
+        <a:cs typeface="+mn-cs"/>
+      </a:defRPr>
+    </a:lvl7pPr>
+    <a:lvl8pPr marL="3200400" algn="l" defTabSz="914400" rtl="0" eaLnBrk="1" latinLnBrk="0" hangingPunct="1">
+      <a:defRPr sz="1200" kern="1200">
+        <a:solidFill>
+          <a:schemeClr val="tx1"/>
+        </a:solidFill>
+        <a:latin typeface="+mn-lt"/>
+        <a:ea typeface="+mn-ea"/>
+        <a:cs typeface="+mn-cs"/>
+      </a:defRPr>
+    </a:lvl8pPr>
+    <a:lvl9pPr marL="3657600" algn="l" defTabSz="914400" rtl="0" eaLnBrk="1" latinLnBrk="0" hangingPunct="1">
+      <a:defRPr sz="1200" kern="1200">
+        <a:solidFill>
+          <a:schemeClr val="tx1"/>
+        </a:solidFill>
+        <a:latin typeface="+mn-lt"/>
+        <a:ea typeface="+mn-ea"/>
+        <a:cs typeface="+mn-cs"/>
+      </a:defRPr>
+    </a:lvl9pPr>
+  </p:notesStyle>
+</p:notesMaster>
+</file>
+
+<file path=ppt/notesSlides/notesSlide1.xml><?xml version="1.0" encoding="utf-8"?>
+<p:notes xmlns:a="http://schemas.openxmlformats.org/drawingml/2006/main" xmlns:r="http://schemas.openxmlformats.org/officeDocument/2006/relationships" xmlns:p="http://schemas.openxmlformats.org/presentationml/2006/main">
+  <p:cSld>
+    <p:spTree>
+      <p:nvGrpSpPr>
+        <p:cNvPr id="1" name=""/>
+        <p:cNvGrpSpPr/>
+        <p:nvPr/>
+      </p:nvGrpSpPr>
+      <p:grpSpPr>
+        <a:xfrm>
+          <a:off x="0" y="0"/>
+          <a:ext cx="0" cy="0"/>
+          <a:chOff x="0" y="0"/>
+          <a:chExt cx="0" cy="0"/>
+        </a:xfrm>
+      </p:grpSpPr>
+      <p:sp>
+        <p:nvSpPr>
+          <p:cNvPr id="2" name="投影片影像版面配置區 1"/>
+          <p:cNvSpPr>
+            <a:spLocks noGrp="1" noRot="1" noChangeAspect="1"/>
+          </p:cNvSpPr>
+          <p:nvPr>
+            <p:ph type="sldImg"/>
+          </p:nvPr>
+        </p:nvSpPr>
+        <p:spPr/>
+      </p:sp>
+      <p:sp>
+        <p:nvSpPr>
+          <p:cNvPr id="3" name="備忘稿版面配置區 2"/>
+          <p:cNvSpPr>
+            <a:spLocks noGrp="1"/>
+          </p:cNvSpPr>
+          <p:nvPr>
+            <p:ph type="body" idx="1"/>
+          </p:nvPr>
+        </p:nvSpPr>
+        <p:spPr/>
+        <p:txBody>
+          <a:bodyPr/>
+          <a:lstStyle/>
+          <a:p>
+            <a:endParaRPr lang="zh-TW" altLang="en-US" dirty="0"/>
+          </a:p>
+        </p:txBody>
+      </p:sp>
+      <p:sp>
+        <p:nvSpPr>
+          <p:cNvPr id="4" name="投影片編號版面配置區 3"/>
+          <p:cNvSpPr>
+            <a:spLocks noGrp="1"/>
+          </p:cNvSpPr>
+          <p:nvPr>
+            <p:ph type="sldNum" sz="quarter" idx="5"/>
+          </p:nvPr>
+        </p:nvSpPr>
+        <p:spPr/>
+        <p:txBody>
+          <a:bodyPr/>
+          <a:lstStyle/>
+          <a:p>
+            <a:fld id="{76F50F68-E9E7-4BC1-B527-560F3585FD1B}" type="slidenum">
+              <a:rPr lang="zh-TW" altLang="en-US" smtClean="0"/>
+              <a:t>1</a:t>
+            </a:fld>
+            <a:endParaRPr lang="zh-TW" altLang="en-US"/>
+          </a:p>
+        </p:txBody>
+      </p:sp>
+    </p:spTree>
+    <p:extLst>
+      <p:ext uri="{BB962C8B-B14F-4D97-AF65-F5344CB8AC3E}">
+        <p14:creationId xmlns:p14="http://schemas.microsoft.com/office/powerpoint/2010/main" val="2237300927"/>
+      </p:ext>
+    </p:extLst>
+  </p:cSld>
+  <p:clrMapOvr>
+    <a:masterClrMapping/>
+  </p:clrMapOvr>
+</p:notes>
+</file>
+
 <file path=ppt/slideLayouts/slideLayout1.xml><?xml version="1.0" encoding="utf-8"?>
 <p:sldLayout xmlns:a="http://schemas.openxmlformats.org/drawingml/2006/main" xmlns:r="http://schemas.openxmlformats.org/officeDocument/2006/relationships" xmlns:p="http://schemas.openxmlformats.org/presentationml/2006/main" type="title" preserve="1">
   <p:cSld name="標題投影片">
@@ -259,7 +707,7 @@
           <a:p>
             <a:fld id="{D94E7259-4CE4-4FEC-BE06-AE2B845FD034}" type="datetimeFigureOut">
               <a:rPr lang="zh-TW" altLang="en-US" smtClean="0"/>
-              <a:t>2026/4/14</a:t>
+              <a:t>2026/4/15</a:t>
             </a:fld>
             <a:endParaRPr lang="zh-TW" altLang="en-US"/>
           </a:p>
@@ -457,7 +905,7 @@
           <a:p>
             <a:fld id="{D94E7259-4CE4-4FEC-BE06-AE2B845FD034}" type="datetimeFigureOut">
               <a:rPr lang="zh-TW" altLang="en-US" smtClean="0"/>
-              <a:t>2026/4/14</a:t>
+              <a:t>2026/4/15</a:t>
             </a:fld>
             <a:endParaRPr lang="zh-TW" altLang="en-US"/>
           </a:p>
@@ -665,7 +1113,7 @@
           <a:p>
             <a:fld id="{D94E7259-4CE4-4FEC-BE06-AE2B845FD034}" type="datetimeFigureOut">
               <a:rPr lang="zh-TW" altLang="en-US" smtClean="0"/>
-              <a:t>2026/4/14</a:t>
+              <a:t>2026/4/15</a:t>
             </a:fld>
             <a:endParaRPr lang="zh-TW" altLang="en-US"/>
           </a:p>
@@ -863,7 +1311,7 @@
           <a:p>
             <a:fld id="{D94E7259-4CE4-4FEC-BE06-AE2B845FD034}" type="datetimeFigureOut">
               <a:rPr lang="zh-TW" altLang="en-US" smtClean="0"/>
-              <a:t>2026/4/14</a:t>
+              <a:t>2026/4/15</a:t>
             </a:fld>
             <a:endParaRPr lang="zh-TW" altLang="en-US"/>
           </a:p>
@@ -1138,7 +1586,7 @@
           <a:p>
             <a:fld id="{D94E7259-4CE4-4FEC-BE06-AE2B845FD034}" type="datetimeFigureOut">
               <a:rPr lang="zh-TW" altLang="en-US" smtClean="0"/>
-              <a:t>2026/4/14</a:t>
+              <a:t>2026/4/15</a:t>
             </a:fld>
             <a:endParaRPr lang="zh-TW" altLang="en-US"/>
           </a:p>
@@ -1403,7 +1851,7 @@
           <a:p>
             <a:fld id="{D94E7259-4CE4-4FEC-BE06-AE2B845FD034}" type="datetimeFigureOut">
               <a:rPr lang="zh-TW" altLang="en-US" smtClean="0"/>
-              <a:t>2026/4/14</a:t>
+              <a:t>2026/4/15</a:t>
             </a:fld>
             <a:endParaRPr lang="zh-TW" altLang="en-US"/>
           </a:p>
@@ -1815,7 +2263,7 @@
           <a:p>
             <a:fld id="{D94E7259-4CE4-4FEC-BE06-AE2B845FD034}" type="datetimeFigureOut">
               <a:rPr lang="zh-TW" altLang="en-US" smtClean="0"/>
-              <a:t>2026/4/14</a:t>
+              <a:t>2026/4/15</a:t>
             </a:fld>
             <a:endParaRPr lang="zh-TW" altLang="en-US"/>
           </a:p>
@@ -1956,7 +2404,7 @@
           <a:p>
             <a:fld id="{D94E7259-4CE4-4FEC-BE06-AE2B845FD034}" type="datetimeFigureOut">
               <a:rPr lang="zh-TW" altLang="en-US" smtClean="0"/>
-              <a:t>2026/4/14</a:t>
+              <a:t>2026/4/15</a:t>
             </a:fld>
             <a:endParaRPr lang="zh-TW" altLang="en-US"/>
           </a:p>
@@ -2069,7 +2517,7 @@
           <a:p>
             <a:fld id="{D94E7259-4CE4-4FEC-BE06-AE2B845FD034}" type="datetimeFigureOut">
               <a:rPr lang="zh-TW" altLang="en-US" smtClean="0"/>
-              <a:t>2026/4/14</a:t>
+              <a:t>2026/4/15</a:t>
             </a:fld>
             <a:endParaRPr lang="zh-TW" altLang="en-US"/>
           </a:p>
@@ -2380,7 +2828,7 @@
           <a:p>
             <a:fld id="{D94E7259-4CE4-4FEC-BE06-AE2B845FD034}" type="datetimeFigureOut">
               <a:rPr lang="zh-TW" altLang="en-US" smtClean="0"/>
-              <a:t>2026/4/14</a:t>
+              <a:t>2026/4/15</a:t>
             </a:fld>
             <a:endParaRPr lang="zh-TW" altLang="en-US"/>
           </a:p>
@@ -2668,7 +3116,7 @@
           <a:p>
             <a:fld id="{D94E7259-4CE4-4FEC-BE06-AE2B845FD034}" type="datetimeFigureOut">
               <a:rPr lang="zh-TW" altLang="en-US" smtClean="0"/>
-              <a:t>2026/4/14</a:t>
+              <a:t>2026/4/15</a:t>
             </a:fld>
             <a:endParaRPr lang="zh-TW" altLang="en-US"/>
           </a:p>
@@ -2909,7 +3357,7 @@
           <a:p>
             <a:fld id="{D94E7259-4CE4-4FEC-BE06-AE2B845FD034}" type="datetimeFigureOut">
               <a:rPr lang="zh-TW" altLang="en-US" smtClean="0"/>
-              <a:t>2026/4/14</a:t>
+              <a:t>2026/4/15</a:t>
             </a:fld>
             <a:endParaRPr lang="zh-TW" altLang="en-US"/>
           </a:p>
@@ -3328,10 +3776,223 @@
       </p:grpSpPr>
       <p:pic>
         <p:nvPicPr>
+          <p:cNvPr id="12" name="圖片 11">
+            <a:extLst>
+              <a:ext uri="{FF2B5EF4-FFF2-40B4-BE49-F238E27FC236}">
+                <a16:creationId xmlns:a16="http://schemas.microsoft.com/office/drawing/2014/main" id="{4048EC05-EADA-B116-8A47-0895688364F7}"/>
+              </a:ext>
+            </a:extLst>
+          </p:cNvPr>
+          <p:cNvPicPr>
+            <a:picLocks noChangeAspect="1"/>
+          </p:cNvPicPr>
+          <p:nvPr/>
+        </p:nvPicPr>
+        <p:blipFill>
+          <a:blip r:embed="rId3">
+            <a:extLst>
+              <a:ext uri="{28A0092B-C50C-407E-A947-70E740481C1C}">
+                <a14:useLocalDpi xmlns:a14="http://schemas.microsoft.com/office/drawing/2010/main" val="0"/>
+              </a:ext>
+            </a:extLst>
+          </a:blip>
+          <a:stretch>
+            <a:fillRect/>
+          </a:stretch>
+        </p:blipFill>
+        <p:spPr>
+          <a:xfrm>
+            <a:off x="0" y="0"/>
+            <a:ext cx="12192000" cy="6858000"/>
+          </a:xfrm>
+          <a:prstGeom prst="rect">
+            <a:avLst/>
+          </a:prstGeom>
+        </p:spPr>
+      </p:pic>
+      <p:sp>
+        <p:nvSpPr>
+          <p:cNvPr id="13" name="文字方塊 12">
+            <a:extLst>
+              <a:ext uri="{FF2B5EF4-FFF2-40B4-BE49-F238E27FC236}">
+                <a16:creationId xmlns:a16="http://schemas.microsoft.com/office/drawing/2014/main" id="{0CBB74B0-DA31-213A-3F20-8EAC3D3CFA7C}"/>
+              </a:ext>
+            </a:extLst>
+          </p:cNvPr>
+          <p:cNvSpPr txBox="1"/>
+          <p:nvPr/>
+        </p:nvSpPr>
+        <p:spPr>
+          <a:xfrm>
+            <a:off x="0" y="2438400"/>
+            <a:ext cx="12192000" cy="830997"/>
+          </a:xfrm>
+          <a:prstGeom prst="rect">
+            <a:avLst/>
+          </a:prstGeom>
+          <a:noFill/>
+        </p:spPr>
+        <p:txBody>
+          <a:bodyPr wrap="square" rtlCol="0">
+            <a:spAutoFit/>
+          </a:bodyPr>
+          <a:lstStyle/>
+          <a:p>
+            <a:pPr algn="ctr"/>
+            <a:r>
+              <a:rPr lang="en-US" altLang="zh-TW" sz="4800" dirty="0">
+                <a:solidFill>
+                  <a:srgbClr val="00FFFF"/>
+                </a:solidFill>
+                <a:latin typeface="微軟正黑體" panose="020B0604030504040204" pitchFamily="34" charset="-120"/>
+                <a:ea typeface="微軟正黑體" panose="020B0604030504040204" pitchFamily="34" charset="-120"/>
+              </a:rPr>
+              <a:t>Steam </a:t>
+            </a:r>
+            <a:r>
+              <a:rPr lang="zh-TW" altLang="en-US" sz="4800" dirty="0">
+                <a:solidFill>
+                  <a:srgbClr val="00FFFF"/>
+                </a:solidFill>
+                <a:latin typeface="微軟正黑體" panose="020B0604030504040204" pitchFamily="34" charset="-120"/>
+                <a:ea typeface="微軟正黑體" panose="020B0604030504040204" pitchFamily="34" charset="-120"/>
+              </a:rPr>
+              <a:t>全球遊戲市場分析專題</a:t>
+            </a:r>
+          </a:p>
+        </p:txBody>
+      </p:sp>
+      <p:sp>
+        <p:nvSpPr>
+          <p:cNvPr id="14" name="文字方塊 13">
+            <a:extLst>
+              <a:ext uri="{FF2B5EF4-FFF2-40B4-BE49-F238E27FC236}">
+                <a16:creationId xmlns:a16="http://schemas.microsoft.com/office/drawing/2014/main" id="{8BF46DFB-EBF5-23E5-4A6E-3A22F65E1EF0}"/>
+              </a:ext>
+            </a:extLst>
+          </p:cNvPr>
+          <p:cNvSpPr txBox="1"/>
+          <p:nvPr/>
+        </p:nvSpPr>
+        <p:spPr>
+          <a:xfrm>
+            <a:off x="4782178" y="5434231"/>
+            <a:ext cx="2723823" cy="369332"/>
+          </a:xfrm>
+          <a:prstGeom prst="rect">
+            <a:avLst/>
+          </a:prstGeom>
+          <a:noFill/>
+        </p:spPr>
+        <p:txBody>
+          <a:bodyPr wrap="none" rtlCol="0">
+            <a:spAutoFit/>
+          </a:bodyPr>
+          <a:lstStyle/>
+          <a:p>
+            <a:r>
+              <a:rPr lang="zh-TW" altLang="en-US" dirty="0">
+                <a:solidFill>
+                  <a:srgbClr val="00FFFF"/>
+                </a:solidFill>
+                <a:latin typeface="微軟正黑體" panose="020B0604030504040204" pitchFamily="34" charset="-120"/>
+                <a:ea typeface="微軟正黑體" panose="020B0604030504040204" pitchFamily="34" charset="-120"/>
+              </a:rPr>
+              <a:t>專題製作及分析：鄭朝元</a:t>
+            </a:r>
+          </a:p>
+        </p:txBody>
+      </p:sp>
+      <p:sp>
+        <p:nvSpPr>
+          <p:cNvPr id="16" name="文字方塊 15">
+            <a:extLst>
+              <a:ext uri="{FF2B5EF4-FFF2-40B4-BE49-F238E27FC236}">
+                <a16:creationId xmlns:a16="http://schemas.microsoft.com/office/drawing/2014/main" id="{A700DAC3-E613-7879-D0F9-D3CE95AFD4DE}"/>
+              </a:ext>
+            </a:extLst>
+          </p:cNvPr>
+          <p:cNvSpPr txBox="1"/>
+          <p:nvPr/>
+        </p:nvSpPr>
+        <p:spPr>
+          <a:xfrm>
+            <a:off x="4685998" y="3265438"/>
+            <a:ext cx="2820003" cy="646331"/>
+          </a:xfrm>
+          <a:prstGeom prst="rect">
+            <a:avLst/>
+          </a:prstGeom>
+          <a:noFill/>
+        </p:spPr>
+        <p:txBody>
+          <a:bodyPr wrap="none" rtlCol="0">
+            <a:spAutoFit/>
+          </a:bodyPr>
+          <a:lstStyle/>
+          <a:p>
+            <a:r>
+              <a:rPr lang="en-US" altLang="zh-TW" sz="3600" dirty="0">
+                <a:solidFill>
+                  <a:srgbClr val="00FFFF"/>
+                </a:solidFill>
+                <a:latin typeface="微軟正黑體" panose="020B0604030504040204" pitchFamily="34" charset="-120"/>
+                <a:ea typeface="微軟正黑體" panose="020B0604030504040204" pitchFamily="34" charset="-120"/>
+              </a:rPr>
+              <a:t>(1997-2024)</a:t>
+            </a:r>
+            <a:endParaRPr lang="zh-TW" altLang="en-US" sz="3600" dirty="0">
+              <a:solidFill>
+                <a:srgbClr val="00FFFF"/>
+              </a:solidFill>
+              <a:latin typeface="微軟正黑體" panose="020B0604030504040204" pitchFamily="34" charset="-120"/>
+              <a:ea typeface="微軟正黑體" panose="020B0604030504040204" pitchFamily="34" charset="-120"/>
+            </a:endParaRPr>
+          </a:p>
+        </p:txBody>
+      </p:sp>
+    </p:spTree>
+    <p:extLst>
+      <p:ext uri="{BB962C8B-B14F-4D97-AF65-F5344CB8AC3E}">
+        <p14:creationId xmlns:p14="http://schemas.microsoft.com/office/powerpoint/2010/main" val="3284444931"/>
+      </p:ext>
+    </p:extLst>
+  </p:cSld>
+  <p:clrMapOvr>
+    <a:masterClrMapping/>
+  </p:clrMapOvr>
+</p:sld>
+</file>
+
+<file path=ppt/slides/slide10.xml><?xml version="1.0" encoding="utf-8"?>
+<p:sld xmlns:a="http://schemas.openxmlformats.org/drawingml/2006/main" xmlns:r="http://schemas.openxmlformats.org/officeDocument/2006/relationships" xmlns:p="http://schemas.openxmlformats.org/presentationml/2006/main">
+  <p:cSld>
+    <p:spTree>
+      <p:nvGrpSpPr>
+        <p:cNvPr id="1" name="">
+          <a:extLst>
+            <a:ext uri="{FF2B5EF4-FFF2-40B4-BE49-F238E27FC236}">
+              <a16:creationId xmlns:a16="http://schemas.microsoft.com/office/drawing/2014/main" id="{96B867E1-730F-3AB3-4A6E-3E1331257F8A}"/>
+            </a:ext>
+          </a:extLst>
+        </p:cNvPr>
+        <p:cNvGrpSpPr/>
+        <p:nvPr/>
+      </p:nvGrpSpPr>
+      <p:grpSpPr>
+        <a:xfrm>
+          <a:off x="0" y="0"/>
+          <a:ext cx="0" cy="0"/>
+          <a:chOff x="0" y="0"/>
+          <a:chExt cx="0" cy="0"/>
+        </a:xfrm>
+      </p:grpSpPr>
+      <p:pic>
+        <p:nvPicPr>
           <p:cNvPr id="5" name="圖片 4">
             <a:extLst>
               <a:ext uri="{FF2B5EF4-FFF2-40B4-BE49-F238E27FC236}">
-                <a16:creationId xmlns:a16="http://schemas.microsoft.com/office/drawing/2014/main" id="{4B0C3111-B700-CCE9-E022-70446EB87C6B}"/>
+                <a16:creationId xmlns:a16="http://schemas.microsoft.com/office/drawing/2014/main" id="{CA88CB68-470F-4F95-7908-6B93A4CE526F}"/>
               </a:ext>
             </a:extLst>
           </p:cNvPr>
@@ -3364,112 +4025,1730 @@
       </p:pic>
       <p:sp>
         <p:nvSpPr>
-          <p:cNvPr id="6" name="矩形 5">
-            <a:extLst>
-              <a:ext uri="{FF2B5EF4-FFF2-40B4-BE49-F238E27FC236}">
-                <a16:creationId xmlns:a16="http://schemas.microsoft.com/office/drawing/2014/main" id="{A198D6C9-0C2F-8CE4-67D9-79C0566FD077}"/>
-              </a:ext>
-            </a:extLst>
-          </p:cNvPr>
-          <p:cNvSpPr/>
+          <p:cNvPr id="6" name="文字方塊 5">
+            <a:extLst>
+              <a:ext uri="{FF2B5EF4-FFF2-40B4-BE49-F238E27FC236}">
+                <a16:creationId xmlns:a16="http://schemas.microsoft.com/office/drawing/2014/main" id="{0A2F43CC-ADF4-4FF9-CDA8-E052538D21AB}"/>
+              </a:ext>
+            </a:extLst>
+          </p:cNvPr>
+          <p:cNvSpPr txBox="1"/>
           <p:nvPr/>
         </p:nvSpPr>
         <p:spPr>
           <a:xfrm>
-            <a:off x="11198578" y="5960533"/>
-            <a:ext cx="812800" cy="733778"/>
+            <a:off x="4517298" y="1524000"/>
+            <a:ext cx="3157403" cy="707886"/>
           </a:xfrm>
           <a:prstGeom prst="rect">
             <a:avLst/>
           </a:prstGeom>
-          <a:solidFill>
-            <a:srgbClr val="0D1522"/>
-          </a:solidFill>
-          <a:ln>
-            <a:noFill/>
-          </a:ln>
-        </p:spPr>
-        <p:style>
-          <a:lnRef idx="2">
-            <a:schemeClr val="accent1">
-              <a:shade val="15000"/>
-            </a:schemeClr>
-          </a:lnRef>
-          <a:fillRef idx="1">
-            <a:schemeClr val="accent1"/>
-          </a:fillRef>
-          <a:effectRef idx="0">
-            <a:schemeClr val="accent1"/>
-          </a:effectRef>
-          <a:fontRef idx="minor">
-            <a:schemeClr val="lt1"/>
-          </a:fontRef>
-        </p:style>
-        <p:txBody>
-          <a:bodyPr rtlCol="0" anchor="ctr"/>
-          <a:lstStyle/>
-          <a:p>
-            <a:pPr algn="ctr"/>
-            <a:endParaRPr lang="zh-TW" altLang="en-US"/>
-          </a:p>
-        </p:txBody>
-      </p:sp>
-      <p:sp>
-        <p:nvSpPr>
-          <p:cNvPr id="2" name="矩形 1">
-            <a:extLst>
-              <a:ext uri="{FF2B5EF4-FFF2-40B4-BE49-F238E27FC236}">
-                <a16:creationId xmlns:a16="http://schemas.microsoft.com/office/drawing/2014/main" id="{B524CA3E-1416-92E7-D53B-A7B1AD78F3AE}"/>
-              </a:ext>
-            </a:extLst>
-          </p:cNvPr>
-          <p:cNvSpPr/>
+          <a:noFill/>
+        </p:spPr>
+        <p:txBody>
+          <a:bodyPr wrap="none" rtlCol="0">
+            <a:spAutoFit/>
+          </a:bodyPr>
+          <a:lstStyle/>
+          <a:p>
+            <a:r>
+              <a:rPr lang="en-US" altLang="zh-TW" sz="4000" dirty="0" err="1">
+                <a:solidFill>
+                  <a:srgbClr val="00FFFF"/>
+                </a:solidFill>
+                <a:latin typeface="微軟正黑體" panose="020B0604030504040204" pitchFamily="34" charset="-120"/>
+                <a:ea typeface="微軟正黑體" panose="020B0604030504040204" pitchFamily="34" charset="-120"/>
+              </a:rPr>
+              <a:t>PowerBI</a:t>
+            </a:r>
+            <a:r>
+              <a:rPr lang="zh-TW" altLang="en-US" sz="4000" dirty="0">
+                <a:solidFill>
+                  <a:srgbClr val="00FFFF"/>
+                </a:solidFill>
+                <a:latin typeface="微軟正黑體" panose="020B0604030504040204" pitchFamily="34" charset="-120"/>
+                <a:ea typeface="微軟正黑體" panose="020B0604030504040204" pitchFamily="34" charset="-120"/>
+              </a:rPr>
+              <a:t>展示</a:t>
+            </a:r>
+          </a:p>
+        </p:txBody>
+      </p:sp>
+      <p:pic>
+        <p:nvPicPr>
+          <p:cNvPr id="4" name="圖片 3">
+            <a:extLst>
+              <a:ext uri="{FF2B5EF4-FFF2-40B4-BE49-F238E27FC236}">
+                <a16:creationId xmlns:a16="http://schemas.microsoft.com/office/drawing/2014/main" id="{6CCA5DA6-09C3-C577-1923-2417AC1A4D71}"/>
+              </a:ext>
+            </a:extLst>
+          </p:cNvPr>
+          <p:cNvPicPr>
+            <a:picLocks noChangeAspect="1"/>
+          </p:cNvPicPr>
           <p:nvPr/>
-        </p:nvSpPr>
-        <p:spPr>
-          <a:xfrm>
-            <a:off x="5057422" y="3793067"/>
-            <a:ext cx="3375378" cy="1546578"/>
+        </p:nvPicPr>
+        <p:blipFill>
+          <a:blip r:embed="rId3">
+            <a:extLst>
+              <a:ext uri="{28A0092B-C50C-407E-A947-70E740481C1C}">
+                <a14:useLocalDpi xmlns:a14="http://schemas.microsoft.com/office/drawing/2010/main" val="0"/>
+              </a:ext>
+            </a:extLst>
+          </a:blip>
+          <a:srcRect/>
+          <a:stretch/>
+        </p:blipFill>
+        <p:spPr>
+          <a:xfrm>
+            <a:off x="3070825" y="2229818"/>
+            <a:ext cx="6050347" cy="3402999"/>
           </a:xfrm>
           <a:prstGeom prst="rect">
             <a:avLst/>
           </a:prstGeom>
-          <a:solidFill>
-            <a:srgbClr val="0E1E2D"/>
-          </a:solidFill>
-          <a:ln>
-            <a:noFill/>
-          </a:ln>
-        </p:spPr>
-        <p:style>
-          <a:lnRef idx="2">
-            <a:schemeClr val="accent1">
-              <a:shade val="15000"/>
-            </a:schemeClr>
-          </a:lnRef>
-          <a:fillRef idx="1">
-            <a:schemeClr val="accent1"/>
-          </a:fillRef>
-          <a:effectRef idx="0">
-            <a:schemeClr val="accent1"/>
-          </a:effectRef>
-          <a:fontRef idx="minor">
-            <a:schemeClr val="lt1"/>
-          </a:fontRef>
-        </p:style>
-        <p:txBody>
-          <a:bodyPr rtlCol="0" anchor="ctr"/>
-          <a:lstStyle/>
-          <a:p>
-            <a:pPr algn="ctr"/>
-            <a:endParaRPr lang="zh-TW" altLang="en-US"/>
-          </a:p>
-        </p:txBody>
-      </p:sp>
+        </p:spPr>
+      </p:pic>
     </p:spTree>
     <p:extLst>
       <p:ext uri="{BB962C8B-B14F-4D97-AF65-F5344CB8AC3E}">
-        <p14:creationId xmlns:p14="http://schemas.microsoft.com/office/powerpoint/2010/main" val="3284444931"/>
+        <p14:creationId xmlns:p14="http://schemas.microsoft.com/office/powerpoint/2010/main" val="2860633482"/>
+      </p:ext>
+    </p:extLst>
+  </p:cSld>
+  <p:clrMapOvr>
+    <a:masterClrMapping/>
+  </p:clrMapOvr>
+</p:sld>
+</file>
+
+<file path=ppt/slides/slide11.xml><?xml version="1.0" encoding="utf-8"?>
+<p:sld xmlns:a="http://schemas.openxmlformats.org/drawingml/2006/main" xmlns:r="http://schemas.openxmlformats.org/officeDocument/2006/relationships" xmlns:p="http://schemas.openxmlformats.org/presentationml/2006/main">
+  <p:cSld>
+    <p:spTree>
+      <p:nvGrpSpPr>
+        <p:cNvPr id="1" name="">
+          <a:extLst>
+            <a:ext uri="{FF2B5EF4-FFF2-40B4-BE49-F238E27FC236}">
+              <a16:creationId xmlns:a16="http://schemas.microsoft.com/office/drawing/2014/main" id="{4D940BCC-0F37-7100-62D6-EE1E1BF36B20}"/>
+            </a:ext>
+          </a:extLst>
+        </p:cNvPr>
+        <p:cNvGrpSpPr/>
+        <p:nvPr/>
+      </p:nvGrpSpPr>
+      <p:grpSpPr>
+        <a:xfrm>
+          <a:off x="0" y="0"/>
+          <a:ext cx="0" cy="0"/>
+          <a:chOff x="0" y="0"/>
+          <a:chExt cx="0" cy="0"/>
+        </a:xfrm>
+      </p:grpSpPr>
+      <p:pic>
+        <p:nvPicPr>
+          <p:cNvPr id="5" name="圖片 4">
+            <a:extLst>
+              <a:ext uri="{FF2B5EF4-FFF2-40B4-BE49-F238E27FC236}">
+                <a16:creationId xmlns:a16="http://schemas.microsoft.com/office/drawing/2014/main" id="{18D5424C-3CE8-9AA9-FB38-0429C6157AAE}"/>
+              </a:ext>
+            </a:extLst>
+          </p:cNvPr>
+          <p:cNvPicPr>
+            <a:picLocks noChangeAspect="1"/>
+          </p:cNvPicPr>
+          <p:nvPr/>
+        </p:nvPicPr>
+        <p:blipFill>
+          <a:blip r:embed="rId2">
+            <a:extLst>
+              <a:ext uri="{28A0092B-C50C-407E-A947-70E740481C1C}">
+                <a14:useLocalDpi xmlns:a14="http://schemas.microsoft.com/office/drawing/2010/main" val="0"/>
+              </a:ext>
+            </a:extLst>
+          </a:blip>
+          <a:stretch>
+            <a:fillRect/>
+          </a:stretch>
+        </p:blipFill>
+        <p:spPr>
+          <a:xfrm>
+            <a:off x="0" y="0"/>
+            <a:ext cx="12192000" cy="6858000"/>
+          </a:xfrm>
+          <a:prstGeom prst="rect">
+            <a:avLst/>
+          </a:prstGeom>
+        </p:spPr>
+      </p:pic>
+      <p:sp>
+        <p:nvSpPr>
+          <p:cNvPr id="6" name="文字方塊 5">
+            <a:extLst>
+              <a:ext uri="{FF2B5EF4-FFF2-40B4-BE49-F238E27FC236}">
+                <a16:creationId xmlns:a16="http://schemas.microsoft.com/office/drawing/2014/main" id="{C2BE8CF9-6F70-230A-18C7-C7C7BD661320}"/>
+              </a:ext>
+            </a:extLst>
+          </p:cNvPr>
+          <p:cNvSpPr txBox="1"/>
+          <p:nvPr/>
+        </p:nvSpPr>
+        <p:spPr>
+          <a:xfrm>
+            <a:off x="4517298" y="1524000"/>
+            <a:ext cx="3157403" cy="707886"/>
+          </a:xfrm>
+          <a:prstGeom prst="rect">
+            <a:avLst/>
+          </a:prstGeom>
+          <a:noFill/>
+        </p:spPr>
+        <p:txBody>
+          <a:bodyPr wrap="none" rtlCol="0">
+            <a:spAutoFit/>
+          </a:bodyPr>
+          <a:lstStyle/>
+          <a:p>
+            <a:r>
+              <a:rPr lang="en-US" altLang="zh-TW" sz="4000" dirty="0" err="1">
+                <a:solidFill>
+                  <a:srgbClr val="00FFFF"/>
+                </a:solidFill>
+                <a:latin typeface="微軟正黑體" panose="020B0604030504040204" pitchFamily="34" charset="-120"/>
+                <a:ea typeface="微軟正黑體" panose="020B0604030504040204" pitchFamily="34" charset="-120"/>
+              </a:rPr>
+              <a:t>PowerBI</a:t>
+            </a:r>
+            <a:r>
+              <a:rPr lang="zh-TW" altLang="en-US" sz="4000" dirty="0">
+                <a:solidFill>
+                  <a:srgbClr val="00FFFF"/>
+                </a:solidFill>
+                <a:latin typeface="微軟正黑體" panose="020B0604030504040204" pitchFamily="34" charset="-120"/>
+                <a:ea typeface="微軟正黑體" panose="020B0604030504040204" pitchFamily="34" charset="-120"/>
+              </a:rPr>
+              <a:t>展示</a:t>
+            </a:r>
+          </a:p>
+        </p:txBody>
+      </p:sp>
+      <p:pic>
+        <p:nvPicPr>
+          <p:cNvPr id="4" name="圖片 3">
+            <a:extLst>
+              <a:ext uri="{FF2B5EF4-FFF2-40B4-BE49-F238E27FC236}">
+                <a16:creationId xmlns:a16="http://schemas.microsoft.com/office/drawing/2014/main" id="{FF8556CE-1271-FBEB-77EA-9AA9CCB7D4E2}"/>
+              </a:ext>
+            </a:extLst>
+          </p:cNvPr>
+          <p:cNvPicPr>
+            <a:picLocks noChangeAspect="1"/>
+          </p:cNvPicPr>
+          <p:nvPr/>
+        </p:nvPicPr>
+        <p:blipFill>
+          <a:blip r:embed="rId3">
+            <a:extLst>
+              <a:ext uri="{28A0092B-C50C-407E-A947-70E740481C1C}">
+                <a14:useLocalDpi xmlns:a14="http://schemas.microsoft.com/office/drawing/2010/main" val="0"/>
+              </a:ext>
+            </a:extLst>
+          </a:blip>
+          <a:srcRect/>
+          <a:stretch/>
+        </p:blipFill>
+        <p:spPr>
+          <a:xfrm>
+            <a:off x="3070825" y="2236399"/>
+            <a:ext cx="6050347" cy="3389837"/>
+          </a:xfrm>
+          <a:prstGeom prst="rect">
+            <a:avLst/>
+          </a:prstGeom>
+        </p:spPr>
+      </p:pic>
+    </p:spTree>
+    <p:extLst>
+      <p:ext uri="{BB962C8B-B14F-4D97-AF65-F5344CB8AC3E}">
+        <p14:creationId xmlns:p14="http://schemas.microsoft.com/office/powerpoint/2010/main" val="1497603658"/>
+      </p:ext>
+    </p:extLst>
+  </p:cSld>
+  <p:clrMapOvr>
+    <a:masterClrMapping/>
+  </p:clrMapOvr>
+</p:sld>
+</file>
+
+<file path=ppt/slides/slide12.xml><?xml version="1.0" encoding="utf-8"?>
+<p:sld xmlns:a="http://schemas.openxmlformats.org/drawingml/2006/main" xmlns:r="http://schemas.openxmlformats.org/officeDocument/2006/relationships" xmlns:p="http://schemas.openxmlformats.org/presentationml/2006/main">
+  <p:cSld>
+    <p:spTree>
+      <p:nvGrpSpPr>
+        <p:cNvPr id="1" name="">
+          <a:extLst>
+            <a:ext uri="{FF2B5EF4-FFF2-40B4-BE49-F238E27FC236}">
+              <a16:creationId xmlns:a16="http://schemas.microsoft.com/office/drawing/2014/main" id="{F3FEFBBE-067E-05E1-A55B-90EB22755EE7}"/>
+            </a:ext>
+          </a:extLst>
+        </p:cNvPr>
+        <p:cNvGrpSpPr/>
+        <p:nvPr/>
+      </p:nvGrpSpPr>
+      <p:grpSpPr>
+        <a:xfrm>
+          <a:off x="0" y="0"/>
+          <a:ext cx="0" cy="0"/>
+          <a:chOff x="0" y="0"/>
+          <a:chExt cx="0" cy="0"/>
+        </a:xfrm>
+      </p:grpSpPr>
+      <p:pic>
+        <p:nvPicPr>
+          <p:cNvPr id="5" name="圖片 4">
+            <a:extLst>
+              <a:ext uri="{FF2B5EF4-FFF2-40B4-BE49-F238E27FC236}">
+                <a16:creationId xmlns:a16="http://schemas.microsoft.com/office/drawing/2014/main" id="{17D50325-4A82-F467-6115-C8DD2DF8C700}"/>
+              </a:ext>
+            </a:extLst>
+          </p:cNvPr>
+          <p:cNvPicPr>
+            <a:picLocks noChangeAspect="1"/>
+          </p:cNvPicPr>
+          <p:nvPr/>
+        </p:nvPicPr>
+        <p:blipFill>
+          <a:blip r:embed="rId2">
+            <a:extLst>
+              <a:ext uri="{28A0092B-C50C-407E-A947-70E740481C1C}">
+                <a14:useLocalDpi xmlns:a14="http://schemas.microsoft.com/office/drawing/2010/main" val="0"/>
+              </a:ext>
+            </a:extLst>
+          </a:blip>
+          <a:stretch>
+            <a:fillRect/>
+          </a:stretch>
+        </p:blipFill>
+        <p:spPr>
+          <a:xfrm>
+            <a:off x="0" y="0"/>
+            <a:ext cx="12192000" cy="6858000"/>
+          </a:xfrm>
+          <a:prstGeom prst="rect">
+            <a:avLst/>
+          </a:prstGeom>
+        </p:spPr>
+      </p:pic>
+    </p:spTree>
+    <p:extLst>
+      <p:ext uri="{BB962C8B-B14F-4D97-AF65-F5344CB8AC3E}">
+        <p14:creationId xmlns:p14="http://schemas.microsoft.com/office/powerpoint/2010/main" val="3737416041"/>
+      </p:ext>
+    </p:extLst>
+  </p:cSld>
+  <p:clrMapOvr>
+    <a:masterClrMapping/>
+  </p:clrMapOvr>
+</p:sld>
+</file>
+
+<file path=ppt/slides/slide13.xml><?xml version="1.0" encoding="utf-8"?>
+<p:sld xmlns:a="http://schemas.openxmlformats.org/drawingml/2006/main" xmlns:r="http://schemas.openxmlformats.org/officeDocument/2006/relationships" xmlns:p="http://schemas.openxmlformats.org/presentationml/2006/main">
+  <p:cSld>
+    <p:spTree>
+      <p:nvGrpSpPr>
+        <p:cNvPr id="1" name="">
+          <a:extLst>
+            <a:ext uri="{FF2B5EF4-FFF2-40B4-BE49-F238E27FC236}">
+              <a16:creationId xmlns:a16="http://schemas.microsoft.com/office/drawing/2014/main" id="{53D3AB4D-7694-5BB8-2719-A71F8DD3EC68}"/>
+            </a:ext>
+          </a:extLst>
+        </p:cNvPr>
+        <p:cNvGrpSpPr/>
+        <p:nvPr/>
+      </p:nvGrpSpPr>
+      <p:grpSpPr>
+        <a:xfrm>
+          <a:off x="0" y="0"/>
+          <a:ext cx="0" cy="0"/>
+          <a:chOff x="0" y="0"/>
+          <a:chExt cx="0" cy="0"/>
+        </a:xfrm>
+      </p:grpSpPr>
+      <p:pic>
+        <p:nvPicPr>
+          <p:cNvPr id="5" name="圖片 4">
+            <a:extLst>
+              <a:ext uri="{FF2B5EF4-FFF2-40B4-BE49-F238E27FC236}">
+                <a16:creationId xmlns:a16="http://schemas.microsoft.com/office/drawing/2014/main" id="{6B471970-C17A-6D77-C51B-AFAD0D04EED9}"/>
+              </a:ext>
+            </a:extLst>
+          </p:cNvPr>
+          <p:cNvPicPr>
+            <a:picLocks noChangeAspect="1"/>
+          </p:cNvPicPr>
+          <p:nvPr/>
+        </p:nvPicPr>
+        <p:blipFill>
+          <a:blip r:embed="rId2">
+            <a:extLst>
+              <a:ext uri="{28A0092B-C50C-407E-A947-70E740481C1C}">
+                <a14:useLocalDpi xmlns:a14="http://schemas.microsoft.com/office/drawing/2010/main" val="0"/>
+              </a:ext>
+            </a:extLst>
+          </a:blip>
+          <a:stretch>
+            <a:fillRect/>
+          </a:stretch>
+        </p:blipFill>
+        <p:spPr>
+          <a:xfrm>
+            <a:off x="0" y="0"/>
+            <a:ext cx="12192000" cy="6858000"/>
+          </a:xfrm>
+          <a:prstGeom prst="rect">
+            <a:avLst/>
+          </a:prstGeom>
+        </p:spPr>
+      </p:pic>
+    </p:spTree>
+    <p:extLst>
+      <p:ext uri="{BB962C8B-B14F-4D97-AF65-F5344CB8AC3E}">
+        <p14:creationId xmlns:p14="http://schemas.microsoft.com/office/powerpoint/2010/main" val="406224121"/>
+      </p:ext>
+    </p:extLst>
+  </p:cSld>
+  <p:clrMapOvr>
+    <a:masterClrMapping/>
+  </p:clrMapOvr>
+</p:sld>
+</file>
+
+<file path=ppt/slides/slide2.xml><?xml version="1.0" encoding="utf-8"?>
+<p:sld xmlns:a="http://schemas.openxmlformats.org/drawingml/2006/main" xmlns:r="http://schemas.openxmlformats.org/officeDocument/2006/relationships" xmlns:p="http://schemas.openxmlformats.org/presentationml/2006/main">
+  <p:cSld>
+    <p:spTree>
+      <p:nvGrpSpPr>
+        <p:cNvPr id="1" name=""/>
+        <p:cNvGrpSpPr/>
+        <p:nvPr/>
+      </p:nvGrpSpPr>
+      <p:grpSpPr>
+        <a:xfrm>
+          <a:off x="0" y="0"/>
+          <a:ext cx="0" cy="0"/>
+          <a:chOff x="0" y="0"/>
+          <a:chExt cx="0" cy="0"/>
+        </a:xfrm>
+      </p:grpSpPr>
+      <p:pic>
+        <p:nvPicPr>
+          <p:cNvPr id="5" name="圖片 4">
+            <a:extLst>
+              <a:ext uri="{FF2B5EF4-FFF2-40B4-BE49-F238E27FC236}">
+                <a16:creationId xmlns:a16="http://schemas.microsoft.com/office/drawing/2014/main" id="{6F92F5E4-3776-C7B0-FEE3-A521BA00A2D7}"/>
+              </a:ext>
+            </a:extLst>
+          </p:cNvPr>
+          <p:cNvPicPr>
+            <a:picLocks noChangeAspect="1"/>
+          </p:cNvPicPr>
+          <p:nvPr/>
+        </p:nvPicPr>
+        <p:blipFill>
+          <a:blip r:embed="rId2">
+            <a:extLst>
+              <a:ext uri="{28A0092B-C50C-407E-A947-70E740481C1C}">
+                <a14:useLocalDpi xmlns:a14="http://schemas.microsoft.com/office/drawing/2010/main" val="0"/>
+              </a:ext>
+            </a:extLst>
+          </a:blip>
+          <a:stretch>
+            <a:fillRect/>
+          </a:stretch>
+        </p:blipFill>
+        <p:spPr>
+          <a:xfrm>
+            <a:off x="0" y="0"/>
+            <a:ext cx="12192000" cy="6858000"/>
+          </a:xfrm>
+          <a:prstGeom prst="rect">
+            <a:avLst/>
+          </a:prstGeom>
+        </p:spPr>
+      </p:pic>
+      <p:sp>
+        <p:nvSpPr>
+          <p:cNvPr id="6" name="文字方塊 5">
+            <a:extLst>
+              <a:ext uri="{FF2B5EF4-FFF2-40B4-BE49-F238E27FC236}">
+                <a16:creationId xmlns:a16="http://schemas.microsoft.com/office/drawing/2014/main" id="{B18A23BA-FC73-A594-60F5-489A1145CADA}"/>
+              </a:ext>
+            </a:extLst>
+          </p:cNvPr>
+          <p:cNvSpPr txBox="1"/>
+          <p:nvPr/>
+        </p:nvSpPr>
+        <p:spPr>
+          <a:xfrm>
+            <a:off x="5490706" y="1524000"/>
+            <a:ext cx="1210588" cy="707886"/>
+          </a:xfrm>
+          <a:prstGeom prst="rect">
+            <a:avLst/>
+          </a:prstGeom>
+          <a:noFill/>
+        </p:spPr>
+        <p:txBody>
+          <a:bodyPr wrap="none" rtlCol="0">
+            <a:spAutoFit/>
+          </a:bodyPr>
+          <a:lstStyle/>
+          <a:p>
+            <a:r>
+              <a:rPr lang="zh-TW" altLang="en-US" sz="4000" dirty="0">
+                <a:solidFill>
+                  <a:srgbClr val="00FFFF"/>
+                </a:solidFill>
+                <a:latin typeface="微軟正黑體" panose="020B0604030504040204" pitchFamily="34" charset="-120"/>
+                <a:ea typeface="微軟正黑體" panose="020B0604030504040204" pitchFamily="34" charset="-120"/>
+              </a:rPr>
+              <a:t>動機</a:t>
+            </a:r>
+          </a:p>
+        </p:txBody>
+      </p:sp>
+      <p:sp>
+        <p:nvSpPr>
+          <p:cNvPr id="7" name="文字方塊 6">
+            <a:extLst>
+              <a:ext uri="{FF2B5EF4-FFF2-40B4-BE49-F238E27FC236}">
+                <a16:creationId xmlns:a16="http://schemas.microsoft.com/office/drawing/2014/main" id="{EE1E7222-61E1-C628-A4C9-1748D216E9B5}"/>
+              </a:ext>
+            </a:extLst>
+          </p:cNvPr>
+          <p:cNvSpPr txBox="1"/>
+          <p:nvPr/>
+        </p:nvSpPr>
+        <p:spPr>
+          <a:xfrm>
+            <a:off x="2261924" y="2476500"/>
+            <a:ext cx="7668152" cy="1569660"/>
+          </a:xfrm>
+          <a:prstGeom prst="rect">
+            <a:avLst/>
+          </a:prstGeom>
+          <a:noFill/>
+        </p:spPr>
+        <p:txBody>
+          <a:bodyPr wrap="square" rtlCol="0">
+            <a:spAutoFit/>
+          </a:bodyPr>
+          <a:lstStyle/>
+          <a:p>
+            <a:r>
+              <a:rPr lang="zh-TW" altLang="en-US" sz="3200" dirty="0">
+                <a:solidFill>
+                  <a:srgbClr val="00CCFF"/>
+                </a:solidFill>
+                <a:latin typeface="微軟正黑體" panose="020B0604030504040204" pitchFamily="34" charset="-120"/>
+                <a:ea typeface="微軟正黑體" panose="020B0604030504040204" pitchFamily="34" charset="-120"/>
+              </a:rPr>
+              <a:t>從小到大都在持續的接觸</a:t>
+            </a:r>
+            <a:r>
+              <a:rPr lang="en-US" altLang="zh-TW" sz="3200" dirty="0">
+                <a:solidFill>
+                  <a:srgbClr val="00CCFF"/>
+                </a:solidFill>
+                <a:latin typeface="微軟正黑體" panose="020B0604030504040204" pitchFamily="34" charset="-120"/>
+                <a:ea typeface="微軟正黑體" panose="020B0604030504040204" pitchFamily="34" charset="-120"/>
+              </a:rPr>
+              <a:t>PC</a:t>
+            </a:r>
+            <a:r>
+              <a:rPr lang="zh-TW" altLang="en-US" sz="3200" dirty="0">
+                <a:solidFill>
+                  <a:srgbClr val="00CCFF"/>
+                </a:solidFill>
+                <a:latin typeface="微軟正黑體" panose="020B0604030504040204" pitchFamily="34" charset="-120"/>
+                <a:ea typeface="微軟正黑體" panose="020B0604030504040204" pitchFamily="34" charset="-120"/>
+              </a:rPr>
+              <a:t>遊戲，因此對於現在經常使用的</a:t>
+            </a:r>
+            <a:r>
+              <a:rPr lang="en-US" altLang="zh-TW" sz="3200" dirty="0">
+                <a:solidFill>
+                  <a:srgbClr val="00CCFF"/>
+                </a:solidFill>
+                <a:latin typeface="微軟正黑體" panose="020B0604030504040204" pitchFamily="34" charset="-120"/>
+                <a:ea typeface="微軟正黑體" panose="020B0604030504040204" pitchFamily="34" charset="-120"/>
+              </a:rPr>
+              <a:t>STEAM</a:t>
+            </a:r>
+            <a:r>
+              <a:rPr lang="zh-TW" altLang="en-US" sz="3200" dirty="0">
+                <a:solidFill>
+                  <a:srgbClr val="00CCFF"/>
+                </a:solidFill>
+                <a:latin typeface="微軟正黑體" panose="020B0604030504040204" pitchFamily="34" charset="-120"/>
+                <a:ea typeface="微軟正黑體" panose="020B0604030504040204" pitchFamily="34" charset="-120"/>
+              </a:rPr>
+              <a:t>平台感到好奇，從而製作了這份分析報告。</a:t>
+            </a:r>
+          </a:p>
+        </p:txBody>
+      </p:sp>
+    </p:spTree>
+    <p:extLst>
+      <p:ext uri="{BB962C8B-B14F-4D97-AF65-F5344CB8AC3E}">
+        <p14:creationId xmlns:p14="http://schemas.microsoft.com/office/powerpoint/2010/main" val="310561265"/>
+      </p:ext>
+    </p:extLst>
+  </p:cSld>
+  <p:clrMapOvr>
+    <a:masterClrMapping/>
+  </p:clrMapOvr>
+</p:sld>
+</file>
+
+<file path=ppt/slides/slide3.xml><?xml version="1.0" encoding="utf-8"?>
+<p:sld xmlns:a="http://schemas.openxmlformats.org/drawingml/2006/main" xmlns:r="http://schemas.openxmlformats.org/officeDocument/2006/relationships" xmlns:p="http://schemas.openxmlformats.org/presentationml/2006/main">
+  <p:cSld>
+    <p:spTree>
+      <p:nvGrpSpPr>
+        <p:cNvPr id="1" name="">
+          <a:extLst>
+            <a:ext uri="{FF2B5EF4-FFF2-40B4-BE49-F238E27FC236}">
+              <a16:creationId xmlns:a16="http://schemas.microsoft.com/office/drawing/2014/main" id="{F9942900-E13C-370C-3264-E7948366DDC9}"/>
+            </a:ext>
+          </a:extLst>
+        </p:cNvPr>
+        <p:cNvGrpSpPr/>
+        <p:nvPr/>
+      </p:nvGrpSpPr>
+      <p:grpSpPr>
+        <a:xfrm>
+          <a:off x="0" y="0"/>
+          <a:ext cx="0" cy="0"/>
+          <a:chOff x="0" y="0"/>
+          <a:chExt cx="0" cy="0"/>
+        </a:xfrm>
+      </p:grpSpPr>
+      <p:pic>
+        <p:nvPicPr>
+          <p:cNvPr id="5" name="圖片 4">
+            <a:extLst>
+              <a:ext uri="{FF2B5EF4-FFF2-40B4-BE49-F238E27FC236}">
+                <a16:creationId xmlns:a16="http://schemas.microsoft.com/office/drawing/2014/main" id="{0F5C274B-05F3-B016-5E16-02123F97D3E7}"/>
+              </a:ext>
+            </a:extLst>
+          </p:cNvPr>
+          <p:cNvPicPr>
+            <a:picLocks noChangeAspect="1"/>
+          </p:cNvPicPr>
+          <p:nvPr/>
+        </p:nvPicPr>
+        <p:blipFill>
+          <a:blip r:embed="rId2">
+            <a:extLst>
+              <a:ext uri="{28A0092B-C50C-407E-A947-70E740481C1C}">
+                <a14:useLocalDpi xmlns:a14="http://schemas.microsoft.com/office/drawing/2010/main" val="0"/>
+              </a:ext>
+            </a:extLst>
+          </a:blip>
+          <a:stretch>
+            <a:fillRect/>
+          </a:stretch>
+        </p:blipFill>
+        <p:spPr>
+          <a:xfrm>
+            <a:off x="0" y="0"/>
+            <a:ext cx="12192000" cy="6858000"/>
+          </a:xfrm>
+          <a:prstGeom prst="rect">
+            <a:avLst/>
+          </a:prstGeom>
+        </p:spPr>
+      </p:pic>
+      <p:sp>
+        <p:nvSpPr>
+          <p:cNvPr id="6" name="文字方塊 5">
+            <a:extLst>
+              <a:ext uri="{FF2B5EF4-FFF2-40B4-BE49-F238E27FC236}">
+                <a16:creationId xmlns:a16="http://schemas.microsoft.com/office/drawing/2014/main" id="{F3F24C56-65BF-E447-92D8-42B3EC228F43}"/>
+              </a:ext>
+            </a:extLst>
+          </p:cNvPr>
+          <p:cNvSpPr txBox="1"/>
+          <p:nvPr/>
+        </p:nvSpPr>
+        <p:spPr>
+          <a:xfrm>
+            <a:off x="4977745" y="1524000"/>
+            <a:ext cx="2236510" cy="707886"/>
+          </a:xfrm>
+          <a:prstGeom prst="rect">
+            <a:avLst/>
+          </a:prstGeom>
+          <a:noFill/>
+        </p:spPr>
+        <p:txBody>
+          <a:bodyPr wrap="none" rtlCol="0">
+            <a:spAutoFit/>
+          </a:bodyPr>
+          <a:lstStyle/>
+          <a:p>
+            <a:r>
+              <a:rPr lang="zh-TW" altLang="en-US" sz="4000" dirty="0">
+                <a:solidFill>
+                  <a:srgbClr val="00FFFF"/>
+                </a:solidFill>
+                <a:latin typeface="微軟正黑體" panose="020B0604030504040204" pitchFamily="34" charset="-120"/>
+                <a:ea typeface="微軟正黑體" panose="020B0604030504040204" pitchFamily="34" charset="-120"/>
+              </a:rPr>
+              <a:t>資料獲取</a:t>
+            </a:r>
+          </a:p>
+        </p:txBody>
+      </p:sp>
+      <p:sp>
+        <p:nvSpPr>
+          <p:cNvPr id="7" name="文字方塊 6">
+            <a:extLst>
+              <a:ext uri="{FF2B5EF4-FFF2-40B4-BE49-F238E27FC236}">
+                <a16:creationId xmlns:a16="http://schemas.microsoft.com/office/drawing/2014/main" id="{5047E607-F08A-B013-E2C2-DDFEB889874A}"/>
+              </a:ext>
+            </a:extLst>
+          </p:cNvPr>
+          <p:cNvSpPr txBox="1"/>
+          <p:nvPr/>
+        </p:nvSpPr>
+        <p:spPr>
+          <a:xfrm>
+            <a:off x="2261924" y="2476500"/>
+            <a:ext cx="7668152" cy="1077218"/>
+          </a:xfrm>
+          <a:prstGeom prst="rect">
+            <a:avLst/>
+          </a:prstGeom>
+          <a:noFill/>
+        </p:spPr>
+        <p:txBody>
+          <a:bodyPr wrap="square" rtlCol="0">
+            <a:spAutoFit/>
+          </a:bodyPr>
+          <a:lstStyle/>
+          <a:p>
+            <a:r>
+              <a:rPr lang="zh-TW" altLang="en-US" sz="3200" dirty="0">
+                <a:solidFill>
+                  <a:srgbClr val="00CCFF"/>
+                </a:solidFill>
+                <a:latin typeface="微軟正黑體" panose="020B0604030504040204" pitchFamily="34" charset="-120"/>
+                <a:ea typeface="微軟正黑體" panose="020B0604030504040204" pitchFamily="34" charset="-120"/>
+              </a:rPr>
+              <a:t>從</a:t>
+            </a:r>
+            <a:r>
+              <a:rPr lang="en-US" altLang="zh-TW" sz="3200" dirty="0" err="1">
+                <a:solidFill>
+                  <a:srgbClr val="00CCFF"/>
+                </a:solidFill>
+                <a:latin typeface="微軟正黑體" panose="020B0604030504040204" pitchFamily="34" charset="-120"/>
+                <a:ea typeface="微軟正黑體" panose="020B0604030504040204" pitchFamily="34" charset="-120"/>
+              </a:rPr>
+              <a:t>kaggle</a:t>
+            </a:r>
+            <a:r>
+              <a:rPr lang="zh-TW" altLang="en-US" sz="3200" dirty="0">
+                <a:solidFill>
+                  <a:srgbClr val="00CCFF"/>
+                </a:solidFill>
+                <a:latin typeface="微軟正黑體" panose="020B0604030504040204" pitchFamily="34" charset="-120"/>
+                <a:ea typeface="微軟正黑體" panose="020B0604030504040204" pitchFamily="34" charset="-120"/>
+              </a:rPr>
+              <a:t>下載關於這次主題的</a:t>
+            </a:r>
+            <a:r>
+              <a:rPr lang="en-US" altLang="zh-TW" sz="3200" dirty="0">
+                <a:solidFill>
+                  <a:srgbClr val="00CCFF"/>
+                </a:solidFill>
+                <a:latin typeface="微軟正黑體" panose="020B0604030504040204" pitchFamily="34" charset="-120"/>
+                <a:ea typeface="微軟正黑體" panose="020B0604030504040204" pitchFamily="34" charset="-120"/>
+              </a:rPr>
+              <a:t>csv</a:t>
+            </a:r>
+            <a:r>
+              <a:rPr lang="zh-TW" altLang="en-US" sz="3200" dirty="0">
+                <a:solidFill>
+                  <a:srgbClr val="00CCFF"/>
+                </a:solidFill>
+                <a:latin typeface="微軟正黑體" panose="020B0604030504040204" pitchFamily="34" charset="-120"/>
+                <a:ea typeface="微軟正黑體" panose="020B0604030504040204" pitchFamily="34" charset="-120"/>
+              </a:rPr>
+              <a:t>，並且在</a:t>
+            </a:r>
+            <a:r>
+              <a:rPr lang="en-US" altLang="zh-TW" sz="3200" dirty="0">
+                <a:solidFill>
+                  <a:srgbClr val="00CCFF"/>
+                </a:solidFill>
+                <a:latin typeface="微軟正黑體" panose="020B0604030504040204" pitchFamily="34" charset="-120"/>
+                <a:ea typeface="微軟正黑體" panose="020B0604030504040204" pitchFamily="34" charset="-120"/>
+              </a:rPr>
+              <a:t>python</a:t>
+            </a:r>
+            <a:r>
+              <a:rPr lang="zh-TW" altLang="en-US" sz="3200" dirty="0">
+                <a:solidFill>
+                  <a:srgbClr val="00CCFF"/>
+                </a:solidFill>
+                <a:latin typeface="微軟正黑體" panose="020B0604030504040204" pitchFamily="34" charset="-120"/>
+                <a:ea typeface="微軟正黑體" panose="020B0604030504040204" pitchFamily="34" charset="-120"/>
+              </a:rPr>
+              <a:t>進行資料的清洗。</a:t>
+            </a:r>
+          </a:p>
+        </p:txBody>
+      </p:sp>
+    </p:spTree>
+    <p:extLst>
+      <p:ext uri="{BB962C8B-B14F-4D97-AF65-F5344CB8AC3E}">
+        <p14:creationId xmlns:p14="http://schemas.microsoft.com/office/powerpoint/2010/main" val="909956457"/>
+      </p:ext>
+    </p:extLst>
+  </p:cSld>
+  <p:clrMapOvr>
+    <a:masterClrMapping/>
+  </p:clrMapOvr>
+</p:sld>
+</file>
+
+<file path=ppt/slides/slide4.xml><?xml version="1.0" encoding="utf-8"?>
+<p:sld xmlns:a="http://schemas.openxmlformats.org/drawingml/2006/main" xmlns:r="http://schemas.openxmlformats.org/officeDocument/2006/relationships" xmlns:p="http://schemas.openxmlformats.org/presentationml/2006/main">
+  <p:cSld>
+    <p:spTree>
+      <p:nvGrpSpPr>
+        <p:cNvPr id="1" name="">
+          <a:extLst>
+            <a:ext uri="{FF2B5EF4-FFF2-40B4-BE49-F238E27FC236}">
+              <a16:creationId xmlns:a16="http://schemas.microsoft.com/office/drawing/2014/main" id="{877928A0-A2F1-87A2-DB6B-76786549D67C}"/>
+            </a:ext>
+          </a:extLst>
+        </p:cNvPr>
+        <p:cNvGrpSpPr/>
+        <p:nvPr/>
+      </p:nvGrpSpPr>
+      <p:grpSpPr>
+        <a:xfrm>
+          <a:off x="0" y="0"/>
+          <a:ext cx="0" cy="0"/>
+          <a:chOff x="0" y="0"/>
+          <a:chExt cx="0" cy="0"/>
+        </a:xfrm>
+      </p:grpSpPr>
+      <p:pic>
+        <p:nvPicPr>
+          <p:cNvPr id="5" name="圖片 4">
+            <a:extLst>
+              <a:ext uri="{FF2B5EF4-FFF2-40B4-BE49-F238E27FC236}">
+                <a16:creationId xmlns:a16="http://schemas.microsoft.com/office/drawing/2014/main" id="{D85EFCAD-3CFB-C8BC-8E90-1BBABDCF693E}"/>
+              </a:ext>
+            </a:extLst>
+          </p:cNvPr>
+          <p:cNvPicPr>
+            <a:picLocks noChangeAspect="1"/>
+          </p:cNvPicPr>
+          <p:nvPr/>
+        </p:nvPicPr>
+        <p:blipFill>
+          <a:blip r:embed="rId2">
+            <a:extLst>
+              <a:ext uri="{28A0092B-C50C-407E-A947-70E740481C1C}">
+                <a14:useLocalDpi xmlns:a14="http://schemas.microsoft.com/office/drawing/2010/main" val="0"/>
+              </a:ext>
+            </a:extLst>
+          </a:blip>
+          <a:stretch>
+            <a:fillRect/>
+          </a:stretch>
+        </p:blipFill>
+        <p:spPr>
+          <a:xfrm>
+            <a:off x="0" y="0"/>
+            <a:ext cx="12192000" cy="6858000"/>
+          </a:xfrm>
+          <a:prstGeom prst="rect">
+            <a:avLst/>
+          </a:prstGeom>
+        </p:spPr>
+      </p:pic>
+      <p:sp>
+        <p:nvSpPr>
+          <p:cNvPr id="6" name="文字方塊 5">
+            <a:extLst>
+              <a:ext uri="{FF2B5EF4-FFF2-40B4-BE49-F238E27FC236}">
+                <a16:creationId xmlns:a16="http://schemas.microsoft.com/office/drawing/2014/main" id="{2B043C29-F607-7BCE-4B47-FB6B6C780514}"/>
+              </a:ext>
+            </a:extLst>
+          </p:cNvPr>
+          <p:cNvSpPr txBox="1"/>
+          <p:nvPr/>
+        </p:nvSpPr>
+        <p:spPr>
+          <a:xfrm>
+            <a:off x="4977745" y="1524000"/>
+            <a:ext cx="2236510" cy="707886"/>
+          </a:xfrm>
+          <a:prstGeom prst="rect">
+            <a:avLst/>
+          </a:prstGeom>
+          <a:noFill/>
+        </p:spPr>
+        <p:txBody>
+          <a:bodyPr wrap="none" rtlCol="0">
+            <a:spAutoFit/>
+          </a:bodyPr>
+          <a:lstStyle/>
+          <a:p>
+            <a:r>
+              <a:rPr lang="zh-TW" altLang="en-US" sz="4000" dirty="0">
+                <a:solidFill>
+                  <a:srgbClr val="00FFFF"/>
+                </a:solidFill>
+                <a:latin typeface="微軟正黑體" panose="020B0604030504040204" pitchFamily="34" charset="-120"/>
+                <a:ea typeface="微軟正黑體" panose="020B0604030504040204" pitchFamily="34" charset="-120"/>
+              </a:rPr>
+              <a:t>資料清洗</a:t>
+            </a:r>
+          </a:p>
+        </p:txBody>
+      </p:sp>
+      <p:pic>
+        <p:nvPicPr>
+          <p:cNvPr id="3" name="圖片 2">
+            <a:extLst>
+              <a:ext uri="{FF2B5EF4-FFF2-40B4-BE49-F238E27FC236}">
+                <a16:creationId xmlns:a16="http://schemas.microsoft.com/office/drawing/2014/main" id="{27199567-ABFB-D7E5-6614-71E07447DB21}"/>
+              </a:ext>
+            </a:extLst>
+          </p:cNvPr>
+          <p:cNvPicPr>
+            <a:picLocks noChangeAspect="1"/>
+          </p:cNvPicPr>
+          <p:nvPr/>
+        </p:nvPicPr>
+        <p:blipFill>
+          <a:blip r:embed="rId3">
+            <a:extLst>
+              <a:ext uri="{28A0092B-C50C-407E-A947-70E740481C1C}">
+                <a14:useLocalDpi xmlns:a14="http://schemas.microsoft.com/office/drawing/2010/main" val="0"/>
+              </a:ext>
+            </a:extLst>
+          </a:blip>
+          <a:stretch>
+            <a:fillRect/>
+          </a:stretch>
+        </p:blipFill>
+        <p:spPr>
+          <a:xfrm>
+            <a:off x="3343127" y="2231886"/>
+            <a:ext cx="5505745" cy="3372889"/>
+          </a:xfrm>
+          <a:prstGeom prst="rect">
+            <a:avLst/>
+          </a:prstGeom>
+        </p:spPr>
+      </p:pic>
+    </p:spTree>
+    <p:extLst>
+      <p:ext uri="{BB962C8B-B14F-4D97-AF65-F5344CB8AC3E}">
+        <p14:creationId xmlns:p14="http://schemas.microsoft.com/office/powerpoint/2010/main" val="297246201"/>
+      </p:ext>
+    </p:extLst>
+  </p:cSld>
+  <p:clrMapOvr>
+    <a:masterClrMapping/>
+  </p:clrMapOvr>
+</p:sld>
+</file>
+
+<file path=ppt/slides/slide5.xml><?xml version="1.0" encoding="utf-8"?>
+<p:sld xmlns:a="http://schemas.openxmlformats.org/drawingml/2006/main" xmlns:r="http://schemas.openxmlformats.org/officeDocument/2006/relationships" xmlns:p="http://schemas.openxmlformats.org/presentationml/2006/main">
+  <p:cSld>
+    <p:spTree>
+      <p:nvGrpSpPr>
+        <p:cNvPr id="1" name="">
+          <a:extLst>
+            <a:ext uri="{FF2B5EF4-FFF2-40B4-BE49-F238E27FC236}">
+              <a16:creationId xmlns:a16="http://schemas.microsoft.com/office/drawing/2014/main" id="{60E7DC36-F6CB-D36E-2A2A-1E1C5F06ABFD}"/>
+            </a:ext>
+          </a:extLst>
+        </p:cNvPr>
+        <p:cNvGrpSpPr/>
+        <p:nvPr/>
+      </p:nvGrpSpPr>
+      <p:grpSpPr>
+        <a:xfrm>
+          <a:off x="0" y="0"/>
+          <a:ext cx="0" cy="0"/>
+          <a:chOff x="0" y="0"/>
+          <a:chExt cx="0" cy="0"/>
+        </a:xfrm>
+      </p:grpSpPr>
+      <p:pic>
+        <p:nvPicPr>
+          <p:cNvPr id="5" name="圖片 4">
+            <a:extLst>
+              <a:ext uri="{FF2B5EF4-FFF2-40B4-BE49-F238E27FC236}">
+                <a16:creationId xmlns:a16="http://schemas.microsoft.com/office/drawing/2014/main" id="{C1C8E310-1740-1C47-3F7B-00C3126A6B11}"/>
+              </a:ext>
+            </a:extLst>
+          </p:cNvPr>
+          <p:cNvPicPr>
+            <a:picLocks noChangeAspect="1"/>
+          </p:cNvPicPr>
+          <p:nvPr/>
+        </p:nvPicPr>
+        <p:blipFill>
+          <a:blip r:embed="rId2">
+            <a:extLst>
+              <a:ext uri="{28A0092B-C50C-407E-A947-70E740481C1C}">
+                <a14:useLocalDpi xmlns:a14="http://schemas.microsoft.com/office/drawing/2010/main" val="0"/>
+              </a:ext>
+            </a:extLst>
+          </a:blip>
+          <a:stretch>
+            <a:fillRect/>
+          </a:stretch>
+        </p:blipFill>
+        <p:spPr>
+          <a:xfrm>
+            <a:off x="0" y="0"/>
+            <a:ext cx="12192000" cy="6858000"/>
+          </a:xfrm>
+          <a:prstGeom prst="rect">
+            <a:avLst/>
+          </a:prstGeom>
+        </p:spPr>
+      </p:pic>
+      <p:sp>
+        <p:nvSpPr>
+          <p:cNvPr id="6" name="文字方塊 5">
+            <a:extLst>
+              <a:ext uri="{FF2B5EF4-FFF2-40B4-BE49-F238E27FC236}">
+                <a16:creationId xmlns:a16="http://schemas.microsoft.com/office/drawing/2014/main" id="{BC8B181B-FF6F-28B9-1570-B399837B4305}"/>
+              </a:ext>
+            </a:extLst>
+          </p:cNvPr>
+          <p:cNvSpPr txBox="1"/>
+          <p:nvPr/>
+        </p:nvSpPr>
+        <p:spPr>
+          <a:xfrm>
+            <a:off x="4977745" y="1524000"/>
+            <a:ext cx="2236510" cy="707886"/>
+          </a:xfrm>
+          <a:prstGeom prst="rect">
+            <a:avLst/>
+          </a:prstGeom>
+          <a:noFill/>
+        </p:spPr>
+        <p:txBody>
+          <a:bodyPr wrap="none" rtlCol="0">
+            <a:spAutoFit/>
+          </a:bodyPr>
+          <a:lstStyle/>
+          <a:p>
+            <a:r>
+              <a:rPr lang="zh-TW" altLang="en-US" sz="4000" dirty="0">
+                <a:solidFill>
+                  <a:srgbClr val="00FFFF"/>
+                </a:solidFill>
+                <a:latin typeface="微軟正黑體" panose="020B0604030504040204" pitchFamily="34" charset="-120"/>
+                <a:ea typeface="微軟正黑體" panose="020B0604030504040204" pitchFamily="34" charset="-120"/>
+              </a:rPr>
+              <a:t>資料清洗</a:t>
+            </a:r>
+          </a:p>
+        </p:txBody>
+      </p:sp>
+      <p:pic>
+        <p:nvPicPr>
+          <p:cNvPr id="4" name="圖片 3">
+            <a:extLst>
+              <a:ext uri="{FF2B5EF4-FFF2-40B4-BE49-F238E27FC236}">
+                <a16:creationId xmlns:a16="http://schemas.microsoft.com/office/drawing/2014/main" id="{A997ED87-7B6B-2D8C-C4F3-F798610D3021}"/>
+              </a:ext>
+            </a:extLst>
+          </p:cNvPr>
+          <p:cNvPicPr>
+            <a:picLocks noChangeAspect="1"/>
+          </p:cNvPicPr>
+          <p:nvPr/>
+        </p:nvPicPr>
+        <p:blipFill>
+          <a:blip r:embed="rId3">
+            <a:extLst>
+              <a:ext uri="{28A0092B-C50C-407E-A947-70E740481C1C}">
+                <a14:useLocalDpi xmlns:a14="http://schemas.microsoft.com/office/drawing/2010/main" val="0"/>
+              </a:ext>
+            </a:extLst>
+          </a:blip>
+          <a:stretch>
+            <a:fillRect/>
+          </a:stretch>
+        </p:blipFill>
+        <p:spPr>
+          <a:xfrm>
+            <a:off x="2765190" y="2231886"/>
+            <a:ext cx="6661619" cy="3434061"/>
+          </a:xfrm>
+          <a:prstGeom prst="rect">
+            <a:avLst/>
+          </a:prstGeom>
+        </p:spPr>
+      </p:pic>
+    </p:spTree>
+    <p:extLst>
+      <p:ext uri="{BB962C8B-B14F-4D97-AF65-F5344CB8AC3E}">
+        <p14:creationId xmlns:p14="http://schemas.microsoft.com/office/powerpoint/2010/main" val="4139995655"/>
+      </p:ext>
+    </p:extLst>
+  </p:cSld>
+  <p:clrMapOvr>
+    <a:masterClrMapping/>
+  </p:clrMapOvr>
+</p:sld>
+</file>
+
+<file path=ppt/slides/slide6.xml><?xml version="1.0" encoding="utf-8"?>
+<p:sld xmlns:a="http://schemas.openxmlformats.org/drawingml/2006/main" xmlns:r="http://schemas.openxmlformats.org/officeDocument/2006/relationships" xmlns:p="http://schemas.openxmlformats.org/presentationml/2006/main">
+  <p:cSld>
+    <p:spTree>
+      <p:nvGrpSpPr>
+        <p:cNvPr id="1" name="">
+          <a:extLst>
+            <a:ext uri="{FF2B5EF4-FFF2-40B4-BE49-F238E27FC236}">
+              <a16:creationId xmlns:a16="http://schemas.microsoft.com/office/drawing/2014/main" id="{3375EE94-A730-DABF-3FBB-63ECD9D89CB9}"/>
+            </a:ext>
+          </a:extLst>
+        </p:cNvPr>
+        <p:cNvGrpSpPr/>
+        <p:nvPr/>
+      </p:nvGrpSpPr>
+      <p:grpSpPr>
+        <a:xfrm>
+          <a:off x="0" y="0"/>
+          <a:ext cx="0" cy="0"/>
+          <a:chOff x="0" y="0"/>
+          <a:chExt cx="0" cy="0"/>
+        </a:xfrm>
+      </p:grpSpPr>
+      <p:pic>
+        <p:nvPicPr>
+          <p:cNvPr id="5" name="圖片 4">
+            <a:extLst>
+              <a:ext uri="{FF2B5EF4-FFF2-40B4-BE49-F238E27FC236}">
+                <a16:creationId xmlns:a16="http://schemas.microsoft.com/office/drawing/2014/main" id="{736CA2FD-AF43-1BF6-10CB-B6F90275666B}"/>
+              </a:ext>
+            </a:extLst>
+          </p:cNvPr>
+          <p:cNvPicPr>
+            <a:picLocks noChangeAspect="1"/>
+          </p:cNvPicPr>
+          <p:nvPr/>
+        </p:nvPicPr>
+        <p:blipFill>
+          <a:blip r:embed="rId2">
+            <a:extLst>
+              <a:ext uri="{28A0092B-C50C-407E-A947-70E740481C1C}">
+                <a14:useLocalDpi xmlns:a14="http://schemas.microsoft.com/office/drawing/2010/main" val="0"/>
+              </a:ext>
+            </a:extLst>
+          </a:blip>
+          <a:stretch>
+            <a:fillRect/>
+          </a:stretch>
+        </p:blipFill>
+        <p:spPr>
+          <a:xfrm>
+            <a:off x="0" y="0"/>
+            <a:ext cx="12192000" cy="6858000"/>
+          </a:xfrm>
+          <a:prstGeom prst="rect">
+            <a:avLst/>
+          </a:prstGeom>
+        </p:spPr>
+      </p:pic>
+      <p:sp>
+        <p:nvSpPr>
+          <p:cNvPr id="6" name="文字方塊 5">
+            <a:extLst>
+              <a:ext uri="{FF2B5EF4-FFF2-40B4-BE49-F238E27FC236}">
+                <a16:creationId xmlns:a16="http://schemas.microsoft.com/office/drawing/2014/main" id="{89814384-66B0-6735-E563-7D5A4622B34B}"/>
+              </a:ext>
+            </a:extLst>
+          </p:cNvPr>
+          <p:cNvSpPr txBox="1"/>
+          <p:nvPr/>
+        </p:nvSpPr>
+        <p:spPr>
+          <a:xfrm>
+            <a:off x="4517298" y="1524000"/>
+            <a:ext cx="3157403" cy="707886"/>
+          </a:xfrm>
+          <a:prstGeom prst="rect">
+            <a:avLst/>
+          </a:prstGeom>
+          <a:noFill/>
+        </p:spPr>
+        <p:txBody>
+          <a:bodyPr wrap="none" rtlCol="0">
+            <a:spAutoFit/>
+          </a:bodyPr>
+          <a:lstStyle/>
+          <a:p>
+            <a:r>
+              <a:rPr lang="en-US" altLang="zh-TW" sz="4000" dirty="0" err="1">
+                <a:solidFill>
+                  <a:srgbClr val="00FFFF"/>
+                </a:solidFill>
+                <a:latin typeface="微軟正黑體" panose="020B0604030504040204" pitchFamily="34" charset="-120"/>
+                <a:ea typeface="微軟正黑體" panose="020B0604030504040204" pitchFamily="34" charset="-120"/>
+              </a:rPr>
+              <a:t>PowerBI</a:t>
+            </a:r>
+            <a:r>
+              <a:rPr lang="zh-TW" altLang="en-US" sz="4000" dirty="0">
+                <a:solidFill>
+                  <a:srgbClr val="00FFFF"/>
+                </a:solidFill>
+                <a:latin typeface="微軟正黑體" panose="020B0604030504040204" pitchFamily="34" charset="-120"/>
+                <a:ea typeface="微軟正黑體" panose="020B0604030504040204" pitchFamily="34" charset="-120"/>
+              </a:rPr>
+              <a:t>展示</a:t>
+            </a:r>
+          </a:p>
+        </p:txBody>
+      </p:sp>
+      <p:pic>
+        <p:nvPicPr>
+          <p:cNvPr id="3" name="圖片 2">
+            <a:extLst>
+              <a:ext uri="{FF2B5EF4-FFF2-40B4-BE49-F238E27FC236}">
+                <a16:creationId xmlns:a16="http://schemas.microsoft.com/office/drawing/2014/main" id="{8AE24A52-640D-8F7B-89A8-3A1DE762BE38}"/>
+              </a:ext>
+            </a:extLst>
+          </p:cNvPr>
+          <p:cNvPicPr>
+            <a:picLocks noChangeAspect="1"/>
+          </p:cNvPicPr>
+          <p:nvPr/>
+        </p:nvPicPr>
+        <p:blipFill>
+          <a:blip r:embed="rId3">
+            <a:extLst>
+              <a:ext uri="{28A0092B-C50C-407E-A947-70E740481C1C}">
+                <a14:useLocalDpi xmlns:a14="http://schemas.microsoft.com/office/drawing/2010/main" val="0"/>
+              </a:ext>
+            </a:extLst>
+          </a:blip>
+          <a:stretch>
+            <a:fillRect/>
+          </a:stretch>
+        </p:blipFill>
+        <p:spPr>
+          <a:xfrm>
+            <a:off x="3061101" y="2231886"/>
+            <a:ext cx="6069797" cy="3402376"/>
+          </a:xfrm>
+          <a:prstGeom prst="rect">
+            <a:avLst/>
+          </a:prstGeom>
+        </p:spPr>
+      </p:pic>
+    </p:spTree>
+    <p:extLst>
+      <p:ext uri="{BB962C8B-B14F-4D97-AF65-F5344CB8AC3E}">
+        <p14:creationId xmlns:p14="http://schemas.microsoft.com/office/powerpoint/2010/main" val="2210699856"/>
+      </p:ext>
+    </p:extLst>
+  </p:cSld>
+  <p:clrMapOvr>
+    <a:masterClrMapping/>
+  </p:clrMapOvr>
+</p:sld>
+</file>
+
+<file path=ppt/slides/slide7.xml><?xml version="1.0" encoding="utf-8"?>
+<p:sld xmlns:a="http://schemas.openxmlformats.org/drawingml/2006/main" xmlns:r="http://schemas.openxmlformats.org/officeDocument/2006/relationships" xmlns:p="http://schemas.openxmlformats.org/presentationml/2006/main">
+  <p:cSld>
+    <p:spTree>
+      <p:nvGrpSpPr>
+        <p:cNvPr id="1" name="">
+          <a:extLst>
+            <a:ext uri="{FF2B5EF4-FFF2-40B4-BE49-F238E27FC236}">
+              <a16:creationId xmlns:a16="http://schemas.microsoft.com/office/drawing/2014/main" id="{1E559EC3-5307-6F8B-ADAC-1ABB5CE9D1F2}"/>
+            </a:ext>
+          </a:extLst>
+        </p:cNvPr>
+        <p:cNvGrpSpPr/>
+        <p:nvPr/>
+      </p:nvGrpSpPr>
+      <p:grpSpPr>
+        <a:xfrm>
+          <a:off x="0" y="0"/>
+          <a:ext cx="0" cy="0"/>
+          <a:chOff x="0" y="0"/>
+          <a:chExt cx="0" cy="0"/>
+        </a:xfrm>
+      </p:grpSpPr>
+      <p:pic>
+        <p:nvPicPr>
+          <p:cNvPr id="5" name="圖片 4">
+            <a:extLst>
+              <a:ext uri="{FF2B5EF4-FFF2-40B4-BE49-F238E27FC236}">
+                <a16:creationId xmlns:a16="http://schemas.microsoft.com/office/drawing/2014/main" id="{7F237B2B-9059-9797-5727-11B91777663C}"/>
+              </a:ext>
+            </a:extLst>
+          </p:cNvPr>
+          <p:cNvPicPr>
+            <a:picLocks noChangeAspect="1"/>
+          </p:cNvPicPr>
+          <p:nvPr/>
+        </p:nvPicPr>
+        <p:blipFill>
+          <a:blip r:embed="rId2">
+            <a:extLst>
+              <a:ext uri="{28A0092B-C50C-407E-A947-70E740481C1C}">
+                <a14:useLocalDpi xmlns:a14="http://schemas.microsoft.com/office/drawing/2010/main" val="0"/>
+              </a:ext>
+            </a:extLst>
+          </a:blip>
+          <a:stretch>
+            <a:fillRect/>
+          </a:stretch>
+        </p:blipFill>
+        <p:spPr>
+          <a:xfrm>
+            <a:off x="0" y="0"/>
+            <a:ext cx="12192000" cy="6858000"/>
+          </a:xfrm>
+          <a:prstGeom prst="rect">
+            <a:avLst/>
+          </a:prstGeom>
+        </p:spPr>
+      </p:pic>
+      <p:sp>
+        <p:nvSpPr>
+          <p:cNvPr id="6" name="文字方塊 5">
+            <a:extLst>
+              <a:ext uri="{FF2B5EF4-FFF2-40B4-BE49-F238E27FC236}">
+                <a16:creationId xmlns:a16="http://schemas.microsoft.com/office/drawing/2014/main" id="{11A831E2-9D89-189B-E983-445A0EDD4B07}"/>
+              </a:ext>
+            </a:extLst>
+          </p:cNvPr>
+          <p:cNvSpPr txBox="1"/>
+          <p:nvPr/>
+        </p:nvSpPr>
+        <p:spPr>
+          <a:xfrm>
+            <a:off x="4517298" y="1524000"/>
+            <a:ext cx="3157403" cy="707886"/>
+          </a:xfrm>
+          <a:prstGeom prst="rect">
+            <a:avLst/>
+          </a:prstGeom>
+          <a:noFill/>
+        </p:spPr>
+        <p:txBody>
+          <a:bodyPr wrap="none" rtlCol="0">
+            <a:spAutoFit/>
+          </a:bodyPr>
+          <a:lstStyle/>
+          <a:p>
+            <a:r>
+              <a:rPr lang="en-US" altLang="zh-TW" sz="4000" dirty="0" err="1">
+                <a:solidFill>
+                  <a:srgbClr val="00FFFF"/>
+                </a:solidFill>
+                <a:latin typeface="微軟正黑體" panose="020B0604030504040204" pitchFamily="34" charset="-120"/>
+                <a:ea typeface="微軟正黑體" panose="020B0604030504040204" pitchFamily="34" charset="-120"/>
+              </a:rPr>
+              <a:t>PowerBI</a:t>
+            </a:r>
+            <a:r>
+              <a:rPr lang="zh-TW" altLang="en-US" sz="4000" dirty="0">
+                <a:solidFill>
+                  <a:srgbClr val="00FFFF"/>
+                </a:solidFill>
+                <a:latin typeface="微軟正黑體" panose="020B0604030504040204" pitchFamily="34" charset="-120"/>
+                <a:ea typeface="微軟正黑體" panose="020B0604030504040204" pitchFamily="34" charset="-120"/>
+              </a:rPr>
+              <a:t>展示</a:t>
+            </a:r>
+          </a:p>
+        </p:txBody>
+      </p:sp>
+      <p:pic>
+        <p:nvPicPr>
+          <p:cNvPr id="4" name="圖片 3">
+            <a:extLst>
+              <a:ext uri="{FF2B5EF4-FFF2-40B4-BE49-F238E27FC236}">
+                <a16:creationId xmlns:a16="http://schemas.microsoft.com/office/drawing/2014/main" id="{7F36C2BF-7F78-9373-18E3-E7D309FCED6A}"/>
+              </a:ext>
+            </a:extLst>
+          </p:cNvPr>
+          <p:cNvPicPr>
+            <a:picLocks noChangeAspect="1"/>
+          </p:cNvPicPr>
+          <p:nvPr/>
+        </p:nvPicPr>
+        <p:blipFill>
+          <a:blip r:embed="rId3">
+            <a:extLst>
+              <a:ext uri="{28A0092B-C50C-407E-A947-70E740481C1C}">
+                <a14:useLocalDpi xmlns:a14="http://schemas.microsoft.com/office/drawing/2010/main" val="0"/>
+              </a:ext>
+            </a:extLst>
+          </a:blip>
+          <a:stretch>
+            <a:fillRect/>
+          </a:stretch>
+        </p:blipFill>
+        <p:spPr>
+          <a:xfrm>
+            <a:off x="3061100" y="2228374"/>
+            <a:ext cx="6069797" cy="3405888"/>
+          </a:xfrm>
+          <a:prstGeom prst="rect">
+            <a:avLst/>
+          </a:prstGeom>
+        </p:spPr>
+      </p:pic>
+    </p:spTree>
+    <p:extLst>
+      <p:ext uri="{BB962C8B-B14F-4D97-AF65-F5344CB8AC3E}">
+        <p14:creationId xmlns:p14="http://schemas.microsoft.com/office/powerpoint/2010/main" val="870029619"/>
+      </p:ext>
+    </p:extLst>
+  </p:cSld>
+  <p:clrMapOvr>
+    <a:masterClrMapping/>
+  </p:clrMapOvr>
+</p:sld>
+</file>
+
+<file path=ppt/slides/slide8.xml><?xml version="1.0" encoding="utf-8"?>
+<p:sld xmlns:a="http://schemas.openxmlformats.org/drawingml/2006/main" xmlns:r="http://schemas.openxmlformats.org/officeDocument/2006/relationships" xmlns:p="http://schemas.openxmlformats.org/presentationml/2006/main">
+  <p:cSld>
+    <p:spTree>
+      <p:nvGrpSpPr>
+        <p:cNvPr id="1" name="">
+          <a:extLst>
+            <a:ext uri="{FF2B5EF4-FFF2-40B4-BE49-F238E27FC236}">
+              <a16:creationId xmlns:a16="http://schemas.microsoft.com/office/drawing/2014/main" id="{71CDC727-C5F8-82D4-9ABF-FA4506076E1F}"/>
+            </a:ext>
+          </a:extLst>
+        </p:cNvPr>
+        <p:cNvGrpSpPr/>
+        <p:nvPr/>
+      </p:nvGrpSpPr>
+      <p:grpSpPr>
+        <a:xfrm>
+          <a:off x="0" y="0"/>
+          <a:ext cx="0" cy="0"/>
+          <a:chOff x="0" y="0"/>
+          <a:chExt cx="0" cy="0"/>
+        </a:xfrm>
+      </p:grpSpPr>
+      <p:pic>
+        <p:nvPicPr>
+          <p:cNvPr id="5" name="圖片 4">
+            <a:extLst>
+              <a:ext uri="{FF2B5EF4-FFF2-40B4-BE49-F238E27FC236}">
+                <a16:creationId xmlns:a16="http://schemas.microsoft.com/office/drawing/2014/main" id="{2BA859DC-B5DB-523D-163A-A64DC1111BA5}"/>
+              </a:ext>
+            </a:extLst>
+          </p:cNvPr>
+          <p:cNvPicPr>
+            <a:picLocks noChangeAspect="1"/>
+          </p:cNvPicPr>
+          <p:nvPr/>
+        </p:nvPicPr>
+        <p:blipFill>
+          <a:blip r:embed="rId2">
+            <a:extLst>
+              <a:ext uri="{28A0092B-C50C-407E-A947-70E740481C1C}">
+                <a14:useLocalDpi xmlns:a14="http://schemas.microsoft.com/office/drawing/2010/main" val="0"/>
+              </a:ext>
+            </a:extLst>
+          </a:blip>
+          <a:stretch>
+            <a:fillRect/>
+          </a:stretch>
+        </p:blipFill>
+        <p:spPr>
+          <a:xfrm>
+            <a:off x="0" y="0"/>
+            <a:ext cx="12192000" cy="6858000"/>
+          </a:xfrm>
+          <a:prstGeom prst="rect">
+            <a:avLst/>
+          </a:prstGeom>
+        </p:spPr>
+      </p:pic>
+      <p:sp>
+        <p:nvSpPr>
+          <p:cNvPr id="6" name="文字方塊 5">
+            <a:extLst>
+              <a:ext uri="{FF2B5EF4-FFF2-40B4-BE49-F238E27FC236}">
+                <a16:creationId xmlns:a16="http://schemas.microsoft.com/office/drawing/2014/main" id="{6F4F3E28-CDDF-0AB6-57CA-0539860484CC}"/>
+              </a:ext>
+            </a:extLst>
+          </p:cNvPr>
+          <p:cNvSpPr txBox="1"/>
+          <p:nvPr/>
+        </p:nvSpPr>
+        <p:spPr>
+          <a:xfrm>
+            <a:off x="4517298" y="1524000"/>
+            <a:ext cx="3157403" cy="707886"/>
+          </a:xfrm>
+          <a:prstGeom prst="rect">
+            <a:avLst/>
+          </a:prstGeom>
+          <a:noFill/>
+        </p:spPr>
+        <p:txBody>
+          <a:bodyPr wrap="none" rtlCol="0">
+            <a:spAutoFit/>
+          </a:bodyPr>
+          <a:lstStyle/>
+          <a:p>
+            <a:r>
+              <a:rPr lang="en-US" altLang="zh-TW" sz="4000" dirty="0" err="1">
+                <a:solidFill>
+                  <a:srgbClr val="00FFFF"/>
+                </a:solidFill>
+                <a:latin typeface="微軟正黑體" panose="020B0604030504040204" pitchFamily="34" charset="-120"/>
+                <a:ea typeface="微軟正黑體" panose="020B0604030504040204" pitchFamily="34" charset="-120"/>
+              </a:rPr>
+              <a:t>PowerBI</a:t>
+            </a:r>
+            <a:r>
+              <a:rPr lang="zh-TW" altLang="en-US" sz="4000" dirty="0">
+                <a:solidFill>
+                  <a:srgbClr val="00FFFF"/>
+                </a:solidFill>
+                <a:latin typeface="微軟正黑體" panose="020B0604030504040204" pitchFamily="34" charset="-120"/>
+                <a:ea typeface="微軟正黑體" panose="020B0604030504040204" pitchFamily="34" charset="-120"/>
+              </a:rPr>
+              <a:t>展示</a:t>
+            </a:r>
+          </a:p>
+        </p:txBody>
+      </p:sp>
+      <p:pic>
+        <p:nvPicPr>
+          <p:cNvPr id="4" name="圖片 3">
+            <a:extLst>
+              <a:ext uri="{FF2B5EF4-FFF2-40B4-BE49-F238E27FC236}">
+                <a16:creationId xmlns:a16="http://schemas.microsoft.com/office/drawing/2014/main" id="{23E1C636-FD26-3D2E-0656-A3B5B0AA5188}"/>
+              </a:ext>
+            </a:extLst>
+          </p:cNvPr>
+          <p:cNvPicPr>
+            <a:picLocks noChangeAspect="1"/>
+          </p:cNvPicPr>
+          <p:nvPr/>
+        </p:nvPicPr>
+        <p:blipFill>
+          <a:blip r:embed="rId3">
+            <a:extLst>
+              <a:ext uri="{28A0092B-C50C-407E-A947-70E740481C1C}">
+                <a14:useLocalDpi xmlns:a14="http://schemas.microsoft.com/office/drawing/2010/main" val="0"/>
+              </a:ext>
+            </a:extLst>
+          </a:blip>
+          <a:srcRect/>
+          <a:stretch/>
+        </p:blipFill>
+        <p:spPr>
+          <a:xfrm>
+            <a:off x="3061100" y="2229818"/>
+            <a:ext cx="6069797" cy="3402999"/>
+          </a:xfrm>
+          <a:prstGeom prst="rect">
+            <a:avLst/>
+          </a:prstGeom>
+        </p:spPr>
+      </p:pic>
+    </p:spTree>
+    <p:extLst>
+      <p:ext uri="{BB962C8B-B14F-4D97-AF65-F5344CB8AC3E}">
+        <p14:creationId xmlns:p14="http://schemas.microsoft.com/office/powerpoint/2010/main" val="4060790127"/>
+      </p:ext>
+    </p:extLst>
+  </p:cSld>
+  <p:clrMapOvr>
+    <a:masterClrMapping/>
+  </p:clrMapOvr>
+</p:sld>
+</file>
+
+<file path=ppt/slides/slide9.xml><?xml version="1.0" encoding="utf-8"?>
+<p:sld xmlns:a="http://schemas.openxmlformats.org/drawingml/2006/main" xmlns:r="http://schemas.openxmlformats.org/officeDocument/2006/relationships" xmlns:p="http://schemas.openxmlformats.org/presentationml/2006/main">
+  <p:cSld>
+    <p:spTree>
+      <p:nvGrpSpPr>
+        <p:cNvPr id="1" name="">
+          <a:extLst>
+            <a:ext uri="{FF2B5EF4-FFF2-40B4-BE49-F238E27FC236}">
+              <a16:creationId xmlns:a16="http://schemas.microsoft.com/office/drawing/2014/main" id="{0B2E3A6C-1C8C-1CAB-7694-26B03E2BEE6C}"/>
+            </a:ext>
+          </a:extLst>
+        </p:cNvPr>
+        <p:cNvGrpSpPr/>
+        <p:nvPr/>
+      </p:nvGrpSpPr>
+      <p:grpSpPr>
+        <a:xfrm>
+          <a:off x="0" y="0"/>
+          <a:ext cx="0" cy="0"/>
+          <a:chOff x="0" y="0"/>
+          <a:chExt cx="0" cy="0"/>
+        </a:xfrm>
+      </p:grpSpPr>
+      <p:pic>
+        <p:nvPicPr>
+          <p:cNvPr id="5" name="圖片 4">
+            <a:extLst>
+              <a:ext uri="{FF2B5EF4-FFF2-40B4-BE49-F238E27FC236}">
+                <a16:creationId xmlns:a16="http://schemas.microsoft.com/office/drawing/2014/main" id="{64410478-C5EA-3CF2-4A24-E9A34689F9B3}"/>
+              </a:ext>
+            </a:extLst>
+          </p:cNvPr>
+          <p:cNvPicPr>
+            <a:picLocks noChangeAspect="1"/>
+          </p:cNvPicPr>
+          <p:nvPr/>
+        </p:nvPicPr>
+        <p:blipFill>
+          <a:blip r:embed="rId2">
+            <a:extLst>
+              <a:ext uri="{28A0092B-C50C-407E-A947-70E740481C1C}">
+                <a14:useLocalDpi xmlns:a14="http://schemas.microsoft.com/office/drawing/2010/main" val="0"/>
+              </a:ext>
+            </a:extLst>
+          </a:blip>
+          <a:stretch>
+            <a:fillRect/>
+          </a:stretch>
+        </p:blipFill>
+        <p:spPr>
+          <a:xfrm>
+            <a:off x="0" y="0"/>
+            <a:ext cx="12192000" cy="6858000"/>
+          </a:xfrm>
+          <a:prstGeom prst="rect">
+            <a:avLst/>
+          </a:prstGeom>
+        </p:spPr>
+      </p:pic>
+      <p:sp>
+        <p:nvSpPr>
+          <p:cNvPr id="6" name="文字方塊 5">
+            <a:extLst>
+              <a:ext uri="{FF2B5EF4-FFF2-40B4-BE49-F238E27FC236}">
+                <a16:creationId xmlns:a16="http://schemas.microsoft.com/office/drawing/2014/main" id="{5EEDA4C8-EAA3-8689-BF24-12B1EEE3A0A2}"/>
+              </a:ext>
+            </a:extLst>
+          </p:cNvPr>
+          <p:cNvSpPr txBox="1"/>
+          <p:nvPr/>
+        </p:nvSpPr>
+        <p:spPr>
+          <a:xfrm>
+            <a:off x="4517298" y="1524000"/>
+            <a:ext cx="3157403" cy="707886"/>
+          </a:xfrm>
+          <a:prstGeom prst="rect">
+            <a:avLst/>
+          </a:prstGeom>
+          <a:noFill/>
+        </p:spPr>
+        <p:txBody>
+          <a:bodyPr wrap="none" rtlCol="0">
+            <a:spAutoFit/>
+          </a:bodyPr>
+          <a:lstStyle/>
+          <a:p>
+            <a:r>
+              <a:rPr lang="en-US" altLang="zh-TW" sz="4000" dirty="0" err="1">
+                <a:solidFill>
+                  <a:srgbClr val="00FFFF"/>
+                </a:solidFill>
+                <a:latin typeface="微軟正黑體" panose="020B0604030504040204" pitchFamily="34" charset="-120"/>
+                <a:ea typeface="微軟正黑體" panose="020B0604030504040204" pitchFamily="34" charset="-120"/>
+              </a:rPr>
+              <a:t>PowerBI</a:t>
+            </a:r>
+            <a:r>
+              <a:rPr lang="zh-TW" altLang="en-US" sz="4000" dirty="0">
+                <a:solidFill>
+                  <a:srgbClr val="00FFFF"/>
+                </a:solidFill>
+                <a:latin typeface="微軟正黑體" panose="020B0604030504040204" pitchFamily="34" charset="-120"/>
+                <a:ea typeface="微軟正黑體" panose="020B0604030504040204" pitchFamily="34" charset="-120"/>
+              </a:rPr>
+              <a:t>展示</a:t>
+            </a:r>
+          </a:p>
+        </p:txBody>
+      </p:sp>
+      <p:pic>
+        <p:nvPicPr>
+          <p:cNvPr id="4" name="圖片 3">
+            <a:extLst>
+              <a:ext uri="{FF2B5EF4-FFF2-40B4-BE49-F238E27FC236}">
+                <a16:creationId xmlns:a16="http://schemas.microsoft.com/office/drawing/2014/main" id="{43F1D34A-703F-687C-16F9-99FFE19B7FE1}"/>
+              </a:ext>
+            </a:extLst>
+          </p:cNvPr>
+          <p:cNvPicPr>
+            <a:picLocks noChangeAspect="1"/>
+          </p:cNvPicPr>
+          <p:nvPr/>
+        </p:nvPicPr>
+        <p:blipFill>
+          <a:blip r:embed="rId3">
+            <a:extLst>
+              <a:ext uri="{28A0092B-C50C-407E-A947-70E740481C1C}">
+                <a14:useLocalDpi xmlns:a14="http://schemas.microsoft.com/office/drawing/2010/main" val="0"/>
+              </a:ext>
+            </a:extLst>
+          </a:blip>
+          <a:srcRect/>
+          <a:stretch/>
+        </p:blipFill>
+        <p:spPr>
+          <a:xfrm>
+            <a:off x="3065685" y="2229818"/>
+            <a:ext cx="6060627" cy="3402999"/>
+          </a:xfrm>
+          <a:prstGeom prst="rect">
+            <a:avLst/>
+          </a:prstGeom>
+        </p:spPr>
+      </p:pic>
+    </p:spTree>
+    <p:extLst>
+      <p:ext uri="{BB962C8B-B14F-4D97-AF65-F5344CB8AC3E}">
+        <p14:creationId xmlns:p14="http://schemas.microsoft.com/office/powerpoint/2010/main" val="2372769068"/>
       </p:ext>
     </p:extLst>
   </p:cSld>
@@ -3772,4 +6051,299 @@
     </a:ext>
   </a:extLst>
 </a:theme>
+</file>
+
+<file path=ppt/theme/theme2.xml><?xml version="1.0" encoding="utf-8"?>
+<a:theme xmlns:a="http://schemas.openxmlformats.org/drawingml/2006/main" name="Office 佈景主題">
+  <a:themeElements>
+    <a:clrScheme name="Office">
+      <a:dk1>
+        <a:sysClr val="windowText" lastClr="000000"/>
+      </a:dk1>
+      <a:lt1>
+        <a:sysClr val="window" lastClr="FFFFFF"/>
+      </a:lt1>
+      <a:dk2>
+        <a:srgbClr val="44546A"/>
+      </a:dk2>
+      <a:lt2>
+        <a:srgbClr val="E7E6E6"/>
+      </a:lt2>
+      <a:accent1>
+        <a:srgbClr val="4472C4"/>
+      </a:accent1>
+      <a:accent2>
+        <a:srgbClr val="ED7D31"/>
+      </a:accent2>
+      <a:accent3>
+        <a:srgbClr val="A5A5A5"/>
+      </a:accent3>
+      <a:accent4>
+        <a:srgbClr val="FFC000"/>
+      </a:accent4>
+      <a:accent5>
+        <a:srgbClr val="5B9BD5"/>
+      </a:accent5>
+      <a:accent6>
+        <a:srgbClr val="70AD47"/>
+      </a:accent6>
+      <a:hlink>
+        <a:srgbClr val="0563C1"/>
+      </a:hlink>
+      <a:folHlink>
+        <a:srgbClr val="954F72"/>
+      </a:folHlink>
+    </a:clrScheme>
+    <a:fontScheme name="Office">
+      <a:majorFont>
+        <a:latin typeface="Calibri Light" panose="020F0302020204030204"/>
+        <a:ea typeface=""/>
+        <a:cs typeface=""/>
+        <a:font script="Jpan" typeface="游ゴシック Light"/>
+        <a:font script="Hang" typeface="맑은 고딕"/>
+        <a:font script="Hans" typeface="等线 Light"/>
+        <a:font script="Hant" typeface="新細明體"/>
+        <a:font script="Arab" typeface="Times New Roman"/>
+        <a:font script="Hebr" typeface="Times New Roman"/>
+        <a:font script="Thai" typeface="Angsana New"/>
+        <a:font script="Ethi" typeface="Nyala"/>
+        <a:font script="Beng" typeface="Vrinda"/>
+        <a:font script="Gujr" typeface="Shruti"/>
+        <a:font script="Khmr" typeface="MoolBoran"/>
+        <a:font script="Knda" typeface="Tunga"/>
+        <a:font script="Guru" typeface="Raavi"/>
+        <a:font script="Cans" typeface="Euphemia"/>
+        <a:font script="Cher" typeface="Plantagenet Cherokee"/>
+        <a:font script="Yiii" typeface="Microsoft Yi Baiti"/>
+        <a:font script="Tibt" typeface="Microsoft Himalaya"/>
+        <a:font script="Thaa" typeface="MV Boli"/>
+        <a:font script="Deva" typeface="Mangal"/>
+        <a:font script="Telu" typeface="Gautami"/>
+        <a:font script="Taml" typeface="Latha"/>
+        <a:font script="Syrc" typeface="Estrangelo Edessa"/>
+        <a:font script="Orya" typeface="Kalinga"/>
+        <a:font script="Mlym" typeface="Kartika"/>
+        <a:font script="Laoo" typeface="DokChampa"/>
+        <a:font script="Sinh" typeface="Iskoola Pota"/>
+        <a:font script="Mong" typeface="Mongolian Baiti"/>
+        <a:font script="Viet" typeface="Times New Roman"/>
+        <a:font script="Uigh" typeface="Microsoft Uighur"/>
+        <a:font script="Geor" typeface="Sylfaen"/>
+        <a:font script="Armn" typeface="Arial"/>
+        <a:font script="Bugi" typeface="Leelawadee UI"/>
+        <a:font script="Bopo" typeface="Microsoft JhengHei"/>
+        <a:font script="Java" typeface="Javanese Text"/>
+        <a:font script="Lisu" typeface="Segoe UI"/>
+        <a:font script="Mymr" typeface="Myanmar Text"/>
+        <a:font script="Nkoo" typeface="Ebrima"/>
+        <a:font script="Olck" typeface="Nirmala UI"/>
+        <a:font script="Osma" typeface="Ebrima"/>
+        <a:font script="Phag" typeface="Phagspa"/>
+        <a:font script="Syrn" typeface="Estrangelo Edessa"/>
+        <a:font script="Syrj" typeface="Estrangelo Edessa"/>
+        <a:font script="Syre" typeface="Estrangelo Edessa"/>
+        <a:font script="Sora" typeface="Nirmala UI"/>
+        <a:font script="Tale" typeface="Microsoft Tai Le"/>
+        <a:font script="Talu" typeface="Microsoft New Tai Lue"/>
+        <a:font script="Tfng" typeface="Ebrima"/>
+      </a:majorFont>
+      <a:minorFont>
+        <a:latin typeface="Calibri" panose="020F0502020204030204"/>
+        <a:ea typeface=""/>
+        <a:cs typeface=""/>
+        <a:font script="Jpan" typeface="游ゴシック"/>
+        <a:font script="Hang" typeface="맑은 고딕"/>
+        <a:font script="Hans" typeface="等线"/>
+        <a:font script="Hant" typeface="新細明體"/>
+        <a:font script="Arab" typeface="Arial"/>
+        <a:font script="Hebr" typeface="Arial"/>
+        <a:font script="Thai" typeface="Cordia New"/>
+        <a:font script="Ethi" typeface="Nyala"/>
+        <a:font script="Beng" typeface="Vrinda"/>
+        <a:font script="Gujr" typeface="Shruti"/>
+        <a:font script="Khmr" typeface="DaunPenh"/>
+        <a:font script="Knda" typeface="Tunga"/>
+        <a:font script="Guru" typeface="Raavi"/>
+        <a:font script="Cans" typeface="Euphemia"/>
+        <a:font script="Cher" typeface="Plantagenet Cherokee"/>
+        <a:font script="Yiii" typeface="Microsoft Yi Baiti"/>
+        <a:font script="Tibt" typeface="Microsoft Himalaya"/>
+        <a:font script="Thaa" typeface="MV Boli"/>
+        <a:font script="Deva" typeface="Mangal"/>
+        <a:font script="Telu" typeface="Gautami"/>
+        <a:font script="Taml" typeface="Latha"/>
+        <a:font script="Syrc" typeface="Estrangelo Edessa"/>
+        <a:font script="Orya" typeface="Kalinga"/>
+        <a:font script="Mlym" typeface="Kartika"/>
+        <a:font script="Laoo" typeface="DokChampa"/>
+        <a:font script="Sinh" typeface="Iskoola Pota"/>
+        <a:font script="Mong" typeface="Mongolian Baiti"/>
+        <a:font script="Viet" typeface="Arial"/>
+        <a:font script="Uigh" typeface="Microsoft Uighur"/>
+        <a:font script="Geor" typeface="Sylfaen"/>
+        <a:font script="Armn" typeface="Arial"/>
+        <a:font script="Bugi" typeface="Leelawadee UI"/>
+        <a:font script="Bopo" typeface="Microsoft JhengHei"/>
+        <a:font script="Java" typeface="Javanese Text"/>
+        <a:font script="Lisu" typeface="Segoe UI"/>
+        <a:font script="Mymr" typeface="Myanmar Text"/>
+        <a:font script="Nkoo" typeface="Ebrima"/>
+        <a:font script="Olck" typeface="Nirmala UI"/>
+        <a:font script="Osma" typeface="Ebrima"/>
+        <a:font script="Phag" typeface="Phagspa"/>
+        <a:font script="Syrn" typeface="Estrangelo Edessa"/>
+        <a:font script="Syrj" typeface="Estrangelo Edessa"/>
+        <a:font script="Syre" typeface="Estrangelo Edessa"/>
+        <a:font script="Sora" typeface="Nirmala UI"/>
+        <a:font script="Tale" typeface="Microsoft Tai Le"/>
+        <a:font script="Talu" typeface="Microsoft New Tai Lue"/>
+        <a:font script="Tfng" typeface="Ebrima"/>
+      </a:minorFont>
+    </a:fontScheme>
+    <a:fmtScheme name="Office">
+      <a:fillStyleLst>
+        <a:solidFill>
+          <a:schemeClr val="phClr"/>
+        </a:solidFill>
+        <a:gradFill rotWithShape="1">
+          <a:gsLst>
+            <a:gs pos="0">
+              <a:schemeClr val="phClr">
+                <a:lumMod val="110000"/>
+                <a:satMod val="105000"/>
+                <a:tint val="67000"/>
+              </a:schemeClr>
+            </a:gs>
+            <a:gs pos="50000">
+              <a:schemeClr val="phClr">
+                <a:lumMod val="105000"/>
+                <a:satMod val="103000"/>
+                <a:tint val="73000"/>
+              </a:schemeClr>
+            </a:gs>
+            <a:gs pos="100000">
+              <a:schemeClr val="phClr">
+                <a:lumMod val="105000"/>
+                <a:satMod val="109000"/>
+                <a:tint val="81000"/>
+              </a:schemeClr>
+            </a:gs>
+          </a:gsLst>
+          <a:lin ang="5400000" scaled="0"/>
+        </a:gradFill>
+        <a:gradFill rotWithShape="1">
+          <a:gsLst>
+            <a:gs pos="0">
+              <a:schemeClr val="phClr">
+                <a:satMod val="103000"/>
+                <a:lumMod val="102000"/>
+                <a:tint val="94000"/>
+              </a:schemeClr>
+            </a:gs>
+            <a:gs pos="50000">
+              <a:schemeClr val="phClr">
+                <a:satMod val="110000"/>
+                <a:lumMod val="100000"/>
+                <a:shade val="100000"/>
+              </a:schemeClr>
+            </a:gs>
+            <a:gs pos="100000">
+              <a:schemeClr val="phClr">
+                <a:lumMod val="99000"/>
+                <a:satMod val="120000"/>
+                <a:shade val="78000"/>
+              </a:schemeClr>
+            </a:gs>
+          </a:gsLst>
+          <a:lin ang="5400000" scaled="0"/>
+        </a:gradFill>
+      </a:fillStyleLst>
+      <a:lnStyleLst>
+        <a:ln w="6350" cap="flat" cmpd="sng" algn="ctr">
+          <a:solidFill>
+            <a:schemeClr val="phClr"/>
+          </a:solidFill>
+          <a:prstDash val="solid"/>
+          <a:miter lim="800000"/>
+        </a:ln>
+        <a:ln w="12700" cap="flat" cmpd="sng" algn="ctr">
+          <a:solidFill>
+            <a:schemeClr val="phClr"/>
+          </a:solidFill>
+          <a:prstDash val="solid"/>
+          <a:miter lim="800000"/>
+        </a:ln>
+        <a:ln w="19050" cap="flat" cmpd="sng" algn="ctr">
+          <a:solidFill>
+            <a:schemeClr val="phClr"/>
+          </a:solidFill>
+          <a:prstDash val="solid"/>
+          <a:miter lim="800000"/>
+        </a:ln>
+      </a:lnStyleLst>
+      <a:effectStyleLst>
+        <a:effectStyle>
+          <a:effectLst/>
+        </a:effectStyle>
+        <a:effectStyle>
+          <a:effectLst/>
+        </a:effectStyle>
+        <a:effectStyle>
+          <a:effectLst>
+            <a:outerShdw blurRad="57150" dist="19050" dir="5400000" algn="ctr" rotWithShape="0">
+              <a:srgbClr val="000000">
+                <a:alpha val="63000"/>
+              </a:srgbClr>
+            </a:outerShdw>
+          </a:effectLst>
+        </a:effectStyle>
+      </a:effectStyleLst>
+      <a:bgFillStyleLst>
+        <a:solidFill>
+          <a:schemeClr val="phClr"/>
+        </a:solidFill>
+        <a:solidFill>
+          <a:schemeClr val="phClr">
+            <a:tint val="95000"/>
+            <a:satMod val="170000"/>
+          </a:schemeClr>
+        </a:solidFill>
+        <a:gradFill rotWithShape="1">
+          <a:gsLst>
+            <a:gs pos="0">
+              <a:schemeClr val="phClr">
+                <a:tint val="93000"/>
+                <a:satMod val="150000"/>
+                <a:shade val="98000"/>
+                <a:lumMod val="102000"/>
+              </a:schemeClr>
+            </a:gs>
+            <a:gs pos="50000">
+              <a:schemeClr val="phClr">
+                <a:tint val="98000"/>
+                <a:satMod val="130000"/>
+                <a:shade val="90000"/>
+                <a:lumMod val="103000"/>
+              </a:schemeClr>
+            </a:gs>
+            <a:gs pos="100000">
+              <a:schemeClr val="phClr">
+                <a:shade val="63000"/>
+                <a:satMod val="120000"/>
+              </a:schemeClr>
+            </a:gs>
+          </a:gsLst>
+          <a:lin ang="5400000" scaled="0"/>
+        </a:gradFill>
+      </a:bgFillStyleLst>
+    </a:fmtScheme>
+  </a:themeElements>
+  <a:objectDefaults/>
+  <a:extraClrSchemeLst/>
+  <a:extLst>
+    <a:ext uri="{05A4C25C-085E-4340-85A3-A5531E510DB2}">
+      <thm15:themeFamily xmlns:thm15="http://schemas.microsoft.com/office/thememl/2012/main" name="Office Theme" id="{62F939B6-93AF-4DB8-9C6B-D6C7DFDC589F}" vid="{4A3C46E8-61CC-4603-A589-7422A47A8E4A}"/>
+    </a:ext>
+  </a:extLst>
+</a:theme>
 </file>
--- a/Steam遊戲市場分析報告.pptx
+++ b/Steam遊戲市場分析報告.pptx
@@ -5,22 +5,25 @@
     <p:sldMasterId id="2147483648" r:id="rId1"/>
   </p:sldMasterIdLst>
   <p:notesMasterIdLst>
-    <p:notesMasterId r:id="rId15"/>
+    <p:notesMasterId r:id="rId18"/>
   </p:notesMasterIdLst>
   <p:sldIdLst>
     <p:sldId id="256" r:id="rId2"/>
     <p:sldId id="257" r:id="rId3"/>
-    <p:sldId id="266" r:id="rId4"/>
-    <p:sldId id="267" r:id="rId5"/>
-    <p:sldId id="268" r:id="rId6"/>
-    <p:sldId id="269" r:id="rId7"/>
-    <p:sldId id="270" r:id="rId8"/>
-    <p:sldId id="271" r:id="rId9"/>
-    <p:sldId id="272" r:id="rId10"/>
-    <p:sldId id="273" r:id="rId11"/>
-    <p:sldId id="274" r:id="rId12"/>
-    <p:sldId id="263" r:id="rId13"/>
-    <p:sldId id="264" r:id="rId14"/>
+    <p:sldId id="278" r:id="rId4"/>
+    <p:sldId id="266" r:id="rId5"/>
+    <p:sldId id="267" r:id="rId6"/>
+    <p:sldId id="268" r:id="rId7"/>
+    <p:sldId id="269" r:id="rId8"/>
+    <p:sldId id="270" r:id="rId9"/>
+    <p:sldId id="271" r:id="rId10"/>
+    <p:sldId id="272" r:id="rId11"/>
+    <p:sldId id="273" r:id="rId12"/>
+    <p:sldId id="274" r:id="rId13"/>
+    <p:sldId id="280" r:id="rId14"/>
+    <p:sldId id="275" r:id="rId15"/>
+    <p:sldId id="279" r:id="rId16"/>
+    <p:sldId id="276" r:id="rId17"/>
   </p:sldIdLst>
   <p:sldSz cx="12192000" cy="6858000"/>
   <p:notesSz cx="6858000" cy="9144000"/>
@@ -209,7 +212,7 @@
           <a:p>
             <a:fld id="{4248A3BC-A2A9-4AF2-859B-7C5E966DF741}" type="datetimeFigureOut">
               <a:rPr lang="zh-TW" altLang="en-US" smtClean="0"/>
-              <a:t>2026/4/15</a:t>
+              <a:t>2026/4/16</a:t>
             </a:fld>
             <a:endParaRPr lang="zh-TW" altLang="en-US"/>
           </a:p>
@@ -707,7 +710,7 @@
           <a:p>
             <a:fld id="{D94E7259-4CE4-4FEC-BE06-AE2B845FD034}" type="datetimeFigureOut">
               <a:rPr lang="zh-TW" altLang="en-US" smtClean="0"/>
-              <a:t>2026/4/15</a:t>
+              <a:t>2026/4/16</a:t>
             </a:fld>
             <a:endParaRPr lang="zh-TW" altLang="en-US"/>
           </a:p>
@@ -905,7 +908,7 @@
           <a:p>
             <a:fld id="{D94E7259-4CE4-4FEC-BE06-AE2B845FD034}" type="datetimeFigureOut">
               <a:rPr lang="zh-TW" altLang="en-US" smtClean="0"/>
-              <a:t>2026/4/15</a:t>
+              <a:t>2026/4/16</a:t>
             </a:fld>
             <a:endParaRPr lang="zh-TW" altLang="en-US"/>
           </a:p>
@@ -1113,7 +1116,7 @@
           <a:p>
             <a:fld id="{D94E7259-4CE4-4FEC-BE06-AE2B845FD034}" type="datetimeFigureOut">
               <a:rPr lang="zh-TW" altLang="en-US" smtClean="0"/>
-              <a:t>2026/4/15</a:t>
+              <a:t>2026/4/16</a:t>
             </a:fld>
             <a:endParaRPr lang="zh-TW" altLang="en-US"/>
           </a:p>
@@ -1311,7 +1314,7 @@
           <a:p>
             <a:fld id="{D94E7259-4CE4-4FEC-BE06-AE2B845FD034}" type="datetimeFigureOut">
               <a:rPr lang="zh-TW" altLang="en-US" smtClean="0"/>
-              <a:t>2026/4/15</a:t>
+              <a:t>2026/4/16</a:t>
             </a:fld>
             <a:endParaRPr lang="zh-TW" altLang="en-US"/>
           </a:p>
@@ -1586,7 +1589,7 @@
           <a:p>
             <a:fld id="{D94E7259-4CE4-4FEC-BE06-AE2B845FD034}" type="datetimeFigureOut">
               <a:rPr lang="zh-TW" altLang="en-US" smtClean="0"/>
-              <a:t>2026/4/15</a:t>
+              <a:t>2026/4/16</a:t>
             </a:fld>
             <a:endParaRPr lang="zh-TW" altLang="en-US"/>
           </a:p>
@@ -1851,7 +1854,7 @@
           <a:p>
             <a:fld id="{D94E7259-4CE4-4FEC-BE06-AE2B845FD034}" type="datetimeFigureOut">
               <a:rPr lang="zh-TW" altLang="en-US" smtClean="0"/>
-              <a:t>2026/4/15</a:t>
+              <a:t>2026/4/16</a:t>
             </a:fld>
             <a:endParaRPr lang="zh-TW" altLang="en-US"/>
           </a:p>
@@ -2263,7 +2266,7 @@
           <a:p>
             <a:fld id="{D94E7259-4CE4-4FEC-BE06-AE2B845FD034}" type="datetimeFigureOut">
               <a:rPr lang="zh-TW" altLang="en-US" smtClean="0"/>
-              <a:t>2026/4/15</a:t>
+              <a:t>2026/4/16</a:t>
             </a:fld>
             <a:endParaRPr lang="zh-TW" altLang="en-US"/>
           </a:p>
@@ -2404,7 +2407,7 @@
           <a:p>
             <a:fld id="{D94E7259-4CE4-4FEC-BE06-AE2B845FD034}" type="datetimeFigureOut">
               <a:rPr lang="zh-TW" altLang="en-US" smtClean="0"/>
-              <a:t>2026/4/15</a:t>
+              <a:t>2026/4/16</a:t>
             </a:fld>
             <a:endParaRPr lang="zh-TW" altLang="en-US"/>
           </a:p>
@@ -2517,7 +2520,7 @@
           <a:p>
             <a:fld id="{D94E7259-4CE4-4FEC-BE06-AE2B845FD034}" type="datetimeFigureOut">
               <a:rPr lang="zh-TW" altLang="en-US" smtClean="0"/>
-              <a:t>2026/4/15</a:t>
+              <a:t>2026/4/16</a:t>
             </a:fld>
             <a:endParaRPr lang="zh-TW" altLang="en-US"/>
           </a:p>
@@ -2828,7 +2831,7 @@
           <a:p>
             <a:fld id="{D94E7259-4CE4-4FEC-BE06-AE2B845FD034}" type="datetimeFigureOut">
               <a:rPr lang="zh-TW" altLang="en-US" smtClean="0"/>
-              <a:t>2026/4/15</a:t>
+              <a:t>2026/4/16</a:t>
             </a:fld>
             <a:endParaRPr lang="zh-TW" altLang="en-US"/>
           </a:p>
@@ -3116,7 +3119,7 @@
           <a:p>
             <a:fld id="{D94E7259-4CE4-4FEC-BE06-AE2B845FD034}" type="datetimeFigureOut">
               <a:rPr lang="zh-TW" altLang="en-US" smtClean="0"/>
-              <a:t>2026/4/15</a:t>
+              <a:t>2026/4/16</a:t>
             </a:fld>
             <a:endParaRPr lang="zh-TW" altLang="en-US"/>
           </a:p>
@@ -3357,7 +3360,7 @@
           <a:p>
             <a:fld id="{D94E7259-4CE4-4FEC-BE06-AE2B845FD034}" type="datetimeFigureOut">
               <a:rPr lang="zh-TW" altLang="en-US" smtClean="0"/>
-              <a:t>2026/4/15</a:t>
+              <a:t>2026/4/16</a:t>
             </a:fld>
             <a:endParaRPr lang="zh-TW" altLang="en-US"/>
           </a:p>
@@ -3939,7 +3942,7 @@
                 <a:latin typeface="微軟正黑體" panose="020B0604030504040204" pitchFamily="34" charset="-120"/>
                 <a:ea typeface="微軟正黑體" panose="020B0604030504040204" pitchFamily="34" charset="-120"/>
               </a:rPr>
-              <a:t>(1997-2024)</a:t>
+              <a:t>(2003-2024)</a:t>
             </a:r>
             <a:endParaRPr lang="zh-TW" altLang="en-US" sz="3600" dirty="0">
               <a:solidFill>
@@ -3965,6 +3968,164 @@
 </file>
 
 <file path=ppt/slides/slide10.xml><?xml version="1.0" encoding="utf-8"?>
+<p:sld xmlns:a="http://schemas.openxmlformats.org/drawingml/2006/main" xmlns:r="http://schemas.openxmlformats.org/officeDocument/2006/relationships" xmlns:p="http://schemas.openxmlformats.org/presentationml/2006/main">
+  <p:cSld>
+    <p:spTree>
+      <p:nvGrpSpPr>
+        <p:cNvPr id="1" name="">
+          <a:extLst>
+            <a:ext uri="{FF2B5EF4-FFF2-40B4-BE49-F238E27FC236}">
+              <a16:creationId xmlns:a16="http://schemas.microsoft.com/office/drawing/2014/main" id="{0B2E3A6C-1C8C-1CAB-7694-26B03E2BEE6C}"/>
+            </a:ext>
+          </a:extLst>
+        </p:cNvPr>
+        <p:cNvGrpSpPr/>
+        <p:nvPr/>
+      </p:nvGrpSpPr>
+      <p:grpSpPr>
+        <a:xfrm>
+          <a:off x="0" y="0"/>
+          <a:ext cx="0" cy="0"/>
+          <a:chOff x="0" y="0"/>
+          <a:chExt cx="0" cy="0"/>
+        </a:xfrm>
+      </p:grpSpPr>
+      <p:pic>
+        <p:nvPicPr>
+          <p:cNvPr id="5" name="圖片 4">
+            <a:extLst>
+              <a:ext uri="{FF2B5EF4-FFF2-40B4-BE49-F238E27FC236}">
+                <a16:creationId xmlns:a16="http://schemas.microsoft.com/office/drawing/2014/main" id="{64410478-C5EA-3CF2-4A24-E9A34689F9B3}"/>
+              </a:ext>
+            </a:extLst>
+          </p:cNvPr>
+          <p:cNvPicPr>
+            <a:picLocks noChangeAspect="1"/>
+          </p:cNvPicPr>
+          <p:nvPr/>
+        </p:nvPicPr>
+        <p:blipFill>
+          <a:blip r:embed="rId2">
+            <a:extLst>
+              <a:ext uri="{28A0092B-C50C-407E-A947-70E740481C1C}">
+                <a14:useLocalDpi xmlns:a14="http://schemas.microsoft.com/office/drawing/2010/main" val="0"/>
+              </a:ext>
+            </a:extLst>
+          </a:blip>
+          <a:stretch>
+            <a:fillRect/>
+          </a:stretch>
+        </p:blipFill>
+        <p:spPr>
+          <a:xfrm>
+            <a:off x="0" y="0"/>
+            <a:ext cx="12192000" cy="6858000"/>
+          </a:xfrm>
+          <a:prstGeom prst="rect">
+            <a:avLst/>
+          </a:prstGeom>
+        </p:spPr>
+      </p:pic>
+      <p:sp>
+        <p:nvSpPr>
+          <p:cNvPr id="6" name="文字方塊 5">
+            <a:extLst>
+              <a:ext uri="{FF2B5EF4-FFF2-40B4-BE49-F238E27FC236}">
+                <a16:creationId xmlns:a16="http://schemas.microsoft.com/office/drawing/2014/main" id="{5EEDA4C8-EAA3-8689-BF24-12B1EEE3A0A2}"/>
+              </a:ext>
+            </a:extLst>
+          </p:cNvPr>
+          <p:cNvSpPr txBox="1"/>
+          <p:nvPr/>
+        </p:nvSpPr>
+        <p:spPr>
+          <a:xfrm>
+            <a:off x="4517298" y="1524000"/>
+            <a:ext cx="3157403" cy="707886"/>
+          </a:xfrm>
+          <a:prstGeom prst="rect">
+            <a:avLst/>
+          </a:prstGeom>
+          <a:noFill/>
+        </p:spPr>
+        <p:txBody>
+          <a:bodyPr wrap="none" rtlCol="0">
+            <a:spAutoFit/>
+          </a:bodyPr>
+          <a:lstStyle/>
+          <a:p>
+            <a:r>
+              <a:rPr lang="en-US" altLang="zh-TW" sz="4000" dirty="0" err="1">
+                <a:solidFill>
+                  <a:srgbClr val="00FFFF"/>
+                </a:solidFill>
+                <a:latin typeface="微軟正黑體" panose="020B0604030504040204" pitchFamily="34" charset="-120"/>
+                <a:ea typeface="微軟正黑體" panose="020B0604030504040204" pitchFamily="34" charset="-120"/>
+              </a:rPr>
+              <a:t>PowerBI</a:t>
+            </a:r>
+            <a:r>
+              <a:rPr lang="zh-TW" altLang="en-US" sz="4000" dirty="0">
+                <a:solidFill>
+                  <a:srgbClr val="00FFFF"/>
+                </a:solidFill>
+                <a:latin typeface="微軟正黑體" panose="020B0604030504040204" pitchFamily="34" charset="-120"/>
+                <a:ea typeface="微軟正黑體" panose="020B0604030504040204" pitchFamily="34" charset="-120"/>
+              </a:rPr>
+              <a:t>展示</a:t>
+            </a:r>
+          </a:p>
+        </p:txBody>
+      </p:sp>
+      <p:pic>
+        <p:nvPicPr>
+          <p:cNvPr id="4" name="圖片 3">
+            <a:extLst>
+              <a:ext uri="{FF2B5EF4-FFF2-40B4-BE49-F238E27FC236}">
+                <a16:creationId xmlns:a16="http://schemas.microsoft.com/office/drawing/2014/main" id="{43F1D34A-703F-687C-16F9-99FFE19B7FE1}"/>
+              </a:ext>
+            </a:extLst>
+          </p:cNvPr>
+          <p:cNvPicPr>
+            <a:picLocks noChangeAspect="1"/>
+          </p:cNvPicPr>
+          <p:nvPr/>
+        </p:nvPicPr>
+        <p:blipFill>
+          <a:blip r:embed="rId3">
+            <a:extLst>
+              <a:ext uri="{28A0092B-C50C-407E-A947-70E740481C1C}">
+                <a14:useLocalDpi xmlns:a14="http://schemas.microsoft.com/office/drawing/2010/main" val="0"/>
+              </a:ext>
+            </a:extLst>
+          </a:blip>
+          <a:srcRect/>
+          <a:stretch/>
+        </p:blipFill>
+        <p:spPr>
+          <a:xfrm>
+            <a:off x="3070105" y="2229818"/>
+            <a:ext cx="6051786" cy="3402999"/>
+          </a:xfrm>
+          <a:prstGeom prst="rect">
+            <a:avLst/>
+          </a:prstGeom>
+        </p:spPr>
+      </p:pic>
+    </p:spTree>
+    <p:extLst>
+      <p:ext uri="{BB962C8B-B14F-4D97-AF65-F5344CB8AC3E}">
+        <p14:creationId xmlns:p14="http://schemas.microsoft.com/office/powerpoint/2010/main" val="2372769068"/>
+      </p:ext>
+    </p:extLst>
+  </p:cSld>
+  <p:clrMapOvr>
+    <a:masterClrMapping/>
+  </p:clrMapOvr>
+</p:sld>
+</file>
+
+<file path=ppt/slides/slide11.xml><?xml version="1.0" encoding="utf-8"?>
 <p:sld xmlns:a="http://schemas.openxmlformats.org/drawingml/2006/main" xmlns:r="http://schemas.openxmlformats.org/officeDocument/2006/relationships" xmlns:p="http://schemas.openxmlformats.org/presentationml/2006/main">
   <p:cSld>
     <p:spTree>
@@ -4122,7 +4283,7 @@
 </p:sld>
 </file>
 
-<file path=ppt/slides/slide11.xml><?xml version="1.0" encoding="utf-8"?>
+<file path=ppt/slides/slide12.xml><?xml version="1.0" encoding="utf-8"?>
 <p:sld xmlns:a="http://schemas.openxmlformats.org/drawingml/2006/main" xmlns:r="http://schemas.openxmlformats.org/officeDocument/2006/relationships" xmlns:p="http://schemas.openxmlformats.org/presentationml/2006/main">
   <p:cSld>
     <p:spTree>
@@ -4280,7 +4441,7 @@
 </p:sld>
 </file>
 
-<file path=ppt/slides/slide12.xml><?xml version="1.0" encoding="utf-8"?>
+<file path=ppt/slides/slide13.xml><?xml version="1.0" encoding="utf-8"?>
 <p:sld xmlns:a="http://schemas.openxmlformats.org/drawingml/2006/main" xmlns:r="http://schemas.openxmlformats.org/officeDocument/2006/relationships" xmlns:p="http://schemas.openxmlformats.org/presentationml/2006/main">
   <p:cSld>
     <p:spTree>
@@ -4288,7 +4449,7 @@
         <p:cNvPr id="1" name="">
           <a:extLst>
             <a:ext uri="{FF2B5EF4-FFF2-40B4-BE49-F238E27FC236}">
-              <a16:creationId xmlns:a16="http://schemas.microsoft.com/office/drawing/2014/main" id="{F3FEFBBE-067E-05E1-A55B-90EB22755EE7}"/>
+              <a16:creationId xmlns:a16="http://schemas.microsoft.com/office/drawing/2014/main" id="{DE170BD4-F6DE-108F-58A9-D8D4A9444DE7}"/>
             </a:ext>
           </a:extLst>
         </p:cNvPr>
@@ -4308,7 +4469,7 @@
           <p:cNvPr id="5" name="圖片 4">
             <a:extLst>
               <a:ext uri="{FF2B5EF4-FFF2-40B4-BE49-F238E27FC236}">
-                <a16:creationId xmlns:a16="http://schemas.microsoft.com/office/drawing/2014/main" id="{17D50325-4A82-F467-6115-C8DD2DF8C700}"/>
+                <a16:creationId xmlns:a16="http://schemas.microsoft.com/office/drawing/2014/main" id="{00B31C4E-8704-4904-0055-39303F1A1D3A}"/>
               </a:ext>
             </a:extLst>
           </p:cNvPr>
@@ -4339,10 +4500,96 @@
           </a:prstGeom>
         </p:spPr>
       </p:pic>
+      <p:sp>
+        <p:nvSpPr>
+          <p:cNvPr id="6" name="文字方塊 5">
+            <a:extLst>
+              <a:ext uri="{FF2B5EF4-FFF2-40B4-BE49-F238E27FC236}">
+                <a16:creationId xmlns:a16="http://schemas.microsoft.com/office/drawing/2014/main" id="{9B8ADAC5-36E4-E4A7-5619-C1BB2E770DE8}"/>
+              </a:ext>
+            </a:extLst>
+          </p:cNvPr>
+          <p:cNvSpPr txBox="1"/>
+          <p:nvPr/>
+        </p:nvSpPr>
+        <p:spPr>
+          <a:xfrm>
+            <a:off x="4517298" y="1524000"/>
+            <a:ext cx="3157403" cy="707886"/>
+          </a:xfrm>
+          <a:prstGeom prst="rect">
+            <a:avLst/>
+          </a:prstGeom>
+          <a:noFill/>
+        </p:spPr>
+        <p:txBody>
+          <a:bodyPr wrap="none" rtlCol="0">
+            <a:spAutoFit/>
+          </a:bodyPr>
+          <a:lstStyle/>
+          <a:p>
+            <a:r>
+              <a:rPr lang="en-US" altLang="zh-TW" sz="4000" dirty="0" err="1">
+                <a:solidFill>
+                  <a:srgbClr val="00FFFF"/>
+                </a:solidFill>
+                <a:latin typeface="微軟正黑體" panose="020B0604030504040204" pitchFamily="34" charset="-120"/>
+                <a:ea typeface="微軟正黑體" panose="020B0604030504040204" pitchFamily="34" charset="-120"/>
+              </a:rPr>
+              <a:t>PowerBI</a:t>
+            </a:r>
+            <a:r>
+              <a:rPr lang="zh-TW" altLang="en-US" sz="4000" dirty="0">
+                <a:solidFill>
+                  <a:srgbClr val="00FFFF"/>
+                </a:solidFill>
+                <a:latin typeface="微軟正黑體" panose="020B0604030504040204" pitchFamily="34" charset="-120"/>
+                <a:ea typeface="微軟正黑體" panose="020B0604030504040204" pitchFamily="34" charset="-120"/>
+              </a:rPr>
+              <a:t>展示</a:t>
+            </a:r>
+          </a:p>
+        </p:txBody>
+      </p:sp>
+      <p:pic>
+        <p:nvPicPr>
+          <p:cNvPr id="4" name="圖片 3">
+            <a:extLst>
+              <a:ext uri="{FF2B5EF4-FFF2-40B4-BE49-F238E27FC236}">
+                <a16:creationId xmlns:a16="http://schemas.microsoft.com/office/drawing/2014/main" id="{5E6B7CD2-6B12-1C59-6EC8-5B29BA9D2BF0}"/>
+              </a:ext>
+            </a:extLst>
+          </p:cNvPr>
+          <p:cNvPicPr>
+            <a:picLocks noChangeAspect="1"/>
+          </p:cNvPicPr>
+          <p:nvPr/>
+        </p:nvPicPr>
+        <p:blipFill>
+          <a:blip r:embed="rId3">
+            <a:extLst>
+              <a:ext uri="{28A0092B-C50C-407E-A947-70E740481C1C}">
+                <a14:useLocalDpi xmlns:a14="http://schemas.microsoft.com/office/drawing/2010/main" val="0"/>
+              </a:ext>
+            </a:extLst>
+          </a:blip>
+          <a:srcRect/>
+          <a:stretch/>
+        </p:blipFill>
+        <p:spPr>
+          <a:xfrm>
+            <a:off x="3214685" y="2229818"/>
+            <a:ext cx="5762625" cy="3402999"/>
+          </a:xfrm>
+          <a:prstGeom prst="rect">
+            <a:avLst/>
+          </a:prstGeom>
+        </p:spPr>
+      </p:pic>
     </p:spTree>
     <p:extLst>
       <p:ext uri="{BB962C8B-B14F-4D97-AF65-F5344CB8AC3E}">
-        <p14:creationId xmlns:p14="http://schemas.microsoft.com/office/powerpoint/2010/main" val="3737416041"/>
+        <p14:creationId xmlns:p14="http://schemas.microsoft.com/office/powerpoint/2010/main" val="2898921761"/>
       </p:ext>
     </p:extLst>
   </p:cSld>
@@ -4352,7 +4599,7 @@
 </p:sld>
 </file>
 
-<file path=ppt/slides/slide13.xml><?xml version="1.0" encoding="utf-8"?>
+<file path=ppt/slides/slide14.xml><?xml version="1.0" encoding="utf-8"?>
 <p:sld xmlns:a="http://schemas.openxmlformats.org/drawingml/2006/main" xmlns:r="http://schemas.openxmlformats.org/officeDocument/2006/relationships" xmlns:p="http://schemas.openxmlformats.org/presentationml/2006/main">
   <p:cSld>
     <p:spTree>
@@ -4360,7 +4607,7 @@
         <p:cNvPr id="1" name="">
           <a:extLst>
             <a:ext uri="{FF2B5EF4-FFF2-40B4-BE49-F238E27FC236}">
-              <a16:creationId xmlns:a16="http://schemas.microsoft.com/office/drawing/2014/main" id="{53D3AB4D-7694-5BB8-2719-A71F8DD3EC68}"/>
+              <a16:creationId xmlns:a16="http://schemas.microsoft.com/office/drawing/2014/main" id="{4E3F0480-F28A-A08D-B05E-6C84DE680745}"/>
             </a:ext>
           </a:extLst>
         </p:cNvPr>
@@ -4380,7 +4627,7 @@
           <p:cNvPr id="5" name="圖片 4">
             <a:extLst>
               <a:ext uri="{FF2B5EF4-FFF2-40B4-BE49-F238E27FC236}">
-                <a16:creationId xmlns:a16="http://schemas.microsoft.com/office/drawing/2014/main" id="{6B471970-C17A-6D77-C51B-AFAD0D04EED9}"/>
+                <a16:creationId xmlns:a16="http://schemas.microsoft.com/office/drawing/2014/main" id="{73FD5318-EC4B-4C1D-2E45-349D55929A52}"/>
               </a:ext>
             </a:extLst>
           </p:cNvPr>
@@ -4411,10 +4658,1048 @@
           </a:prstGeom>
         </p:spPr>
       </p:pic>
+      <p:sp>
+        <p:nvSpPr>
+          <p:cNvPr id="6" name="文字方塊 5">
+            <a:extLst>
+              <a:ext uri="{FF2B5EF4-FFF2-40B4-BE49-F238E27FC236}">
+                <a16:creationId xmlns:a16="http://schemas.microsoft.com/office/drawing/2014/main" id="{4AD5EAEA-A346-69F1-CCD1-4DC2E8CC10FD}"/>
+              </a:ext>
+            </a:extLst>
+          </p:cNvPr>
+          <p:cNvSpPr txBox="1"/>
+          <p:nvPr/>
+        </p:nvSpPr>
+        <p:spPr>
+          <a:xfrm>
+            <a:off x="5490706" y="1524000"/>
+            <a:ext cx="1210588" cy="707886"/>
+          </a:xfrm>
+          <a:prstGeom prst="rect">
+            <a:avLst/>
+          </a:prstGeom>
+          <a:noFill/>
+        </p:spPr>
+        <p:txBody>
+          <a:bodyPr wrap="none" rtlCol="0">
+            <a:spAutoFit/>
+          </a:bodyPr>
+          <a:lstStyle/>
+          <a:p>
+            <a:r>
+              <a:rPr lang="zh-TW" altLang="en-US" sz="4000" dirty="0">
+                <a:solidFill>
+                  <a:srgbClr val="00FFFF"/>
+                </a:solidFill>
+                <a:latin typeface="微軟正黑體" panose="020B0604030504040204" pitchFamily="34" charset="-120"/>
+                <a:ea typeface="微軟正黑體" panose="020B0604030504040204" pitchFamily="34" charset="-120"/>
+              </a:rPr>
+              <a:t>總結</a:t>
+            </a:r>
+          </a:p>
+        </p:txBody>
+      </p:sp>
+      <p:sp>
+        <p:nvSpPr>
+          <p:cNvPr id="7" name="文字方塊 6">
+            <a:extLst>
+              <a:ext uri="{FF2B5EF4-FFF2-40B4-BE49-F238E27FC236}">
+                <a16:creationId xmlns:a16="http://schemas.microsoft.com/office/drawing/2014/main" id="{989270A0-E00A-ADDE-2C90-82B41D85EA8C}"/>
+              </a:ext>
+            </a:extLst>
+          </p:cNvPr>
+          <p:cNvSpPr txBox="1"/>
+          <p:nvPr/>
+        </p:nvSpPr>
+        <p:spPr>
+          <a:xfrm>
+            <a:off x="2261924" y="2476500"/>
+            <a:ext cx="7668152" cy="2240485"/>
+          </a:xfrm>
+          <a:prstGeom prst="rect">
+            <a:avLst/>
+          </a:prstGeom>
+          <a:noFill/>
+        </p:spPr>
+        <p:txBody>
+          <a:bodyPr wrap="square" rtlCol="0">
+            <a:spAutoFit/>
+          </a:bodyPr>
+          <a:lstStyle/>
+          <a:p>
+            <a:pPr marL="514350" indent="-514350">
+              <a:lnSpc>
+                <a:spcPct val="150000"/>
+              </a:lnSpc>
+              <a:buFont typeface="+mj-lt"/>
+              <a:buAutoNum type="arabicPeriod"/>
+            </a:pPr>
+            <a:r>
+              <a:rPr lang="zh-TW" altLang="en-US" sz="2400" dirty="0">
+                <a:solidFill>
+                  <a:srgbClr val="00CCFF"/>
+                </a:solidFill>
+                <a:latin typeface="微軟正黑體" panose="020B0604030504040204" pitchFamily="34" charset="-120"/>
+                <a:ea typeface="微軟正黑體" panose="020B0604030504040204" pitchFamily="34" charset="-120"/>
+              </a:rPr>
+              <a:t>獨立遊戲是目前</a:t>
+            </a:r>
+            <a:r>
+              <a:rPr lang="en-US" altLang="zh-TW" sz="2400" dirty="0">
+                <a:solidFill>
+                  <a:srgbClr val="00CCFF"/>
+                </a:solidFill>
+                <a:latin typeface="微軟正黑體" panose="020B0604030504040204" pitchFamily="34" charset="-120"/>
+                <a:ea typeface="微軟正黑體" panose="020B0604030504040204" pitchFamily="34" charset="-120"/>
+              </a:rPr>
+              <a:t>Steam</a:t>
+            </a:r>
+            <a:r>
+              <a:rPr lang="zh-TW" altLang="en-US" sz="2400" dirty="0">
+                <a:solidFill>
+                  <a:srgbClr val="00CCFF"/>
+                </a:solidFill>
+                <a:latin typeface="微軟正黑體" panose="020B0604030504040204" pitchFamily="34" charset="-120"/>
+                <a:ea typeface="微軟正黑體" panose="020B0604030504040204" pitchFamily="34" charset="-120"/>
+              </a:rPr>
+              <a:t>遊戲數量的最大宗</a:t>
+            </a:r>
+            <a:endParaRPr lang="en-US" altLang="zh-TW" sz="2400" dirty="0">
+              <a:solidFill>
+                <a:srgbClr val="00CCFF"/>
+              </a:solidFill>
+              <a:latin typeface="微軟正黑體" panose="020B0604030504040204" pitchFamily="34" charset="-120"/>
+              <a:ea typeface="微軟正黑體" panose="020B0604030504040204" pitchFamily="34" charset="-120"/>
+            </a:endParaRPr>
+          </a:p>
+          <a:p>
+            <a:pPr marL="514350" indent="-514350">
+              <a:lnSpc>
+                <a:spcPct val="150000"/>
+              </a:lnSpc>
+              <a:buFont typeface="+mj-lt"/>
+              <a:buAutoNum type="arabicPeriod"/>
+            </a:pPr>
+            <a:r>
+              <a:rPr lang="zh-TW" altLang="en-US" sz="2400" dirty="0">
+                <a:solidFill>
+                  <a:srgbClr val="00CCFF"/>
+                </a:solidFill>
+                <a:latin typeface="微軟正黑體" panose="020B0604030504040204" pitchFamily="34" charset="-120"/>
+                <a:ea typeface="微軟正黑體" panose="020B0604030504040204" pitchFamily="34" charset="-120"/>
+              </a:rPr>
+              <a:t>發行遊戲時間可以選擇在秋季特賣或是前一個月</a:t>
+            </a:r>
+            <a:endParaRPr lang="en-US" altLang="zh-TW" sz="2400" dirty="0">
+              <a:solidFill>
+                <a:srgbClr val="00CCFF"/>
+              </a:solidFill>
+              <a:latin typeface="微軟正黑體" panose="020B0604030504040204" pitchFamily="34" charset="-120"/>
+              <a:ea typeface="微軟正黑體" panose="020B0604030504040204" pitchFamily="34" charset="-120"/>
+            </a:endParaRPr>
+          </a:p>
+          <a:p>
+            <a:pPr marL="514350" indent="-514350">
+              <a:lnSpc>
+                <a:spcPct val="150000"/>
+              </a:lnSpc>
+              <a:buFont typeface="+mj-lt"/>
+              <a:buAutoNum type="arabicPeriod"/>
+            </a:pPr>
+            <a:r>
+              <a:rPr lang="zh-TW" altLang="en-US" sz="2400" dirty="0">
+                <a:solidFill>
+                  <a:srgbClr val="00CCFF"/>
+                </a:solidFill>
+                <a:latin typeface="微軟正黑體" panose="020B0604030504040204" pitchFamily="34" charset="-120"/>
+                <a:ea typeface="微軟正黑體" panose="020B0604030504040204" pitchFamily="34" charset="-120"/>
+              </a:rPr>
+              <a:t>預估總營收最高是落在</a:t>
+            </a:r>
+            <a:r>
+              <a:rPr lang="en-US" altLang="zh-TW" sz="2400" dirty="0">
+                <a:solidFill>
+                  <a:srgbClr val="00CCFF"/>
+                </a:solidFill>
+                <a:latin typeface="微軟正黑體" panose="020B0604030504040204" pitchFamily="34" charset="-120"/>
+                <a:ea typeface="微軟正黑體" panose="020B0604030504040204" pitchFamily="34" charset="-120"/>
+              </a:rPr>
+              <a:t>30.00-59.99</a:t>
+            </a:r>
+            <a:r>
+              <a:rPr lang="zh-TW" altLang="en-US" sz="2400" dirty="0">
+                <a:solidFill>
+                  <a:srgbClr val="00CCFF"/>
+                </a:solidFill>
+                <a:latin typeface="微軟正黑體" panose="020B0604030504040204" pitchFamily="34" charset="-120"/>
+                <a:ea typeface="微軟正黑體" panose="020B0604030504040204" pitchFamily="34" charset="-120"/>
+              </a:rPr>
+              <a:t>美元，</a:t>
+            </a:r>
+            <a:r>
+              <a:rPr lang="en-US" altLang="zh-TW" sz="2400" dirty="0">
+                <a:solidFill>
+                  <a:srgbClr val="00CCFF"/>
+                </a:solidFill>
+                <a:latin typeface="微軟正黑體" panose="020B0604030504040204" pitchFamily="34" charset="-120"/>
+                <a:ea typeface="微軟正黑體" panose="020B0604030504040204" pitchFamily="34" charset="-120"/>
+              </a:rPr>
+              <a:t>11-20</a:t>
+            </a:r>
+            <a:r>
+              <a:rPr lang="zh-TW" altLang="en-US" sz="2400" dirty="0">
+                <a:solidFill>
+                  <a:srgbClr val="00CCFF"/>
+                </a:solidFill>
+                <a:latin typeface="微軟正黑體" panose="020B0604030504040204" pitchFamily="34" charset="-120"/>
+                <a:ea typeface="微軟正黑體" panose="020B0604030504040204" pitchFamily="34" charset="-120"/>
+              </a:rPr>
+              <a:t>種的支援語言</a:t>
+            </a:r>
+          </a:p>
+        </p:txBody>
+      </p:sp>
     </p:spTree>
     <p:extLst>
       <p:ext uri="{BB962C8B-B14F-4D97-AF65-F5344CB8AC3E}">
-        <p14:creationId xmlns:p14="http://schemas.microsoft.com/office/powerpoint/2010/main" val="406224121"/>
+        <p14:creationId xmlns:p14="http://schemas.microsoft.com/office/powerpoint/2010/main" val="4272047835"/>
+      </p:ext>
+    </p:extLst>
+  </p:cSld>
+  <p:clrMapOvr>
+    <a:masterClrMapping/>
+  </p:clrMapOvr>
+</p:sld>
+</file>
+
+<file path=ppt/slides/slide15.xml><?xml version="1.0" encoding="utf-8"?>
+<p:sld xmlns:a="http://schemas.openxmlformats.org/drawingml/2006/main" xmlns:r="http://schemas.openxmlformats.org/officeDocument/2006/relationships" xmlns:p="http://schemas.openxmlformats.org/presentationml/2006/main">
+  <p:cSld>
+    <p:spTree>
+      <p:nvGrpSpPr>
+        <p:cNvPr id="1" name="">
+          <a:extLst>
+            <a:ext uri="{FF2B5EF4-FFF2-40B4-BE49-F238E27FC236}">
+              <a16:creationId xmlns:a16="http://schemas.microsoft.com/office/drawing/2014/main" id="{F59F45D3-88E3-8C6D-AE23-3337D5685071}"/>
+            </a:ext>
+          </a:extLst>
+        </p:cNvPr>
+        <p:cNvGrpSpPr/>
+        <p:nvPr/>
+      </p:nvGrpSpPr>
+      <p:grpSpPr>
+        <a:xfrm>
+          <a:off x="0" y="0"/>
+          <a:ext cx="0" cy="0"/>
+          <a:chOff x="0" y="0"/>
+          <a:chExt cx="0" cy="0"/>
+        </a:xfrm>
+      </p:grpSpPr>
+      <p:pic>
+        <p:nvPicPr>
+          <p:cNvPr id="5" name="圖片 4">
+            <a:extLst>
+              <a:ext uri="{FF2B5EF4-FFF2-40B4-BE49-F238E27FC236}">
+                <a16:creationId xmlns:a16="http://schemas.microsoft.com/office/drawing/2014/main" id="{C3B63A09-8685-9056-D33D-582B129D8374}"/>
+              </a:ext>
+            </a:extLst>
+          </p:cNvPr>
+          <p:cNvPicPr>
+            <a:picLocks noChangeAspect="1"/>
+          </p:cNvPicPr>
+          <p:nvPr/>
+        </p:nvPicPr>
+        <p:blipFill>
+          <a:blip r:embed="rId2">
+            <a:extLst>
+              <a:ext uri="{28A0092B-C50C-407E-A947-70E740481C1C}">
+                <a14:useLocalDpi xmlns:a14="http://schemas.microsoft.com/office/drawing/2010/main" val="0"/>
+              </a:ext>
+            </a:extLst>
+          </a:blip>
+          <a:stretch>
+            <a:fillRect/>
+          </a:stretch>
+        </p:blipFill>
+        <p:spPr>
+          <a:xfrm>
+            <a:off x="0" y="0"/>
+            <a:ext cx="12192000" cy="6858000"/>
+          </a:xfrm>
+          <a:prstGeom prst="rect">
+            <a:avLst/>
+          </a:prstGeom>
+        </p:spPr>
+      </p:pic>
+      <p:sp>
+        <p:nvSpPr>
+          <p:cNvPr id="6" name="文字方塊 5">
+            <a:extLst>
+              <a:ext uri="{FF2B5EF4-FFF2-40B4-BE49-F238E27FC236}">
+                <a16:creationId xmlns:a16="http://schemas.microsoft.com/office/drawing/2014/main" id="{B9DC044F-C35C-6825-1CFD-D3CD4935E740}"/>
+              </a:ext>
+            </a:extLst>
+          </p:cNvPr>
+          <p:cNvSpPr txBox="1"/>
+          <p:nvPr/>
+        </p:nvSpPr>
+        <p:spPr>
+          <a:xfrm>
+            <a:off x="4977745" y="1524000"/>
+            <a:ext cx="2236510" cy="707886"/>
+          </a:xfrm>
+          <a:prstGeom prst="rect">
+            <a:avLst/>
+          </a:prstGeom>
+          <a:noFill/>
+        </p:spPr>
+        <p:txBody>
+          <a:bodyPr wrap="none" rtlCol="0">
+            <a:spAutoFit/>
+          </a:bodyPr>
+          <a:lstStyle/>
+          <a:p>
+            <a:r>
+              <a:rPr lang="zh-TW" altLang="en-US" sz="4000" dirty="0">
+                <a:solidFill>
+                  <a:srgbClr val="00FFFF"/>
+                </a:solidFill>
+                <a:latin typeface="微軟正黑體" panose="020B0604030504040204" pitchFamily="34" charset="-120"/>
+                <a:ea typeface="微軟正黑體" panose="020B0604030504040204" pitchFamily="34" charset="-120"/>
+              </a:rPr>
+              <a:t>額外分享</a:t>
+            </a:r>
+          </a:p>
+        </p:txBody>
+      </p:sp>
+      <p:sp>
+        <p:nvSpPr>
+          <p:cNvPr id="7" name="文字方塊 6">
+            <a:extLst>
+              <a:ext uri="{FF2B5EF4-FFF2-40B4-BE49-F238E27FC236}">
+                <a16:creationId xmlns:a16="http://schemas.microsoft.com/office/drawing/2014/main" id="{0CEA27C0-692F-6206-BABC-B2ECA2EA4CC8}"/>
+              </a:ext>
+            </a:extLst>
+          </p:cNvPr>
+          <p:cNvSpPr txBox="1"/>
+          <p:nvPr/>
+        </p:nvSpPr>
+        <p:spPr>
+          <a:xfrm>
+            <a:off x="2261924" y="2476500"/>
+            <a:ext cx="7668152" cy="3170099"/>
+          </a:xfrm>
+          <a:prstGeom prst="rect">
+            <a:avLst/>
+          </a:prstGeom>
+          <a:noFill/>
+        </p:spPr>
+        <p:txBody>
+          <a:bodyPr wrap="square" rtlCol="0">
+            <a:spAutoFit/>
+          </a:bodyPr>
+          <a:lstStyle/>
+          <a:p>
+            <a:pPr marL="457200" indent="-457200">
+              <a:lnSpc>
+                <a:spcPct val="150000"/>
+              </a:lnSpc>
+              <a:buFont typeface="+mj-lt"/>
+              <a:buAutoNum type="arabicPeriod"/>
+            </a:pPr>
+            <a:r>
+              <a:rPr lang="en-US" altLang="zh-TW" sz="2000" dirty="0" err="1">
+                <a:solidFill>
+                  <a:srgbClr val="00CCFF"/>
+                </a:solidFill>
+                <a:latin typeface="微軟正黑體" panose="020B0604030504040204" pitchFamily="34" charset="-120"/>
+                <a:ea typeface="微軟正黑體" panose="020B0604030504040204" pitchFamily="34" charset="-120"/>
+              </a:rPr>
+              <a:t>S&amp;box</a:t>
+            </a:r>
+            <a:r>
+              <a:rPr lang="en-US" altLang="zh-TW" sz="2000" dirty="0">
+                <a:solidFill>
+                  <a:srgbClr val="00CCFF"/>
+                </a:solidFill>
+                <a:latin typeface="微軟正黑體" panose="020B0604030504040204" pitchFamily="34" charset="-120"/>
+                <a:ea typeface="微軟正黑體" panose="020B0604030504040204" pitchFamily="34" charset="-120"/>
+              </a:rPr>
+              <a:t>(</a:t>
+            </a:r>
+            <a:r>
+              <a:rPr lang="zh-TW" altLang="en-US" sz="2000" dirty="0">
+                <a:solidFill>
+                  <a:srgbClr val="00CCFF"/>
+                </a:solidFill>
+                <a:latin typeface="微軟正黑體" panose="020B0604030504040204" pitchFamily="34" charset="-120"/>
+                <a:ea typeface="微軟正黑體" panose="020B0604030504040204" pitchFamily="34" charset="-120"/>
+              </a:rPr>
+              <a:t>沙盒創作平台</a:t>
+            </a:r>
+            <a:r>
+              <a:rPr lang="en-US" altLang="zh-TW" sz="2000" dirty="0">
+                <a:solidFill>
+                  <a:srgbClr val="00CCFF"/>
+                </a:solidFill>
+                <a:latin typeface="微軟正黑體" panose="020B0604030504040204" pitchFamily="34" charset="-120"/>
+                <a:ea typeface="微軟正黑體" panose="020B0604030504040204" pitchFamily="34" charset="-120"/>
+              </a:rPr>
+              <a:t>)</a:t>
+            </a:r>
+            <a:r>
+              <a:rPr lang="zh-TW" altLang="en-US" sz="2000" dirty="0">
+                <a:solidFill>
+                  <a:srgbClr val="00CCFF"/>
+                </a:solidFill>
+                <a:latin typeface="微軟正黑體" panose="020B0604030504040204" pitchFamily="34" charset="-120"/>
+                <a:ea typeface="微軟正黑體" panose="020B0604030504040204" pitchFamily="34" charset="-120"/>
+              </a:rPr>
+              <a:t>是基於 </a:t>
+            </a:r>
+            <a:r>
+              <a:rPr lang="en-US" altLang="zh-TW" sz="2000" dirty="0">
+                <a:solidFill>
+                  <a:srgbClr val="00CCFF"/>
+                </a:solidFill>
+                <a:latin typeface="微軟正黑體" panose="020B0604030504040204" pitchFamily="34" charset="-120"/>
+                <a:ea typeface="微軟正黑體" panose="020B0604030504040204" pitchFamily="34" charset="-120"/>
+              </a:rPr>
+              <a:t>Source 2 </a:t>
+            </a:r>
+            <a:r>
+              <a:rPr lang="zh-TW" altLang="en-US" sz="2000" dirty="0">
+                <a:solidFill>
+                  <a:srgbClr val="00CCFF"/>
+                </a:solidFill>
+                <a:latin typeface="微軟正黑體" panose="020B0604030504040204" pitchFamily="34" charset="-120"/>
+                <a:ea typeface="微軟正黑體" panose="020B0604030504040204" pitchFamily="34" charset="-120"/>
+              </a:rPr>
+              <a:t>引擎構建，允許創作者直接從</a:t>
+            </a:r>
+            <a:r>
+              <a:rPr lang="en-US" altLang="zh-TW" sz="2000" dirty="0" err="1">
+                <a:solidFill>
+                  <a:srgbClr val="00CCFF"/>
+                </a:solidFill>
+                <a:latin typeface="微軟正黑體" panose="020B0604030504040204" pitchFamily="34" charset="-120"/>
+                <a:ea typeface="微軟正黑體" panose="020B0604030504040204" pitchFamily="34" charset="-120"/>
+              </a:rPr>
+              <a:t>S&amp;box</a:t>
+            </a:r>
+            <a:r>
+              <a:rPr lang="zh-TW" altLang="en-US" sz="2000" dirty="0">
+                <a:solidFill>
+                  <a:srgbClr val="00CCFF"/>
+                </a:solidFill>
+                <a:latin typeface="微軟正黑體" panose="020B0604030504040204" pitchFamily="34" charset="-120"/>
+                <a:ea typeface="微軟正黑體" panose="020B0604030504040204" pitchFamily="34" charset="-120"/>
+              </a:rPr>
+              <a:t>編輯器匯出項目，並將其作為獨立遊戲在</a:t>
+            </a:r>
+            <a:r>
+              <a:rPr lang="en-US" altLang="zh-TW" sz="2000" dirty="0">
+                <a:solidFill>
+                  <a:srgbClr val="00CCFF"/>
+                </a:solidFill>
+                <a:latin typeface="微軟正黑體" panose="020B0604030504040204" pitchFamily="34" charset="-120"/>
+                <a:ea typeface="微軟正黑體" panose="020B0604030504040204" pitchFamily="34" charset="-120"/>
+              </a:rPr>
+              <a:t>Steam</a:t>
+            </a:r>
+            <a:r>
+              <a:rPr lang="zh-TW" altLang="en-US" sz="2000" dirty="0">
+                <a:solidFill>
+                  <a:srgbClr val="00CCFF"/>
+                </a:solidFill>
+                <a:latin typeface="微軟正黑體" panose="020B0604030504040204" pitchFamily="34" charset="-120"/>
+                <a:ea typeface="微軟正黑體" panose="020B0604030504040204" pitchFamily="34" charset="-120"/>
+              </a:rPr>
+              <a:t>上發布，且完全免版稅。</a:t>
+            </a:r>
+            <a:endParaRPr lang="en-US" altLang="zh-TW" sz="2000" dirty="0">
+              <a:solidFill>
+                <a:srgbClr val="00CCFF"/>
+              </a:solidFill>
+              <a:latin typeface="微軟正黑體" panose="020B0604030504040204" pitchFamily="34" charset="-120"/>
+              <a:ea typeface="微軟正黑體" panose="020B0604030504040204" pitchFamily="34" charset="-120"/>
+            </a:endParaRPr>
+          </a:p>
+          <a:p>
+            <a:pPr marL="457200" indent="-457200">
+              <a:lnSpc>
+                <a:spcPct val="150000"/>
+              </a:lnSpc>
+              <a:buFont typeface="+mj-lt"/>
+              <a:buAutoNum type="arabicPeriod"/>
+            </a:pPr>
+            <a:r>
+              <a:rPr lang="zh-TW" altLang="en-US" sz="2000" dirty="0">
+                <a:solidFill>
+                  <a:srgbClr val="00CCFF"/>
+                </a:solidFill>
+                <a:latin typeface="微軟正黑體" panose="020B0604030504040204" pitchFamily="34" charset="-120"/>
+                <a:ea typeface="微軟正黑體" panose="020B0604030504040204" pitchFamily="34" charset="-120"/>
+              </a:rPr>
+              <a:t>開發中的幀率估算器，</a:t>
+            </a:r>
+            <a:r>
+              <a:rPr lang="en-US" altLang="zh-TW" sz="2000" dirty="0">
+                <a:solidFill>
+                  <a:srgbClr val="00CCFF"/>
+                </a:solidFill>
+                <a:latin typeface="微軟正黑體" panose="020B0604030504040204" pitchFamily="34" charset="-120"/>
+                <a:ea typeface="微軟正黑體" panose="020B0604030504040204" pitchFamily="34" charset="-120"/>
+              </a:rPr>
+              <a:t>Steam </a:t>
+            </a:r>
+            <a:r>
+              <a:rPr lang="zh-TW" altLang="en-US" sz="2000" dirty="0">
+                <a:solidFill>
+                  <a:srgbClr val="00CCFF"/>
+                </a:solidFill>
+                <a:latin typeface="微軟正黑體" panose="020B0604030504040204" pitchFamily="34" charset="-120"/>
+                <a:ea typeface="微軟正黑體" panose="020B0604030504040204" pitchFamily="34" charset="-120"/>
+              </a:rPr>
+              <a:t>系統根據玩家的 </a:t>
+            </a:r>
+            <a:r>
+              <a:rPr lang="en-US" altLang="zh-TW" sz="2000" dirty="0">
+                <a:solidFill>
+                  <a:srgbClr val="00CCFF"/>
+                </a:solidFill>
+                <a:latin typeface="微軟正黑體" panose="020B0604030504040204" pitchFamily="34" charset="-120"/>
+                <a:ea typeface="微軟正黑體" panose="020B0604030504040204" pitchFamily="34" charset="-120"/>
+              </a:rPr>
+              <a:t>CPU</a:t>
+            </a:r>
+            <a:r>
+              <a:rPr lang="zh-TW" altLang="en-US" sz="2000" dirty="0">
+                <a:solidFill>
+                  <a:srgbClr val="00CCFF"/>
+                </a:solidFill>
+                <a:latin typeface="微軟正黑體" panose="020B0604030504040204" pitchFamily="34" charset="-120"/>
+                <a:ea typeface="微軟正黑體" panose="020B0604030504040204" pitchFamily="34" charset="-120"/>
+              </a:rPr>
+              <a:t>、</a:t>
+            </a:r>
+            <a:r>
+              <a:rPr lang="en-US" altLang="zh-TW" sz="2000" dirty="0">
+                <a:solidFill>
+                  <a:srgbClr val="00CCFF"/>
+                </a:solidFill>
+                <a:latin typeface="微軟正黑體" panose="020B0604030504040204" pitchFamily="34" charset="-120"/>
+                <a:ea typeface="微軟正黑體" panose="020B0604030504040204" pitchFamily="34" charset="-120"/>
+              </a:rPr>
+              <a:t>GPU </a:t>
+            </a:r>
+            <a:r>
+              <a:rPr lang="zh-TW" altLang="en-US" sz="2000" dirty="0">
+                <a:solidFill>
+                  <a:srgbClr val="00CCFF"/>
+                </a:solidFill>
+                <a:latin typeface="微軟正黑體" panose="020B0604030504040204" pitchFamily="34" charset="-120"/>
+                <a:ea typeface="微軟正黑體" panose="020B0604030504040204" pitchFamily="34" charset="-120"/>
+              </a:rPr>
+              <a:t>和記憶體數據，比對其他用戶的實際遊玩數據，在購買前預估遊戲在玩家電腦上的效能表現。</a:t>
+            </a:r>
+            <a:endParaRPr lang="en-US" altLang="zh-TW" sz="2000" dirty="0">
+              <a:solidFill>
+                <a:srgbClr val="00CCFF"/>
+              </a:solidFill>
+              <a:latin typeface="微軟正黑體" panose="020B0604030504040204" pitchFamily="34" charset="-120"/>
+              <a:ea typeface="微軟正黑體" panose="020B0604030504040204" pitchFamily="34" charset="-120"/>
+            </a:endParaRPr>
+          </a:p>
+          <a:p>
+            <a:pPr marL="457200" indent="-457200">
+              <a:buFont typeface="+mj-lt"/>
+              <a:buAutoNum type="arabicPeriod"/>
+            </a:pPr>
+            <a:endParaRPr lang="en-US" altLang="zh-TW" sz="2000" dirty="0">
+              <a:solidFill>
+                <a:srgbClr val="00CCFF"/>
+              </a:solidFill>
+              <a:latin typeface="微軟正黑體" panose="020B0604030504040204" pitchFamily="34" charset="-120"/>
+              <a:ea typeface="微軟正黑體" panose="020B0604030504040204" pitchFamily="34" charset="-120"/>
+            </a:endParaRPr>
+          </a:p>
+        </p:txBody>
+      </p:sp>
+    </p:spTree>
+    <p:extLst>
+      <p:ext uri="{BB962C8B-B14F-4D97-AF65-F5344CB8AC3E}">
+        <p14:creationId xmlns:p14="http://schemas.microsoft.com/office/powerpoint/2010/main" val="963227508"/>
+      </p:ext>
+    </p:extLst>
+  </p:cSld>
+  <p:clrMapOvr>
+    <a:masterClrMapping/>
+  </p:clrMapOvr>
+</p:sld>
+</file>
+
+<file path=ppt/slides/slide16.xml><?xml version="1.0" encoding="utf-8"?>
+<p:sld xmlns:a="http://schemas.openxmlformats.org/drawingml/2006/main" xmlns:r="http://schemas.openxmlformats.org/officeDocument/2006/relationships" xmlns:p="http://schemas.openxmlformats.org/presentationml/2006/main">
+  <p:cSld>
+    <p:spTree>
+      <p:nvGrpSpPr>
+        <p:cNvPr id="1" name="">
+          <a:extLst>
+            <a:ext uri="{FF2B5EF4-FFF2-40B4-BE49-F238E27FC236}">
+              <a16:creationId xmlns:a16="http://schemas.microsoft.com/office/drawing/2014/main" id="{08AF6B73-4486-90CF-AD38-38918FD0FDDE}"/>
+            </a:ext>
+          </a:extLst>
+        </p:cNvPr>
+        <p:cNvGrpSpPr/>
+        <p:nvPr/>
+      </p:nvGrpSpPr>
+      <p:grpSpPr>
+        <a:xfrm>
+          <a:off x="0" y="0"/>
+          <a:ext cx="0" cy="0"/>
+          <a:chOff x="0" y="0"/>
+          <a:chExt cx="0" cy="0"/>
+        </a:xfrm>
+      </p:grpSpPr>
+      <p:pic>
+        <p:nvPicPr>
+          <p:cNvPr id="5" name="圖片 4">
+            <a:extLst>
+              <a:ext uri="{FF2B5EF4-FFF2-40B4-BE49-F238E27FC236}">
+                <a16:creationId xmlns:a16="http://schemas.microsoft.com/office/drawing/2014/main" id="{F50E5D5F-BE30-BC71-3D07-604FD396D77E}"/>
+              </a:ext>
+            </a:extLst>
+          </p:cNvPr>
+          <p:cNvPicPr>
+            <a:picLocks noChangeAspect="1"/>
+          </p:cNvPicPr>
+          <p:nvPr/>
+        </p:nvPicPr>
+        <p:blipFill>
+          <a:blip r:embed="rId2">
+            <a:extLst>
+              <a:ext uri="{28A0092B-C50C-407E-A947-70E740481C1C}">
+                <a14:useLocalDpi xmlns:a14="http://schemas.microsoft.com/office/drawing/2010/main" val="0"/>
+              </a:ext>
+            </a:extLst>
+          </a:blip>
+          <a:stretch>
+            <a:fillRect/>
+          </a:stretch>
+        </p:blipFill>
+        <p:spPr>
+          <a:xfrm>
+            <a:off x="0" y="0"/>
+            <a:ext cx="12192000" cy="6858000"/>
+          </a:xfrm>
+          <a:prstGeom prst="rect">
+            <a:avLst/>
+          </a:prstGeom>
+        </p:spPr>
+      </p:pic>
+      <p:sp>
+        <p:nvSpPr>
+          <p:cNvPr id="6" name="文字方塊 5">
+            <a:extLst>
+              <a:ext uri="{FF2B5EF4-FFF2-40B4-BE49-F238E27FC236}">
+                <a16:creationId xmlns:a16="http://schemas.microsoft.com/office/drawing/2014/main" id="{26CC69FB-2DBE-6060-D8DD-BFE28FBE4813}"/>
+              </a:ext>
+            </a:extLst>
+          </p:cNvPr>
+          <p:cNvSpPr txBox="1"/>
+          <p:nvPr/>
+        </p:nvSpPr>
+        <p:spPr>
+          <a:xfrm>
+            <a:off x="4977745" y="1524000"/>
+            <a:ext cx="2236510" cy="707886"/>
+          </a:xfrm>
+          <a:prstGeom prst="rect">
+            <a:avLst/>
+          </a:prstGeom>
+          <a:noFill/>
+        </p:spPr>
+        <p:txBody>
+          <a:bodyPr wrap="none" rtlCol="0">
+            <a:spAutoFit/>
+          </a:bodyPr>
+          <a:lstStyle/>
+          <a:p>
+            <a:r>
+              <a:rPr lang="zh-TW" altLang="en-US" sz="4000" dirty="0">
+                <a:solidFill>
+                  <a:srgbClr val="00FFFF"/>
+                </a:solidFill>
+                <a:latin typeface="微軟正黑體" panose="020B0604030504040204" pitchFamily="34" charset="-120"/>
+                <a:ea typeface="微軟正黑體" panose="020B0604030504040204" pitchFamily="34" charset="-120"/>
+              </a:rPr>
+              <a:t>參考資料</a:t>
+            </a:r>
+          </a:p>
+        </p:txBody>
+      </p:sp>
+      <p:sp>
+        <p:nvSpPr>
+          <p:cNvPr id="7" name="文字方塊 6">
+            <a:extLst>
+              <a:ext uri="{FF2B5EF4-FFF2-40B4-BE49-F238E27FC236}">
+                <a16:creationId xmlns:a16="http://schemas.microsoft.com/office/drawing/2014/main" id="{301AEC1B-ABA0-4DB5-73CF-2E214E8DB78A}"/>
+              </a:ext>
+            </a:extLst>
+          </p:cNvPr>
+          <p:cNvSpPr txBox="1"/>
+          <p:nvPr/>
+        </p:nvSpPr>
+        <p:spPr>
+          <a:xfrm>
+            <a:off x="2261923" y="2476500"/>
+            <a:ext cx="7909365" cy="2800767"/>
+          </a:xfrm>
+          <a:prstGeom prst="rect">
+            <a:avLst/>
+          </a:prstGeom>
+          <a:noFill/>
+        </p:spPr>
+        <p:txBody>
+          <a:bodyPr wrap="square" rtlCol="0">
+            <a:spAutoFit/>
+          </a:bodyPr>
+          <a:lstStyle/>
+          <a:p>
+            <a:r>
+              <a:rPr lang="zh-TW" altLang="en-US" sz="2400" dirty="0">
+                <a:solidFill>
+                  <a:srgbClr val="00CCFF"/>
+                </a:solidFill>
+                <a:latin typeface="微軟正黑體" panose="020B0604030504040204" pitchFamily="34" charset="-120"/>
+                <a:ea typeface="微軟正黑體" panose="020B0604030504040204" pitchFamily="34" charset="-120"/>
+              </a:rPr>
+              <a:t>資料來源</a:t>
+            </a:r>
+            <a:r>
+              <a:rPr lang="zh-TW" altLang="en-US" sz="1400" dirty="0">
+                <a:solidFill>
+                  <a:srgbClr val="00CCFF"/>
+                </a:solidFill>
+                <a:latin typeface="微軟正黑體" panose="020B0604030504040204" pitchFamily="34" charset="-120"/>
+                <a:ea typeface="微軟正黑體" panose="020B0604030504040204" pitchFamily="34" charset="-120"/>
+              </a:rPr>
+              <a:t>：</a:t>
+            </a:r>
+            <a:r>
+              <a:rPr lang="en-US" altLang="zh-TW" sz="1400" dirty="0">
+                <a:solidFill>
+                  <a:srgbClr val="00CCFF"/>
+                </a:solidFill>
+                <a:latin typeface="微軟正黑體" panose="020B0604030504040204" pitchFamily="34" charset="-120"/>
+                <a:ea typeface="微軟正黑體" panose="020B0604030504040204" pitchFamily="34" charset="-120"/>
+                <a:hlinkClick r:id="rId3"/>
+              </a:rPr>
+              <a:t>https://www.kaggle.com/datasets/artermiloff/steam-games-dataset/data</a:t>
+            </a:r>
+            <a:endParaRPr lang="en-US" altLang="zh-TW" sz="1400" dirty="0">
+              <a:solidFill>
+                <a:srgbClr val="00CCFF"/>
+              </a:solidFill>
+              <a:latin typeface="微軟正黑體" panose="020B0604030504040204" pitchFamily="34" charset="-120"/>
+              <a:ea typeface="微軟正黑體" panose="020B0604030504040204" pitchFamily="34" charset="-120"/>
+            </a:endParaRPr>
+          </a:p>
+          <a:p>
+            <a:endParaRPr lang="en-US" altLang="zh-TW" sz="1400" dirty="0">
+              <a:solidFill>
+                <a:srgbClr val="00CCFF"/>
+              </a:solidFill>
+              <a:latin typeface="微軟正黑體" panose="020B0604030504040204" pitchFamily="34" charset="-120"/>
+              <a:ea typeface="微軟正黑體" panose="020B0604030504040204" pitchFamily="34" charset="-120"/>
+            </a:endParaRPr>
+          </a:p>
+          <a:p>
+            <a:r>
+              <a:rPr lang="en-US" altLang="zh-TW" sz="2400" dirty="0">
+                <a:solidFill>
+                  <a:srgbClr val="00CCFF"/>
+                </a:solidFill>
+                <a:latin typeface="微軟正黑體" panose="020B0604030504040204" pitchFamily="34" charset="-120"/>
+                <a:ea typeface="微軟正黑體" panose="020B0604030504040204" pitchFamily="34" charset="-120"/>
+              </a:rPr>
+              <a:t>steam</a:t>
+            </a:r>
+            <a:r>
+              <a:rPr lang="zh-TW" altLang="en-US" sz="2400" dirty="0">
+                <a:solidFill>
+                  <a:srgbClr val="00CCFF"/>
+                </a:solidFill>
+                <a:latin typeface="微軟正黑體" panose="020B0604030504040204" pitchFamily="34" charset="-120"/>
+                <a:ea typeface="微軟正黑體" panose="020B0604030504040204" pitchFamily="34" charset="-120"/>
+              </a:rPr>
+              <a:t>相關資料</a:t>
+            </a:r>
+            <a:r>
+              <a:rPr lang="zh-TW" altLang="en-US" sz="1400" dirty="0">
+                <a:solidFill>
+                  <a:srgbClr val="00CCFF"/>
+                </a:solidFill>
+                <a:latin typeface="微軟正黑體" panose="020B0604030504040204" pitchFamily="34" charset="-120"/>
+                <a:ea typeface="微軟正黑體" panose="020B0604030504040204" pitchFamily="34" charset="-120"/>
+              </a:rPr>
+              <a:t>：</a:t>
+            </a:r>
+            <a:r>
+              <a:rPr lang="en-US" altLang="zh-TW" sz="1400" dirty="0">
+                <a:solidFill>
+                  <a:srgbClr val="00CCFF"/>
+                </a:solidFill>
+                <a:latin typeface="微軟正黑體" panose="020B0604030504040204" pitchFamily="34" charset="-120"/>
+                <a:ea typeface="微軟正黑體" panose="020B0604030504040204" pitchFamily="34" charset="-120"/>
+                <a:hlinkClick r:id="rId4"/>
+              </a:rPr>
+              <a:t>https://zh.wikipedia.org/zh-tw/Steam</a:t>
+            </a:r>
+            <a:endParaRPr lang="en-US" altLang="zh-TW" sz="1400" dirty="0">
+              <a:solidFill>
+                <a:srgbClr val="00CCFF"/>
+              </a:solidFill>
+              <a:latin typeface="微軟正黑體" panose="020B0604030504040204" pitchFamily="34" charset="-120"/>
+              <a:ea typeface="微軟正黑體" panose="020B0604030504040204" pitchFamily="34" charset="-120"/>
+            </a:endParaRPr>
+          </a:p>
+          <a:p>
+            <a:endParaRPr lang="en-US" altLang="zh-TW" sz="1400" dirty="0">
+              <a:solidFill>
+                <a:srgbClr val="00CCFF"/>
+              </a:solidFill>
+              <a:latin typeface="微軟正黑體" panose="020B0604030504040204" pitchFamily="34" charset="-120"/>
+              <a:ea typeface="微軟正黑體" panose="020B0604030504040204" pitchFamily="34" charset="-120"/>
+            </a:endParaRPr>
+          </a:p>
+          <a:p>
+            <a:r>
+              <a:rPr lang="en-US" altLang="zh-TW" sz="2400" dirty="0">
+                <a:solidFill>
+                  <a:srgbClr val="00CCFF"/>
+                </a:solidFill>
+                <a:latin typeface="微軟正黑體" panose="020B0604030504040204" pitchFamily="34" charset="-120"/>
+                <a:ea typeface="微軟正黑體" panose="020B0604030504040204" pitchFamily="34" charset="-120"/>
+              </a:rPr>
+              <a:t>steam</a:t>
+            </a:r>
+            <a:r>
+              <a:rPr lang="zh-TW" altLang="en-US" sz="2400" dirty="0">
+                <a:solidFill>
+                  <a:srgbClr val="00CCFF"/>
+                </a:solidFill>
+                <a:latin typeface="微軟正黑體" panose="020B0604030504040204" pitchFamily="34" charset="-120"/>
+                <a:ea typeface="微軟正黑體" panose="020B0604030504040204" pitchFamily="34" charset="-120"/>
+              </a:rPr>
+              <a:t>開發者</a:t>
+            </a:r>
+            <a:r>
+              <a:rPr lang="en-US" altLang="zh-TW" sz="2400" dirty="0">
+                <a:solidFill>
+                  <a:srgbClr val="00CCFF"/>
+                </a:solidFill>
+                <a:latin typeface="微軟正黑體" panose="020B0604030504040204" pitchFamily="34" charset="-120"/>
+                <a:ea typeface="微軟正黑體" panose="020B0604030504040204" pitchFamily="34" charset="-120"/>
+              </a:rPr>
+              <a:t>Valve</a:t>
+            </a:r>
+            <a:r>
+              <a:rPr lang="zh-TW" altLang="en-US" sz="1400" dirty="0">
+                <a:solidFill>
+                  <a:srgbClr val="00CCFF"/>
+                </a:solidFill>
+                <a:latin typeface="微軟正黑體" panose="020B0604030504040204" pitchFamily="34" charset="-120"/>
+                <a:ea typeface="微軟正黑體" panose="020B0604030504040204" pitchFamily="34" charset="-120"/>
+              </a:rPr>
+              <a:t>：</a:t>
+            </a:r>
+            <a:r>
+              <a:rPr lang="en-US" altLang="zh-TW" sz="1400" dirty="0">
+                <a:solidFill>
+                  <a:srgbClr val="00CCFF"/>
+                </a:solidFill>
+                <a:latin typeface="微軟正黑體" panose="020B0604030504040204" pitchFamily="34" charset="-120"/>
+                <a:ea typeface="微軟正黑體" panose="020B0604030504040204" pitchFamily="34" charset="-120"/>
+                <a:hlinkClick r:id="rId5"/>
+              </a:rPr>
+              <a:t>https://zh.wikipedia.org/wiki/Valve</a:t>
+            </a:r>
+            <a:endParaRPr lang="en-US" altLang="zh-TW" sz="1400" dirty="0">
+              <a:solidFill>
+                <a:srgbClr val="00CCFF"/>
+              </a:solidFill>
+              <a:latin typeface="微軟正黑體" panose="020B0604030504040204" pitchFamily="34" charset="-120"/>
+              <a:ea typeface="微軟正黑體" panose="020B0604030504040204" pitchFamily="34" charset="-120"/>
+            </a:endParaRPr>
+          </a:p>
+          <a:p>
+            <a:endParaRPr lang="en-US" altLang="zh-TW" sz="1400" dirty="0">
+              <a:solidFill>
+                <a:srgbClr val="00CCFF"/>
+              </a:solidFill>
+              <a:latin typeface="微軟正黑體" panose="020B0604030504040204" pitchFamily="34" charset="-120"/>
+              <a:ea typeface="微軟正黑體" panose="020B0604030504040204" pitchFamily="34" charset="-120"/>
+            </a:endParaRPr>
+          </a:p>
+          <a:p>
+            <a:r>
+              <a:rPr lang="zh-TW" altLang="en-US" sz="2400" dirty="0">
+                <a:solidFill>
+                  <a:srgbClr val="00CCFF"/>
+                </a:solidFill>
+                <a:latin typeface="微軟正黑體" panose="020B0604030504040204" pitchFamily="34" charset="-120"/>
+                <a:ea typeface="微軟正黑體" panose="020B0604030504040204" pitchFamily="34" charset="-120"/>
+              </a:rPr>
+              <a:t>使用工具：</a:t>
+            </a:r>
+            <a:r>
+              <a:rPr lang="en-US" altLang="zh-TW" sz="2400" dirty="0">
+                <a:solidFill>
+                  <a:srgbClr val="00CCFF"/>
+                </a:solidFill>
+                <a:latin typeface="微軟正黑體" panose="020B0604030504040204" pitchFamily="34" charset="-120"/>
+                <a:ea typeface="微軟正黑體" panose="020B0604030504040204" pitchFamily="34" charset="-120"/>
+              </a:rPr>
+              <a:t>Gemini</a:t>
+            </a:r>
+            <a:r>
+              <a:rPr lang="zh-TW" altLang="en-US" sz="2400" dirty="0">
+                <a:solidFill>
+                  <a:srgbClr val="00CCFF"/>
+                </a:solidFill>
+                <a:latin typeface="微軟正黑體" panose="020B0604030504040204" pitchFamily="34" charset="-120"/>
+                <a:ea typeface="微軟正黑體" panose="020B0604030504040204" pitchFamily="34" charset="-120"/>
+              </a:rPr>
+              <a:t>、</a:t>
+            </a:r>
+            <a:r>
+              <a:rPr lang="en-US" altLang="zh-TW" sz="2400" dirty="0">
+                <a:solidFill>
+                  <a:srgbClr val="00CCFF"/>
+                </a:solidFill>
+                <a:latin typeface="微軟正黑體" panose="020B0604030504040204" pitchFamily="34" charset="-120"/>
+                <a:ea typeface="微軟正黑體" panose="020B0604030504040204" pitchFamily="34" charset="-120"/>
+              </a:rPr>
+              <a:t>Bing</a:t>
+            </a:r>
+            <a:r>
+              <a:rPr lang="zh-TW" altLang="en-US" sz="2400" dirty="0">
+                <a:solidFill>
+                  <a:srgbClr val="00CCFF"/>
+                </a:solidFill>
+                <a:latin typeface="微軟正黑體" panose="020B0604030504040204" pitchFamily="34" charset="-120"/>
+                <a:ea typeface="微軟正黑體" panose="020B0604030504040204" pitchFamily="34" charset="-120"/>
+              </a:rPr>
+              <a:t>、</a:t>
+            </a:r>
+            <a:r>
+              <a:rPr lang="en-US" altLang="zh-TW" sz="2400" dirty="0">
+                <a:solidFill>
+                  <a:srgbClr val="00CCFF"/>
+                </a:solidFill>
+                <a:latin typeface="微軟正黑體" panose="020B0604030504040204" pitchFamily="34" charset="-120"/>
+                <a:ea typeface="微軟正黑體" panose="020B0604030504040204" pitchFamily="34" charset="-120"/>
+              </a:rPr>
+              <a:t>Nano Banana2</a:t>
+            </a:r>
+            <a:r>
+              <a:rPr lang="zh-TW" altLang="en-US" sz="2400" dirty="0">
+                <a:solidFill>
+                  <a:srgbClr val="00CCFF"/>
+                </a:solidFill>
+                <a:latin typeface="微軟正黑體" panose="020B0604030504040204" pitchFamily="34" charset="-120"/>
+                <a:ea typeface="微軟正黑體" panose="020B0604030504040204" pitchFamily="34" charset="-120"/>
+              </a:rPr>
+              <a:t>、</a:t>
+            </a:r>
+            <a:r>
+              <a:rPr lang="en-US" altLang="zh-TW" sz="2400" dirty="0">
+                <a:solidFill>
+                  <a:srgbClr val="00CCFF"/>
+                </a:solidFill>
+                <a:latin typeface="微軟正黑體" panose="020B0604030504040204" pitchFamily="34" charset="-120"/>
+                <a:ea typeface="微軟正黑體" panose="020B0604030504040204" pitchFamily="34" charset="-120"/>
+              </a:rPr>
+              <a:t>Python</a:t>
+            </a:r>
+            <a:r>
+              <a:rPr lang="zh-TW" altLang="en-US" sz="2400" dirty="0">
+                <a:solidFill>
+                  <a:srgbClr val="00CCFF"/>
+                </a:solidFill>
+                <a:latin typeface="微軟正黑體" panose="020B0604030504040204" pitchFamily="34" charset="-120"/>
+                <a:ea typeface="微軟正黑體" panose="020B0604030504040204" pitchFamily="34" charset="-120"/>
+              </a:rPr>
+              <a:t>、</a:t>
+            </a:r>
+            <a:r>
+              <a:rPr lang="en-US" altLang="zh-TW" sz="2400" dirty="0">
+                <a:solidFill>
+                  <a:srgbClr val="00CCFF"/>
+                </a:solidFill>
+                <a:latin typeface="微軟正黑體" panose="020B0604030504040204" pitchFamily="34" charset="-120"/>
+                <a:ea typeface="微軟正黑體" panose="020B0604030504040204" pitchFamily="34" charset="-120"/>
+              </a:rPr>
+              <a:t>Power BI</a:t>
+            </a:r>
+            <a:r>
+              <a:rPr lang="zh-TW" altLang="en-US" sz="2400" dirty="0">
+                <a:solidFill>
+                  <a:srgbClr val="00CCFF"/>
+                </a:solidFill>
+                <a:latin typeface="微軟正黑體" panose="020B0604030504040204" pitchFamily="34" charset="-120"/>
+                <a:ea typeface="微軟正黑體" panose="020B0604030504040204" pitchFamily="34" charset="-120"/>
+              </a:rPr>
+              <a:t>、</a:t>
+            </a:r>
+            <a:r>
+              <a:rPr lang="en-US" altLang="zh-TW" sz="2400" dirty="0">
+                <a:solidFill>
+                  <a:srgbClr val="00CCFF"/>
+                </a:solidFill>
+                <a:latin typeface="微軟正黑體" panose="020B0604030504040204" pitchFamily="34" charset="-120"/>
+                <a:ea typeface="微軟正黑體" panose="020B0604030504040204" pitchFamily="34" charset="-120"/>
+              </a:rPr>
+              <a:t>PowerPoint</a:t>
+            </a:r>
+            <a:r>
+              <a:rPr lang="zh-TW" altLang="en-US" sz="2400" dirty="0">
+                <a:solidFill>
+                  <a:srgbClr val="00CCFF"/>
+                </a:solidFill>
+                <a:latin typeface="微軟正黑體" panose="020B0604030504040204" pitchFamily="34" charset="-120"/>
+                <a:ea typeface="微軟正黑體" panose="020B0604030504040204" pitchFamily="34" charset="-120"/>
+              </a:rPr>
+              <a:t>、</a:t>
+            </a:r>
+            <a:r>
+              <a:rPr lang="en-US" altLang="zh-TW" sz="2400" dirty="0">
+                <a:solidFill>
+                  <a:srgbClr val="00CCFF"/>
+                </a:solidFill>
+                <a:latin typeface="微軟正黑體" panose="020B0604030504040204" pitchFamily="34" charset="-120"/>
+                <a:ea typeface="微軟正黑體" panose="020B0604030504040204" pitchFamily="34" charset="-120"/>
+              </a:rPr>
+              <a:t>VS Code</a:t>
+            </a:r>
+          </a:p>
+          <a:p>
+            <a:endParaRPr lang="zh-TW" altLang="en-US" sz="1400" dirty="0">
+              <a:solidFill>
+                <a:srgbClr val="00CCFF"/>
+              </a:solidFill>
+              <a:latin typeface="微軟正黑體" panose="020B0604030504040204" pitchFamily="34" charset="-120"/>
+              <a:ea typeface="微軟正黑體" panose="020B0604030504040204" pitchFamily="34" charset="-120"/>
+            </a:endParaRPr>
+          </a:p>
+        </p:txBody>
+      </p:sp>
+    </p:spTree>
+    <p:extLst>
+      <p:ext uri="{BB962C8B-B14F-4D97-AF65-F5344CB8AC3E}">
+        <p14:creationId xmlns:p14="http://schemas.microsoft.com/office/powerpoint/2010/main" val="279637085"/>
       </p:ext>
     </p:extLst>
   </p:cSld>
@@ -4533,7 +5818,7 @@
         <p:spPr>
           <a:xfrm>
             <a:off x="2261924" y="2476500"/>
-            <a:ext cx="7668152" cy="1569660"/>
+            <a:ext cx="7668152" cy="1132490"/>
           </a:xfrm>
           <a:prstGeom prst="rect">
             <a:avLst/>
@@ -4546,8 +5831,13 @@
           </a:bodyPr>
           <a:lstStyle/>
           <a:p>
-            <a:r>
-              <a:rPr lang="zh-TW" altLang="en-US" sz="3200" dirty="0">
+            <a:pPr>
+              <a:lnSpc>
+                <a:spcPct val="150000"/>
+              </a:lnSpc>
+            </a:pPr>
+            <a:r>
+              <a:rPr lang="zh-TW" altLang="en-US" sz="2400" dirty="0">
                 <a:solidFill>
                   <a:srgbClr val="00CCFF"/>
                 </a:solidFill>
@@ -4557,7 +5847,7 @@
               <a:t>從小到大都在持續的接觸</a:t>
             </a:r>
             <a:r>
-              <a:rPr lang="en-US" altLang="zh-TW" sz="3200" dirty="0">
+              <a:rPr lang="en-US" altLang="zh-TW" sz="2400" dirty="0">
                 <a:solidFill>
                   <a:srgbClr val="00CCFF"/>
                 </a:solidFill>
@@ -4567,7 +5857,7 @@
               <a:t>PC</a:t>
             </a:r>
             <a:r>
-              <a:rPr lang="zh-TW" altLang="en-US" sz="3200" dirty="0">
+              <a:rPr lang="zh-TW" altLang="en-US" sz="2400" dirty="0">
                 <a:solidFill>
                   <a:srgbClr val="00CCFF"/>
                 </a:solidFill>
@@ -4577,7 +5867,7 @@
               <a:t>遊戲，因此對於現在經常使用的</a:t>
             </a:r>
             <a:r>
-              <a:rPr lang="en-US" altLang="zh-TW" sz="3200" dirty="0">
+              <a:rPr lang="en-US" altLang="zh-TW" sz="2400" dirty="0">
                 <a:solidFill>
                   <a:srgbClr val="00CCFF"/>
                 </a:solidFill>
@@ -4587,7 +5877,7 @@
               <a:t>STEAM</a:t>
             </a:r>
             <a:r>
-              <a:rPr lang="zh-TW" altLang="en-US" sz="3200" dirty="0">
+              <a:rPr lang="zh-TW" altLang="en-US" sz="2400" dirty="0">
                 <a:solidFill>
                   <a:srgbClr val="00CCFF"/>
                 </a:solidFill>
@@ -4613,6 +5903,262 @@
 </file>
 
 <file path=ppt/slides/slide3.xml><?xml version="1.0" encoding="utf-8"?>
+<p:sld xmlns:a="http://schemas.openxmlformats.org/drawingml/2006/main" xmlns:r="http://schemas.openxmlformats.org/officeDocument/2006/relationships" xmlns:p="http://schemas.openxmlformats.org/presentationml/2006/main">
+  <p:cSld>
+    <p:spTree>
+      <p:nvGrpSpPr>
+        <p:cNvPr id="1" name="">
+          <a:extLst>
+            <a:ext uri="{FF2B5EF4-FFF2-40B4-BE49-F238E27FC236}">
+              <a16:creationId xmlns:a16="http://schemas.microsoft.com/office/drawing/2014/main" id="{0529B7FD-EA06-9B04-D9FF-D511CC4BCD5F}"/>
+            </a:ext>
+          </a:extLst>
+        </p:cNvPr>
+        <p:cNvGrpSpPr/>
+        <p:nvPr/>
+      </p:nvGrpSpPr>
+      <p:grpSpPr>
+        <a:xfrm>
+          <a:off x="0" y="0"/>
+          <a:ext cx="0" cy="0"/>
+          <a:chOff x="0" y="0"/>
+          <a:chExt cx="0" cy="0"/>
+        </a:xfrm>
+      </p:grpSpPr>
+      <p:pic>
+        <p:nvPicPr>
+          <p:cNvPr id="5" name="圖片 4">
+            <a:extLst>
+              <a:ext uri="{FF2B5EF4-FFF2-40B4-BE49-F238E27FC236}">
+                <a16:creationId xmlns:a16="http://schemas.microsoft.com/office/drawing/2014/main" id="{E43FA913-E454-799C-7F3A-9C779A96D7D6}"/>
+              </a:ext>
+            </a:extLst>
+          </p:cNvPr>
+          <p:cNvPicPr>
+            <a:picLocks noChangeAspect="1"/>
+          </p:cNvPicPr>
+          <p:nvPr/>
+        </p:nvPicPr>
+        <p:blipFill>
+          <a:blip r:embed="rId2">
+            <a:extLst>
+              <a:ext uri="{28A0092B-C50C-407E-A947-70E740481C1C}">
+                <a14:useLocalDpi xmlns:a14="http://schemas.microsoft.com/office/drawing/2010/main" val="0"/>
+              </a:ext>
+            </a:extLst>
+          </a:blip>
+          <a:stretch>
+            <a:fillRect/>
+          </a:stretch>
+        </p:blipFill>
+        <p:spPr>
+          <a:xfrm>
+            <a:off x="0" y="0"/>
+            <a:ext cx="12192000" cy="6858000"/>
+          </a:xfrm>
+          <a:prstGeom prst="rect">
+            <a:avLst/>
+          </a:prstGeom>
+        </p:spPr>
+      </p:pic>
+      <p:sp>
+        <p:nvSpPr>
+          <p:cNvPr id="6" name="文字方塊 5">
+            <a:extLst>
+              <a:ext uri="{FF2B5EF4-FFF2-40B4-BE49-F238E27FC236}">
+                <a16:creationId xmlns:a16="http://schemas.microsoft.com/office/drawing/2014/main" id="{328301CF-4564-6E1B-96BF-599FC64263D0}"/>
+              </a:ext>
+            </a:extLst>
+          </p:cNvPr>
+          <p:cNvSpPr txBox="1"/>
+          <p:nvPr/>
+        </p:nvSpPr>
+        <p:spPr>
+          <a:xfrm>
+            <a:off x="5490706" y="1524000"/>
+            <a:ext cx="1210588" cy="707886"/>
+          </a:xfrm>
+          <a:prstGeom prst="rect">
+            <a:avLst/>
+          </a:prstGeom>
+          <a:noFill/>
+        </p:spPr>
+        <p:txBody>
+          <a:bodyPr wrap="none" rtlCol="0">
+            <a:spAutoFit/>
+          </a:bodyPr>
+          <a:lstStyle/>
+          <a:p>
+            <a:r>
+              <a:rPr lang="zh-TW" altLang="en-US" sz="4000" dirty="0">
+                <a:solidFill>
+                  <a:srgbClr val="00FFFF"/>
+                </a:solidFill>
+                <a:latin typeface="微軟正黑體" panose="020B0604030504040204" pitchFamily="34" charset="-120"/>
+                <a:ea typeface="微軟正黑體" panose="020B0604030504040204" pitchFamily="34" charset="-120"/>
+              </a:rPr>
+              <a:t>背景</a:t>
+            </a:r>
+          </a:p>
+        </p:txBody>
+      </p:sp>
+      <p:sp>
+        <p:nvSpPr>
+          <p:cNvPr id="7" name="文字方塊 6">
+            <a:extLst>
+              <a:ext uri="{FF2B5EF4-FFF2-40B4-BE49-F238E27FC236}">
+                <a16:creationId xmlns:a16="http://schemas.microsoft.com/office/drawing/2014/main" id="{5F9F7DF4-0E71-1646-409B-5E06815F5AB6}"/>
+              </a:ext>
+            </a:extLst>
+          </p:cNvPr>
+          <p:cNvSpPr txBox="1"/>
+          <p:nvPr/>
+        </p:nvSpPr>
+        <p:spPr>
+          <a:xfrm>
+            <a:off x="2261923" y="2476500"/>
+            <a:ext cx="7943233" cy="1688796"/>
+          </a:xfrm>
+          <a:prstGeom prst="rect">
+            <a:avLst/>
+          </a:prstGeom>
+          <a:noFill/>
+        </p:spPr>
+        <p:txBody>
+          <a:bodyPr wrap="square" rtlCol="0">
+            <a:spAutoFit/>
+          </a:bodyPr>
+          <a:lstStyle/>
+          <a:p>
+            <a:pPr>
+              <a:lnSpc>
+                <a:spcPct val="150000"/>
+              </a:lnSpc>
+            </a:pPr>
+            <a:r>
+              <a:rPr lang="en-US" altLang="zh-TW" sz="2400" dirty="0">
+                <a:solidFill>
+                  <a:srgbClr val="00CCFF"/>
+                </a:solidFill>
+                <a:latin typeface="微軟正黑體" panose="020B0604030504040204" pitchFamily="34" charset="-120"/>
+                <a:ea typeface="微軟正黑體" panose="020B0604030504040204" pitchFamily="34" charset="-120"/>
+              </a:rPr>
+              <a:t>Valve</a:t>
+            </a:r>
+            <a:r>
+              <a:rPr lang="zh-TW" altLang="en-US" sz="2400" dirty="0">
+                <a:solidFill>
+                  <a:srgbClr val="00CCFF"/>
+                </a:solidFill>
+                <a:latin typeface="微軟正黑體" panose="020B0604030504040204" pitchFamily="34" charset="-120"/>
+                <a:ea typeface="微軟正黑體" panose="020B0604030504040204" pitchFamily="34" charset="-120"/>
+              </a:rPr>
+              <a:t>的創立者是</a:t>
+            </a:r>
+            <a:r>
+              <a:rPr lang="en-US" altLang="zh-TW" sz="2400" dirty="0">
+                <a:solidFill>
+                  <a:srgbClr val="00CCFF"/>
+                </a:solidFill>
+                <a:latin typeface="微軟正黑體" panose="020B0604030504040204" pitchFamily="34" charset="-120"/>
+                <a:ea typeface="微軟正黑體" panose="020B0604030504040204" pitchFamily="34" charset="-120"/>
+              </a:rPr>
+              <a:t>Gabe Logan Newell</a:t>
+            </a:r>
+            <a:r>
+              <a:rPr lang="zh-TW" altLang="en-US" sz="2400" dirty="0">
+                <a:solidFill>
+                  <a:srgbClr val="00CCFF"/>
+                </a:solidFill>
+                <a:latin typeface="微軟正黑體" panose="020B0604030504040204" pitchFamily="34" charset="-120"/>
+                <a:ea typeface="微軟正黑體" panose="020B0604030504040204" pitchFamily="34" charset="-120"/>
+              </a:rPr>
+              <a:t>及</a:t>
+            </a:r>
+            <a:r>
+              <a:rPr lang="en-US" altLang="zh-TW" sz="2400" dirty="0">
+                <a:solidFill>
+                  <a:srgbClr val="00CCFF"/>
+                </a:solidFill>
+                <a:latin typeface="微軟正黑體" panose="020B0604030504040204" pitchFamily="34" charset="-120"/>
+                <a:ea typeface="微軟正黑體" panose="020B0604030504040204" pitchFamily="34" charset="-120"/>
+              </a:rPr>
+              <a:t>Mike Harrington</a:t>
+            </a:r>
+          </a:p>
+          <a:p>
+            <a:pPr>
+              <a:lnSpc>
+                <a:spcPct val="150000"/>
+              </a:lnSpc>
+            </a:pPr>
+            <a:r>
+              <a:rPr lang="zh-TW" altLang="en-US" sz="2400" dirty="0">
+                <a:solidFill>
+                  <a:srgbClr val="00CCFF"/>
+                </a:solidFill>
+                <a:latin typeface="微軟正黑體" panose="020B0604030504040204" pitchFamily="34" charset="-120"/>
+                <a:ea typeface="微軟正黑體" panose="020B0604030504040204" pitchFamily="34" charset="-120"/>
+              </a:rPr>
+              <a:t>而</a:t>
+            </a:r>
+            <a:r>
+              <a:rPr lang="en-US" altLang="zh-TW" sz="2400" dirty="0">
+                <a:solidFill>
+                  <a:srgbClr val="00CCFF"/>
+                </a:solidFill>
+                <a:latin typeface="微軟正黑體" panose="020B0604030504040204" pitchFamily="34" charset="-120"/>
+                <a:ea typeface="微軟正黑體" panose="020B0604030504040204" pitchFamily="34" charset="-120"/>
+              </a:rPr>
+              <a:t>Steam</a:t>
+            </a:r>
+            <a:r>
+              <a:rPr lang="zh-TW" altLang="en-US" sz="2400" dirty="0">
+                <a:solidFill>
+                  <a:srgbClr val="00CCFF"/>
+                </a:solidFill>
+                <a:latin typeface="微軟正黑體" panose="020B0604030504040204" pitchFamily="34" charset="-120"/>
+                <a:ea typeface="微軟正黑體" panose="020B0604030504040204" pitchFamily="34" charset="-120"/>
+              </a:rPr>
+              <a:t>則是由</a:t>
+            </a:r>
+            <a:r>
+              <a:rPr lang="en-US" altLang="zh-TW" sz="2400" dirty="0">
+                <a:solidFill>
+                  <a:srgbClr val="00CCFF"/>
+                </a:solidFill>
+                <a:latin typeface="微軟正黑體" panose="020B0604030504040204" pitchFamily="34" charset="-120"/>
+                <a:ea typeface="微軟正黑體" panose="020B0604030504040204" pitchFamily="34" charset="-120"/>
+              </a:rPr>
+              <a:t>Valve</a:t>
+            </a:r>
+            <a:r>
+              <a:rPr lang="zh-TW" altLang="en-US" sz="2400" dirty="0">
+                <a:solidFill>
+                  <a:srgbClr val="00CCFF"/>
+                </a:solidFill>
+                <a:latin typeface="微軟正黑體" panose="020B0604030504040204" pitchFamily="34" charset="-120"/>
+                <a:ea typeface="微軟正黑體" panose="020B0604030504040204" pitchFamily="34" charset="-120"/>
+              </a:rPr>
+              <a:t>開發 。平台經歷了從「人工嚴選」到「數據演算法推薦」的轉移。</a:t>
+            </a:r>
+          </a:p>
+        </p:txBody>
+      </p:sp>
+    </p:spTree>
+    <p:extLst>
+      <p:ext uri="{BB962C8B-B14F-4D97-AF65-F5344CB8AC3E}">
+        <p14:creationId xmlns:p14="http://schemas.microsoft.com/office/powerpoint/2010/main" val="2092863032"/>
+      </p:ext>
+    </p:extLst>
+  </p:cSld>
+  <p:clrMapOvr>
+    <a:masterClrMapping/>
+  </p:clrMapOvr>
+</p:sld>
+</file>
+
+<file path=ppt/slides/slide4.xml><?xml version="1.0" encoding="utf-8"?>
 <p:sld xmlns:a="http://schemas.openxmlformats.org/drawingml/2006/main" xmlns:r="http://schemas.openxmlformats.org/officeDocument/2006/relationships" xmlns:p="http://schemas.openxmlformats.org/presentationml/2006/main">
   <p:cSld>
     <p:spTree>
@@ -4727,7 +6273,7 @@
         <p:spPr>
           <a:xfrm>
             <a:off x="2261924" y="2476500"/>
-            <a:ext cx="7668152" cy="1077218"/>
+            <a:ext cx="7668152" cy="1132490"/>
           </a:xfrm>
           <a:prstGeom prst="rect">
             <a:avLst/>
@@ -4740,8 +6286,13 @@
           </a:bodyPr>
           <a:lstStyle/>
           <a:p>
-            <a:r>
-              <a:rPr lang="zh-TW" altLang="en-US" sz="3200" dirty="0">
+            <a:pPr>
+              <a:lnSpc>
+                <a:spcPct val="150000"/>
+              </a:lnSpc>
+            </a:pPr>
+            <a:r>
+              <a:rPr lang="zh-TW" altLang="en-US" sz="2400" dirty="0">
                 <a:solidFill>
                   <a:srgbClr val="00CCFF"/>
                 </a:solidFill>
@@ -4751,7 +6302,7 @@
               <a:t>從</a:t>
             </a:r>
             <a:r>
-              <a:rPr lang="en-US" altLang="zh-TW" sz="3200" dirty="0" err="1">
+              <a:rPr lang="en-US" altLang="zh-TW" sz="2400" dirty="0" err="1">
                 <a:solidFill>
                   <a:srgbClr val="00CCFF"/>
                 </a:solidFill>
@@ -4761,7 +6312,7 @@
               <a:t>kaggle</a:t>
             </a:r>
             <a:r>
-              <a:rPr lang="zh-TW" altLang="en-US" sz="3200" dirty="0">
+              <a:rPr lang="zh-TW" altLang="en-US" sz="2400" dirty="0">
                 <a:solidFill>
                   <a:srgbClr val="00CCFF"/>
                 </a:solidFill>
@@ -4771,7 +6322,7 @@
               <a:t>下載關於這次主題的</a:t>
             </a:r>
             <a:r>
-              <a:rPr lang="en-US" altLang="zh-TW" sz="3200" dirty="0">
+              <a:rPr lang="en-US" altLang="zh-TW" sz="2400" dirty="0">
                 <a:solidFill>
                   <a:srgbClr val="00CCFF"/>
                 </a:solidFill>
@@ -4781,7 +6332,7 @@
               <a:t>csv</a:t>
             </a:r>
             <a:r>
-              <a:rPr lang="zh-TW" altLang="en-US" sz="3200" dirty="0">
+              <a:rPr lang="zh-TW" altLang="en-US" sz="2400" dirty="0">
                 <a:solidFill>
                   <a:srgbClr val="00CCFF"/>
                 </a:solidFill>
@@ -4791,7 +6342,7 @@
               <a:t>，並且在</a:t>
             </a:r>
             <a:r>
-              <a:rPr lang="en-US" altLang="zh-TW" sz="3200" dirty="0">
+              <a:rPr lang="en-US" altLang="zh-TW" sz="2400" dirty="0">
                 <a:solidFill>
                   <a:srgbClr val="00CCFF"/>
                 </a:solidFill>
@@ -4801,14 +6352,14 @@
               <a:t>python</a:t>
             </a:r>
             <a:r>
-              <a:rPr lang="zh-TW" altLang="en-US" sz="3200" dirty="0">
+              <a:rPr lang="zh-TW" altLang="en-US" sz="2400" dirty="0">
                 <a:solidFill>
                   <a:srgbClr val="00CCFF"/>
                 </a:solidFill>
                 <a:latin typeface="微軟正黑體" panose="020B0604030504040204" pitchFamily="34" charset="-120"/>
                 <a:ea typeface="微軟正黑體" panose="020B0604030504040204" pitchFamily="34" charset="-120"/>
               </a:rPr>
-              <a:t>進行資料的清洗。</a:t>
+              <a:t>進行資料的清洗及擷取。</a:t>
             </a:r>
           </a:p>
         </p:txBody>
@@ -4826,7 +6377,7 @@
 </p:sld>
 </file>
 
-<file path=ppt/slides/slide4.xml><?xml version="1.0" encoding="utf-8"?>
+<file path=ppt/slides/slide5.xml><?xml version="1.0" encoding="utf-8"?>
 <p:sld xmlns:a="http://schemas.openxmlformats.org/drawingml/2006/main" xmlns:r="http://schemas.openxmlformats.org/officeDocument/2006/relationships" xmlns:p="http://schemas.openxmlformats.org/presentationml/2006/main">
   <p:cSld>
     <p:spTree>
@@ -4975,7 +6526,7 @@
 </p:sld>
 </file>
 
-<file path=ppt/slides/slide5.xml><?xml version="1.0" encoding="utf-8"?>
+<file path=ppt/slides/slide6.xml><?xml version="1.0" encoding="utf-8"?>
 <p:sld xmlns:a="http://schemas.openxmlformats.org/drawingml/2006/main" xmlns:r="http://schemas.openxmlformats.org/officeDocument/2006/relationships" xmlns:p="http://schemas.openxmlformats.org/presentationml/2006/main">
   <p:cSld>
     <p:spTree>
@@ -5124,7 +6675,7 @@
 </p:sld>
 </file>
 
-<file path=ppt/slides/slide6.xml><?xml version="1.0" encoding="utf-8"?>
+<file path=ppt/slides/slide7.xml><?xml version="1.0" encoding="utf-8"?>
 <p:sld xmlns:a="http://schemas.openxmlformats.org/drawingml/2006/main" xmlns:r="http://schemas.openxmlformats.org/officeDocument/2006/relationships" xmlns:p="http://schemas.openxmlformats.org/presentationml/2006/main">
   <p:cSld>
     <p:spTree>
@@ -5283,7 +6834,7 @@
 </p:sld>
 </file>
 
-<file path=ppt/slides/slide7.xml><?xml version="1.0" encoding="utf-8"?>
+<file path=ppt/slides/slide8.xml><?xml version="1.0" encoding="utf-8"?>
 <p:sld xmlns:a="http://schemas.openxmlformats.org/drawingml/2006/main" xmlns:r="http://schemas.openxmlformats.org/officeDocument/2006/relationships" xmlns:p="http://schemas.openxmlformats.org/presentationml/2006/main">
   <p:cSld>
     <p:spTree>
@@ -5442,7 +6993,7 @@
 </p:sld>
 </file>
 
-<file path=ppt/slides/slide8.xml><?xml version="1.0" encoding="utf-8"?>
+<file path=ppt/slides/slide9.xml><?xml version="1.0" encoding="utf-8"?>
 <p:sld xmlns:a="http://schemas.openxmlformats.org/drawingml/2006/main" xmlns:r="http://schemas.openxmlformats.org/officeDocument/2006/relationships" xmlns:p="http://schemas.openxmlformats.org/presentationml/2006/main">
   <p:cSld>
     <p:spTree>
@@ -5591,164 +7142,6 @@
     <p:extLst>
       <p:ext uri="{BB962C8B-B14F-4D97-AF65-F5344CB8AC3E}">
         <p14:creationId xmlns:p14="http://schemas.microsoft.com/office/powerpoint/2010/main" val="4060790127"/>
-      </p:ext>
-    </p:extLst>
-  </p:cSld>
-  <p:clrMapOvr>
-    <a:masterClrMapping/>
-  </p:clrMapOvr>
-</p:sld>
-</file>
-
-<file path=ppt/slides/slide9.xml><?xml version="1.0" encoding="utf-8"?>
-<p:sld xmlns:a="http://schemas.openxmlformats.org/drawingml/2006/main" xmlns:r="http://schemas.openxmlformats.org/officeDocument/2006/relationships" xmlns:p="http://schemas.openxmlformats.org/presentationml/2006/main">
-  <p:cSld>
-    <p:spTree>
-      <p:nvGrpSpPr>
-        <p:cNvPr id="1" name="">
-          <a:extLst>
-            <a:ext uri="{FF2B5EF4-FFF2-40B4-BE49-F238E27FC236}">
-              <a16:creationId xmlns:a16="http://schemas.microsoft.com/office/drawing/2014/main" id="{0B2E3A6C-1C8C-1CAB-7694-26B03E2BEE6C}"/>
-            </a:ext>
-          </a:extLst>
-        </p:cNvPr>
-        <p:cNvGrpSpPr/>
-        <p:nvPr/>
-      </p:nvGrpSpPr>
-      <p:grpSpPr>
-        <a:xfrm>
-          <a:off x="0" y="0"/>
-          <a:ext cx="0" cy="0"/>
-          <a:chOff x="0" y="0"/>
-          <a:chExt cx="0" cy="0"/>
-        </a:xfrm>
-      </p:grpSpPr>
-      <p:pic>
-        <p:nvPicPr>
-          <p:cNvPr id="5" name="圖片 4">
-            <a:extLst>
-              <a:ext uri="{FF2B5EF4-FFF2-40B4-BE49-F238E27FC236}">
-                <a16:creationId xmlns:a16="http://schemas.microsoft.com/office/drawing/2014/main" id="{64410478-C5EA-3CF2-4A24-E9A34689F9B3}"/>
-              </a:ext>
-            </a:extLst>
-          </p:cNvPr>
-          <p:cNvPicPr>
-            <a:picLocks noChangeAspect="1"/>
-          </p:cNvPicPr>
-          <p:nvPr/>
-        </p:nvPicPr>
-        <p:blipFill>
-          <a:blip r:embed="rId2">
-            <a:extLst>
-              <a:ext uri="{28A0092B-C50C-407E-A947-70E740481C1C}">
-                <a14:useLocalDpi xmlns:a14="http://schemas.microsoft.com/office/drawing/2010/main" val="0"/>
-              </a:ext>
-            </a:extLst>
-          </a:blip>
-          <a:stretch>
-            <a:fillRect/>
-          </a:stretch>
-        </p:blipFill>
-        <p:spPr>
-          <a:xfrm>
-            <a:off x="0" y="0"/>
-            <a:ext cx="12192000" cy="6858000"/>
-          </a:xfrm>
-          <a:prstGeom prst="rect">
-            <a:avLst/>
-          </a:prstGeom>
-        </p:spPr>
-      </p:pic>
-      <p:sp>
-        <p:nvSpPr>
-          <p:cNvPr id="6" name="文字方塊 5">
-            <a:extLst>
-              <a:ext uri="{FF2B5EF4-FFF2-40B4-BE49-F238E27FC236}">
-                <a16:creationId xmlns:a16="http://schemas.microsoft.com/office/drawing/2014/main" id="{5EEDA4C8-EAA3-8689-BF24-12B1EEE3A0A2}"/>
-              </a:ext>
-            </a:extLst>
-          </p:cNvPr>
-          <p:cNvSpPr txBox="1"/>
-          <p:nvPr/>
-        </p:nvSpPr>
-        <p:spPr>
-          <a:xfrm>
-            <a:off x="4517298" y="1524000"/>
-            <a:ext cx="3157403" cy="707886"/>
-          </a:xfrm>
-          <a:prstGeom prst="rect">
-            <a:avLst/>
-          </a:prstGeom>
-          <a:noFill/>
-        </p:spPr>
-        <p:txBody>
-          <a:bodyPr wrap="none" rtlCol="0">
-            <a:spAutoFit/>
-          </a:bodyPr>
-          <a:lstStyle/>
-          <a:p>
-            <a:r>
-              <a:rPr lang="en-US" altLang="zh-TW" sz="4000" dirty="0" err="1">
-                <a:solidFill>
-                  <a:srgbClr val="00FFFF"/>
-                </a:solidFill>
-                <a:latin typeface="微軟正黑體" panose="020B0604030504040204" pitchFamily="34" charset="-120"/>
-                <a:ea typeface="微軟正黑體" panose="020B0604030504040204" pitchFamily="34" charset="-120"/>
-              </a:rPr>
-              <a:t>PowerBI</a:t>
-            </a:r>
-            <a:r>
-              <a:rPr lang="zh-TW" altLang="en-US" sz="4000" dirty="0">
-                <a:solidFill>
-                  <a:srgbClr val="00FFFF"/>
-                </a:solidFill>
-                <a:latin typeface="微軟正黑體" panose="020B0604030504040204" pitchFamily="34" charset="-120"/>
-                <a:ea typeface="微軟正黑體" panose="020B0604030504040204" pitchFamily="34" charset="-120"/>
-              </a:rPr>
-              <a:t>展示</a:t>
-            </a:r>
-          </a:p>
-        </p:txBody>
-      </p:sp>
-      <p:pic>
-        <p:nvPicPr>
-          <p:cNvPr id="4" name="圖片 3">
-            <a:extLst>
-              <a:ext uri="{FF2B5EF4-FFF2-40B4-BE49-F238E27FC236}">
-                <a16:creationId xmlns:a16="http://schemas.microsoft.com/office/drawing/2014/main" id="{43F1D34A-703F-687C-16F9-99FFE19B7FE1}"/>
-              </a:ext>
-            </a:extLst>
-          </p:cNvPr>
-          <p:cNvPicPr>
-            <a:picLocks noChangeAspect="1"/>
-          </p:cNvPicPr>
-          <p:nvPr/>
-        </p:nvPicPr>
-        <p:blipFill>
-          <a:blip r:embed="rId3">
-            <a:extLst>
-              <a:ext uri="{28A0092B-C50C-407E-A947-70E740481C1C}">
-                <a14:useLocalDpi xmlns:a14="http://schemas.microsoft.com/office/drawing/2010/main" val="0"/>
-              </a:ext>
-            </a:extLst>
-          </a:blip>
-          <a:srcRect/>
-          <a:stretch/>
-        </p:blipFill>
-        <p:spPr>
-          <a:xfrm>
-            <a:off x="3065685" y="2229818"/>
-            <a:ext cx="6060627" cy="3402999"/>
-          </a:xfrm>
-          <a:prstGeom prst="rect">
-            <a:avLst/>
-          </a:prstGeom>
-        </p:spPr>
-      </p:pic>
-    </p:spTree>
-    <p:extLst>
-      <p:ext uri="{BB962C8B-B14F-4D97-AF65-F5344CB8AC3E}">
-        <p14:creationId xmlns:p14="http://schemas.microsoft.com/office/powerpoint/2010/main" val="2372769068"/>
       </p:ext>
     </p:extLst>
   </p:cSld>

--- a/Steam遊戲市場分析報告.pptx
+++ b/Steam遊戲市場分析報告.pptx
@@ -11,16 +11,16 @@
     <p:sldId id="256" r:id="rId2"/>
     <p:sldId id="257" r:id="rId3"/>
     <p:sldId id="278" r:id="rId4"/>
-    <p:sldId id="266" r:id="rId5"/>
-    <p:sldId id="267" r:id="rId6"/>
-    <p:sldId id="268" r:id="rId7"/>
-    <p:sldId id="269" r:id="rId8"/>
-    <p:sldId id="270" r:id="rId9"/>
-    <p:sldId id="271" r:id="rId10"/>
-    <p:sldId id="272" r:id="rId11"/>
-    <p:sldId id="273" r:id="rId12"/>
-    <p:sldId id="274" r:id="rId13"/>
-    <p:sldId id="280" r:id="rId14"/>
+    <p:sldId id="269" r:id="rId5"/>
+    <p:sldId id="270" r:id="rId6"/>
+    <p:sldId id="271" r:id="rId7"/>
+    <p:sldId id="272" r:id="rId8"/>
+    <p:sldId id="273" r:id="rId9"/>
+    <p:sldId id="274" r:id="rId10"/>
+    <p:sldId id="280" r:id="rId11"/>
+    <p:sldId id="266" r:id="rId12"/>
+    <p:sldId id="267" r:id="rId13"/>
+    <p:sldId id="268" r:id="rId14"/>
     <p:sldId id="275" r:id="rId15"/>
     <p:sldId id="279" r:id="rId16"/>
     <p:sldId id="276" r:id="rId17"/>
@@ -3975,480 +3975,6 @@
         <p:cNvPr id="1" name="">
           <a:extLst>
             <a:ext uri="{FF2B5EF4-FFF2-40B4-BE49-F238E27FC236}">
-              <a16:creationId xmlns:a16="http://schemas.microsoft.com/office/drawing/2014/main" id="{0B2E3A6C-1C8C-1CAB-7694-26B03E2BEE6C}"/>
-            </a:ext>
-          </a:extLst>
-        </p:cNvPr>
-        <p:cNvGrpSpPr/>
-        <p:nvPr/>
-      </p:nvGrpSpPr>
-      <p:grpSpPr>
-        <a:xfrm>
-          <a:off x="0" y="0"/>
-          <a:ext cx="0" cy="0"/>
-          <a:chOff x="0" y="0"/>
-          <a:chExt cx="0" cy="0"/>
-        </a:xfrm>
-      </p:grpSpPr>
-      <p:pic>
-        <p:nvPicPr>
-          <p:cNvPr id="5" name="圖片 4">
-            <a:extLst>
-              <a:ext uri="{FF2B5EF4-FFF2-40B4-BE49-F238E27FC236}">
-                <a16:creationId xmlns:a16="http://schemas.microsoft.com/office/drawing/2014/main" id="{64410478-C5EA-3CF2-4A24-E9A34689F9B3}"/>
-              </a:ext>
-            </a:extLst>
-          </p:cNvPr>
-          <p:cNvPicPr>
-            <a:picLocks noChangeAspect="1"/>
-          </p:cNvPicPr>
-          <p:nvPr/>
-        </p:nvPicPr>
-        <p:blipFill>
-          <a:blip r:embed="rId2">
-            <a:extLst>
-              <a:ext uri="{28A0092B-C50C-407E-A947-70E740481C1C}">
-                <a14:useLocalDpi xmlns:a14="http://schemas.microsoft.com/office/drawing/2010/main" val="0"/>
-              </a:ext>
-            </a:extLst>
-          </a:blip>
-          <a:stretch>
-            <a:fillRect/>
-          </a:stretch>
-        </p:blipFill>
-        <p:spPr>
-          <a:xfrm>
-            <a:off x="0" y="0"/>
-            <a:ext cx="12192000" cy="6858000"/>
-          </a:xfrm>
-          <a:prstGeom prst="rect">
-            <a:avLst/>
-          </a:prstGeom>
-        </p:spPr>
-      </p:pic>
-      <p:sp>
-        <p:nvSpPr>
-          <p:cNvPr id="6" name="文字方塊 5">
-            <a:extLst>
-              <a:ext uri="{FF2B5EF4-FFF2-40B4-BE49-F238E27FC236}">
-                <a16:creationId xmlns:a16="http://schemas.microsoft.com/office/drawing/2014/main" id="{5EEDA4C8-EAA3-8689-BF24-12B1EEE3A0A2}"/>
-              </a:ext>
-            </a:extLst>
-          </p:cNvPr>
-          <p:cNvSpPr txBox="1"/>
-          <p:nvPr/>
-        </p:nvSpPr>
-        <p:spPr>
-          <a:xfrm>
-            <a:off x="4517298" y="1524000"/>
-            <a:ext cx="3157403" cy="707886"/>
-          </a:xfrm>
-          <a:prstGeom prst="rect">
-            <a:avLst/>
-          </a:prstGeom>
-          <a:noFill/>
-        </p:spPr>
-        <p:txBody>
-          <a:bodyPr wrap="none" rtlCol="0">
-            <a:spAutoFit/>
-          </a:bodyPr>
-          <a:lstStyle/>
-          <a:p>
-            <a:r>
-              <a:rPr lang="en-US" altLang="zh-TW" sz="4000" dirty="0" err="1">
-                <a:solidFill>
-                  <a:srgbClr val="00FFFF"/>
-                </a:solidFill>
-                <a:latin typeface="微軟正黑體" panose="020B0604030504040204" pitchFamily="34" charset="-120"/>
-                <a:ea typeface="微軟正黑體" panose="020B0604030504040204" pitchFamily="34" charset="-120"/>
-              </a:rPr>
-              <a:t>PowerBI</a:t>
-            </a:r>
-            <a:r>
-              <a:rPr lang="zh-TW" altLang="en-US" sz="4000" dirty="0">
-                <a:solidFill>
-                  <a:srgbClr val="00FFFF"/>
-                </a:solidFill>
-                <a:latin typeface="微軟正黑體" panose="020B0604030504040204" pitchFamily="34" charset="-120"/>
-                <a:ea typeface="微軟正黑體" panose="020B0604030504040204" pitchFamily="34" charset="-120"/>
-              </a:rPr>
-              <a:t>展示</a:t>
-            </a:r>
-          </a:p>
-        </p:txBody>
-      </p:sp>
-      <p:pic>
-        <p:nvPicPr>
-          <p:cNvPr id="4" name="圖片 3">
-            <a:extLst>
-              <a:ext uri="{FF2B5EF4-FFF2-40B4-BE49-F238E27FC236}">
-                <a16:creationId xmlns:a16="http://schemas.microsoft.com/office/drawing/2014/main" id="{43F1D34A-703F-687C-16F9-99FFE19B7FE1}"/>
-              </a:ext>
-            </a:extLst>
-          </p:cNvPr>
-          <p:cNvPicPr>
-            <a:picLocks noChangeAspect="1"/>
-          </p:cNvPicPr>
-          <p:nvPr/>
-        </p:nvPicPr>
-        <p:blipFill>
-          <a:blip r:embed="rId3">
-            <a:extLst>
-              <a:ext uri="{28A0092B-C50C-407E-A947-70E740481C1C}">
-                <a14:useLocalDpi xmlns:a14="http://schemas.microsoft.com/office/drawing/2010/main" val="0"/>
-              </a:ext>
-            </a:extLst>
-          </a:blip>
-          <a:srcRect/>
-          <a:stretch/>
-        </p:blipFill>
-        <p:spPr>
-          <a:xfrm>
-            <a:off x="3070105" y="2229818"/>
-            <a:ext cx="6051786" cy="3402999"/>
-          </a:xfrm>
-          <a:prstGeom prst="rect">
-            <a:avLst/>
-          </a:prstGeom>
-        </p:spPr>
-      </p:pic>
-    </p:spTree>
-    <p:extLst>
-      <p:ext uri="{BB962C8B-B14F-4D97-AF65-F5344CB8AC3E}">
-        <p14:creationId xmlns:p14="http://schemas.microsoft.com/office/powerpoint/2010/main" val="2372769068"/>
-      </p:ext>
-    </p:extLst>
-  </p:cSld>
-  <p:clrMapOvr>
-    <a:masterClrMapping/>
-  </p:clrMapOvr>
-</p:sld>
-</file>
-
-<file path=ppt/slides/slide11.xml><?xml version="1.0" encoding="utf-8"?>
-<p:sld xmlns:a="http://schemas.openxmlformats.org/drawingml/2006/main" xmlns:r="http://schemas.openxmlformats.org/officeDocument/2006/relationships" xmlns:p="http://schemas.openxmlformats.org/presentationml/2006/main">
-  <p:cSld>
-    <p:spTree>
-      <p:nvGrpSpPr>
-        <p:cNvPr id="1" name="">
-          <a:extLst>
-            <a:ext uri="{FF2B5EF4-FFF2-40B4-BE49-F238E27FC236}">
-              <a16:creationId xmlns:a16="http://schemas.microsoft.com/office/drawing/2014/main" id="{96B867E1-730F-3AB3-4A6E-3E1331257F8A}"/>
-            </a:ext>
-          </a:extLst>
-        </p:cNvPr>
-        <p:cNvGrpSpPr/>
-        <p:nvPr/>
-      </p:nvGrpSpPr>
-      <p:grpSpPr>
-        <a:xfrm>
-          <a:off x="0" y="0"/>
-          <a:ext cx="0" cy="0"/>
-          <a:chOff x="0" y="0"/>
-          <a:chExt cx="0" cy="0"/>
-        </a:xfrm>
-      </p:grpSpPr>
-      <p:pic>
-        <p:nvPicPr>
-          <p:cNvPr id="5" name="圖片 4">
-            <a:extLst>
-              <a:ext uri="{FF2B5EF4-FFF2-40B4-BE49-F238E27FC236}">
-                <a16:creationId xmlns:a16="http://schemas.microsoft.com/office/drawing/2014/main" id="{CA88CB68-470F-4F95-7908-6B93A4CE526F}"/>
-              </a:ext>
-            </a:extLst>
-          </p:cNvPr>
-          <p:cNvPicPr>
-            <a:picLocks noChangeAspect="1"/>
-          </p:cNvPicPr>
-          <p:nvPr/>
-        </p:nvPicPr>
-        <p:blipFill>
-          <a:blip r:embed="rId2">
-            <a:extLst>
-              <a:ext uri="{28A0092B-C50C-407E-A947-70E740481C1C}">
-                <a14:useLocalDpi xmlns:a14="http://schemas.microsoft.com/office/drawing/2010/main" val="0"/>
-              </a:ext>
-            </a:extLst>
-          </a:blip>
-          <a:stretch>
-            <a:fillRect/>
-          </a:stretch>
-        </p:blipFill>
-        <p:spPr>
-          <a:xfrm>
-            <a:off x="0" y="0"/>
-            <a:ext cx="12192000" cy="6858000"/>
-          </a:xfrm>
-          <a:prstGeom prst="rect">
-            <a:avLst/>
-          </a:prstGeom>
-        </p:spPr>
-      </p:pic>
-      <p:sp>
-        <p:nvSpPr>
-          <p:cNvPr id="6" name="文字方塊 5">
-            <a:extLst>
-              <a:ext uri="{FF2B5EF4-FFF2-40B4-BE49-F238E27FC236}">
-                <a16:creationId xmlns:a16="http://schemas.microsoft.com/office/drawing/2014/main" id="{0A2F43CC-ADF4-4FF9-CDA8-E052538D21AB}"/>
-              </a:ext>
-            </a:extLst>
-          </p:cNvPr>
-          <p:cNvSpPr txBox="1"/>
-          <p:nvPr/>
-        </p:nvSpPr>
-        <p:spPr>
-          <a:xfrm>
-            <a:off x="4517298" y="1524000"/>
-            <a:ext cx="3157403" cy="707886"/>
-          </a:xfrm>
-          <a:prstGeom prst="rect">
-            <a:avLst/>
-          </a:prstGeom>
-          <a:noFill/>
-        </p:spPr>
-        <p:txBody>
-          <a:bodyPr wrap="none" rtlCol="0">
-            <a:spAutoFit/>
-          </a:bodyPr>
-          <a:lstStyle/>
-          <a:p>
-            <a:r>
-              <a:rPr lang="en-US" altLang="zh-TW" sz="4000" dirty="0" err="1">
-                <a:solidFill>
-                  <a:srgbClr val="00FFFF"/>
-                </a:solidFill>
-                <a:latin typeface="微軟正黑體" panose="020B0604030504040204" pitchFamily="34" charset="-120"/>
-                <a:ea typeface="微軟正黑體" panose="020B0604030504040204" pitchFamily="34" charset="-120"/>
-              </a:rPr>
-              <a:t>PowerBI</a:t>
-            </a:r>
-            <a:r>
-              <a:rPr lang="zh-TW" altLang="en-US" sz="4000" dirty="0">
-                <a:solidFill>
-                  <a:srgbClr val="00FFFF"/>
-                </a:solidFill>
-                <a:latin typeface="微軟正黑體" panose="020B0604030504040204" pitchFamily="34" charset="-120"/>
-                <a:ea typeface="微軟正黑體" panose="020B0604030504040204" pitchFamily="34" charset="-120"/>
-              </a:rPr>
-              <a:t>展示</a:t>
-            </a:r>
-          </a:p>
-        </p:txBody>
-      </p:sp>
-      <p:pic>
-        <p:nvPicPr>
-          <p:cNvPr id="4" name="圖片 3">
-            <a:extLst>
-              <a:ext uri="{FF2B5EF4-FFF2-40B4-BE49-F238E27FC236}">
-                <a16:creationId xmlns:a16="http://schemas.microsoft.com/office/drawing/2014/main" id="{6CCA5DA6-09C3-C577-1923-2417AC1A4D71}"/>
-              </a:ext>
-            </a:extLst>
-          </p:cNvPr>
-          <p:cNvPicPr>
-            <a:picLocks noChangeAspect="1"/>
-          </p:cNvPicPr>
-          <p:nvPr/>
-        </p:nvPicPr>
-        <p:blipFill>
-          <a:blip r:embed="rId3">
-            <a:extLst>
-              <a:ext uri="{28A0092B-C50C-407E-A947-70E740481C1C}">
-                <a14:useLocalDpi xmlns:a14="http://schemas.microsoft.com/office/drawing/2010/main" val="0"/>
-              </a:ext>
-            </a:extLst>
-          </a:blip>
-          <a:srcRect/>
-          <a:stretch/>
-        </p:blipFill>
-        <p:spPr>
-          <a:xfrm>
-            <a:off x="3070825" y="2229818"/>
-            <a:ext cx="6050347" cy="3402999"/>
-          </a:xfrm>
-          <a:prstGeom prst="rect">
-            <a:avLst/>
-          </a:prstGeom>
-        </p:spPr>
-      </p:pic>
-    </p:spTree>
-    <p:extLst>
-      <p:ext uri="{BB962C8B-B14F-4D97-AF65-F5344CB8AC3E}">
-        <p14:creationId xmlns:p14="http://schemas.microsoft.com/office/powerpoint/2010/main" val="2860633482"/>
-      </p:ext>
-    </p:extLst>
-  </p:cSld>
-  <p:clrMapOvr>
-    <a:masterClrMapping/>
-  </p:clrMapOvr>
-</p:sld>
-</file>
-
-<file path=ppt/slides/slide12.xml><?xml version="1.0" encoding="utf-8"?>
-<p:sld xmlns:a="http://schemas.openxmlformats.org/drawingml/2006/main" xmlns:r="http://schemas.openxmlformats.org/officeDocument/2006/relationships" xmlns:p="http://schemas.openxmlformats.org/presentationml/2006/main">
-  <p:cSld>
-    <p:spTree>
-      <p:nvGrpSpPr>
-        <p:cNvPr id="1" name="">
-          <a:extLst>
-            <a:ext uri="{FF2B5EF4-FFF2-40B4-BE49-F238E27FC236}">
-              <a16:creationId xmlns:a16="http://schemas.microsoft.com/office/drawing/2014/main" id="{4D940BCC-0F37-7100-62D6-EE1E1BF36B20}"/>
-            </a:ext>
-          </a:extLst>
-        </p:cNvPr>
-        <p:cNvGrpSpPr/>
-        <p:nvPr/>
-      </p:nvGrpSpPr>
-      <p:grpSpPr>
-        <a:xfrm>
-          <a:off x="0" y="0"/>
-          <a:ext cx="0" cy="0"/>
-          <a:chOff x="0" y="0"/>
-          <a:chExt cx="0" cy="0"/>
-        </a:xfrm>
-      </p:grpSpPr>
-      <p:pic>
-        <p:nvPicPr>
-          <p:cNvPr id="5" name="圖片 4">
-            <a:extLst>
-              <a:ext uri="{FF2B5EF4-FFF2-40B4-BE49-F238E27FC236}">
-                <a16:creationId xmlns:a16="http://schemas.microsoft.com/office/drawing/2014/main" id="{18D5424C-3CE8-9AA9-FB38-0429C6157AAE}"/>
-              </a:ext>
-            </a:extLst>
-          </p:cNvPr>
-          <p:cNvPicPr>
-            <a:picLocks noChangeAspect="1"/>
-          </p:cNvPicPr>
-          <p:nvPr/>
-        </p:nvPicPr>
-        <p:blipFill>
-          <a:blip r:embed="rId2">
-            <a:extLst>
-              <a:ext uri="{28A0092B-C50C-407E-A947-70E740481C1C}">
-                <a14:useLocalDpi xmlns:a14="http://schemas.microsoft.com/office/drawing/2010/main" val="0"/>
-              </a:ext>
-            </a:extLst>
-          </a:blip>
-          <a:stretch>
-            <a:fillRect/>
-          </a:stretch>
-        </p:blipFill>
-        <p:spPr>
-          <a:xfrm>
-            <a:off x="0" y="0"/>
-            <a:ext cx="12192000" cy="6858000"/>
-          </a:xfrm>
-          <a:prstGeom prst="rect">
-            <a:avLst/>
-          </a:prstGeom>
-        </p:spPr>
-      </p:pic>
-      <p:sp>
-        <p:nvSpPr>
-          <p:cNvPr id="6" name="文字方塊 5">
-            <a:extLst>
-              <a:ext uri="{FF2B5EF4-FFF2-40B4-BE49-F238E27FC236}">
-                <a16:creationId xmlns:a16="http://schemas.microsoft.com/office/drawing/2014/main" id="{C2BE8CF9-6F70-230A-18C7-C7C7BD661320}"/>
-              </a:ext>
-            </a:extLst>
-          </p:cNvPr>
-          <p:cNvSpPr txBox="1"/>
-          <p:nvPr/>
-        </p:nvSpPr>
-        <p:spPr>
-          <a:xfrm>
-            <a:off x="4517298" y="1524000"/>
-            <a:ext cx="3157403" cy="707886"/>
-          </a:xfrm>
-          <a:prstGeom prst="rect">
-            <a:avLst/>
-          </a:prstGeom>
-          <a:noFill/>
-        </p:spPr>
-        <p:txBody>
-          <a:bodyPr wrap="none" rtlCol="0">
-            <a:spAutoFit/>
-          </a:bodyPr>
-          <a:lstStyle/>
-          <a:p>
-            <a:r>
-              <a:rPr lang="en-US" altLang="zh-TW" sz="4000" dirty="0" err="1">
-                <a:solidFill>
-                  <a:srgbClr val="00FFFF"/>
-                </a:solidFill>
-                <a:latin typeface="微軟正黑體" panose="020B0604030504040204" pitchFamily="34" charset="-120"/>
-                <a:ea typeface="微軟正黑體" panose="020B0604030504040204" pitchFamily="34" charset="-120"/>
-              </a:rPr>
-              <a:t>PowerBI</a:t>
-            </a:r>
-            <a:r>
-              <a:rPr lang="zh-TW" altLang="en-US" sz="4000" dirty="0">
-                <a:solidFill>
-                  <a:srgbClr val="00FFFF"/>
-                </a:solidFill>
-                <a:latin typeface="微軟正黑體" panose="020B0604030504040204" pitchFamily="34" charset="-120"/>
-                <a:ea typeface="微軟正黑體" panose="020B0604030504040204" pitchFamily="34" charset="-120"/>
-              </a:rPr>
-              <a:t>展示</a:t>
-            </a:r>
-          </a:p>
-        </p:txBody>
-      </p:sp>
-      <p:pic>
-        <p:nvPicPr>
-          <p:cNvPr id="4" name="圖片 3">
-            <a:extLst>
-              <a:ext uri="{FF2B5EF4-FFF2-40B4-BE49-F238E27FC236}">
-                <a16:creationId xmlns:a16="http://schemas.microsoft.com/office/drawing/2014/main" id="{FF8556CE-1271-FBEB-77EA-9AA9CCB7D4E2}"/>
-              </a:ext>
-            </a:extLst>
-          </p:cNvPr>
-          <p:cNvPicPr>
-            <a:picLocks noChangeAspect="1"/>
-          </p:cNvPicPr>
-          <p:nvPr/>
-        </p:nvPicPr>
-        <p:blipFill>
-          <a:blip r:embed="rId3">
-            <a:extLst>
-              <a:ext uri="{28A0092B-C50C-407E-A947-70E740481C1C}">
-                <a14:useLocalDpi xmlns:a14="http://schemas.microsoft.com/office/drawing/2010/main" val="0"/>
-              </a:ext>
-            </a:extLst>
-          </a:blip>
-          <a:srcRect/>
-          <a:stretch/>
-        </p:blipFill>
-        <p:spPr>
-          <a:xfrm>
-            <a:off x="3070825" y="2236399"/>
-            <a:ext cx="6050347" cy="3389837"/>
-          </a:xfrm>
-          <a:prstGeom prst="rect">
-            <a:avLst/>
-          </a:prstGeom>
-        </p:spPr>
-      </p:pic>
-    </p:spTree>
-    <p:extLst>
-      <p:ext uri="{BB962C8B-B14F-4D97-AF65-F5344CB8AC3E}">
-        <p14:creationId xmlns:p14="http://schemas.microsoft.com/office/powerpoint/2010/main" val="1497603658"/>
-      </p:ext>
-    </p:extLst>
-  </p:cSld>
-  <p:clrMapOvr>
-    <a:masterClrMapping/>
-  </p:clrMapOvr>
-</p:sld>
-</file>
-
-<file path=ppt/slides/slide13.xml><?xml version="1.0" encoding="utf-8"?>
-<p:sld xmlns:a="http://schemas.openxmlformats.org/drawingml/2006/main" xmlns:r="http://schemas.openxmlformats.org/officeDocument/2006/relationships" xmlns:p="http://schemas.openxmlformats.org/presentationml/2006/main">
-  <p:cSld>
-    <p:spTree>
-      <p:nvGrpSpPr>
-        <p:cNvPr id="1" name="">
-          <a:extLst>
-            <a:ext uri="{FF2B5EF4-FFF2-40B4-BE49-F238E27FC236}">
               <a16:creationId xmlns:a16="http://schemas.microsoft.com/office/drawing/2014/main" id="{DE170BD4-F6DE-108F-58A9-D8D4A9444DE7}"/>
             </a:ext>
           </a:extLst>
@@ -4590,6 +4116,523 @@
     <p:extLst>
       <p:ext uri="{BB962C8B-B14F-4D97-AF65-F5344CB8AC3E}">
         <p14:creationId xmlns:p14="http://schemas.microsoft.com/office/powerpoint/2010/main" val="2898921761"/>
+      </p:ext>
+    </p:extLst>
+  </p:cSld>
+  <p:clrMapOvr>
+    <a:masterClrMapping/>
+  </p:clrMapOvr>
+</p:sld>
+</file>
+
+<file path=ppt/slides/slide11.xml><?xml version="1.0" encoding="utf-8"?>
+<p:sld xmlns:a="http://schemas.openxmlformats.org/drawingml/2006/main" xmlns:r="http://schemas.openxmlformats.org/officeDocument/2006/relationships" xmlns:p="http://schemas.openxmlformats.org/presentationml/2006/main">
+  <p:cSld>
+    <p:spTree>
+      <p:nvGrpSpPr>
+        <p:cNvPr id="1" name="">
+          <a:extLst>
+            <a:ext uri="{FF2B5EF4-FFF2-40B4-BE49-F238E27FC236}">
+              <a16:creationId xmlns:a16="http://schemas.microsoft.com/office/drawing/2014/main" id="{F9942900-E13C-370C-3264-E7948366DDC9}"/>
+            </a:ext>
+          </a:extLst>
+        </p:cNvPr>
+        <p:cNvGrpSpPr/>
+        <p:nvPr/>
+      </p:nvGrpSpPr>
+      <p:grpSpPr>
+        <a:xfrm>
+          <a:off x="0" y="0"/>
+          <a:ext cx="0" cy="0"/>
+          <a:chOff x="0" y="0"/>
+          <a:chExt cx="0" cy="0"/>
+        </a:xfrm>
+      </p:grpSpPr>
+      <p:pic>
+        <p:nvPicPr>
+          <p:cNvPr id="5" name="圖片 4">
+            <a:extLst>
+              <a:ext uri="{FF2B5EF4-FFF2-40B4-BE49-F238E27FC236}">
+                <a16:creationId xmlns:a16="http://schemas.microsoft.com/office/drawing/2014/main" id="{0F5C274B-05F3-B016-5E16-02123F97D3E7}"/>
+              </a:ext>
+            </a:extLst>
+          </p:cNvPr>
+          <p:cNvPicPr>
+            <a:picLocks noChangeAspect="1"/>
+          </p:cNvPicPr>
+          <p:nvPr/>
+        </p:nvPicPr>
+        <p:blipFill>
+          <a:blip r:embed="rId2">
+            <a:extLst>
+              <a:ext uri="{28A0092B-C50C-407E-A947-70E740481C1C}">
+                <a14:useLocalDpi xmlns:a14="http://schemas.microsoft.com/office/drawing/2010/main" val="0"/>
+              </a:ext>
+            </a:extLst>
+          </a:blip>
+          <a:stretch>
+            <a:fillRect/>
+          </a:stretch>
+        </p:blipFill>
+        <p:spPr>
+          <a:xfrm>
+            <a:off x="0" y="0"/>
+            <a:ext cx="12192000" cy="6858000"/>
+          </a:xfrm>
+          <a:prstGeom prst="rect">
+            <a:avLst/>
+          </a:prstGeom>
+        </p:spPr>
+      </p:pic>
+      <p:sp>
+        <p:nvSpPr>
+          <p:cNvPr id="6" name="文字方塊 5">
+            <a:extLst>
+              <a:ext uri="{FF2B5EF4-FFF2-40B4-BE49-F238E27FC236}">
+                <a16:creationId xmlns:a16="http://schemas.microsoft.com/office/drawing/2014/main" id="{F3F24C56-65BF-E447-92D8-42B3EC228F43}"/>
+              </a:ext>
+            </a:extLst>
+          </p:cNvPr>
+          <p:cNvSpPr txBox="1"/>
+          <p:nvPr/>
+        </p:nvSpPr>
+        <p:spPr>
+          <a:xfrm>
+            <a:off x="4977745" y="1524000"/>
+            <a:ext cx="2236510" cy="707886"/>
+          </a:xfrm>
+          <a:prstGeom prst="rect">
+            <a:avLst/>
+          </a:prstGeom>
+          <a:noFill/>
+        </p:spPr>
+        <p:txBody>
+          <a:bodyPr wrap="none" rtlCol="0">
+            <a:spAutoFit/>
+          </a:bodyPr>
+          <a:lstStyle/>
+          <a:p>
+            <a:r>
+              <a:rPr lang="zh-TW" altLang="en-US" sz="4000" dirty="0">
+                <a:solidFill>
+                  <a:srgbClr val="00FFFF"/>
+                </a:solidFill>
+                <a:latin typeface="微軟正黑體" panose="020B0604030504040204" pitchFamily="34" charset="-120"/>
+                <a:ea typeface="微軟正黑體" panose="020B0604030504040204" pitchFamily="34" charset="-120"/>
+              </a:rPr>
+              <a:t>資料獲取</a:t>
+            </a:r>
+          </a:p>
+        </p:txBody>
+      </p:sp>
+      <p:sp>
+        <p:nvSpPr>
+          <p:cNvPr id="7" name="文字方塊 6">
+            <a:extLst>
+              <a:ext uri="{FF2B5EF4-FFF2-40B4-BE49-F238E27FC236}">
+                <a16:creationId xmlns:a16="http://schemas.microsoft.com/office/drawing/2014/main" id="{5047E607-F08A-B013-E2C2-DDFEB889874A}"/>
+              </a:ext>
+            </a:extLst>
+          </p:cNvPr>
+          <p:cNvSpPr txBox="1"/>
+          <p:nvPr/>
+        </p:nvSpPr>
+        <p:spPr>
+          <a:xfrm>
+            <a:off x="2261924" y="2476500"/>
+            <a:ext cx="7668152" cy="1132490"/>
+          </a:xfrm>
+          <a:prstGeom prst="rect">
+            <a:avLst/>
+          </a:prstGeom>
+          <a:noFill/>
+        </p:spPr>
+        <p:txBody>
+          <a:bodyPr wrap="square" rtlCol="0">
+            <a:spAutoFit/>
+          </a:bodyPr>
+          <a:lstStyle/>
+          <a:p>
+            <a:pPr>
+              <a:lnSpc>
+                <a:spcPct val="150000"/>
+              </a:lnSpc>
+            </a:pPr>
+            <a:r>
+              <a:rPr lang="zh-TW" altLang="en-US" sz="2400" dirty="0">
+                <a:solidFill>
+                  <a:srgbClr val="00CCFF"/>
+                </a:solidFill>
+                <a:latin typeface="微軟正黑體" panose="020B0604030504040204" pitchFamily="34" charset="-120"/>
+                <a:ea typeface="微軟正黑體" panose="020B0604030504040204" pitchFamily="34" charset="-120"/>
+              </a:rPr>
+              <a:t>從</a:t>
+            </a:r>
+            <a:r>
+              <a:rPr lang="en-US" altLang="zh-TW" sz="2400" dirty="0" err="1">
+                <a:solidFill>
+                  <a:srgbClr val="00CCFF"/>
+                </a:solidFill>
+                <a:latin typeface="微軟正黑體" panose="020B0604030504040204" pitchFamily="34" charset="-120"/>
+                <a:ea typeface="微軟正黑體" panose="020B0604030504040204" pitchFamily="34" charset="-120"/>
+              </a:rPr>
+              <a:t>kaggle</a:t>
+            </a:r>
+            <a:r>
+              <a:rPr lang="zh-TW" altLang="en-US" sz="2400" dirty="0">
+                <a:solidFill>
+                  <a:srgbClr val="00CCFF"/>
+                </a:solidFill>
+                <a:latin typeface="微軟正黑體" panose="020B0604030504040204" pitchFamily="34" charset="-120"/>
+                <a:ea typeface="微軟正黑體" panose="020B0604030504040204" pitchFamily="34" charset="-120"/>
+              </a:rPr>
+              <a:t>下載關於這次主題的</a:t>
+            </a:r>
+            <a:r>
+              <a:rPr lang="en-US" altLang="zh-TW" sz="2400" dirty="0">
+                <a:solidFill>
+                  <a:srgbClr val="00CCFF"/>
+                </a:solidFill>
+                <a:latin typeface="微軟正黑體" panose="020B0604030504040204" pitchFamily="34" charset="-120"/>
+                <a:ea typeface="微軟正黑體" panose="020B0604030504040204" pitchFamily="34" charset="-120"/>
+              </a:rPr>
+              <a:t>csv</a:t>
+            </a:r>
+            <a:r>
+              <a:rPr lang="zh-TW" altLang="en-US" sz="2400" dirty="0">
+                <a:solidFill>
+                  <a:srgbClr val="00CCFF"/>
+                </a:solidFill>
+                <a:latin typeface="微軟正黑體" panose="020B0604030504040204" pitchFamily="34" charset="-120"/>
+                <a:ea typeface="微軟正黑體" panose="020B0604030504040204" pitchFamily="34" charset="-120"/>
+              </a:rPr>
+              <a:t>，並且在</a:t>
+            </a:r>
+            <a:r>
+              <a:rPr lang="en-US" altLang="zh-TW" sz="2400" dirty="0">
+                <a:solidFill>
+                  <a:srgbClr val="00CCFF"/>
+                </a:solidFill>
+                <a:latin typeface="微軟正黑體" panose="020B0604030504040204" pitchFamily="34" charset="-120"/>
+                <a:ea typeface="微軟正黑體" panose="020B0604030504040204" pitchFamily="34" charset="-120"/>
+              </a:rPr>
+              <a:t>python</a:t>
+            </a:r>
+            <a:r>
+              <a:rPr lang="zh-TW" altLang="en-US" sz="2400" dirty="0">
+                <a:solidFill>
+                  <a:srgbClr val="00CCFF"/>
+                </a:solidFill>
+                <a:latin typeface="微軟正黑體" panose="020B0604030504040204" pitchFamily="34" charset="-120"/>
+                <a:ea typeface="微軟正黑體" panose="020B0604030504040204" pitchFamily="34" charset="-120"/>
+              </a:rPr>
+              <a:t>進行資料的清洗及擷取。</a:t>
+            </a:r>
+          </a:p>
+        </p:txBody>
+      </p:sp>
+    </p:spTree>
+    <p:extLst>
+      <p:ext uri="{BB962C8B-B14F-4D97-AF65-F5344CB8AC3E}">
+        <p14:creationId xmlns:p14="http://schemas.microsoft.com/office/powerpoint/2010/main" val="909956457"/>
+      </p:ext>
+    </p:extLst>
+  </p:cSld>
+  <p:clrMapOvr>
+    <a:masterClrMapping/>
+  </p:clrMapOvr>
+</p:sld>
+</file>
+
+<file path=ppt/slides/slide12.xml><?xml version="1.0" encoding="utf-8"?>
+<p:sld xmlns:a="http://schemas.openxmlformats.org/drawingml/2006/main" xmlns:r="http://schemas.openxmlformats.org/officeDocument/2006/relationships" xmlns:p="http://schemas.openxmlformats.org/presentationml/2006/main">
+  <p:cSld>
+    <p:spTree>
+      <p:nvGrpSpPr>
+        <p:cNvPr id="1" name="">
+          <a:extLst>
+            <a:ext uri="{FF2B5EF4-FFF2-40B4-BE49-F238E27FC236}">
+              <a16:creationId xmlns:a16="http://schemas.microsoft.com/office/drawing/2014/main" id="{877928A0-A2F1-87A2-DB6B-76786549D67C}"/>
+            </a:ext>
+          </a:extLst>
+        </p:cNvPr>
+        <p:cNvGrpSpPr/>
+        <p:nvPr/>
+      </p:nvGrpSpPr>
+      <p:grpSpPr>
+        <a:xfrm>
+          <a:off x="0" y="0"/>
+          <a:ext cx="0" cy="0"/>
+          <a:chOff x="0" y="0"/>
+          <a:chExt cx="0" cy="0"/>
+        </a:xfrm>
+      </p:grpSpPr>
+      <p:pic>
+        <p:nvPicPr>
+          <p:cNvPr id="5" name="圖片 4">
+            <a:extLst>
+              <a:ext uri="{FF2B5EF4-FFF2-40B4-BE49-F238E27FC236}">
+                <a16:creationId xmlns:a16="http://schemas.microsoft.com/office/drawing/2014/main" id="{D85EFCAD-3CFB-C8BC-8E90-1BBABDCF693E}"/>
+              </a:ext>
+            </a:extLst>
+          </p:cNvPr>
+          <p:cNvPicPr>
+            <a:picLocks noChangeAspect="1"/>
+          </p:cNvPicPr>
+          <p:nvPr/>
+        </p:nvPicPr>
+        <p:blipFill>
+          <a:blip r:embed="rId2">
+            <a:extLst>
+              <a:ext uri="{28A0092B-C50C-407E-A947-70E740481C1C}">
+                <a14:useLocalDpi xmlns:a14="http://schemas.microsoft.com/office/drawing/2010/main" val="0"/>
+              </a:ext>
+            </a:extLst>
+          </a:blip>
+          <a:stretch>
+            <a:fillRect/>
+          </a:stretch>
+        </p:blipFill>
+        <p:spPr>
+          <a:xfrm>
+            <a:off x="0" y="0"/>
+            <a:ext cx="12192000" cy="6858000"/>
+          </a:xfrm>
+          <a:prstGeom prst="rect">
+            <a:avLst/>
+          </a:prstGeom>
+        </p:spPr>
+      </p:pic>
+      <p:sp>
+        <p:nvSpPr>
+          <p:cNvPr id="6" name="文字方塊 5">
+            <a:extLst>
+              <a:ext uri="{FF2B5EF4-FFF2-40B4-BE49-F238E27FC236}">
+                <a16:creationId xmlns:a16="http://schemas.microsoft.com/office/drawing/2014/main" id="{2B043C29-F607-7BCE-4B47-FB6B6C780514}"/>
+              </a:ext>
+            </a:extLst>
+          </p:cNvPr>
+          <p:cNvSpPr txBox="1"/>
+          <p:nvPr/>
+        </p:nvSpPr>
+        <p:spPr>
+          <a:xfrm>
+            <a:off x="4977745" y="1524000"/>
+            <a:ext cx="2236510" cy="707886"/>
+          </a:xfrm>
+          <a:prstGeom prst="rect">
+            <a:avLst/>
+          </a:prstGeom>
+          <a:noFill/>
+        </p:spPr>
+        <p:txBody>
+          <a:bodyPr wrap="none" rtlCol="0">
+            <a:spAutoFit/>
+          </a:bodyPr>
+          <a:lstStyle/>
+          <a:p>
+            <a:r>
+              <a:rPr lang="zh-TW" altLang="en-US" sz="4000" dirty="0">
+                <a:solidFill>
+                  <a:srgbClr val="00FFFF"/>
+                </a:solidFill>
+                <a:latin typeface="微軟正黑體" panose="020B0604030504040204" pitchFamily="34" charset="-120"/>
+                <a:ea typeface="微軟正黑體" panose="020B0604030504040204" pitchFamily="34" charset="-120"/>
+              </a:rPr>
+              <a:t>資料清洗</a:t>
+            </a:r>
+          </a:p>
+        </p:txBody>
+      </p:sp>
+      <p:pic>
+        <p:nvPicPr>
+          <p:cNvPr id="3" name="圖片 2">
+            <a:extLst>
+              <a:ext uri="{FF2B5EF4-FFF2-40B4-BE49-F238E27FC236}">
+                <a16:creationId xmlns:a16="http://schemas.microsoft.com/office/drawing/2014/main" id="{27199567-ABFB-D7E5-6614-71E07447DB21}"/>
+              </a:ext>
+            </a:extLst>
+          </p:cNvPr>
+          <p:cNvPicPr>
+            <a:picLocks noChangeAspect="1"/>
+          </p:cNvPicPr>
+          <p:nvPr/>
+        </p:nvPicPr>
+        <p:blipFill>
+          <a:blip r:embed="rId3">
+            <a:extLst>
+              <a:ext uri="{28A0092B-C50C-407E-A947-70E740481C1C}">
+                <a14:useLocalDpi xmlns:a14="http://schemas.microsoft.com/office/drawing/2010/main" val="0"/>
+              </a:ext>
+            </a:extLst>
+          </a:blip>
+          <a:stretch>
+            <a:fillRect/>
+          </a:stretch>
+        </p:blipFill>
+        <p:spPr>
+          <a:xfrm>
+            <a:off x="3343127" y="2231886"/>
+            <a:ext cx="5505745" cy="3372889"/>
+          </a:xfrm>
+          <a:prstGeom prst="rect">
+            <a:avLst/>
+          </a:prstGeom>
+        </p:spPr>
+      </p:pic>
+    </p:spTree>
+    <p:extLst>
+      <p:ext uri="{BB962C8B-B14F-4D97-AF65-F5344CB8AC3E}">
+        <p14:creationId xmlns:p14="http://schemas.microsoft.com/office/powerpoint/2010/main" val="297246201"/>
+      </p:ext>
+    </p:extLst>
+  </p:cSld>
+  <p:clrMapOvr>
+    <a:masterClrMapping/>
+  </p:clrMapOvr>
+</p:sld>
+</file>
+
+<file path=ppt/slides/slide13.xml><?xml version="1.0" encoding="utf-8"?>
+<p:sld xmlns:a="http://schemas.openxmlformats.org/drawingml/2006/main" xmlns:r="http://schemas.openxmlformats.org/officeDocument/2006/relationships" xmlns:p="http://schemas.openxmlformats.org/presentationml/2006/main">
+  <p:cSld>
+    <p:spTree>
+      <p:nvGrpSpPr>
+        <p:cNvPr id="1" name="">
+          <a:extLst>
+            <a:ext uri="{FF2B5EF4-FFF2-40B4-BE49-F238E27FC236}">
+              <a16:creationId xmlns:a16="http://schemas.microsoft.com/office/drawing/2014/main" id="{60E7DC36-F6CB-D36E-2A2A-1E1C5F06ABFD}"/>
+            </a:ext>
+          </a:extLst>
+        </p:cNvPr>
+        <p:cNvGrpSpPr/>
+        <p:nvPr/>
+      </p:nvGrpSpPr>
+      <p:grpSpPr>
+        <a:xfrm>
+          <a:off x="0" y="0"/>
+          <a:ext cx="0" cy="0"/>
+          <a:chOff x="0" y="0"/>
+          <a:chExt cx="0" cy="0"/>
+        </a:xfrm>
+      </p:grpSpPr>
+      <p:pic>
+        <p:nvPicPr>
+          <p:cNvPr id="5" name="圖片 4">
+            <a:extLst>
+              <a:ext uri="{FF2B5EF4-FFF2-40B4-BE49-F238E27FC236}">
+                <a16:creationId xmlns:a16="http://schemas.microsoft.com/office/drawing/2014/main" id="{C1C8E310-1740-1C47-3F7B-00C3126A6B11}"/>
+              </a:ext>
+            </a:extLst>
+          </p:cNvPr>
+          <p:cNvPicPr>
+            <a:picLocks noChangeAspect="1"/>
+          </p:cNvPicPr>
+          <p:nvPr/>
+        </p:nvPicPr>
+        <p:blipFill>
+          <a:blip r:embed="rId2">
+            <a:extLst>
+              <a:ext uri="{28A0092B-C50C-407E-A947-70E740481C1C}">
+                <a14:useLocalDpi xmlns:a14="http://schemas.microsoft.com/office/drawing/2010/main" val="0"/>
+              </a:ext>
+            </a:extLst>
+          </a:blip>
+          <a:stretch>
+            <a:fillRect/>
+          </a:stretch>
+        </p:blipFill>
+        <p:spPr>
+          <a:xfrm>
+            <a:off x="0" y="0"/>
+            <a:ext cx="12192000" cy="6858000"/>
+          </a:xfrm>
+          <a:prstGeom prst="rect">
+            <a:avLst/>
+          </a:prstGeom>
+        </p:spPr>
+      </p:pic>
+      <p:sp>
+        <p:nvSpPr>
+          <p:cNvPr id="6" name="文字方塊 5">
+            <a:extLst>
+              <a:ext uri="{FF2B5EF4-FFF2-40B4-BE49-F238E27FC236}">
+                <a16:creationId xmlns:a16="http://schemas.microsoft.com/office/drawing/2014/main" id="{BC8B181B-FF6F-28B9-1570-B399837B4305}"/>
+              </a:ext>
+            </a:extLst>
+          </p:cNvPr>
+          <p:cNvSpPr txBox="1"/>
+          <p:nvPr/>
+        </p:nvSpPr>
+        <p:spPr>
+          <a:xfrm>
+            <a:off x="4977745" y="1524000"/>
+            <a:ext cx="2236510" cy="707886"/>
+          </a:xfrm>
+          <a:prstGeom prst="rect">
+            <a:avLst/>
+          </a:prstGeom>
+          <a:noFill/>
+        </p:spPr>
+        <p:txBody>
+          <a:bodyPr wrap="none" rtlCol="0">
+            <a:spAutoFit/>
+          </a:bodyPr>
+          <a:lstStyle/>
+          <a:p>
+            <a:r>
+              <a:rPr lang="zh-TW" altLang="en-US" sz="4000" dirty="0">
+                <a:solidFill>
+                  <a:srgbClr val="00FFFF"/>
+                </a:solidFill>
+                <a:latin typeface="微軟正黑體" panose="020B0604030504040204" pitchFamily="34" charset="-120"/>
+                <a:ea typeface="微軟正黑體" panose="020B0604030504040204" pitchFamily="34" charset="-120"/>
+              </a:rPr>
+              <a:t>資料清洗</a:t>
+            </a:r>
+          </a:p>
+        </p:txBody>
+      </p:sp>
+      <p:pic>
+        <p:nvPicPr>
+          <p:cNvPr id="4" name="圖片 3">
+            <a:extLst>
+              <a:ext uri="{FF2B5EF4-FFF2-40B4-BE49-F238E27FC236}">
+                <a16:creationId xmlns:a16="http://schemas.microsoft.com/office/drawing/2014/main" id="{A997ED87-7B6B-2D8C-C4F3-F798610D3021}"/>
+              </a:ext>
+            </a:extLst>
+          </p:cNvPr>
+          <p:cNvPicPr>
+            <a:picLocks noChangeAspect="1"/>
+          </p:cNvPicPr>
+          <p:nvPr/>
+        </p:nvPicPr>
+        <p:blipFill>
+          <a:blip r:embed="rId3">
+            <a:extLst>
+              <a:ext uri="{28A0092B-C50C-407E-A947-70E740481C1C}">
+                <a14:useLocalDpi xmlns:a14="http://schemas.microsoft.com/office/drawing/2010/main" val="0"/>
+              </a:ext>
+            </a:extLst>
+          </a:blip>
+          <a:stretch>
+            <a:fillRect/>
+          </a:stretch>
+        </p:blipFill>
+        <p:spPr>
+          <a:xfrm>
+            <a:off x="2765190" y="2231886"/>
+            <a:ext cx="6661619" cy="3434061"/>
+          </a:xfrm>
+          <a:prstGeom prst="rect">
+            <a:avLst/>
+          </a:prstGeom>
+        </p:spPr>
+      </p:pic>
+    </p:spTree>
+    <p:extLst>
+      <p:ext uri="{BB962C8B-B14F-4D97-AF65-F5344CB8AC3E}">
+        <p14:creationId xmlns:p14="http://schemas.microsoft.com/office/powerpoint/2010/main" val="4139995655"/>
       </p:ext>
     </p:extLst>
   </p:cSld>
@@ -4945,8 +4988,8 @@
         </p:nvSpPr>
         <p:spPr>
           <a:xfrm>
-            <a:off x="4977745" y="1524000"/>
-            <a:ext cx="2236510" cy="707886"/>
+            <a:off x="4464784" y="1524000"/>
+            <a:ext cx="3262432" cy="707886"/>
           </a:xfrm>
           <a:prstGeom prst="rect">
             <a:avLst/>
@@ -4967,7 +5010,7 @@
                 <a:latin typeface="微軟正黑體" panose="020B0604030504040204" pitchFamily="34" charset="-120"/>
                 <a:ea typeface="微軟正黑體" panose="020B0604030504040204" pitchFamily="34" charset="-120"/>
               </a:rPr>
-              <a:t>額外分享</a:t>
+              <a:t>近期額外分享</a:t>
             </a:r>
           </a:p>
         </p:txBody>
@@ -5684,6 +5727,26 @@
               </a:rPr>
               <a:t>VS Code</a:t>
             </a:r>
+            <a:r>
+              <a:rPr lang="zh-TW" altLang="en-US" sz="2400" dirty="0">
+                <a:solidFill>
+                  <a:srgbClr val="00CCFF"/>
+                </a:solidFill>
+                <a:latin typeface="微軟正黑體" panose="020B0604030504040204" pitchFamily="34" charset="-120"/>
+                <a:ea typeface="微軟正黑體" panose="020B0604030504040204" pitchFamily="34" charset="-120"/>
+              </a:rPr>
+              <a:t>、</a:t>
+            </a:r>
+            <a:r>
+              <a:rPr lang="en-US" altLang="zh-TW" sz="2400" dirty="0">
+                <a:solidFill>
+                  <a:srgbClr val="00CCFF"/>
+                </a:solidFill>
+                <a:latin typeface="微軟正黑體" panose="020B0604030504040204" pitchFamily="34" charset="-120"/>
+                <a:ea typeface="微軟正黑體" panose="020B0604030504040204" pitchFamily="34" charset="-120"/>
+              </a:rPr>
+              <a:t>GitHub</a:t>
+            </a:r>
           </a:p>
           <a:p>
             <a:endParaRPr lang="zh-TW" altLang="en-US" sz="1400" dirty="0">
@@ -6166,523 +6229,6 @@
         <p:cNvPr id="1" name="">
           <a:extLst>
             <a:ext uri="{FF2B5EF4-FFF2-40B4-BE49-F238E27FC236}">
-              <a16:creationId xmlns:a16="http://schemas.microsoft.com/office/drawing/2014/main" id="{F9942900-E13C-370C-3264-E7948366DDC9}"/>
-            </a:ext>
-          </a:extLst>
-        </p:cNvPr>
-        <p:cNvGrpSpPr/>
-        <p:nvPr/>
-      </p:nvGrpSpPr>
-      <p:grpSpPr>
-        <a:xfrm>
-          <a:off x="0" y="0"/>
-          <a:ext cx="0" cy="0"/>
-          <a:chOff x="0" y="0"/>
-          <a:chExt cx="0" cy="0"/>
-        </a:xfrm>
-      </p:grpSpPr>
-      <p:pic>
-        <p:nvPicPr>
-          <p:cNvPr id="5" name="圖片 4">
-            <a:extLst>
-              <a:ext uri="{FF2B5EF4-FFF2-40B4-BE49-F238E27FC236}">
-                <a16:creationId xmlns:a16="http://schemas.microsoft.com/office/drawing/2014/main" id="{0F5C274B-05F3-B016-5E16-02123F97D3E7}"/>
-              </a:ext>
-            </a:extLst>
-          </p:cNvPr>
-          <p:cNvPicPr>
-            <a:picLocks noChangeAspect="1"/>
-          </p:cNvPicPr>
-          <p:nvPr/>
-        </p:nvPicPr>
-        <p:blipFill>
-          <a:blip r:embed="rId2">
-            <a:extLst>
-              <a:ext uri="{28A0092B-C50C-407E-A947-70E740481C1C}">
-                <a14:useLocalDpi xmlns:a14="http://schemas.microsoft.com/office/drawing/2010/main" val="0"/>
-              </a:ext>
-            </a:extLst>
-          </a:blip>
-          <a:stretch>
-            <a:fillRect/>
-          </a:stretch>
-        </p:blipFill>
-        <p:spPr>
-          <a:xfrm>
-            <a:off x="0" y="0"/>
-            <a:ext cx="12192000" cy="6858000"/>
-          </a:xfrm>
-          <a:prstGeom prst="rect">
-            <a:avLst/>
-          </a:prstGeom>
-        </p:spPr>
-      </p:pic>
-      <p:sp>
-        <p:nvSpPr>
-          <p:cNvPr id="6" name="文字方塊 5">
-            <a:extLst>
-              <a:ext uri="{FF2B5EF4-FFF2-40B4-BE49-F238E27FC236}">
-                <a16:creationId xmlns:a16="http://schemas.microsoft.com/office/drawing/2014/main" id="{F3F24C56-65BF-E447-92D8-42B3EC228F43}"/>
-              </a:ext>
-            </a:extLst>
-          </p:cNvPr>
-          <p:cNvSpPr txBox="1"/>
-          <p:nvPr/>
-        </p:nvSpPr>
-        <p:spPr>
-          <a:xfrm>
-            <a:off x="4977745" y="1524000"/>
-            <a:ext cx="2236510" cy="707886"/>
-          </a:xfrm>
-          <a:prstGeom prst="rect">
-            <a:avLst/>
-          </a:prstGeom>
-          <a:noFill/>
-        </p:spPr>
-        <p:txBody>
-          <a:bodyPr wrap="none" rtlCol="0">
-            <a:spAutoFit/>
-          </a:bodyPr>
-          <a:lstStyle/>
-          <a:p>
-            <a:r>
-              <a:rPr lang="zh-TW" altLang="en-US" sz="4000" dirty="0">
-                <a:solidFill>
-                  <a:srgbClr val="00FFFF"/>
-                </a:solidFill>
-                <a:latin typeface="微軟正黑體" panose="020B0604030504040204" pitchFamily="34" charset="-120"/>
-                <a:ea typeface="微軟正黑體" panose="020B0604030504040204" pitchFamily="34" charset="-120"/>
-              </a:rPr>
-              <a:t>資料獲取</a:t>
-            </a:r>
-          </a:p>
-        </p:txBody>
-      </p:sp>
-      <p:sp>
-        <p:nvSpPr>
-          <p:cNvPr id="7" name="文字方塊 6">
-            <a:extLst>
-              <a:ext uri="{FF2B5EF4-FFF2-40B4-BE49-F238E27FC236}">
-                <a16:creationId xmlns:a16="http://schemas.microsoft.com/office/drawing/2014/main" id="{5047E607-F08A-B013-E2C2-DDFEB889874A}"/>
-              </a:ext>
-            </a:extLst>
-          </p:cNvPr>
-          <p:cNvSpPr txBox="1"/>
-          <p:nvPr/>
-        </p:nvSpPr>
-        <p:spPr>
-          <a:xfrm>
-            <a:off x="2261924" y="2476500"/>
-            <a:ext cx="7668152" cy="1132490"/>
-          </a:xfrm>
-          <a:prstGeom prst="rect">
-            <a:avLst/>
-          </a:prstGeom>
-          <a:noFill/>
-        </p:spPr>
-        <p:txBody>
-          <a:bodyPr wrap="square" rtlCol="0">
-            <a:spAutoFit/>
-          </a:bodyPr>
-          <a:lstStyle/>
-          <a:p>
-            <a:pPr>
-              <a:lnSpc>
-                <a:spcPct val="150000"/>
-              </a:lnSpc>
-            </a:pPr>
-            <a:r>
-              <a:rPr lang="zh-TW" altLang="en-US" sz="2400" dirty="0">
-                <a:solidFill>
-                  <a:srgbClr val="00CCFF"/>
-                </a:solidFill>
-                <a:latin typeface="微軟正黑體" panose="020B0604030504040204" pitchFamily="34" charset="-120"/>
-                <a:ea typeface="微軟正黑體" panose="020B0604030504040204" pitchFamily="34" charset="-120"/>
-              </a:rPr>
-              <a:t>從</a:t>
-            </a:r>
-            <a:r>
-              <a:rPr lang="en-US" altLang="zh-TW" sz="2400" dirty="0" err="1">
-                <a:solidFill>
-                  <a:srgbClr val="00CCFF"/>
-                </a:solidFill>
-                <a:latin typeface="微軟正黑體" panose="020B0604030504040204" pitchFamily="34" charset="-120"/>
-                <a:ea typeface="微軟正黑體" panose="020B0604030504040204" pitchFamily="34" charset="-120"/>
-              </a:rPr>
-              <a:t>kaggle</a:t>
-            </a:r>
-            <a:r>
-              <a:rPr lang="zh-TW" altLang="en-US" sz="2400" dirty="0">
-                <a:solidFill>
-                  <a:srgbClr val="00CCFF"/>
-                </a:solidFill>
-                <a:latin typeface="微軟正黑體" panose="020B0604030504040204" pitchFamily="34" charset="-120"/>
-                <a:ea typeface="微軟正黑體" panose="020B0604030504040204" pitchFamily="34" charset="-120"/>
-              </a:rPr>
-              <a:t>下載關於這次主題的</a:t>
-            </a:r>
-            <a:r>
-              <a:rPr lang="en-US" altLang="zh-TW" sz="2400" dirty="0">
-                <a:solidFill>
-                  <a:srgbClr val="00CCFF"/>
-                </a:solidFill>
-                <a:latin typeface="微軟正黑體" panose="020B0604030504040204" pitchFamily="34" charset="-120"/>
-                <a:ea typeface="微軟正黑體" panose="020B0604030504040204" pitchFamily="34" charset="-120"/>
-              </a:rPr>
-              <a:t>csv</a:t>
-            </a:r>
-            <a:r>
-              <a:rPr lang="zh-TW" altLang="en-US" sz="2400" dirty="0">
-                <a:solidFill>
-                  <a:srgbClr val="00CCFF"/>
-                </a:solidFill>
-                <a:latin typeface="微軟正黑體" panose="020B0604030504040204" pitchFamily="34" charset="-120"/>
-                <a:ea typeface="微軟正黑體" panose="020B0604030504040204" pitchFamily="34" charset="-120"/>
-              </a:rPr>
-              <a:t>，並且在</a:t>
-            </a:r>
-            <a:r>
-              <a:rPr lang="en-US" altLang="zh-TW" sz="2400" dirty="0">
-                <a:solidFill>
-                  <a:srgbClr val="00CCFF"/>
-                </a:solidFill>
-                <a:latin typeface="微軟正黑體" panose="020B0604030504040204" pitchFamily="34" charset="-120"/>
-                <a:ea typeface="微軟正黑體" panose="020B0604030504040204" pitchFamily="34" charset="-120"/>
-              </a:rPr>
-              <a:t>python</a:t>
-            </a:r>
-            <a:r>
-              <a:rPr lang="zh-TW" altLang="en-US" sz="2400" dirty="0">
-                <a:solidFill>
-                  <a:srgbClr val="00CCFF"/>
-                </a:solidFill>
-                <a:latin typeface="微軟正黑體" panose="020B0604030504040204" pitchFamily="34" charset="-120"/>
-                <a:ea typeface="微軟正黑體" panose="020B0604030504040204" pitchFamily="34" charset="-120"/>
-              </a:rPr>
-              <a:t>進行資料的清洗及擷取。</a:t>
-            </a:r>
-          </a:p>
-        </p:txBody>
-      </p:sp>
-    </p:spTree>
-    <p:extLst>
-      <p:ext uri="{BB962C8B-B14F-4D97-AF65-F5344CB8AC3E}">
-        <p14:creationId xmlns:p14="http://schemas.microsoft.com/office/powerpoint/2010/main" val="909956457"/>
-      </p:ext>
-    </p:extLst>
-  </p:cSld>
-  <p:clrMapOvr>
-    <a:masterClrMapping/>
-  </p:clrMapOvr>
-</p:sld>
-</file>
-
-<file path=ppt/slides/slide5.xml><?xml version="1.0" encoding="utf-8"?>
-<p:sld xmlns:a="http://schemas.openxmlformats.org/drawingml/2006/main" xmlns:r="http://schemas.openxmlformats.org/officeDocument/2006/relationships" xmlns:p="http://schemas.openxmlformats.org/presentationml/2006/main">
-  <p:cSld>
-    <p:spTree>
-      <p:nvGrpSpPr>
-        <p:cNvPr id="1" name="">
-          <a:extLst>
-            <a:ext uri="{FF2B5EF4-FFF2-40B4-BE49-F238E27FC236}">
-              <a16:creationId xmlns:a16="http://schemas.microsoft.com/office/drawing/2014/main" id="{877928A0-A2F1-87A2-DB6B-76786549D67C}"/>
-            </a:ext>
-          </a:extLst>
-        </p:cNvPr>
-        <p:cNvGrpSpPr/>
-        <p:nvPr/>
-      </p:nvGrpSpPr>
-      <p:grpSpPr>
-        <a:xfrm>
-          <a:off x="0" y="0"/>
-          <a:ext cx="0" cy="0"/>
-          <a:chOff x="0" y="0"/>
-          <a:chExt cx="0" cy="0"/>
-        </a:xfrm>
-      </p:grpSpPr>
-      <p:pic>
-        <p:nvPicPr>
-          <p:cNvPr id="5" name="圖片 4">
-            <a:extLst>
-              <a:ext uri="{FF2B5EF4-FFF2-40B4-BE49-F238E27FC236}">
-                <a16:creationId xmlns:a16="http://schemas.microsoft.com/office/drawing/2014/main" id="{D85EFCAD-3CFB-C8BC-8E90-1BBABDCF693E}"/>
-              </a:ext>
-            </a:extLst>
-          </p:cNvPr>
-          <p:cNvPicPr>
-            <a:picLocks noChangeAspect="1"/>
-          </p:cNvPicPr>
-          <p:nvPr/>
-        </p:nvPicPr>
-        <p:blipFill>
-          <a:blip r:embed="rId2">
-            <a:extLst>
-              <a:ext uri="{28A0092B-C50C-407E-A947-70E740481C1C}">
-                <a14:useLocalDpi xmlns:a14="http://schemas.microsoft.com/office/drawing/2010/main" val="0"/>
-              </a:ext>
-            </a:extLst>
-          </a:blip>
-          <a:stretch>
-            <a:fillRect/>
-          </a:stretch>
-        </p:blipFill>
-        <p:spPr>
-          <a:xfrm>
-            <a:off x="0" y="0"/>
-            <a:ext cx="12192000" cy="6858000"/>
-          </a:xfrm>
-          <a:prstGeom prst="rect">
-            <a:avLst/>
-          </a:prstGeom>
-        </p:spPr>
-      </p:pic>
-      <p:sp>
-        <p:nvSpPr>
-          <p:cNvPr id="6" name="文字方塊 5">
-            <a:extLst>
-              <a:ext uri="{FF2B5EF4-FFF2-40B4-BE49-F238E27FC236}">
-                <a16:creationId xmlns:a16="http://schemas.microsoft.com/office/drawing/2014/main" id="{2B043C29-F607-7BCE-4B47-FB6B6C780514}"/>
-              </a:ext>
-            </a:extLst>
-          </p:cNvPr>
-          <p:cNvSpPr txBox="1"/>
-          <p:nvPr/>
-        </p:nvSpPr>
-        <p:spPr>
-          <a:xfrm>
-            <a:off x="4977745" y="1524000"/>
-            <a:ext cx="2236510" cy="707886"/>
-          </a:xfrm>
-          <a:prstGeom prst="rect">
-            <a:avLst/>
-          </a:prstGeom>
-          <a:noFill/>
-        </p:spPr>
-        <p:txBody>
-          <a:bodyPr wrap="none" rtlCol="0">
-            <a:spAutoFit/>
-          </a:bodyPr>
-          <a:lstStyle/>
-          <a:p>
-            <a:r>
-              <a:rPr lang="zh-TW" altLang="en-US" sz="4000" dirty="0">
-                <a:solidFill>
-                  <a:srgbClr val="00FFFF"/>
-                </a:solidFill>
-                <a:latin typeface="微軟正黑體" panose="020B0604030504040204" pitchFamily="34" charset="-120"/>
-                <a:ea typeface="微軟正黑體" panose="020B0604030504040204" pitchFamily="34" charset="-120"/>
-              </a:rPr>
-              <a:t>資料清洗</a:t>
-            </a:r>
-          </a:p>
-        </p:txBody>
-      </p:sp>
-      <p:pic>
-        <p:nvPicPr>
-          <p:cNvPr id="3" name="圖片 2">
-            <a:extLst>
-              <a:ext uri="{FF2B5EF4-FFF2-40B4-BE49-F238E27FC236}">
-                <a16:creationId xmlns:a16="http://schemas.microsoft.com/office/drawing/2014/main" id="{27199567-ABFB-D7E5-6614-71E07447DB21}"/>
-              </a:ext>
-            </a:extLst>
-          </p:cNvPr>
-          <p:cNvPicPr>
-            <a:picLocks noChangeAspect="1"/>
-          </p:cNvPicPr>
-          <p:nvPr/>
-        </p:nvPicPr>
-        <p:blipFill>
-          <a:blip r:embed="rId3">
-            <a:extLst>
-              <a:ext uri="{28A0092B-C50C-407E-A947-70E740481C1C}">
-                <a14:useLocalDpi xmlns:a14="http://schemas.microsoft.com/office/drawing/2010/main" val="0"/>
-              </a:ext>
-            </a:extLst>
-          </a:blip>
-          <a:stretch>
-            <a:fillRect/>
-          </a:stretch>
-        </p:blipFill>
-        <p:spPr>
-          <a:xfrm>
-            <a:off x="3343127" y="2231886"/>
-            <a:ext cx="5505745" cy="3372889"/>
-          </a:xfrm>
-          <a:prstGeom prst="rect">
-            <a:avLst/>
-          </a:prstGeom>
-        </p:spPr>
-      </p:pic>
-    </p:spTree>
-    <p:extLst>
-      <p:ext uri="{BB962C8B-B14F-4D97-AF65-F5344CB8AC3E}">
-        <p14:creationId xmlns:p14="http://schemas.microsoft.com/office/powerpoint/2010/main" val="297246201"/>
-      </p:ext>
-    </p:extLst>
-  </p:cSld>
-  <p:clrMapOvr>
-    <a:masterClrMapping/>
-  </p:clrMapOvr>
-</p:sld>
-</file>
-
-<file path=ppt/slides/slide6.xml><?xml version="1.0" encoding="utf-8"?>
-<p:sld xmlns:a="http://schemas.openxmlformats.org/drawingml/2006/main" xmlns:r="http://schemas.openxmlformats.org/officeDocument/2006/relationships" xmlns:p="http://schemas.openxmlformats.org/presentationml/2006/main">
-  <p:cSld>
-    <p:spTree>
-      <p:nvGrpSpPr>
-        <p:cNvPr id="1" name="">
-          <a:extLst>
-            <a:ext uri="{FF2B5EF4-FFF2-40B4-BE49-F238E27FC236}">
-              <a16:creationId xmlns:a16="http://schemas.microsoft.com/office/drawing/2014/main" id="{60E7DC36-F6CB-D36E-2A2A-1E1C5F06ABFD}"/>
-            </a:ext>
-          </a:extLst>
-        </p:cNvPr>
-        <p:cNvGrpSpPr/>
-        <p:nvPr/>
-      </p:nvGrpSpPr>
-      <p:grpSpPr>
-        <a:xfrm>
-          <a:off x="0" y="0"/>
-          <a:ext cx="0" cy="0"/>
-          <a:chOff x="0" y="0"/>
-          <a:chExt cx="0" cy="0"/>
-        </a:xfrm>
-      </p:grpSpPr>
-      <p:pic>
-        <p:nvPicPr>
-          <p:cNvPr id="5" name="圖片 4">
-            <a:extLst>
-              <a:ext uri="{FF2B5EF4-FFF2-40B4-BE49-F238E27FC236}">
-                <a16:creationId xmlns:a16="http://schemas.microsoft.com/office/drawing/2014/main" id="{C1C8E310-1740-1C47-3F7B-00C3126A6B11}"/>
-              </a:ext>
-            </a:extLst>
-          </p:cNvPr>
-          <p:cNvPicPr>
-            <a:picLocks noChangeAspect="1"/>
-          </p:cNvPicPr>
-          <p:nvPr/>
-        </p:nvPicPr>
-        <p:blipFill>
-          <a:blip r:embed="rId2">
-            <a:extLst>
-              <a:ext uri="{28A0092B-C50C-407E-A947-70E740481C1C}">
-                <a14:useLocalDpi xmlns:a14="http://schemas.microsoft.com/office/drawing/2010/main" val="0"/>
-              </a:ext>
-            </a:extLst>
-          </a:blip>
-          <a:stretch>
-            <a:fillRect/>
-          </a:stretch>
-        </p:blipFill>
-        <p:spPr>
-          <a:xfrm>
-            <a:off x="0" y="0"/>
-            <a:ext cx="12192000" cy="6858000"/>
-          </a:xfrm>
-          <a:prstGeom prst="rect">
-            <a:avLst/>
-          </a:prstGeom>
-        </p:spPr>
-      </p:pic>
-      <p:sp>
-        <p:nvSpPr>
-          <p:cNvPr id="6" name="文字方塊 5">
-            <a:extLst>
-              <a:ext uri="{FF2B5EF4-FFF2-40B4-BE49-F238E27FC236}">
-                <a16:creationId xmlns:a16="http://schemas.microsoft.com/office/drawing/2014/main" id="{BC8B181B-FF6F-28B9-1570-B399837B4305}"/>
-              </a:ext>
-            </a:extLst>
-          </p:cNvPr>
-          <p:cNvSpPr txBox="1"/>
-          <p:nvPr/>
-        </p:nvSpPr>
-        <p:spPr>
-          <a:xfrm>
-            <a:off x="4977745" y="1524000"/>
-            <a:ext cx="2236510" cy="707886"/>
-          </a:xfrm>
-          <a:prstGeom prst="rect">
-            <a:avLst/>
-          </a:prstGeom>
-          <a:noFill/>
-        </p:spPr>
-        <p:txBody>
-          <a:bodyPr wrap="none" rtlCol="0">
-            <a:spAutoFit/>
-          </a:bodyPr>
-          <a:lstStyle/>
-          <a:p>
-            <a:r>
-              <a:rPr lang="zh-TW" altLang="en-US" sz="4000" dirty="0">
-                <a:solidFill>
-                  <a:srgbClr val="00FFFF"/>
-                </a:solidFill>
-                <a:latin typeface="微軟正黑體" panose="020B0604030504040204" pitchFamily="34" charset="-120"/>
-                <a:ea typeface="微軟正黑體" panose="020B0604030504040204" pitchFamily="34" charset="-120"/>
-              </a:rPr>
-              <a:t>資料清洗</a:t>
-            </a:r>
-          </a:p>
-        </p:txBody>
-      </p:sp>
-      <p:pic>
-        <p:nvPicPr>
-          <p:cNvPr id="4" name="圖片 3">
-            <a:extLst>
-              <a:ext uri="{FF2B5EF4-FFF2-40B4-BE49-F238E27FC236}">
-                <a16:creationId xmlns:a16="http://schemas.microsoft.com/office/drawing/2014/main" id="{A997ED87-7B6B-2D8C-C4F3-F798610D3021}"/>
-              </a:ext>
-            </a:extLst>
-          </p:cNvPr>
-          <p:cNvPicPr>
-            <a:picLocks noChangeAspect="1"/>
-          </p:cNvPicPr>
-          <p:nvPr/>
-        </p:nvPicPr>
-        <p:blipFill>
-          <a:blip r:embed="rId3">
-            <a:extLst>
-              <a:ext uri="{28A0092B-C50C-407E-A947-70E740481C1C}">
-                <a14:useLocalDpi xmlns:a14="http://schemas.microsoft.com/office/drawing/2010/main" val="0"/>
-              </a:ext>
-            </a:extLst>
-          </a:blip>
-          <a:stretch>
-            <a:fillRect/>
-          </a:stretch>
-        </p:blipFill>
-        <p:spPr>
-          <a:xfrm>
-            <a:off x="2765190" y="2231886"/>
-            <a:ext cx="6661619" cy="3434061"/>
-          </a:xfrm>
-          <a:prstGeom prst="rect">
-            <a:avLst/>
-          </a:prstGeom>
-        </p:spPr>
-      </p:pic>
-    </p:spTree>
-    <p:extLst>
-      <p:ext uri="{BB962C8B-B14F-4D97-AF65-F5344CB8AC3E}">
-        <p14:creationId xmlns:p14="http://schemas.microsoft.com/office/powerpoint/2010/main" val="4139995655"/>
-      </p:ext>
-    </p:extLst>
-  </p:cSld>
-  <p:clrMapOvr>
-    <a:masterClrMapping/>
-  </p:clrMapOvr>
-</p:sld>
-</file>
-
-<file path=ppt/slides/slide7.xml><?xml version="1.0" encoding="utf-8"?>
-<p:sld xmlns:a="http://schemas.openxmlformats.org/drawingml/2006/main" xmlns:r="http://schemas.openxmlformats.org/officeDocument/2006/relationships" xmlns:p="http://schemas.openxmlformats.org/presentationml/2006/main">
-  <p:cSld>
-    <p:spTree>
-      <p:nvGrpSpPr>
-        <p:cNvPr id="1" name="">
-          <a:extLst>
-            <a:ext uri="{FF2B5EF4-FFF2-40B4-BE49-F238E27FC236}">
               <a16:creationId xmlns:a16="http://schemas.microsoft.com/office/drawing/2014/main" id="{3375EE94-A730-DABF-3FBB-63ECD9D89CB9}"/>
             </a:ext>
           </a:extLst>
@@ -6834,7 +6380,7 @@
 </p:sld>
 </file>
 
-<file path=ppt/slides/slide8.xml><?xml version="1.0" encoding="utf-8"?>
+<file path=ppt/slides/slide5.xml><?xml version="1.0" encoding="utf-8"?>
 <p:sld xmlns:a="http://schemas.openxmlformats.org/drawingml/2006/main" xmlns:r="http://schemas.openxmlformats.org/officeDocument/2006/relationships" xmlns:p="http://schemas.openxmlformats.org/presentationml/2006/main">
   <p:cSld>
     <p:spTree>
@@ -6993,7 +6539,7 @@
 </p:sld>
 </file>
 
-<file path=ppt/slides/slide9.xml><?xml version="1.0" encoding="utf-8"?>
+<file path=ppt/slides/slide6.xml><?xml version="1.0" encoding="utf-8"?>
 <p:sld xmlns:a="http://schemas.openxmlformats.org/drawingml/2006/main" xmlns:r="http://schemas.openxmlformats.org/officeDocument/2006/relationships" xmlns:p="http://schemas.openxmlformats.org/presentationml/2006/main">
   <p:cSld>
     <p:spTree>
@@ -7142,6 +6688,480 @@
     <p:extLst>
       <p:ext uri="{BB962C8B-B14F-4D97-AF65-F5344CB8AC3E}">
         <p14:creationId xmlns:p14="http://schemas.microsoft.com/office/powerpoint/2010/main" val="4060790127"/>
+      </p:ext>
+    </p:extLst>
+  </p:cSld>
+  <p:clrMapOvr>
+    <a:masterClrMapping/>
+  </p:clrMapOvr>
+</p:sld>
+</file>
+
+<file path=ppt/slides/slide7.xml><?xml version="1.0" encoding="utf-8"?>
+<p:sld xmlns:a="http://schemas.openxmlformats.org/drawingml/2006/main" xmlns:r="http://schemas.openxmlformats.org/officeDocument/2006/relationships" xmlns:p="http://schemas.openxmlformats.org/presentationml/2006/main">
+  <p:cSld>
+    <p:spTree>
+      <p:nvGrpSpPr>
+        <p:cNvPr id="1" name="">
+          <a:extLst>
+            <a:ext uri="{FF2B5EF4-FFF2-40B4-BE49-F238E27FC236}">
+              <a16:creationId xmlns:a16="http://schemas.microsoft.com/office/drawing/2014/main" id="{0B2E3A6C-1C8C-1CAB-7694-26B03E2BEE6C}"/>
+            </a:ext>
+          </a:extLst>
+        </p:cNvPr>
+        <p:cNvGrpSpPr/>
+        <p:nvPr/>
+      </p:nvGrpSpPr>
+      <p:grpSpPr>
+        <a:xfrm>
+          <a:off x="0" y="0"/>
+          <a:ext cx="0" cy="0"/>
+          <a:chOff x="0" y="0"/>
+          <a:chExt cx="0" cy="0"/>
+        </a:xfrm>
+      </p:grpSpPr>
+      <p:pic>
+        <p:nvPicPr>
+          <p:cNvPr id="5" name="圖片 4">
+            <a:extLst>
+              <a:ext uri="{FF2B5EF4-FFF2-40B4-BE49-F238E27FC236}">
+                <a16:creationId xmlns:a16="http://schemas.microsoft.com/office/drawing/2014/main" id="{64410478-C5EA-3CF2-4A24-E9A34689F9B3}"/>
+              </a:ext>
+            </a:extLst>
+          </p:cNvPr>
+          <p:cNvPicPr>
+            <a:picLocks noChangeAspect="1"/>
+          </p:cNvPicPr>
+          <p:nvPr/>
+        </p:nvPicPr>
+        <p:blipFill>
+          <a:blip r:embed="rId2">
+            <a:extLst>
+              <a:ext uri="{28A0092B-C50C-407E-A947-70E740481C1C}">
+                <a14:useLocalDpi xmlns:a14="http://schemas.microsoft.com/office/drawing/2010/main" val="0"/>
+              </a:ext>
+            </a:extLst>
+          </a:blip>
+          <a:stretch>
+            <a:fillRect/>
+          </a:stretch>
+        </p:blipFill>
+        <p:spPr>
+          <a:xfrm>
+            <a:off x="0" y="0"/>
+            <a:ext cx="12192000" cy="6858000"/>
+          </a:xfrm>
+          <a:prstGeom prst="rect">
+            <a:avLst/>
+          </a:prstGeom>
+        </p:spPr>
+      </p:pic>
+      <p:sp>
+        <p:nvSpPr>
+          <p:cNvPr id="6" name="文字方塊 5">
+            <a:extLst>
+              <a:ext uri="{FF2B5EF4-FFF2-40B4-BE49-F238E27FC236}">
+                <a16:creationId xmlns:a16="http://schemas.microsoft.com/office/drawing/2014/main" id="{5EEDA4C8-EAA3-8689-BF24-12B1EEE3A0A2}"/>
+              </a:ext>
+            </a:extLst>
+          </p:cNvPr>
+          <p:cNvSpPr txBox="1"/>
+          <p:nvPr/>
+        </p:nvSpPr>
+        <p:spPr>
+          <a:xfrm>
+            <a:off x="4517298" y="1524000"/>
+            <a:ext cx="3157403" cy="707886"/>
+          </a:xfrm>
+          <a:prstGeom prst="rect">
+            <a:avLst/>
+          </a:prstGeom>
+          <a:noFill/>
+        </p:spPr>
+        <p:txBody>
+          <a:bodyPr wrap="none" rtlCol="0">
+            <a:spAutoFit/>
+          </a:bodyPr>
+          <a:lstStyle/>
+          <a:p>
+            <a:r>
+              <a:rPr lang="en-US" altLang="zh-TW" sz="4000" dirty="0" err="1">
+                <a:solidFill>
+                  <a:srgbClr val="00FFFF"/>
+                </a:solidFill>
+                <a:latin typeface="微軟正黑體" panose="020B0604030504040204" pitchFamily="34" charset="-120"/>
+                <a:ea typeface="微軟正黑體" panose="020B0604030504040204" pitchFamily="34" charset="-120"/>
+              </a:rPr>
+              <a:t>PowerBI</a:t>
+            </a:r>
+            <a:r>
+              <a:rPr lang="zh-TW" altLang="en-US" sz="4000" dirty="0">
+                <a:solidFill>
+                  <a:srgbClr val="00FFFF"/>
+                </a:solidFill>
+                <a:latin typeface="微軟正黑體" panose="020B0604030504040204" pitchFamily="34" charset="-120"/>
+                <a:ea typeface="微軟正黑體" panose="020B0604030504040204" pitchFamily="34" charset="-120"/>
+              </a:rPr>
+              <a:t>展示</a:t>
+            </a:r>
+          </a:p>
+        </p:txBody>
+      </p:sp>
+      <p:pic>
+        <p:nvPicPr>
+          <p:cNvPr id="4" name="圖片 3">
+            <a:extLst>
+              <a:ext uri="{FF2B5EF4-FFF2-40B4-BE49-F238E27FC236}">
+                <a16:creationId xmlns:a16="http://schemas.microsoft.com/office/drawing/2014/main" id="{43F1D34A-703F-687C-16F9-99FFE19B7FE1}"/>
+              </a:ext>
+            </a:extLst>
+          </p:cNvPr>
+          <p:cNvPicPr>
+            <a:picLocks noChangeAspect="1"/>
+          </p:cNvPicPr>
+          <p:nvPr/>
+        </p:nvPicPr>
+        <p:blipFill>
+          <a:blip r:embed="rId3">
+            <a:extLst>
+              <a:ext uri="{28A0092B-C50C-407E-A947-70E740481C1C}">
+                <a14:useLocalDpi xmlns:a14="http://schemas.microsoft.com/office/drawing/2010/main" val="0"/>
+              </a:ext>
+            </a:extLst>
+          </a:blip>
+          <a:srcRect/>
+          <a:stretch/>
+        </p:blipFill>
+        <p:spPr>
+          <a:xfrm>
+            <a:off x="3070105" y="2229818"/>
+            <a:ext cx="6051786" cy="3402999"/>
+          </a:xfrm>
+          <a:prstGeom prst="rect">
+            <a:avLst/>
+          </a:prstGeom>
+        </p:spPr>
+      </p:pic>
+    </p:spTree>
+    <p:extLst>
+      <p:ext uri="{BB962C8B-B14F-4D97-AF65-F5344CB8AC3E}">
+        <p14:creationId xmlns:p14="http://schemas.microsoft.com/office/powerpoint/2010/main" val="2372769068"/>
+      </p:ext>
+    </p:extLst>
+  </p:cSld>
+  <p:clrMapOvr>
+    <a:masterClrMapping/>
+  </p:clrMapOvr>
+</p:sld>
+</file>
+
+<file path=ppt/slides/slide8.xml><?xml version="1.0" encoding="utf-8"?>
+<p:sld xmlns:a="http://schemas.openxmlformats.org/drawingml/2006/main" xmlns:r="http://schemas.openxmlformats.org/officeDocument/2006/relationships" xmlns:p="http://schemas.openxmlformats.org/presentationml/2006/main">
+  <p:cSld>
+    <p:spTree>
+      <p:nvGrpSpPr>
+        <p:cNvPr id="1" name="">
+          <a:extLst>
+            <a:ext uri="{FF2B5EF4-FFF2-40B4-BE49-F238E27FC236}">
+              <a16:creationId xmlns:a16="http://schemas.microsoft.com/office/drawing/2014/main" id="{96B867E1-730F-3AB3-4A6E-3E1331257F8A}"/>
+            </a:ext>
+          </a:extLst>
+        </p:cNvPr>
+        <p:cNvGrpSpPr/>
+        <p:nvPr/>
+      </p:nvGrpSpPr>
+      <p:grpSpPr>
+        <a:xfrm>
+          <a:off x="0" y="0"/>
+          <a:ext cx="0" cy="0"/>
+          <a:chOff x="0" y="0"/>
+          <a:chExt cx="0" cy="0"/>
+        </a:xfrm>
+      </p:grpSpPr>
+      <p:pic>
+        <p:nvPicPr>
+          <p:cNvPr id="5" name="圖片 4">
+            <a:extLst>
+              <a:ext uri="{FF2B5EF4-FFF2-40B4-BE49-F238E27FC236}">
+                <a16:creationId xmlns:a16="http://schemas.microsoft.com/office/drawing/2014/main" id="{CA88CB68-470F-4F95-7908-6B93A4CE526F}"/>
+              </a:ext>
+            </a:extLst>
+          </p:cNvPr>
+          <p:cNvPicPr>
+            <a:picLocks noChangeAspect="1"/>
+          </p:cNvPicPr>
+          <p:nvPr/>
+        </p:nvPicPr>
+        <p:blipFill>
+          <a:blip r:embed="rId2">
+            <a:extLst>
+              <a:ext uri="{28A0092B-C50C-407E-A947-70E740481C1C}">
+                <a14:useLocalDpi xmlns:a14="http://schemas.microsoft.com/office/drawing/2010/main" val="0"/>
+              </a:ext>
+            </a:extLst>
+          </a:blip>
+          <a:stretch>
+            <a:fillRect/>
+          </a:stretch>
+        </p:blipFill>
+        <p:spPr>
+          <a:xfrm>
+            <a:off x="0" y="0"/>
+            <a:ext cx="12192000" cy="6858000"/>
+          </a:xfrm>
+          <a:prstGeom prst="rect">
+            <a:avLst/>
+          </a:prstGeom>
+        </p:spPr>
+      </p:pic>
+      <p:sp>
+        <p:nvSpPr>
+          <p:cNvPr id="6" name="文字方塊 5">
+            <a:extLst>
+              <a:ext uri="{FF2B5EF4-FFF2-40B4-BE49-F238E27FC236}">
+                <a16:creationId xmlns:a16="http://schemas.microsoft.com/office/drawing/2014/main" id="{0A2F43CC-ADF4-4FF9-CDA8-E052538D21AB}"/>
+              </a:ext>
+            </a:extLst>
+          </p:cNvPr>
+          <p:cNvSpPr txBox="1"/>
+          <p:nvPr/>
+        </p:nvSpPr>
+        <p:spPr>
+          <a:xfrm>
+            <a:off x="4517298" y="1524000"/>
+            <a:ext cx="3157403" cy="707886"/>
+          </a:xfrm>
+          <a:prstGeom prst="rect">
+            <a:avLst/>
+          </a:prstGeom>
+          <a:noFill/>
+        </p:spPr>
+        <p:txBody>
+          <a:bodyPr wrap="none" rtlCol="0">
+            <a:spAutoFit/>
+          </a:bodyPr>
+          <a:lstStyle/>
+          <a:p>
+            <a:r>
+              <a:rPr lang="en-US" altLang="zh-TW" sz="4000" dirty="0" err="1">
+                <a:solidFill>
+                  <a:srgbClr val="00FFFF"/>
+                </a:solidFill>
+                <a:latin typeface="微軟正黑體" panose="020B0604030504040204" pitchFamily="34" charset="-120"/>
+                <a:ea typeface="微軟正黑體" panose="020B0604030504040204" pitchFamily="34" charset="-120"/>
+              </a:rPr>
+              <a:t>PowerBI</a:t>
+            </a:r>
+            <a:r>
+              <a:rPr lang="zh-TW" altLang="en-US" sz="4000" dirty="0">
+                <a:solidFill>
+                  <a:srgbClr val="00FFFF"/>
+                </a:solidFill>
+                <a:latin typeface="微軟正黑體" panose="020B0604030504040204" pitchFamily="34" charset="-120"/>
+                <a:ea typeface="微軟正黑體" panose="020B0604030504040204" pitchFamily="34" charset="-120"/>
+              </a:rPr>
+              <a:t>展示</a:t>
+            </a:r>
+          </a:p>
+        </p:txBody>
+      </p:sp>
+      <p:pic>
+        <p:nvPicPr>
+          <p:cNvPr id="4" name="圖片 3">
+            <a:extLst>
+              <a:ext uri="{FF2B5EF4-FFF2-40B4-BE49-F238E27FC236}">
+                <a16:creationId xmlns:a16="http://schemas.microsoft.com/office/drawing/2014/main" id="{6CCA5DA6-09C3-C577-1923-2417AC1A4D71}"/>
+              </a:ext>
+            </a:extLst>
+          </p:cNvPr>
+          <p:cNvPicPr>
+            <a:picLocks noChangeAspect="1"/>
+          </p:cNvPicPr>
+          <p:nvPr/>
+        </p:nvPicPr>
+        <p:blipFill>
+          <a:blip r:embed="rId3">
+            <a:extLst>
+              <a:ext uri="{28A0092B-C50C-407E-A947-70E740481C1C}">
+                <a14:useLocalDpi xmlns:a14="http://schemas.microsoft.com/office/drawing/2010/main" val="0"/>
+              </a:ext>
+            </a:extLst>
+          </a:blip>
+          <a:srcRect/>
+          <a:stretch/>
+        </p:blipFill>
+        <p:spPr>
+          <a:xfrm>
+            <a:off x="3070825" y="2229818"/>
+            <a:ext cx="6050347" cy="3402999"/>
+          </a:xfrm>
+          <a:prstGeom prst="rect">
+            <a:avLst/>
+          </a:prstGeom>
+        </p:spPr>
+      </p:pic>
+    </p:spTree>
+    <p:extLst>
+      <p:ext uri="{BB962C8B-B14F-4D97-AF65-F5344CB8AC3E}">
+        <p14:creationId xmlns:p14="http://schemas.microsoft.com/office/powerpoint/2010/main" val="2860633482"/>
+      </p:ext>
+    </p:extLst>
+  </p:cSld>
+  <p:clrMapOvr>
+    <a:masterClrMapping/>
+  </p:clrMapOvr>
+</p:sld>
+</file>
+
+<file path=ppt/slides/slide9.xml><?xml version="1.0" encoding="utf-8"?>
+<p:sld xmlns:a="http://schemas.openxmlformats.org/drawingml/2006/main" xmlns:r="http://schemas.openxmlformats.org/officeDocument/2006/relationships" xmlns:p="http://schemas.openxmlformats.org/presentationml/2006/main">
+  <p:cSld>
+    <p:spTree>
+      <p:nvGrpSpPr>
+        <p:cNvPr id="1" name="">
+          <a:extLst>
+            <a:ext uri="{FF2B5EF4-FFF2-40B4-BE49-F238E27FC236}">
+              <a16:creationId xmlns:a16="http://schemas.microsoft.com/office/drawing/2014/main" id="{4D940BCC-0F37-7100-62D6-EE1E1BF36B20}"/>
+            </a:ext>
+          </a:extLst>
+        </p:cNvPr>
+        <p:cNvGrpSpPr/>
+        <p:nvPr/>
+      </p:nvGrpSpPr>
+      <p:grpSpPr>
+        <a:xfrm>
+          <a:off x="0" y="0"/>
+          <a:ext cx="0" cy="0"/>
+          <a:chOff x="0" y="0"/>
+          <a:chExt cx="0" cy="0"/>
+        </a:xfrm>
+      </p:grpSpPr>
+      <p:pic>
+        <p:nvPicPr>
+          <p:cNvPr id="5" name="圖片 4">
+            <a:extLst>
+              <a:ext uri="{FF2B5EF4-FFF2-40B4-BE49-F238E27FC236}">
+                <a16:creationId xmlns:a16="http://schemas.microsoft.com/office/drawing/2014/main" id="{18D5424C-3CE8-9AA9-FB38-0429C6157AAE}"/>
+              </a:ext>
+            </a:extLst>
+          </p:cNvPr>
+          <p:cNvPicPr>
+            <a:picLocks noChangeAspect="1"/>
+          </p:cNvPicPr>
+          <p:nvPr/>
+        </p:nvPicPr>
+        <p:blipFill>
+          <a:blip r:embed="rId2">
+            <a:extLst>
+              <a:ext uri="{28A0092B-C50C-407E-A947-70E740481C1C}">
+                <a14:useLocalDpi xmlns:a14="http://schemas.microsoft.com/office/drawing/2010/main" val="0"/>
+              </a:ext>
+            </a:extLst>
+          </a:blip>
+          <a:stretch>
+            <a:fillRect/>
+          </a:stretch>
+        </p:blipFill>
+        <p:spPr>
+          <a:xfrm>
+            <a:off x="0" y="0"/>
+            <a:ext cx="12192000" cy="6858000"/>
+          </a:xfrm>
+          <a:prstGeom prst="rect">
+            <a:avLst/>
+          </a:prstGeom>
+        </p:spPr>
+      </p:pic>
+      <p:sp>
+        <p:nvSpPr>
+          <p:cNvPr id="6" name="文字方塊 5">
+            <a:extLst>
+              <a:ext uri="{FF2B5EF4-FFF2-40B4-BE49-F238E27FC236}">
+                <a16:creationId xmlns:a16="http://schemas.microsoft.com/office/drawing/2014/main" id="{C2BE8CF9-6F70-230A-18C7-C7C7BD661320}"/>
+              </a:ext>
+            </a:extLst>
+          </p:cNvPr>
+          <p:cNvSpPr txBox="1"/>
+          <p:nvPr/>
+        </p:nvSpPr>
+        <p:spPr>
+          <a:xfrm>
+            <a:off x="4517298" y="1524000"/>
+            <a:ext cx="3157403" cy="707886"/>
+          </a:xfrm>
+          <a:prstGeom prst="rect">
+            <a:avLst/>
+          </a:prstGeom>
+          <a:noFill/>
+        </p:spPr>
+        <p:txBody>
+          <a:bodyPr wrap="none" rtlCol="0">
+            <a:spAutoFit/>
+          </a:bodyPr>
+          <a:lstStyle/>
+          <a:p>
+            <a:r>
+              <a:rPr lang="en-US" altLang="zh-TW" sz="4000" dirty="0" err="1">
+                <a:solidFill>
+                  <a:srgbClr val="00FFFF"/>
+                </a:solidFill>
+                <a:latin typeface="微軟正黑體" panose="020B0604030504040204" pitchFamily="34" charset="-120"/>
+                <a:ea typeface="微軟正黑體" panose="020B0604030504040204" pitchFamily="34" charset="-120"/>
+              </a:rPr>
+              <a:t>PowerBI</a:t>
+            </a:r>
+            <a:r>
+              <a:rPr lang="zh-TW" altLang="en-US" sz="4000" dirty="0">
+                <a:solidFill>
+                  <a:srgbClr val="00FFFF"/>
+                </a:solidFill>
+                <a:latin typeface="微軟正黑體" panose="020B0604030504040204" pitchFamily="34" charset="-120"/>
+                <a:ea typeface="微軟正黑體" panose="020B0604030504040204" pitchFamily="34" charset="-120"/>
+              </a:rPr>
+              <a:t>展示</a:t>
+            </a:r>
+          </a:p>
+        </p:txBody>
+      </p:sp>
+      <p:pic>
+        <p:nvPicPr>
+          <p:cNvPr id="4" name="圖片 3">
+            <a:extLst>
+              <a:ext uri="{FF2B5EF4-FFF2-40B4-BE49-F238E27FC236}">
+                <a16:creationId xmlns:a16="http://schemas.microsoft.com/office/drawing/2014/main" id="{FF8556CE-1271-FBEB-77EA-9AA9CCB7D4E2}"/>
+              </a:ext>
+            </a:extLst>
+          </p:cNvPr>
+          <p:cNvPicPr>
+            <a:picLocks noChangeAspect="1"/>
+          </p:cNvPicPr>
+          <p:nvPr/>
+        </p:nvPicPr>
+        <p:blipFill>
+          <a:blip r:embed="rId3">
+            <a:extLst>
+              <a:ext uri="{28A0092B-C50C-407E-A947-70E740481C1C}">
+                <a14:useLocalDpi xmlns:a14="http://schemas.microsoft.com/office/drawing/2010/main" val="0"/>
+              </a:ext>
+            </a:extLst>
+          </a:blip>
+          <a:srcRect/>
+          <a:stretch/>
+        </p:blipFill>
+        <p:spPr>
+          <a:xfrm>
+            <a:off x="3070825" y="2236399"/>
+            <a:ext cx="6050347" cy="3389837"/>
+          </a:xfrm>
+          <a:prstGeom prst="rect">
+            <a:avLst/>
+          </a:prstGeom>
+        </p:spPr>
+      </p:pic>
+    </p:spTree>
+    <p:extLst>
+      <p:ext uri="{BB962C8B-B14F-4D97-AF65-F5344CB8AC3E}">
+        <p14:creationId xmlns:p14="http://schemas.microsoft.com/office/powerpoint/2010/main" val="1497603658"/>
       </p:ext>
     </p:extLst>
   </p:cSld>

--- a/Steam遊戲市場分析報告.pptx
+++ b/Steam遊戲市場分析報告.pptx
@@ -11,16 +11,16 @@
     <p:sldId id="256" r:id="rId2"/>
     <p:sldId id="257" r:id="rId3"/>
     <p:sldId id="278" r:id="rId4"/>
-    <p:sldId id="269" r:id="rId5"/>
-    <p:sldId id="270" r:id="rId6"/>
-    <p:sldId id="271" r:id="rId7"/>
-    <p:sldId id="272" r:id="rId8"/>
-    <p:sldId id="273" r:id="rId9"/>
-    <p:sldId id="274" r:id="rId10"/>
-    <p:sldId id="280" r:id="rId11"/>
-    <p:sldId id="266" r:id="rId12"/>
-    <p:sldId id="267" r:id="rId13"/>
-    <p:sldId id="268" r:id="rId14"/>
+    <p:sldId id="266" r:id="rId5"/>
+    <p:sldId id="267" r:id="rId6"/>
+    <p:sldId id="268" r:id="rId7"/>
+    <p:sldId id="269" r:id="rId8"/>
+    <p:sldId id="270" r:id="rId9"/>
+    <p:sldId id="271" r:id="rId10"/>
+    <p:sldId id="272" r:id="rId11"/>
+    <p:sldId id="273" r:id="rId12"/>
+    <p:sldId id="274" r:id="rId13"/>
+    <p:sldId id="280" r:id="rId14"/>
     <p:sldId id="275" r:id="rId15"/>
     <p:sldId id="279" r:id="rId16"/>
     <p:sldId id="276" r:id="rId17"/>
@@ -3975,6 +3975,480 @@
         <p:cNvPr id="1" name="">
           <a:extLst>
             <a:ext uri="{FF2B5EF4-FFF2-40B4-BE49-F238E27FC236}">
+              <a16:creationId xmlns:a16="http://schemas.microsoft.com/office/drawing/2014/main" id="{0B2E3A6C-1C8C-1CAB-7694-26B03E2BEE6C}"/>
+            </a:ext>
+          </a:extLst>
+        </p:cNvPr>
+        <p:cNvGrpSpPr/>
+        <p:nvPr/>
+      </p:nvGrpSpPr>
+      <p:grpSpPr>
+        <a:xfrm>
+          <a:off x="0" y="0"/>
+          <a:ext cx="0" cy="0"/>
+          <a:chOff x="0" y="0"/>
+          <a:chExt cx="0" cy="0"/>
+        </a:xfrm>
+      </p:grpSpPr>
+      <p:pic>
+        <p:nvPicPr>
+          <p:cNvPr id="5" name="圖片 4">
+            <a:extLst>
+              <a:ext uri="{FF2B5EF4-FFF2-40B4-BE49-F238E27FC236}">
+                <a16:creationId xmlns:a16="http://schemas.microsoft.com/office/drawing/2014/main" id="{64410478-C5EA-3CF2-4A24-E9A34689F9B3}"/>
+              </a:ext>
+            </a:extLst>
+          </p:cNvPr>
+          <p:cNvPicPr>
+            <a:picLocks noChangeAspect="1"/>
+          </p:cNvPicPr>
+          <p:nvPr/>
+        </p:nvPicPr>
+        <p:blipFill>
+          <a:blip r:embed="rId2">
+            <a:extLst>
+              <a:ext uri="{28A0092B-C50C-407E-A947-70E740481C1C}">
+                <a14:useLocalDpi xmlns:a14="http://schemas.microsoft.com/office/drawing/2010/main" val="0"/>
+              </a:ext>
+            </a:extLst>
+          </a:blip>
+          <a:stretch>
+            <a:fillRect/>
+          </a:stretch>
+        </p:blipFill>
+        <p:spPr>
+          <a:xfrm>
+            <a:off x="0" y="0"/>
+            <a:ext cx="12192000" cy="6858000"/>
+          </a:xfrm>
+          <a:prstGeom prst="rect">
+            <a:avLst/>
+          </a:prstGeom>
+        </p:spPr>
+      </p:pic>
+      <p:sp>
+        <p:nvSpPr>
+          <p:cNvPr id="6" name="文字方塊 5">
+            <a:extLst>
+              <a:ext uri="{FF2B5EF4-FFF2-40B4-BE49-F238E27FC236}">
+                <a16:creationId xmlns:a16="http://schemas.microsoft.com/office/drawing/2014/main" id="{5EEDA4C8-EAA3-8689-BF24-12B1EEE3A0A2}"/>
+              </a:ext>
+            </a:extLst>
+          </p:cNvPr>
+          <p:cNvSpPr txBox="1"/>
+          <p:nvPr/>
+        </p:nvSpPr>
+        <p:spPr>
+          <a:xfrm>
+            <a:off x="4517298" y="1524000"/>
+            <a:ext cx="3157403" cy="707886"/>
+          </a:xfrm>
+          <a:prstGeom prst="rect">
+            <a:avLst/>
+          </a:prstGeom>
+          <a:noFill/>
+        </p:spPr>
+        <p:txBody>
+          <a:bodyPr wrap="none" rtlCol="0">
+            <a:spAutoFit/>
+          </a:bodyPr>
+          <a:lstStyle/>
+          <a:p>
+            <a:r>
+              <a:rPr lang="en-US" altLang="zh-TW" sz="4000" dirty="0" err="1">
+                <a:solidFill>
+                  <a:srgbClr val="00FFFF"/>
+                </a:solidFill>
+                <a:latin typeface="微軟正黑體" panose="020B0604030504040204" pitchFamily="34" charset="-120"/>
+                <a:ea typeface="微軟正黑體" panose="020B0604030504040204" pitchFamily="34" charset="-120"/>
+              </a:rPr>
+              <a:t>PowerBI</a:t>
+            </a:r>
+            <a:r>
+              <a:rPr lang="zh-TW" altLang="en-US" sz="4000" dirty="0">
+                <a:solidFill>
+                  <a:srgbClr val="00FFFF"/>
+                </a:solidFill>
+                <a:latin typeface="微軟正黑體" panose="020B0604030504040204" pitchFamily="34" charset="-120"/>
+                <a:ea typeface="微軟正黑體" panose="020B0604030504040204" pitchFamily="34" charset="-120"/>
+              </a:rPr>
+              <a:t>展示</a:t>
+            </a:r>
+          </a:p>
+        </p:txBody>
+      </p:sp>
+      <p:pic>
+        <p:nvPicPr>
+          <p:cNvPr id="4" name="圖片 3">
+            <a:extLst>
+              <a:ext uri="{FF2B5EF4-FFF2-40B4-BE49-F238E27FC236}">
+                <a16:creationId xmlns:a16="http://schemas.microsoft.com/office/drawing/2014/main" id="{43F1D34A-703F-687C-16F9-99FFE19B7FE1}"/>
+              </a:ext>
+            </a:extLst>
+          </p:cNvPr>
+          <p:cNvPicPr>
+            <a:picLocks noChangeAspect="1"/>
+          </p:cNvPicPr>
+          <p:nvPr/>
+        </p:nvPicPr>
+        <p:blipFill>
+          <a:blip r:embed="rId3">
+            <a:extLst>
+              <a:ext uri="{28A0092B-C50C-407E-A947-70E740481C1C}">
+                <a14:useLocalDpi xmlns:a14="http://schemas.microsoft.com/office/drawing/2010/main" val="0"/>
+              </a:ext>
+            </a:extLst>
+          </a:blip>
+          <a:srcRect/>
+          <a:stretch/>
+        </p:blipFill>
+        <p:spPr>
+          <a:xfrm>
+            <a:off x="3070105" y="2229818"/>
+            <a:ext cx="6051786" cy="3402999"/>
+          </a:xfrm>
+          <a:prstGeom prst="rect">
+            <a:avLst/>
+          </a:prstGeom>
+        </p:spPr>
+      </p:pic>
+    </p:spTree>
+    <p:extLst>
+      <p:ext uri="{BB962C8B-B14F-4D97-AF65-F5344CB8AC3E}">
+        <p14:creationId xmlns:p14="http://schemas.microsoft.com/office/powerpoint/2010/main" val="2372769068"/>
+      </p:ext>
+    </p:extLst>
+  </p:cSld>
+  <p:clrMapOvr>
+    <a:masterClrMapping/>
+  </p:clrMapOvr>
+</p:sld>
+</file>
+
+<file path=ppt/slides/slide11.xml><?xml version="1.0" encoding="utf-8"?>
+<p:sld xmlns:a="http://schemas.openxmlformats.org/drawingml/2006/main" xmlns:r="http://schemas.openxmlformats.org/officeDocument/2006/relationships" xmlns:p="http://schemas.openxmlformats.org/presentationml/2006/main">
+  <p:cSld>
+    <p:spTree>
+      <p:nvGrpSpPr>
+        <p:cNvPr id="1" name="">
+          <a:extLst>
+            <a:ext uri="{FF2B5EF4-FFF2-40B4-BE49-F238E27FC236}">
+              <a16:creationId xmlns:a16="http://schemas.microsoft.com/office/drawing/2014/main" id="{96B867E1-730F-3AB3-4A6E-3E1331257F8A}"/>
+            </a:ext>
+          </a:extLst>
+        </p:cNvPr>
+        <p:cNvGrpSpPr/>
+        <p:nvPr/>
+      </p:nvGrpSpPr>
+      <p:grpSpPr>
+        <a:xfrm>
+          <a:off x="0" y="0"/>
+          <a:ext cx="0" cy="0"/>
+          <a:chOff x="0" y="0"/>
+          <a:chExt cx="0" cy="0"/>
+        </a:xfrm>
+      </p:grpSpPr>
+      <p:pic>
+        <p:nvPicPr>
+          <p:cNvPr id="5" name="圖片 4">
+            <a:extLst>
+              <a:ext uri="{FF2B5EF4-FFF2-40B4-BE49-F238E27FC236}">
+                <a16:creationId xmlns:a16="http://schemas.microsoft.com/office/drawing/2014/main" id="{CA88CB68-470F-4F95-7908-6B93A4CE526F}"/>
+              </a:ext>
+            </a:extLst>
+          </p:cNvPr>
+          <p:cNvPicPr>
+            <a:picLocks noChangeAspect="1"/>
+          </p:cNvPicPr>
+          <p:nvPr/>
+        </p:nvPicPr>
+        <p:blipFill>
+          <a:blip r:embed="rId2">
+            <a:extLst>
+              <a:ext uri="{28A0092B-C50C-407E-A947-70E740481C1C}">
+                <a14:useLocalDpi xmlns:a14="http://schemas.microsoft.com/office/drawing/2010/main" val="0"/>
+              </a:ext>
+            </a:extLst>
+          </a:blip>
+          <a:stretch>
+            <a:fillRect/>
+          </a:stretch>
+        </p:blipFill>
+        <p:spPr>
+          <a:xfrm>
+            <a:off x="0" y="0"/>
+            <a:ext cx="12192000" cy="6858000"/>
+          </a:xfrm>
+          <a:prstGeom prst="rect">
+            <a:avLst/>
+          </a:prstGeom>
+        </p:spPr>
+      </p:pic>
+      <p:sp>
+        <p:nvSpPr>
+          <p:cNvPr id="6" name="文字方塊 5">
+            <a:extLst>
+              <a:ext uri="{FF2B5EF4-FFF2-40B4-BE49-F238E27FC236}">
+                <a16:creationId xmlns:a16="http://schemas.microsoft.com/office/drawing/2014/main" id="{0A2F43CC-ADF4-4FF9-CDA8-E052538D21AB}"/>
+              </a:ext>
+            </a:extLst>
+          </p:cNvPr>
+          <p:cNvSpPr txBox="1"/>
+          <p:nvPr/>
+        </p:nvSpPr>
+        <p:spPr>
+          <a:xfrm>
+            <a:off x="4517298" y="1524000"/>
+            <a:ext cx="3157403" cy="707886"/>
+          </a:xfrm>
+          <a:prstGeom prst="rect">
+            <a:avLst/>
+          </a:prstGeom>
+          <a:noFill/>
+        </p:spPr>
+        <p:txBody>
+          <a:bodyPr wrap="none" rtlCol="0">
+            <a:spAutoFit/>
+          </a:bodyPr>
+          <a:lstStyle/>
+          <a:p>
+            <a:r>
+              <a:rPr lang="en-US" altLang="zh-TW" sz="4000" dirty="0" err="1">
+                <a:solidFill>
+                  <a:srgbClr val="00FFFF"/>
+                </a:solidFill>
+                <a:latin typeface="微軟正黑體" panose="020B0604030504040204" pitchFamily="34" charset="-120"/>
+                <a:ea typeface="微軟正黑體" panose="020B0604030504040204" pitchFamily="34" charset="-120"/>
+              </a:rPr>
+              <a:t>PowerBI</a:t>
+            </a:r>
+            <a:r>
+              <a:rPr lang="zh-TW" altLang="en-US" sz="4000" dirty="0">
+                <a:solidFill>
+                  <a:srgbClr val="00FFFF"/>
+                </a:solidFill>
+                <a:latin typeface="微軟正黑體" panose="020B0604030504040204" pitchFamily="34" charset="-120"/>
+                <a:ea typeface="微軟正黑體" panose="020B0604030504040204" pitchFamily="34" charset="-120"/>
+              </a:rPr>
+              <a:t>展示</a:t>
+            </a:r>
+          </a:p>
+        </p:txBody>
+      </p:sp>
+      <p:pic>
+        <p:nvPicPr>
+          <p:cNvPr id="4" name="圖片 3">
+            <a:extLst>
+              <a:ext uri="{FF2B5EF4-FFF2-40B4-BE49-F238E27FC236}">
+                <a16:creationId xmlns:a16="http://schemas.microsoft.com/office/drawing/2014/main" id="{6CCA5DA6-09C3-C577-1923-2417AC1A4D71}"/>
+              </a:ext>
+            </a:extLst>
+          </p:cNvPr>
+          <p:cNvPicPr>
+            <a:picLocks noChangeAspect="1"/>
+          </p:cNvPicPr>
+          <p:nvPr/>
+        </p:nvPicPr>
+        <p:blipFill>
+          <a:blip r:embed="rId3">
+            <a:extLst>
+              <a:ext uri="{28A0092B-C50C-407E-A947-70E740481C1C}">
+                <a14:useLocalDpi xmlns:a14="http://schemas.microsoft.com/office/drawing/2010/main" val="0"/>
+              </a:ext>
+            </a:extLst>
+          </a:blip>
+          <a:srcRect/>
+          <a:stretch/>
+        </p:blipFill>
+        <p:spPr>
+          <a:xfrm>
+            <a:off x="3070825" y="2229818"/>
+            <a:ext cx="6050347" cy="3402999"/>
+          </a:xfrm>
+          <a:prstGeom prst="rect">
+            <a:avLst/>
+          </a:prstGeom>
+        </p:spPr>
+      </p:pic>
+    </p:spTree>
+    <p:extLst>
+      <p:ext uri="{BB962C8B-B14F-4D97-AF65-F5344CB8AC3E}">
+        <p14:creationId xmlns:p14="http://schemas.microsoft.com/office/powerpoint/2010/main" val="2860633482"/>
+      </p:ext>
+    </p:extLst>
+  </p:cSld>
+  <p:clrMapOvr>
+    <a:masterClrMapping/>
+  </p:clrMapOvr>
+</p:sld>
+</file>
+
+<file path=ppt/slides/slide12.xml><?xml version="1.0" encoding="utf-8"?>
+<p:sld xmlns:a="http://schemas.openxmlformats.org/drawingml/2006/main" xmlns:r="http://schemas.openxmlformats.org/officeDocument/2006/relationships" xmlns:p="http://schemas.openxmlformats.org/presentationml/2006/main">
+  <p:cSld>
+    <p:spTree>
+      <p:nvGrpSpPr>
+        <p:cNvPr id="1" name="">
+          <a:extLst>
+            <a:ext uri="{FF2B5EF4-FFF2-40B4-BE49-F238E27FC236}">
+              <a16:creationId xmlns:a16="http://schemas.microsoft.com/office/drawing/2014/main" id="{4D940BCC-0F37-7100-62D6-EE1E1BF36B20}"/>
+            </a:ext>
+          </a:extLst>
+        </p:cNvPr>
+        <p:cNvGrpSpPr/>
+        <p:nvPr/>
+      </p:nvGrpSpPr>
+      <p:grpSpPr>
+        <a:xfrm>
+          <a:off x="0" y="0"/>
+          <a:ext cx="0" cy="0"/>
+          <a:chOff x="0" y="0"/>
+          <a:chExt cx="0" cy="0"/>
+        </a:xfrm>
+      </p:grpSpPr>
+      <p:pic>
+        <p:nvPicPr>
+          <p:cNvPr id="5" name="圖片 4">
+            <a:extLst>
+              <a:ext uri="{FF2B5EF4-FFF2-40B4-BE49-F238E27FC236}">
+                <a16:creationId xmlns:a16="http://schemas.microsoft.com/office/drawing/2014/main" id="{18D5424C-3CE8-9AA9-FB38-0429C6157AAE}"/>
+              </a:ext>
+            </a:extLst>
+          </p:cNvPr>
+          <p:cNvPicPr>
+            <a:picLocks noChangeAspect="1"/>
+          </p:cNvPicPr>
+          <p:nvPr/>
+        </p:nvPicPr>
+        <p:blipFill>
+          <a:blip r:embed="rId2">
+            <a:extLst>
+              <a:ext uri="{28A0092B-C50C-407E-A947-70E740481C1C}">
+                <a14:useLocalDpi xmlns:a14="http://schemas.microsoft.com/office/drawing/2010/main" val="0"/>
+              </a:ext>
+            </a:extLst>
+          </a:blip>
+          <a:stretch>
+            <a:fillRect/>
+          </a:stretch>
+        </p:blipFill>
+        <p:spPr>
+          <a:xfrm>
+            <a:off x="0" y="0"/>
+            <a:ext cx="12192000" cy="6858000"/>
+          </a:xfrm>
+          <a:prstGeom prst="rect">
+            <a:avLst/>
+          </a:prstGeom>
+        </p:spPr>
+      </p:pic>
+      <p:sp>
+        <p:nvSpPr>
+          <p:cNvPr id="6" name="文字方塊 5">
+            <a:extLst>
+              <a:ext uri="{FF2B5EF4-FFF2-40B4-BE49-F238E27FC236}">
+                <a16:creationId xmlns:a16="http://schemas.microsoft.com/office/drawing/2014/main" id="{C2BE8CF9-6F70-230A-18C7-C7C7BD661320}"/>
+              </a:ext>
+            </a:extLst>
+          </p:cNvPr>
+          <p:cNvSpPr txBox="1"/>
+          <p:nvPr/>
+        </p:nvSpPr>
+        <p:spPr>
+          <a:xfrm>
+            <a:off x="4517298" y="1524000"/>
+            <a:ext cx="3157403" cy="707886"/>
+          </a:xfrm>
+          <a:prstGeom prst="rect">
+            <a:avLst/>
+          </a:prstGeom>
+          <a:noFill/>
+        </p:spPr>
+        <p:txBody>
+          <a:bodyPr wrap="none" rtlCol="0">
+            <a:spAutoFit/>
+          </a:bodyPr>
+          <a:lstStyle/>
+          <a:p>
+            <a:r>
+              <a:rPr lang="en-US" altLang="zh-TW" sz="4000" dirty="0" err="1">
+                <a:solidFill>
+                  <a:srgbClr val="00FFFF"/>
+                </a:solidFill>
+                <a:latin typeface="微軟正黑體" panose="020B0604030504040204" pitchFamily="34" charset="-120"/>
+                <a:ea typeface="微軟正黑體" panose="020B0604030504040204" pitchFamily="34" charset="-120"/>
+              </a:rPr>
+              <a:t>PowerBI</a:t>
+            </a:r>
+            <a:r>
+              <a:rPr lang="zh-TW" altLang="en-US" sz="4000" dirty="0">
+                <a:solidFill>
+                  <a:srgbClr val="00FFFF"/>
+                </a:solidFill>
+                <a:latin typeface="微軟正黑體" panose="020B0604030504040204" pitchFamily="34" charset="-120"/>
+                <a:ea typeface="微軟正黑體" panose="020B0604030504040204" pitchFamily="34" charset="-120"/>
+              </a:rPr>
+              <a:t>展示</a:t>
+            </a:r>
+          </a:p>
+        </p:txBody>
+      </p:sp>
+      <p:pic>
+        <p:nvPicPr>
+          <p:cNvPr id="4" name="圖片 3">
+            <a:extLst>
+              <a:ext uri="{FF2B5EF4-FFF2-40B4-BE49-F238E27FC236}">
+                <a16:creationId xmlns:a16="http://schemas.microsoft.com/office/drawing/2014/main" id="{FF8556CE-1271-FBEB-77EA-9AA9CCB7D4E2}"/>
+              </a:ext>
+            </a:extLst>
+          </p:cNvPr>
+          <p:cNvPicPr>
+            <a:picLocks noChangeAspect="1"/>
+          </p:cNvPicPr>
+          <p:nvPr/>
+        </p:nvPicPr>
+        <p:blipFill>
+          <a:blip r:embed="rId3">
+            <a:extLst>
+              <a:ext uri="{28A0092B-C50C-407E-A947-70E740481C1C}">
+                <a14:useLocalDpi xmlns:a14="http://schemas.microsoft.com/office/drawing/2010/main" val="0"/>
+              </a:ext>
+            </a:extLst>
+          </a:blip>
+          <a:srcRect/>
+          <a:stretch/>
+        </p:blipFill>
+        <p:spPr>
+          <a:xfrm>
+            <a:off x="3070825" y="2236399"/>
+            <a:ext cx="6050347" cy="3389837"/>
+          </a:xfrm>
+          <a:prstGeom prst="rect">
+            <a:avLst/>
+          </a:prstGeom>
+        </p:spPr>
+      </p:pic>
+    </p:spTree>
+    <p:extLst>
+      <p:ext uri="{BB962C8B-B14F-4D97-AF65-F5344CB8AC3E}">
+        <p14:creationId xmlns:p14="http://schemas.microsoft.com/office/powerpoint/2010/main" val="1497603658"/>
+      </p:ext>
+    </p:extLst>
+  </p:cSld>
+  <p:clrMapOvr>
+    <a:masterClrMapping/>
+  </p:clrMapOvr>
+</p:sld>
+</file>
+
+<file path=ppt/slides/slide13.xml><?xml version="1.0" encoding="utf-8"?>
+<p:sld xmlns:a="http://schemas.openxmlformats.org/drawingml/2006/main" xmlns:r="http://schemas.openxmlformats.org/officeDocument/2006/relationships" xmlns:p="http://schemas.openxmlformats.org/presentationml/2006/main">
+  <p:cSld>
+    <p:spTree>
+      <p:nvGrpSpPr>
+        <p:cNvPr id="1" name="">
+          <a:extLst>
+            <a:ext uri="{FF2B5EF4-FFF2-40B4-BE49-F238E27FC236}">
               <a16:creationId xmlns:a16="http://schemas.microsoft.com/office/drawing/2014/main" id="{DE170BD4-F6DE-108F-58A9-D8D4A9444DE7}"/>
             </a:ext>
           </a:extLst>
@@ -4116,523 +4590,6 @@
     <p:extLst>
       <p:ext uri="{BB962C8B-B14F-4D97-AF65-F5344CB8AC3E}">
         <p14:creationId xmlns:p14="http://schemas.microsoft.com/office/powerpoint/2010/main" val="2898921761"/>
-      </p:ext>
-    </p:extLst>
-  </p:cSld>
-  <p:clrMapOvr>
-    <a:masterClrMapping/>
-  </p:clrMapOvr>
-</p:sld>
-</file>
-
-<file path=ppt/slides/slide11.xml><?xml version="1.0" encoding="utf-8"?>
-<p:sld xmlns:a="http://schemas.openxmlformats.org/drawingml/2006/main" xmlns:r="http://schemas.openxmlformats.org/officeDocument/2006/relationships" xmlns:p="http://schemas.openxmlformats.org/presentationml/2006/main">
-  <p:cSld>
-    <p:spTree>
-      <p:nvGrpSpPr>
-        <p:cNvPr id="1" name="">
-          <a:extLst>
-            <a:ext uri="{FF2B5EF4-FFF2-40B4-BE49-F238E27FC236}">
-              <a16:creationId xmlns:a16="http://schemas.microsoft.com/office/drawing/2014/main" id="{F9942900-E13C-370C-3264-E7948366DDC9}"/>
-            </a:ext>
-          </a:extLst>
-        </p:cNvPr>
-        <p:cNvGrpSpPr/>
-        <p:nvPr/>
-      </p:nvGrpSpPr>
-      <p:grpSpPr>
-        <a:xfrm>
-          <a:off x="0" y="0"/>
-          <a:ext cx="0" cy="0"/>
-          <a:chOff x="0" y="0"/>
-          <a:chExt cx="0" cy="0"/>
-        </a:xfrm>
-      </p:grpSpPr>
-      <p:pic>
-        <p:nvPicPr>
-          <p:cNvPr id="5" name="圖片 4">
-            <a:extLst>
-              <a:ext uri="{FF2B5EF4-FFF2-40B4-BE49-F238E27FC236}">
-                <a16:creationId xmlns:a16="http://schemas.microsoft.com/office/drawing/2014/main" id="{0F5C274B-05F3-B016-5E16-02123F97D3E7}"/>
-              </a:ext>
-            </a:extLst>
-          </p:cNvPr>
-          <p:cNvPicPr>
-            <a:picLocks noChangeAspect="1"/>
-          </p:cNvPicPr>
-          <p:nvPr/>
-        </p:nvPicPr>
-        <p:blipFill>
-          <a:blip r:embed="rId2">
-            <a:extLst>
-              <a:ext uri="{28A0092B-C50C-407E-A947-70E740481C1C}">
-                <a14:useLocalDpi xmlns:a14="http://schemas.microsoft.com/office/drawing/2010/main" val="0"/>
-              </a:ext>
-            </a:extLst>
-          </a:blip>
-          <a:stretch>
-            <a:fillRect/>
-          </a:stretch>
-        </p:blipFill>
-        <p:spPr>
-          <a:xfrm>
-            <a:off x="0" y="0"/>
-            <a:ext cx="12192000" cy="6858000"/>
-          </a:xfrm>
-          <a:prstGeom prst="rect">
-            <a:avLst/>
-          </a:prstGeom>
-        </p:spPr>
-      </p:pic>
-      <p:sp>
-        <p:nvSpPr>
-          <p:cNvPr id="6" name="文字方塊 5">
-            <a:extLst>
-              <a:ext uri="{FF2B5EF4-FFF2-40B4-BE49-F238E27FC236}">
-                <a16:creationId xmlns:a16="http://schemas.microsoft.com/office/drawing/2014/main" id="{F3F24C56-65BF-E447-92D8-42B3EC228F43}"/>
-              </a:ext>
-            </a:extLst>
-          </p:cNvPr>
-          <p:cNvSpPr txBox="1"/>
-          <p:nvPr/>
-        </p:nvSpPr>
-        <p:spPr>
-          <a:xfrm>
-            <a:off x="4977745" y="1524000"/>
-            <a:ext cx="2236510" cy="707886"/>
-          </a:xfrm>
-          <a:prstGeom prst="rect">
-            <a:avLst/>
-          </a:prstGeom>
-          <a:noFill/>
-        </p:spPr>
-        <p:txBody>
-          <a:bodyPr wrap="none" rtlCol="0">
-            <a:spAutoFit/>
-          </a:bodyPr>
-          <a:lstStyle/>
-          <a:p>
-            <a:r>
-              <a:rPr lang="zh-TW" altLang="en-US" sz="4000" dirty="0">
-                <a:solidFill>
-                  <a:srgbClr val="00FFFF"/>
-                </a:solidFill>
-                <a:latin typeface="微軟正黑體" panose="020B0604030504040204" pitchFamily="34" charset="-120"/>
-                <a:ea typeface="微軟正黑體" panose="020B0604030504040204" pitchFamily="34" charset="-120"/>
-              </a:rPr>
-              <a:t>資料獲取</a:t>
-            </a:r>
-          </a:p>
-        </p:txBody>
-      </p:sp>
-      <p:sp>
-        <p:nvSpPr>
-          <p:cNvPr id="7" name="文字方塊 6">
-            <a:extLst>
-              <a:ext uri="{FF2B5EF4-FFF2-40B4-BE49-F238E27FC236}">
-                <a16:creationId xmlns:a16="http://schemas.microsoft.com/office/drawing/2014/main" id="{5047E607-F08A-B013-E2C2-DDFEB889874A}"/>
-              </a:ext>
-            </a:extLst>
-          </p:cNvPr>
-          <p:cNvSpPr txBox="1"/>
-          <p:nvPr/>
-        </p:nvSpPr>
-        <p:spPr>
-          <a:xfrm>
-            <a:off x="2261924" y="2476500"/>
-            <a:ext cx="7668152" cy="1132490"/>
-          </a:xfrm>
-          <a:prstGeom prst="rect">
-            <a:avLst/>
-          </a:prstGeom>
-          <a:noFill/>
-        </p:spPr>
-        <p:txBody>
-          <a:bodyPr wrap="square" rtlCol="0">
-            <a:spAutoFit/>
-          </a:bodyPr>
-          <a:lstStyle/>
-          <a:p>
-            <a:pPr>
-              <a:lnSpc>
-                <a:spcPct val="150000"/>
-              </a:lnSpc>
-            </a:pPr>
-            <a:r>
-              <a:rPr lang="zh-TW" altLang="en-US" sz="2400" dirty="0">
-                <a:solidFill>
-                  <a:srgbClr val="00CCFF"/>
-                </a:solidFill>
-                <a:latin typeface="微軟正黑體" panose="020B0604030504040204" pitchFamily="34" charset="-120"/>
-                <a:ea typeface="微軟正黑體" panose="020B0604030504040204" pitchFamily="34" charset="-120"/>
-              </a:rPr>
-              <a:t>從</a:t>
-            </a:r>
-            <a:r>
-              <a:rPr lang="en-US" altLang="zh-TW" sz="2400" dirty="0" err="1">
-                <a:solidFill>
-                  <a:srgbClr val="00CCFF"/>
-                </a:solidFill>
-                <a:latin typeface="微軟正黑體" panose="020B0604030504040204" pitchFamily="34" charset="-120"/>
-                <a:ea typeface="微軟正黑體" panose="020B0604030504040204" pitchFamily="34" charset="-120"/>
-              </a:rPr>
-              <a:t>kaggle</a:t>
-            </a:r>
-            <a:r>
-              <a:rPr lang="zh-TW" altLang="en-US" sz="2400" dirty="0">
-                <a:solidFill>
-                  <a:srgbClr val="00CCFF"/>
-                </a:solidFill>
-                <a:latin typeface="微軟正黑體" panose="020B0604030504040204" pitchFamily="34" charset="-120"/>
-                <a:ea typeface="微軟正黑體" panose="020B0604030504040204" pitchFamily="34" charset="-120"/>
-              </a:rPr>
-              <a:t>下載關於這次主題的</a:t>
-            </a:r>
-            <a:r>
-              <a:rPr lang="en-US" altLang="zh-TW" sz="2400" dirty="0">
-                <a:solidFill>
-                  <a:srgbClr val="00CCFF"/>
-                </a:solidFill>
-                <a:latin typeface="微軟正黑體" panose="020B0604030504040204" pitchFamily="34" charset="-120"/>
-                <a:ea typeface="微軟正黑體" panose="020B0604030504040204" pitchFamily="34" charset="-120"/>
-              </a:rPr>
-              <a:t>csv</a:t>
-            </a:r>
-            <a:r>
-              <a:rPr lang="zh-TW" altLang="en-US" sz="2400" dirty="0">
-                <a:solidFill>
-                  <a:srgbClr val="00CCFF"/>
-                </a:solidFill>
-                <a:latin typeface="微軟正黑體" panose="020B0604030504040204" pitchFamily="34" charset="-120"/>
-                <a:ea typeface="微軟正黑體" panose="020B0604030504040204" pitchFamily="34" charset="-120"/>
-              </a:rPr>
-              <a:t>，並且在</a:t>
-            </a:r>
-            <a:r>
-              <a:rPr lang="en-US" altLang="zh-TW" sz="2400" dirty="0">
-                <a:solidFill>
-                  <a:srgbClr val="00CCFF"/>
-                </a:solidFill>
-                <a:latin typeface="微軟正黑體" panose="020B0604030504040204" pitchFamily="34" charset="-120"/>
-                <a:ea typeface="微軟正黑體" panose="020B0604030504040204" pitchFamily="34" charset="-120"/>
-              </a:rPr>
-              <a:t>python</a:t>
-            </a:r>
-            <a:r>
-              <a:rPr lang="zh-TW" altLang="en-US" sz="2400" dirty="0">
-                <a:solidFill>
-                  <a:srgbClr val="00CCFF"/>
-                </a:solidFill>
-                <a:latin typeface="微軟正黑體" panose="020B0604030504040204" pitchFamily="34" charset="-120"/>
-                <a:ea typeface="微軟正黑體" panose="020B0604030504040204" pitchFamily="34" charset="-120"/>
-              </a:rPr>
-              <a:t>進行資料的清洗及擷取。</a:t>
-            </a:r>
-          </a:p>
-        </p:txBody>
-      </p:sp>
-    </p:spTree>
-    <p:extLst>
-      <p:ext uri="{BB962C8B-B14F-4D97-AF65-F5344CB8AC3E}">
-        <p14:creationId xmlns:p14="http://schemas.microsoft.com/office/powerpoint/2010/main" val="909956457"/>
-      </p:ext>
-    </p:extLst>
-  </p:cSld>
-  <p:clrMapOvr>
-    <a:masterClrMapping/>
-  </p:clrMapOvr>
-</p:sld>
-</file>
-
-<file path=ppt/slides/slide12.xml><?xml version="1.0" encoding="utf-8"?>
-<p:sld xmlns:a="http://schemas.openxmlformats.org/drawingml/2006/main" xmlns:r="http://schemas.openxmlformats.org/officeDocument/2006/relationships" xmlns:p="http://schemas.openxmlformats.org/presentationml/2006/main">
-  <p:cSld>
-    <p:spTree>
-      <p:nvGrpSpPr>
-        <p:cNvPr id="1" name="">
-          <a:extLst>
-            <a:ext uri="{FF2B5EF4-FFF2-40B4-BE49-F238E27FC236}">
-              <a16:creationId xmlns:a16="http://schemas.microsoft.com/office/drawing/2014/main" id="{877928A0-A2F1-87A2-DB6B-76786549D67C}"/>
-            </a:ext>
-          </a:extLst>
-        </p:cNvPr>
-        <p:cNvGrpSpPr/>
-        <p:nvPr/>
-      </p:nvGrpSpPr>
-      <p:grpSpPr>
-        <a:xfrm>
-          <a:off x="0" y="0"/>
-          <a:ext cx="0" cy="0"/>
-          <a:chOff x="0" y="0"/>
-          <a:chExt cx="0" cy="0"/>
-        </a:xfrm>
-      </p:grpSpPr>
-      <p:pic>
-        <p:nvPicPr>
-          <p:cNvPr id="5" name="圖片 4">
-            <a:extLst>
-              <a:ext uri="{FF2B5EF4-FFF2-40B4-BE49-F238E27FC236}">
-                <a16:creationId xmlns:a16="http://schemas.microsoft.com/office/drawing/2014/main" id="{D85EFCAD-3CFB-C8BC-8E90-1BBABDCF693E}"/>
-              </a:ext>
-            </a:extLst>
-          </p:cNvPr>
-          <p:cNvPicPr>
-            <a:picLocks noChangeAspect="1"/>
-          </p:cNvPicPr>
-          <p:nvPr/>
-        </p:nvPicPr>
-        <p:blipFill>
-          <a:blip r:embed="rId2">
-            <a:extLst>
-              <a:ext uri="{28A0092B-C50C-407E-A947-70E740481C1C}">
-                <a14:useLocalDpi xmlns:a14="http://schemas.microsoft.com/office/drawing/2010/main" val="0"/>
-              </a:ext>
-            </a:extLst>
-          </a:blip>
-          <a:stretch>
-            <a:fillRect/>
-          </a:stretch>
-        </p:blipFill>
-        <p:spPr>
-          <a:xfrm>
-            <a:off x="0" y="0"/>
-            <a:ext cx="12192000" cy="6858000"/>
-          </a:xfrm>
-          <a:prstGeom prst="rect">
-            <a:avLst/>
-          </a:prstGeom>
-        </p:spPr>
-      </p:pic>
-      <p:sp>
-        <p:nvSpPr>
-          <p:cNvPr id="6" name="文字方塊 5">
-            <a:extLst>
-              <a:ext uri="{FF2B5EF4-FFF2-40B4-BE49-F238E27FC236}">
-                <a16:creationId xmlns:a16="http://schemas.microsoft.com/office/drawing/2014/main" id="{2B043C29-F607-7BCE-4B47-FB6B6C780514}"/>
-              </a:ext>
-            </a:extLst>
-          </p:cNvPr>
-          <p:cNvSpPr txBox="1"/>
-          <p:nvPr/>
-        </p:nvSpPr>
-        <p:spPr>
-          <a:xfrm>
-            <a:off x="4977745" y="1524000"/>
-            <a:ext cx="2236510" cy="707886"/>
-          </a:xfrm>
-          <a:prstGeom prst="rect">
-            <a:avLst/>
-          </a:prstGeom>
-          <a:noFill/>
-        </p:spPr>
-        <p:txBody>
-          <a:bodyPr wrap="none" rtlCol="0">
-            <a:spAutoFit/>
-          </a:bodyPr>
-          <a:lstStyle/>
-          <a:p>
-            <a:r>
-              <a:rPr lang="zh-TW" altLang="en-US" sz="4000" dirty="0">
-                <a:solidFill>
-                  <a:srgbClr val="00FFFF"/>
-                </a:solidFill>
-                <a:latin typeface="微軟正黑體" panose="020B0604030504040204" pitchFamily="34" charset="-120"/>
-                <a:ea typeface="微軟正黑體" panose="020B0604030504040204" pitchFamily="34" charset="-120"/>
-              </a:rPr>
-              <a:t>資料清洗</a:t>
-            </a:r>
-          </a:p>
-        </p:txBody>
-      </p:sp>
-      <p:pic>
-        <p:nvPicPr>
-          <p:cNvPr id="3" name="圖片 2">
-            <a:extLst>
-              <a:ext uri="{FF2B5EF4-FFF2-40B4-BE49-F238E27FC236}">
-                <a16:creationId xmlns:a16="http://schemas.microsoft.com/office/drawing/2014/main" id="{27199567-ABFB-D7E5-6614-71E07447DB21}"/>
-              </a:ext>
-            </a:extLst>
-          </p:cNvPr>
-          <p:cNvPicPr>
-            <a:picLocks noChangeAspect="1"/>
-          </p:cNvPicPr>
-          <p:nvPr/>
-        </p:nvPicPr>
-        <p:blipFill>
-          <a:blip r:embed="rId3">
-            <a:extLst>
-              <a:ext uri="{28A0092B-C50C-407E-A947-70E740481C1C}">
-                <a14:useLocalDpi xmlns:a14="http://schemas.microsoft.com/office/drawing/2010/main" val="0"/>
-              </a:ext>
-            </a:extLst>
-          </a:blip>
-          <a:stretch>
-            <a:fillRect/>
-          </a:stretch>
-        </p:blipFill>
-        <p:spPr>
-          <a:xfrm>
-            <a:off x="3343127" y="2231886"/>
-            <a:ext cx="5505745" cy="3372889"/>
-          </a:xfrm>
-          <a:prstGeom prst="rect">
-            <a:avLst/>
-          </a:prstGeom>
-        </p:spPr>
-      </p:pic>
-    </p:spTree>
-    <p:extLst>
-      <p:ext uri="{BB962C8B-B14F-4D97-AF65-F5344CB8AC3E}">
-        <p14:creationId xmlns:p14="http://schemas.microsoft.com/office/powerpoint/2010/main" val="297246201"/>
-      </p:ext>
-    </p:extLst>
-  </p:cSld>
-  <p:clrMapOvr>
-    <a:masterClrMapping/>
-  </p:clrMapOvr>
-</p:sld>
-</file>
-
-<file path=ppt/slides/slide13.xml><?xml version="1.0" encoding="utf-8"?>
-<p:sld xmlns:a="http://schemas.openxmlformats.org/drawingml/2006/main" xmlns:r="http://schemas.openxmlformats.org/officeDocument/2006/relationships" xmlns:p="http://schemas.openxmlformats.org/presentationml/2006/main">
-  <p:cSld>
-    <p:spTree>
-      <p:nvGrpSpPr>
-        <p:cNvPr id="1" name="">
-          <a:extLst>
-            <a:ext uri="{FF2B5EF4-FFF2-40B4-BE49-F238E27FC236}">
-              <a16:creationId xmlns:a16="http://schemas.microsoft.com/office/drawing/2014/main" id="{60E7DC36-F6CB-D36E-2A2A-1E1C5F06ABFD}"/>
-            </a:ext>
-          </a:extLst>
-        </p:cNvPr>
-        <p:cNvGrpSpPr/>
-        <p:nvPr/>
-      </p:nvGrpSpPr>
-      <p:grpSpPr>
-        <a:xfrm>
-          <a:off x="0" y="0"/>
-          <a:ext cx="0" cy="0"/>
-          <a:chOff x="0" y="0"/>
-          <a:chExt cx="0" cy="0"/>
-        </a:xfrm>
-      </p:grpSpPr>
-      <p:pic>
-        <p:nvPicPr>
-          <p:cNvPr id="5" name="圖片 4">
-            <a:extLst>
-              <a:ext uri="{FF2B5EF4-FFF2-40B4-BE49-F238E27FC236}">
-                <a16:creationId xmlns:a16="http://schemas.microsoft.com/office/drawing/2014/main" id="{C1C8E310-1740-1C47-3F7B-00C3126A6B11}"/>
-              </a:ext>
-            </a:extLst>
-          </p:cNvPr>
-          <p:cNvPicPr>
-            <a:picLocks noChangeAspect="1"/>
-          </p:cNvPicPr>
-          <p:nvPr/>
-        </p:nvPicPr>
-        <p:blipFill>
-          <a:blip r:embed="rId2">
-            <a:extLst>
-              <a:ext uri="{28A0092B-C50C-407E-A947-70E740481C1C}">
-                <a14:useLocalDpi xmlns:a14="http://schemas.microsoft.com/office/drawing/2010/main" val="0"/>
-              </a:ext>
-            </a:extLst>
-          </a:blip>
-          <a:stretch>
-            <a:fillRect/>
-          </a:stretch>
-        </p:blipFill>
-        <p:spPr>
-          <a:xfrm>
-            <a:off x="0" y="0"/>
-            <a:ext cx="12192000" cy="6858000"/>
-          </a:xfrm>
-          <a:prstGeom prst="rect">
-            <a:avLst/>
-          </a:prstGeom>
-        </p:spPr>
-      </p:pic>
-      <p:sp>
-        <p:nvSpPr>
-          <p:cNvPr id="6" name="文字方塊 5">
-            <a:extLst>
-              <a:ext uri="{FF2B5EF4-FFF2-40B4-BE49-F238E27FC236}">
-                <a16:creationId xmlns:a16="http://schemas.microsoft.com/office/drawing/2014/main" id="{BC8B181B-FF6F-28B9-1570-B399837B4305}"/>
-              </a:ext>
-            </a:extLst>
-          </p:cNvPr>
-          <p:cNvSpPr txBox="1"/>
-          <p:nvPr/>
-        </p:nvSpPr>
-        <p:spPr>
-          <a:xfrm>
-            <a:off x="4977745" y="1524000"/>
-            <a:ext cx="2236510" cy="707886"/>
-          </a:xfrm>
-          <a:prstGeom prst="rect">
-            <a:avLst/>
-          </a:prstGeom>
-          <a:noFill/>
-        </p:spPr>
-        <p:txBody>
-          <a:bodyPr wrap="none" rtlCol="0">
-            <a:spAutoFit/>
-          </a:bodyPr>
-          <a:lstStyle/>
-          <a:p>
-            <a:r>
-              <a:rPr lang="zh-TW" altLang="en-US" sz="4000" dirty="0">
-                <a:solidFill>
-                  <a:srgbClr val="00FFFF"/>
-                </a:solidFill>
-                <a:latin typeface="微軟正黑體" panose="020B0604030504040204" pitchFamily="34" charset="-120"/>
-                <a:ea typeface="微軟正黑體" panose="020B0604030504040204" pitchFamily="34" charset="-120"/>
-              </a:rPr>
-              <a:t>資料清洗</a:t>
-            </a:r>
-          </a:p>
-        </p:txBody>
-      </p:sp>
-      <p:pic>
-        <p:nvPicPr>
-          <p:cNvPr id="4" name="圖片 3">
-            <a:extLst>
-              <a:ext uri="{FF2B5EF4-FFF2-40B4-BE49-F238E27FC236}">
-                <a16:creationId xmlns:a16="http://schemas.microsoft.com/office/drawing/2014/main" id="{A997ED87-7B6B-2D8C-C4F3-F798610D3021}"/>
-              </a:ext>
-            </a:extLst>
-          </p:cNvPr>
-          <p:cNvPicPr>
-            <a:picLocks noChangeAspect="1"/>
-          </p:cNvPicPr>
-          <p:nvPr/>
-        </p:nvPicPr>
-        <p:blipFill>
-          <a:blip r:embed="rId3">
-            <a:extLst>
-              <a:ext uri="{28A0092B-C50C-407E-A947-70E740481C1C}">
-                <a14:useLocalDpi xmlns:a14="http://schemas.microsoft.com/office/drawing/2010/main" val="0"/>
-              </a:ext>
-            </a:extLst>
-          </a:blip>
-          <a:stretch>
-            <a:fillRect/>
-          </a:stretch>
-        </p:blipFill>
-        <p:spPr>
-          <a:xfrm>
-            <a:off x="2765190" y="2231886"/>
-            <a:ext cx="6661619" cy="3434061"/>
-          </a:xfrm>
-          <a:prstGeom prst="rect">
-            <a:avLst/>
-          </a:prstGeom>
-        </p:spPr>
-      </p:pic>
-    </p:spTree>
-    <p:extLst>
-      <p:ext uri="{BB962C8B-B14F-4D97-AF65-F5344CB8AC3E}">
-        <p14:creationId xmlns:p14="http://schemas.microsoft.com/office/powerpoint/2010/main" val="4139995655"/>
       </p:ext>
     </p:extLst>
   </p:cSld>
@@ -6229,6 +6186,523 @@
         <p:cNvPr id="1" name="">
           <a:extLst>
             <a:ext uri="{FF2B5EF4-FFF2-40B4-BE49-F238E27FC236}">
+              <a16:creationId xmlns:a16="http://schemas.microsoft.com/office/drawing/2014/main" id="{F9942900-E13C-370C-3264-E7948366DDC9}"/>
+            </a:ext>
+          </a:extLst>
+        </p:cNvPr>
+        <p:cNvGrpSpPr/>
+        <p:nvPr/>
+      </p:nvGrpSpPr>
+      <p:grpSpPr>
+        <a:xfrm>
+          <a:off x="0" y="0"/>
+          <a:ext cx="0" cy="0"/>
+          <a:chOff x="0" y="0"/>
+          <a:chExt cx="0" cy="0"/>
+        </a:xfrm>
+      </p:grpSpPr>
+      <p:pic>
+        <p:nvPicPr>
+          <p:cNvPr id="5" name="圖片 4">
+            <a:extLst>
+              <a:ext uri="{FF2B5EF4-FFF2-40B4-BE49-F238E27FC236}">
+                <a16:creationId xmlns:a16="http://schemas.microsoft.com/office/drawing/2014/main" id="{0F5C274B-05F3-B016-5E16-02123F97D3E7}"/>
+              </a:ext>
+            </a:extLst>
+          </p:cNvPr>
+          <p:cNvPicPr>
+            <a:picLocks noChangeAspect="1"/>
+          </p:cNvPicPr>
+          <p:nvPr/>
+        </p:nvPicPr>
+        <p:blipFill>
+          <a:blip r:embed="rId2">
+            <a:extLst>
+              <a:ext uri="{28A0092B-C50C-407E-A947-70E740481C1C}">
+                <a14:useLocalDpi xmlns:a14="http://schemas.microsoft.com/office/drawing/2010/main" val="0"/>
+              </a:ext>
+            </a:extLst>
+          </a:blip>
+          <a:stretch>
+            <a:fillRect/>
+          </a:stretch>
+        </p:blipFill>
+        <p:spPr>
+          <a:xfrm>
+            <a:off x="0" y="0"/>
+            <a:ext cx="12192000" cy="6858000"/>
+          </a:xfrm>
+          <a:prstGeom prst="rect">
+            <a:avLst/>
+          </a:prstGeom>
+        </p:spPr>
+      </p:pic>
+      <p:sp>
+        <p:nvSpPr>
+          <p:cNvPr id="6" name="文字方塊 5">
+            <a:extLst>
+              <a:ext uri="{FF2B5EF4-FFF2-40B4-BE49-F238E27FC236}">
+                <a16:creationId xmlns:a16="http://schemas.microsoft.com/office/drawing/2014/main" id="{F3F24C56-65BF-E447-92D8-42B3EC228F43}"/>
+              </a:ext>
+            </a:extLst>
+          </p:cNvPr>
+          <p:cNvSpPr txBox="1"/>
+          <p:nvPr/>
+        </p:nvSpPr>
+        <p:spPr>
+          <a:xfrm>
+            <a:off x="4977745" y="1524000"/>
+            <a:ext cx="2236510" cy="707886"/>
+          </a:xfrm>
+          <a:prstGeom prst="rect">
+            <a:avLst/>
+          </a:prstGeom>
+          <a:noFill/>
+        </p:spPr>
+        <p:txBody>
+          <a:bodyPr wrap="none" rtlCol="0">
+            <a:spAutoFit/>
+          </a:bodyPr>
+          <a:lstStyle/>
+          <a:p>
+            <a:r>
+              <a:rPr lang="zh-TW" altLang="en-US" sz="4000" dirty="0">
+                <a:solidFill>
+                  <a:srgbClr val="00FFFF"/>
+                </a:solidFill>
+                <a:latin typeface="微軟正黑體" panose="020B0604030504040204" pitchFamily="34" charset="-120"/>
+                <a:ea typeface="微軟正黑體" panose="020B0604030504040204" pitchFamily="34" charset="-120"/>
+              </a:rPr>
+              <a:t>資料獲取</a:t>
+            </a:r>
+          </a:p>
+        </p:txBody>
+      </p:sp>
+      <p:sp>
+        <p:nvSpPr>
+          <p:cNvPr id="7" name="文字方塊 6">
+            <a:extLst>
+              <a:ext uri="{FF2B5EF4-FFF2-40B4-BE49-F238E27FC236}">
+                <a16:creationId xmlns:a16="http://schemas.microsoft.com/office/drawing/2014/main" id="{5047E607-F08A-B013-E2C2-DDFEB889874A}"/>
+              </a:ext>
+            </a:extLst>
+          </p:cNvPr>
+          <p:cNvSpPr txBox="1"/>
+          <p:nvPr/>
+        </p:nvSpPr>
+        <p:spPr>
+          <a:xfrm>
+            <a:off x="2261924" y="2476500"/>
+            <a:ext cx="7668152" cy="1132490"/>
+          </a:xfrm>
+          <a:prstGeom prst="rect">
+            <a:avLst/>
+          </a:prstGeom>
+          <a:noFill/>
+        </p:spPr>
+        <p:txBody>
+          <a:bodyPr wrap="square" rtlCol="0">
+            <a:spAutoFit/>
+          </a:bodyPr>
+          <a:lstStyle/>
+          <a:p>
+            <a:pPr>
+              <a:lnSpc>
+                <a:spcPct val="150000"/>
+              </a:lnSpc>
+            </a:pPr>
+            <a:r>
+              <a:rPr lang="zh-TW" altLang="en-US" sz="2400" dirty="0">
+                <a:solidFill>
+                  <a:srgbClr val="00CCFF"/>
+                </a:solidFill>
+                <a:latin typeface="微軟正黑體" panose="020B0604030504040204" pitchFamily="34" charset="-120"/>
+                <a:ea typeface="微軟正黑體" panose="020B0604030504040204" pitchFamily="34" charset="-120"/>
+              </a:rPr>
+              <a:t>從</a:t>
+            </a:r>
+            <a:r>
+              <a:rPr lang="en-US" altLang="zh-TW" sz="2400" dirty="0" err="1">
+                <a:solidFill>
+                  <a:srgbClr val="00CCFF"/>
+                </a:solidFill>
+                <a:latin typeface="微軟正黑體" panose="020B0604030504040204" pitchFamily="34" charset="-120"/>
+                <a:ea typeface="微軟正黑體" panose="020B0604030504040204" pitchFamily="34" charset="-120"/>
+              </a:rPr>
+              <a:t>kaggle</a:t>
+            </a:r>
+            <a:r>
+              <a:rPr lang="zh-TW" altLang="en-US" sz="2400" dirty="0">
+                <a:solidFill>
+                  <a:srgbClr val="00CCFF"/>
+                </a:solidFill>
+                <a:latin typeface="微軟正黑體" panose="020B0604030504040204" pitchFamily="34" charset="-120"/>
+                <a:ea typeface="微軟正黑體" panose="020B0604030504040204" pitchFamily="34" charset="-120"/>
+              </a:rPr>
+              <a:t>下載關於這次主題的</a:t>
+            </a:r>
+            <a:r>
+              <a:rPr lang="en-US" altLang="zh-TW" sz="2400" dirty="0">
+                <a:solidFill>
+                  <a:srgbClr val="00CCFF"/>
+                </a:solidFill>
+                <a:latin typeface="微軟正黑體" panose="020B0604030504040204" pitchFamily="34" charset="-120"/>
+                <a:ea typeface="微軟正黑體" panose="020B0604030504040204" pitchFamily="34" charset="-120"/>
+              </a:rPr>
+              <a:t>csv</a:t>
+            </a:r>
+            <a:r>
+              <a:rPr lang="zh-TW" altLang="en-US" sz="2400" dirty="0">
+                <a:solidFill>
+                  <a:srgbClr val="00CCFF"/>
+                </a:solidFill>
+                <a:latin typeface="微軟正黑體" panose="020B0604030504040204" pitchFamily="34" charset="-120"/>
+                <a:ea typeface="微軟正黑體" panose="020B0604030504040204" pitchFamily="34" charset="-120"/>
+              </a:rPr>
+              <a:t>，並且在</a:t>
+            </a:r>
+            <a:r>
+              <a:rPr lang="en-US" altLang="zh-TW" sz="2400" dirty="0">
+                <a:solidFill>
+                  <a:srgbClr val="00CCFF"/>
+                </a:solidFill>
+                <a:latin typeface="微軟正黑體" panose="020B0604030504040204" pitchFamily="34" charset="-120"/>
+                <a:ea typeface="微軟正黑體" panose="020B0604030504040204" pitchFamily="34" charset="-120"/>
+              </a:rPr>
+              <a:t>python</a:t>
+            </a:r>
+            <a:r>
+              <a:rPr lang="zh-TW" altLang="en-US" sz="2400" dirty="0">
+                <a:solidFill>
+                  <a:srgbClr val="00CCFF"/>
+                </a:solidFill>
+                <a:latin typeface="微軟正黑體" panose="020B0604030504040204" pitchFamily="34" charset="-120"/>
+                <a:ea typeface="微軟正黑體" panose="020B0604030504040204" pitchFamily="34" charset="-120"/>
+              </a:rPr>
+              <a:t>進行資料的清洗及擷取。</a:t>
+            </a:r>
+          </a:p>
+        </p:txBody>
+      </p:sp>
+    </p:spTree>
+    <p:extLst>
+      <p:ext uri="{BB962C8B-B14F-4D97-AF65-F5344CB8AC3E}">
+        <p14:creationId xmlns:p14="http://schemas.microsoft.com/office/powerpoint/2010/main" val="909956457"/>
+      </p:ext>
+    </p:extLst>
+  </p:cSld>
+  <p:clrMapOvr>
+    <a:masterClrMapping/>
+  </p:clrMapOvr>
+</p:sld>
+</file>
+
+<file path=ppt/slides/slide5.xml><?xml version="1.0" encoding="utf-8"?>
+<p:sld xmlns:a="http://schemas.openxmlformats.org/drawingml/2006/main" xmlns:r="http://schemas.openxmlformats.org/officeDocument/2006/relationships" xmlns:p="http://schemas.openxmlformats.org/presentationml/2006/main">
+  <p:cSld>
+    <p:spTree>
+      <p:nvGrpSpPr>
+        <p:cNvPr id="1" name="">
+          <a:extLst>
+            <a:ext uri="{FF2B5EF4-FFF2-40B4-BE49-F238E27FC236}">
+              <a16:creationId xmlns:a16="http://schemas.microsoft.com/office/drawing/2014/main" id="{877928A0-A2F1-87A2-DB6B-76786549D67C}"/>
+            </a:ext>
+          </a:extLst>
+        </p:cNvPr>
+        <p:cNvGrpSpPr/>
+        <p:nvPr/>
+      </p:nvGrpSpPr>
+      <p:grpSpPr>
+        <a:xfrm>
+          <a:off x="0" y="0"/>
+          <a:ext cx="0" cy="0"/>
+          <a:chOff x="0" y="0"/>
+          <a:chExt cx="0" cy="0"/>
+        </a:xfrm>
+      </p:grpSpPr>
+      <p:pic>
+        <p:nvPicPr>
+          <p:cNvPr id="5" name="圖片 4">
+            <a:extLst>
+              <a:ext uri="{FF2B5EF4-FFF2-40B4-BE49-F238E27FC236}">
+                <a16:creationId xmlns:a16="http://schemas.microsoft.com/office/drawing/2014/main" id="{D85EFCAD-3CFB-C8BC-8E90-1BBABDCF693E}"/>
+              </a:ext>
+            </a:extLst>
+          </p:cNvPr>
+          <p:cNvPicPr>
+            <a:picLocks noChangeAspect="1"/>
+          </p:cNvPicPr>
+          <p:nvPr/>
+        </p:nvPicPr>
+        <p:blipFill>
+          <a:blip r:embed="rId2">
+            <a:extLst>
+              <a:ext uri="{28A0092B-C50C-407E-A947-70E740481C1C}">
+                <a14:useLocalDpi xmlns:a14="http://schemas.microsoft.com/office/drawing/2010/main" val="0"/>
+              </a:ext>
+            </a:extLst>
+          </a:blip>
+          <a:stretch>
+            <a:fillRect/>
+          </a:stretch>
+        </p:blipFill>
+        <p:spPr>
+          <a:xfrm>
+            <a:off x="0" y="0"/>
+            <a:ext cx="12192000" cy="6858000"/>
+          </a:xfrm>
+          <a:prstGeom prst="rect">
+            <a:avLst/>
+          </a:prstGeom>
+        </p:spPr>
+      </p:pic>
+      <p:sp>
+        <p:nvSpPr>
+          <p:cNvPr id="6" name="文字方塊 5">
+            <a:extLst>
+              <a:ext uri="{FF2B5EF4-FFF2-40B4-BE49-F238E27FC236}">
+                <a16:creationId xmlns:a16="http://schemas.microsoft.com/office/drawing/2014/main" id="{2B043C29-F607-7BCE-4B47-FB6B6C780514}"/>
+              </a:ext>
+            </a:extLst>
+          </p:cNvPr>
+          <p:cNvSpPr txBox="1"/>
+          <p:nvPr/>
+        </p:nvSpPr>
+        <p:spPr>
+          <a:xfrm>
+            <a:off x="4977745" y="1524000"/>
+            <a:ext cx="2236510" cy="707886"/>
+          </a:xfrm>
+          <a:prstGeom prst="rect">
+            <a:avLst/>
+          </a:prstGeom>
+          <a:noFill/>
+        </p:spPr>
+        <p:txBody>
+          <a:bodyPr wrap="none" rtlCol="0">
+            <a:spAutoFit/>
+          </a:bodyPr>
+          <a:lstStyle/>
+          <a:p>
+            <a:r>
+              <a:rPr lang="zh-TW" altLang="en-US" sz="4000" dirty="0">
+                <a:solidFill>
+                  <a:srgbClr val="00FFFF"/>
+                </a:solidFill>
+                <a:latin typeface="微軟正黑體" panose="020B0604030504040204" pitchFamily="34" charset="-120"/>
+                <a:ea typeface="微軟正黑體" panose="020B0604030504040204" pitchFamily="34" charset="-120"/>
+              </a:rPr>
+              <a:t>資料清洗</a:t>
+            </a:r>
+          </a:p>
+        </p:txBody>
+      </p:sp>
+      <p:pic>
+        <p:nvPicPr>
+          <p:cNvPr id="3" name="圖片 2">
+            <a:extLst>
+              <a:ext uri="{FF2B5EF4-FFF2-40B4-BE49-F238E27FC236}">
+                <a16:creationId xmlns:a16="http://schemas.microsoft.com/office/drawing/2014/main" id="{27199567-ABFB-D7E5-6614-71E07447DB21}"/>
+              </a:ext>
+            </a:extLst>
+          </p:cNvPr>
+          <p:cNvPicPr>
+            <a:picLocks noChangeAspect="1"/>
+          </p:cNvPicPr>
+          <p:nvPr/>
+        </p:nvPicPr>
+        <p:blipFill>
+          <a:blip r:embed="rId3">
+            <a:extLst>
+              <a:ext uri="{28A0092B-C50C-407E-A947-70E740481C1C}">
+                <a14:useLocalDpi xmlns:a14="http://schemas.microsoft.com/office/drawing/2010/main" val="0"/>
+              </a:ext>
+            </a:extLst>
+          </a:blip>
+          <a:stretch>
+            <a:fillRect/>
+          </a:stretch>
+        </p:blipFill>
+        <p:spPr>
+          <a:xfrm>
+            <a:off x="3343127" y="2231886"/>
+            <a:ext cx="5505745" cy="3372889"/>
+          </a:xfrm>
+          <a:prstGeom prst="rect">
+            <a:avLst/>
+          </a:prstGeom>
+        </p:spPr>
+      </p:pic>
+    </p:spTree>
+    <p:extLst>
+      <p:ext uri="{BB962C8B-B14F-4D97-AF65-F5344CB8AC3E}">
+        <p14:creationId xmlns:p14="http://schemas.microsoft.com/office/powerpoint/2010/main" val="297246201"/>
+      </p:ext>
+    </p:extLst>
+  </p:cSld>
+  <p:clrMapOvr>
+    <a:masterClrMapping/>
+  </p:clrMapOvr>
+</p:sld>
+</file>
+
+<file path=ppt/slides/slide6.xml><?xml version="1.0" encoding="utf-8"?>
+<p:sld xmlns:a="http://schemas.openxmlformats.org/drawingml/2006/main" xmlns:r="http://schemas.openxmlformats.org/officeDocument/2006/relationships" xmlns:p="http://schemas.openxmlformats.org/presentationml/2006/main">
+  <p:cSld>
+    <p:spTree>
+      <p:nvGrpSpPr>
+        <p:cNvPr id="1" name="">
+          <a:extLst>
+            <a:ext uri="{FF2B5EF4-FFF2-40B4-BE49-F238E27FC236}">
+              <a16:creationId xmlns:a16="http://schemas.microsoft.com/office/drawing/2014/main" id="{60E7DC36-F6CB-D36E-2A2A-1E1C5F06ABFD}"/>
+            </a:ext>
+          </a:extLst>
+        </p:cNvPr>
+        <p:cNvGrpSpPr/>
+        <p:nvPr/>
+      </p:nvGrpSpPr>
+      <p:grpSpPr>
+        <a:xfrm>
+          <a:off x="0" y="0"/>
+          <a:ext cx="0" cy="0"/>
+          <a:chOff x="0" y="0"/>
+          <a:chExt cx="0" cy="0"/>
+        </a:xfrm>
+      </p:grpSpPr>
+      <p:pic>
+        <p:nvPicPr>
+          <p:cNvPr id="5" name="圖片 4">
+            <a:extLst>
+              <a:ext uri="{FF2B5EF4-FFF2-40B4-BE49-F238E27FC236}">
+                <a16:creationId xmlns:a16="http://schemas.microsoft.com/office/drawing/2014/main" id="{C1C8E310-1740-1C47-3F7B-00C3126A6B11}"/>
+              </a:ext>
+            </a:extLst>
+          </p:cNvPr>
+          <p:cNvPicPr>
+            <a:picLocks noChangeAspect="1"/>
+          </p:cNvPicPr>
+          <p:nvPr/>
+        </p:nvPicPr>
+        <p:blipFill>
+          <a:blip r:embed="rId2">
+            <a:extLst>
+              <a:ext uri="{28A0092B-C50C-407E-A947-70E740481C1C}">
+                <a14:useLocalDpi xmlns:a14="http://schemas.microsoft.com/office/drawing/2010/main" val="0"/>
+              </a:ext>
+            </a:extLst>
+          </a:blip>
+          <a:stretch>
+            <a:fillRect/>
+          </a:stretch>
+        </p:blipFill>
+        <p:spPr>
+          <a:xfrm>
+            <a:off x="0" y="0"/>
+            <a:ext cx="12192000" cy="6858000"/>
+          </a:xfrm>
+          <a:prstGeom prst="rect">
+            <a:avLst/>
+          </a:prstGeom>
+        </p:spPr>
+      </p:pic>
+      <p:sp>
+        <p:nvSpPr>
+          <p:cNvPr id="6" name="文字方塊 5">
+            <a:extLst>
+              <a:ext uri="{FF2B5EF4-FFF2-40B4-BE49-F238E27FC236}">
+                <a16:creationId xmlns:a16="http://schemas.microsoft.com/office/drawing/2014/main" id="{BC8B181B-FF6F-28B9-1570-B399837B4305}"/>
+              </a:ext>
+            </a:extLst>
+          </p:cNvPr>
+          <p:cNvSpPr txBox="1"/>
+          <p:nvPr/>
+        </p:nvSpPr>
+        <p:spPr>
+          <a:xfrm>
+            <a:off x="4977745" y="1524000"/>
+            <a:ext cx="2236510" cy="707886"/>
+          </a:xfrm>
+          <a:prstGeom prst="rect">
+            <a:avLst/>
+          </a:prstGeom>
+          <a:noFill/>
+        </p:spPr>
+        <p:txBody>
+          <a:bodyPr wrap="none" rtlCol="0">
+            <a:spAutoFit/>
+          </a:bodyPr>
+          <a:lstStyle/>
+          <a:p>
+            <a:r>
+              <a:rPr lang="zh-TW" altLang="en-US" sz="4000" dirty="0">
+                <a:solidFill>
+                  <a:srgbClr val="00FFFF"/>
+                </a:solidFill>
+                <a:latin typeface="微軟正黑體" panose="020B0604030504040204" pitchFamily="34" charset="-120"/>
+                <a:ea typeface="微軟正黑體" panose="020B0604030504040204" pitchFamily="34" charset="-120"/>
+              </a:rPr>
+              <a:t>資料清洗</a:t>
+            </a:r>
+          </a:p>
+        </p:txBody>
+      </p:sp>
+      <p:pic>
+        <p:nvPicPr>
+          <p:cNvPr id="4" name="圖片 3">
+            <a:extLst>
+              <a:ext uri="{FF2B5EF4-FFF2-40B4-BE49-F238E27FC236}">
+                <a16:creationId xmlns:a16="http://schemas.microsoft.com/office/drawing/2014/main" id="{A997ED87-7B6B-2D8C-C4F3-F798610D3021}"/>
+              </a:ext>
+            </a:extLst>
+          </p:cNvPr>
+          <p:cNvPicPr>
+            <a:picLocks noChangeAspect="1"/>
+          </p:cNvPicPr>
+          <p:nvPr/>
+        </p:nvPicPr>
+        <p:blipFill>
+          <a:blip r:embed="rId3">
+            <a:extLst>
+              <a:ext uri="{28A0092B-C50C-407E-A947-70E740481C1C}">
+                <a14:useLocalDpi xmlns:a14="http://schemas.microsoft.com/office/drawing/2010/main" val="0"/>
+              </a:ext>
+            </a:extLst>
+          </a:blip>
+          <a:stretch>
+            <a:fillRect/>
+          </a:stretch>
+        </p:blipFill>
+        <p:spPr>
+          <a:xfrm>
+            <a:off x="2765190" y="2231886"/>
+            <a:ext cx="6661619" cy="3434061"/>
+          </a:xfrm>
+          <a:prstGeom prst="rect">
+            <a:avLst/>
+          </a:prstGeom>
+        </p:spPr>
+      </p:pic>
+    </p:spTree>
+    <p:extLst>
+      <p:ext uri="{BB962C8B-B14F-4D97-AF65-F5344CB8AC3E}">
+        <p14:creationId xmlns:p14="http://schemas.microsoft.com/office/powerpoint/2010/main" val="4139995655"/>
+      </p:ext>
+    </p:extLst>
+  </p:cSld>
+  <p:clrMapOvr>
+    <a:masterClrMapping/>
+  </p:clrMapOvr>
+</p:sld>
+</file>
+
+<file path=ppt/slides/slide7.xml><?xml version="1.0" encoding="utf-8"?>
+<p:sld xmlns:a="http://schemas.openxmlformats.org/drawingml/2006/main" xmlns:r="http://schemas.openxmlformats.org/officeDocument/2006/relationships" xmlns:p="http://schemas.openxmlformats.org/presentationml/2006/main">
+  <p:cSld>
+    <p:spTree>
+      <p:nvGrpSpPr>
+        <p:cNvPr id="1" name="">
+          <a:extLst>
+            <a:ext uri="{FF2B5EF4-FFF2-40B4-BE49-F238E27FC236}">
               <a16:creationId xmlns:a16="http://schemas.microsoft.com/office/drawing/2014/main" id="{3375EE94-A730-DABF-3FBB-63ECD9D89CB9}"/>
             </a:ext>
           </a:extLst>
@@ -6380,7 +6854,7 @@
 </p:sld>
 </file>
 
-<file path=ppt/slides/slide5.xml><?xml version="1.0" encoding="utf-8"?>
+<file path=ppt/slides/slide8.xml><?xml version="1.0" encoding="utf-8"?>
 <p:sld xmlns:a="http://schemas.openxmlformats.org/drawingml/2006/main" xmlns:r="http://schemas.openxmlformats.org/officeDocument/2006/relationships" xmlns:p="http://schemas.openxmlformats.org/presentationml/2006/main">
   <p:cSld>
     <p:spTree>
@@ -6539,7 +7013,7 @@
 </p:sld>
 </file>
 
-<file path=ppt/slides/slide6.xml><?xml version="1.0" encoding="utf-8"?>
+<file path=ppt/slides/slide9.xml><?xml version="1.0" encoding="utf-8"?>
 <p:sld xmlns:a="http://schemas.openxmlformats.org/drawingml/2006/main" xmlns:r="http://schemas.openxmlformats.org/officeDocument/2006/relationships" xmlns:p="http://schemas.openxmlformats.org/presentationml/2006/main">
   <p:cSld>
     <p:spTree>
@@ -6688,480 +7162,6 @@
     <p:extLst>
       <p:ext uri="{BB962C8B-B14F-4D97-AF65-F5344CB8AC3E}">
         <p14:creationId xmlns:p14="http://schemas.microsoft.com/office/powerpoint/2010/main" val="4060790127"/>
-      </p:ext>
-    </p:extLst>
-  </p:cSld>
-  <p:clrMapOvr>
-    <a:masterClrMapping/>
-  </p:clrMapOvr>
-</p:sld>
-</file>
-
-<file path=ppt/slides/slide7.xml><?xml version="1.0" encoding="utf-8"?>
-<p:sld xmlns:a="http://schemas.openxmlformats.org/drawingml/2006/main" xmlns:r="http://schemas.openxmlformats.org/officeDocument/2006/relationships" xmlns:p="http://schemas.openxmlformats.org/presentationml/2006/main">
-  <p:cSld>
-    <p:spTree>
-      <p:nvGrpSpPr>
-        <p:cNvPr id="1" name="">
-          <a:extLst>
-            <a:ext uri="{FF2B5EF4-FFF2-40B4-BE49-F238E27FC236}">
-              <a16:creationId xmlns:a16="http://schemas.microsoft.com/office/drawing/2014/main" id="{0B2E3A6C-1C8C-1CAB-7694-26B03E2BEE6C}"/>
-            </a:ext>
-          </a:extLst>
-        </p:cNvPr>
-        <p:cNvGrpSpPr/>
-        <p:nvPr/>
-      </p:nvGrpSpPr>
-      <p:grpSpPr>
-        <a:xfrm>
-          <a:off x="0" y="0"/>
-          <a:ext cx="0" cy="0"/>
-          <a:chOff x="0" y="0"/>
-          <a:chExt cx="0" cy="0"/>
-        </a:xfrm>
-      </p:grpSpPr>
-      <p:pic>
-        <p:nvPicPr>
-          <p:cNvPr id="5" name="圖片 4">
-            <a:extLst>
-              <a:ext uri="{FF2B5EF4-FFF2-40B4-BE49-F238E27FC236}">
-                <a16:creationId xmlns:a16="http://schemas.microsoft.com/office/drawing/2014/main" id="{64410478-C5EA-3CF2-4A24-E9A34689F9B3}"/>
-              </a:ext>
-            </a:extLst>
-          </p:cNvPr>
-          <p:cNvPicPr>
-            <a:picLocks noChangeAspect="1"/>
-          </p:cNvPicPr>
-          <p:nvPr/>
-        </p:nvPicPr>
-        <p:blipFill>
-          <a:blip r:embed="rId2">
-            <a:extLst>
-              <a:ext uri="{28A0092B-C50C-407E-A947-70E740481C1C}">
-                <a14:useLocalDpi xmlns:a14="http://schemas.microsoft.com/office/drawing/2010/main" val="0"/>
-              </a:ext>
-            </a:extLst>
-          </a:blip>
-          <a:stretch>
-            <a:fillRect/>
-          </a:stretch>
-        </p:blipFill>
-        <p:spPr>
-          <a:xfrm>
-            <a:off x="0" y="0"/>
-            <a:ext cx="12192000" cy="6858000"/>
-          </a:xfrm>
-          <a:prstGeom prst="rect">
-            <a:avLst/>
-          </a:prstGeom>
-        </p:spPr>
-      </p:pic>
-      <p:sp>
-        <p:nvSpPr>
-          <p:cNvPr id="6" name="文字方塊 5">
-            <a:extLst>
-              <a:ext uri="{FF2B5EF4-FFF2-40B4-BE49-F238E27FC236}">
-                <a16:creationId xmlns:a16="http://schemas.microsoft.com/office/drawing/2014/main" id="{5EEDA4C8-EAA3-8689-BF24-12B1EEE3A0A2}"/>
-              </a:ext>
-            </a:extLst>
-          </p:cNvPr>
-          <p:cNvSpPr txBox="1"/>
-          <p:nvPr/>
-        </p:nvSpPr>
-        <p:spPr>
-          <a:xfrm>
-            <a:off x="4517298" y="1524000"/>
-            <a:ext cx="3157403" cy="707886"/>
-          </a:xfrm>
-          <a:prstGeom prst="rect">
-            <a:avLst/>
-          </a:prstGeom>
-          <a:noFill/>
-        </p:spPr>
-        <p:txBody>
-          <a:bodyPr wrap="none" rtlCol="0">
-            <a:spAutoFit/>
-          </a:bodyPr>
-          <a:lstStyle/>
-          <a:p>
-            <a:r>
-              <a:rPr lang="en-US" altLang="zh-TW" sz="4000" dirty="0" err="1">
-                <a:solidFill>
-                  <a:srgbClr val="00FFFF"/>
-                </a:solidFill>
-                <a:latin typeface="微軟正黑體" panose="020B0604030504040204" pitchFamily="34" charset="-120"/>
-                <a:ea typeface="微軟正黑體" panose="020B0604030504040204" pitchFamily="34" charset="-120"/>
-              </a:rPr>
-              <a:t>PowerBI</a:t>
-            </a:r>
-            <a:r>
-              <a:rPr lang="zh-TW" altLang="en-US" sz="4000" dirty="0">
-                <a:solidFill>
-                  <a:srgbClr val="00FFFF"/>
-                </a:solidFill>
-                <a:latin typeface="微軟正黑體" panose="020B0604030504040204" pitchFamily="34" charset="-120"/>
-                <a:ea typeface="微軟正黑體" panose="020B0604030504040204" pitchFamily="34" charset="-120"/>
-              </a:rPr>
-              <a:t>展示</a:t>
-            </a:r>
-          </a:p>
-        </p:txBody>
-      </p:sp>
-      <p:pic>
-        <p:nvPicPr>
-          <p:cNvPr id="4" name="圖片 3">
-            <a:extLst>
-              <a:ext uri="{FF2B5EF4-FFF2-40B4-BE49-F238E27FC236}">
-                <a16:creationId xmlns:a16="http://schemas.microsoft.com/office/drawing/2014/main" id="{43F1D34A-703F-687C-16F9-99FFE19B7FE1}"/>
-              </a:ext>
-            </a:extLst>
-          </p:cNvPr>
-          <p:cNvPicPr>
-            <a:picLocks noChangeAspect="1"/>
-          </p:cNvPicPr>
-          <p:nvPr/>
-        </p:nvPicPr>
-        <p:blipFill>
-          <a:blip r:embed="rId3">
-            <a:extLst>
-              <a:ext uri="{28A0092B-C50C-407E-A947-70E740481C1C}">
-                <a14:useLocalDpi xmlns:a14="http://schemas.microsoft.com/office/drawing/2010/main" val="0"/>
-              </a:ext>
-            </a:extLst>
-          </a:blip>
-          <a:srcRect/>
-          <a:stretch/>
-        </p:blipFill>
-        <p:spPr>
-          <a:xfrm>
-            <a:off x="3070105" y="2229818"/>
-            <a:ext cx="6051786" cy="3402999"/>
-          </a:xfrm>
-          <a:prstGeom prst="rect">
-            <a:avLst/>
-          </a:prstGeom>
-        </p:spPr>
-      </p:pic>
-    </p:spTree>
-    <p:extLst>
-      <p:ext uri="{BB962C8B-B14F-4D97-AF65-F5344CB8AC3E}">
-        <p14:creationId xmlns:p14="http://schemas.microsoft.com/office/powerpoint/2010/main" val="2372769068"/>
-      </p:ext>
-    </p:extLst>
-  </p:cSld>
-  <p:clrMapOvr>
-    <a:masterClrMapping/>
-  </p:clrMapOvr>
-</p:sld>
-</file>
-
-<file path=ppt/slides/slide8.xml><?xml version="1.0" encoding="utf-8"?>
-<p:sld xmlns:a="http://schemas.openxmlformats.org/drawingml/2006/main" xmlns:r="http://schemas.openxmlformats.org/officeDocument/2006/relationships" xmlns:p="http://schemas.openxmlformats.org/presentationml/2006/main">
-  <p:cSld>
-    <p:spTree>
-      <p:nvGrpSpPr>
-        <p:cNvPr id="1" name="">
-          <a:extLst>
-            <a:ext uri="{FF2B5EF4-FFF2-40B4-BE49-F238E27FC236}">
-              <a16:creationId xmlns:a16="http://schemas.microsoft.com/office/drawing/2014/main" id="{96B867E1-730F-3AB3-4A6E-3E1331257F8A}"/>
-            </a:ext>
-          </a:extLst>
-        </p:cNvPr>
-        <p:cNvGrpSpPr/>
-        <p:nvPr/>
-      </p:nvGrpSpPr>
-      <p:grpSpPr>
-        <a:xfrm>
-          <a:off x="0" y="0"/>
-          <a:ext cx="0" cy="0"/>
-          <a:chOff x="0" y="0"/>
-          <a:chExt cx="0" cy="0"/>
-        </a:xfrm>
-      </p:grpSpPr>
-      <p:pic>
-        <p:nvPicPr>
-          <p:cNvPr id="5" name="圖片 4">
-            <a:extLst>
-              <a:ext uri="{FF2B5EF4-FFF2-40B4-BE49-F238E27FC236}">
-                <a16:creationId xmlns:a16="http://schemas.microsoft.com/office/drawing/2014/main" id="{CA88CB68-470F-4F95-7908-6B93A4CE526F}"/>
-              </a:ext>
-            </a:extLst>
-          </p:cNvPr>
-          <p:cNvPicPr>
-            <a:picLocks noChangeAspect="1"/>
-          </p:cNvPicPr>
-          <p:nvPr/>
-        </p:nvPicPr>
-        <p:blipFill>
-          <a:blip r:embed="rId2">
-            <a:extLst>
-              <a:ext uri="{28A0092B-C50C-407E-A947-70E740481C1C}">
-                <a14:useLocalDpi xmlns:a14="http://schemas.microsoft.com/office/drawing/2010/main" val="0"/>
-              </a:ext>
-            </a:extLst>
-          </a:blip>
-          <a:stretch>
-            <a:fillRect/>
-          </a:stretch>
-        </p:blipFill>
-        <p:spPr>
-          <a:xfrm>
-            <a:off x="0" y="0"/>
-            <a:ext cx="12192000" cy="6858000"/>
-          </a:xfrm>
-          <a:prstGeom prst="rect">
-            <a:avLst/>
-          </a:prstGeom>
-        </p:spPr>
-      </p:pic>
-      <p:sp>
-        <p:nvSpPr>
-          <p:cNvPr id="6" name="文字方塊 5">
-            <a:extLst>
-              <a:ext uri="{FF2B5EF4-FFF2-40B4-BE49-F238E27FC236}">
-                <a16:creationId xmlns:a16="http://schemas.microsoft.com/office/drawing/2014/main" id="{0A2F43CC-ADF4-4FF9-CDA8-E052538D21AB}"/>
-              </a:ext>
-            </a:extLst>
-          </p:cNvPr>
-          <p:cNvSpPr txBox="1"/>
-          <p:nvPr/>
-        </p:nvSpPr>
-        <p:spPr>
-          <a:xfrm>
-            <a:off x="4517298" y="1524000"/>
-            <a:ext cx="3157403" cy="707886"/>
-          </a:xfrm>
-          <a:prstGeom prst="rect">
-            <a:avLst/>
-          </a:prstGeom>
-          <a:noFill/>
-        </p:spPr>
-        <p:txBody>
-          <a:bodyPr wrap="none" rtlCol="0">
-            <a:spAutoFit/>
-          </a:bodyPr>
-          <a:lstStyle/>
-          <a:p>
-            <a:r>
-              <a:rPr lang="en-US" altLang="zh-TW" sz="4000" dirty="0" err="1">
-                <a:solidFill>
-                  <a:srgbClr val="00FFFF"/>
-                </a:solidFill>
-                <a:latin typeface="微軟正黑體" panose="020B0604030504040204" pitchFamily="34" charset="-120"/>
-                <a:ea typeface="微軟正黑體" panose="020B0604030504040204" pitchFamily="34" charset="-120"/>
-              </a:rPr>
-              <a:t>PowerBI</a:t>
-            </a:r>
-            <a:r>
-              <a:rPr lang="zh-TW" altLang="en-US" sz="4000" dirty="0">
-                <a:solidFill>
-                  <a:srgbClr val="00FFFF"/>
-                </a:solidFill>
-                <a:latin typeface="微軟正黑體" panose="020B0604030504040204" pitchFamily="34" charset="-120"/>
-                <a:ea typeface="微軟正黑體" panose="020B0604030504040204" pitchFamily="34" charset="-120"/>
-              </a:rPr>
-              <a:t>展示</a:t>
-            </a:r>
-          </a:p>
-        </p:txBody>
-      </p:sp>
-      <p:pic>
-        <p:nvPicPr>
-          <p:cNvPr id="4" name="圖片 3">
-            <a:extLst>
-              <a:ext uri="{FF2B5EF4-FFF2-40B4-BE49-F238E27FC236}">
-                <a16:creationId xmlns:a16="http://schemas.microsoft.com/office/drawing/2014/main" id="{6CCA5DA6-09C3-C577-1923-2417AC1A4D71}"/>
-              </a:ext>
-            </a:extLst>
-          </p:cNvPr>
-          <p:cNvPicPr>
-            <a:picLocks noChangeAspect="1"/>
-          </p:cNvPicPr>
-          <p:nvPr/>
-        </p:nvPicPr>
-        <p:blipFill>
-          <a:blip r:embed="rId3">
-            <a:extLst>
-              <a:ext uri="{28A0092B-C50C-407E-A947-70E740481C1C}">
-                <a14:useLocalDpi xmlns:a14="http://schemas.microsoft.com/office/drawing/2010/main" val="0"/>
-              </a:ext>
-            </a:extLst>
-          </a:blip>
-          <a:srcRect/>
-          <a:stretch/>
-        </p:blipFill>
-        <p:spPr>
-          <a:xfrm>
-            <a:off x="3070825" y="2229818"/>
-            <a:ext cx="6050347" cy="3402999"/>
-          </a:xfrm>
-          <a:prstGeom prst="rect">
-            <a:avLst/>
-          </a:prstGeom>
-        </p:spPr>
-      </p:pic>
-    </p:spTree>
-    <p:extLst>
-      <p:ext uri="{BB962C8B-B14F-4D97-AF65-F5344CB8AC3E}">
-        <p14:creationId xmlns:p14="http://schemas.microsoft.com/office/powerpoint/2010/main" val="2860633482"/>
-      </p:ext>
-    </p:extLst>
-  </p:cSld>
-  <p:clrMapOvr>
-    <a:masterClrMapping/>
-  </p:clrMapOvr>
-</p:sld>
-</file>
-
-<file path=ppt/slides/slide9.xml><?xml version="1.0" encoding="utf-8"?>
-<p:sld xmlns:a="http://schemas.openxmlformats.org/drawingml/2006/main" xmlns:r="http://schemas.openxmlformats.org/officeDocument/2006/relationships" xmlns:p="http://schemas.openxmlformats.org/presentationml/2006/main">
-  <p:cSld>
-    <p:spTree>
-      <p:nvGrpSpPr>
-        <p:cNvPr id="1" name="">
-          <a:extLst>
-            <a:ext uri="{FF2B5EF4-FFF2-40B4-BE49-F238E27FC236}">
-              <a16:creationId xmlns:a16="http://schemas.microsoft.com/office/drawing/2014/main" id="{4D940BCC-0F37-7100-62D6-EE1E1BF36B20}"/>
-            </a:ext>
-          </a:extLst>
-        </p:cNvPr>
-        <p:cNvGrpSpPr/>
-        <p:nvPr/>
-      </p:nvGrpSpPr>
-      <p:grpSpPr>
-        <a:xfrm>
-          <a:off x="0" y="0"/>
-          <a:ext cx="0" cy="0"/>
-          <a:chOff x="0" y="0"/>
-          <a:chExt cx="0" cy="0"/>
-        </a:xfrm>
-      </p:grpSpPr>
-      <p:pic>
-        <p:nvPicPr>
-          <p:cNvPr id="5" name="圖片 4">
-            <a:extLst>
-              <a:ext uri="{FF2B5EF4-FFF2-40B4-BE49-F238E27FC236}">
-                <a16:creationId xmlns:a16="http://schemas.microsoft.com/office/drawing/2014/main" id="{18D5424C-3CE8-9AA9-FB38-0429C6157AAE}"/>
-              </a:ext>
-            </a:extLst>
-          </p:cNvPr>
-          <p:cNvPicPr>
-            <a:picLocks noChangeAspect="1"/>
-          </p:cNvPicPr>
-          <p:nvPr/>
-        </p:nvPicPr>
-        <p:blipFill>
-          <a:blip r:embed="rId2">
-            <a:extLst>
-              <a:ext uri="{28A0092B-C50C-407E-A947-70E740481C1C}">
-                <a14:useLocalDpi xmlns:a14="http://schemas.microsoft.com/office/drawing/2010/main" val="0"/>
-              </a:ext>
-            </a:extLst>
-          </a:blip>
-          <a:stretch>
-            <a:fillRect/>
-          </a:stretch>
-        </p:blipFill>
-        <p:spPr>
-          <a:xfrm>
-            <a:off x="0" y="0"/>
-            <a:ext cx="12192000" cy="6858000"/>
-          </a:xfrm>
-          <a:prstGeom prst="rect">
-            <a:avLst/>
-          </a:prstGeom>
-        </p:spPr>
-      </p:pic>
-      <p:sp>
-        <p:nvSpPr>
-          <p:cNvPr id="6" name="文字方塊 5">
-            <a:extLst>
-              <a:ext uri="{FF2B5EF4-FFF2-40B4-BE49-F238E27FC236}">
-                <a16:creationId xmlns:a16="http://schemas.microsoft.com/office/drawing/2014/main" id="{C2BE8CF9-6F70-230A-18C7-C7C7BD661320}"/>
-              </a:ext>
-            </a:extLst>
-          </p:cNvPr>
-          <p:cNvSpPr txBox="1"/>
-          <p:nvPr/>
-        </p:nvSpPr>
-        <p:spPr>
-          <a:xfrm>
-            <a:off x="4517298" y="1524000"/>
-            <a:ext cx="3157403" cy="707886"/>
-          </a:xfrm>
-          <a:prstGeom prst="rect">
-            <a:avLst/>
-          </a:prstGeom>
-          <a:noFill/>
-        </p:spPr>
-        <p:txBody>
-          <a:bodyPr wrap="none" rtlCol="0">
-            <a:spAutoFit/>
-          </a:bodyPr>
-          <a:lstStyle/>
-          <a:p>
-            <a:r>
-              <a:rPr lang="en-US" altLang="zh-TW" sz="4000" dirty="0" err="1">
-                <a:solidFill>
-                  <a:srgbClr val="00FFFF"/>
-                </a:solidFill>
-                <a:latin typeface="微軟正黑體" panose="020B0604030504040204" pitchFamily="34" charset="-120"/>
-                <a:ea typeface="微軟正黑體" panose="020B0604030504040204" pitchFamily="34" charset="-120"/>
-              </a:rPr>
-              <a:t>PowerBI</a:t>
-            </a:r>
-            <a:r>
-              <a:rPr lang="zh-TW" altLang="en-US" sz="4000" dirty="0">
-                <a:solidFill>
-                  <a:srgbClr val="00FFFF"/>
-                </a:solidFill>
-                <a:latin typeface="微軟正黑體" panose="020B0604030504040204" pitchFamily="34" charset="-120"/>
-                <a:ea typeface="微軟正黑體" panose="020B0604030504040204" pitchFamily="34" charset="-120"/>
-              </a:rPr>
-              <a:t>展示</a:t>
-            </a:r>
-          </a:p>
-        </p:txBody>
-      </p:sp>
-      <p:pic>
-        <p:nvPicPr>
-          <p:cNvPr id="4" name="圖片 3">
-            <a:extLst>
-              <a:ext uri="{FF2B5EF4-FFF2-40B4-BE49-F238E27FC236}">
-                <a16:creationId xmlns:a16="http://schemas.microsoft.com/office/drawing/2014/main" id="{FF8556CE-1271-FBEB-77EA-9AA9CCB7D4E2}"/>
-              </a:ext>
-            </a:extLst>
-          </p:cNvPr>
-          <p:cNvPicPr>
-            <a:picLocks noChangeAspect="1"/>
-          </p:cNvPicPr>
-          <p:nvPr/>
-        </p:nvPicPr>
-        <p:blipFill>
-          <a:blip r:embed="rId3">
-            <a:extLst>
-              <a:ext uri="{28A0092B-C50C-407E-A947-70E740481C1C}">
-                <a14:useLocalDpi xmlns:a14="http://schemas.microsoft.com/office/drawing/2010/main" val="0"/>
-              </a:ext>
-            </a:extLst>
-          </a:blip>
-          <a:srcRect/>
-          <a:stretch/>
-        </p:blipFill>
-        <p:spPr>
-          <a:xfrm>
-            <a:off x="3070825" y="2236399"/>
-            <a:ext cx="6050347" cy="3389837"/>
-          </a:xfrm>
-          <a:prstGeom prst="rect">
-            <a:avLst/>
-          </a:prstGeom>
-        </p:spPr>
-      </p:pic>
-    </p:spTree>
-    <p:extLst>
-      <p:ext uri="{BB962C8B-B14F-4D97-AF65-F5344CB8AC3E}">
-        <p14:creationId xmlns:p14="http://schemas.microsoft.com/office/powerpoint/2010/main" val="1497603658"/>
       </p:ext>
     </p:extLst>
   </p:cSld>

--- a/Steam遊戲市場分析報告.pptx
+++ b/Steam遊戲市場分析報告.pptx
@@ -212,7 +212,7 @@
           <a:p>
             <a:fld id="{4248A3BC-A2A9-4AF2-859B-7C5E966DF741}" type="datetimeFigureOut">
               <a:rPr lang="zh-TW" altLang="en-US" smtClean="0"/>
-              <a:t>2026/4/16</a:t>
+              <a:t>2026/4/21</a:t>
             </a:fld>
             <a:endParaRPr lang="zh-TW" altLang="en-US"/>
           </a:p>
@@ -710,7 +710,7 @@
           <a:p>
             <a:fld id="{D94E7259-4CE4-4FEC-BE06-AE2B845FD034}" type="datetimeFigureOut">
               <a:rPr lang="zh-TW" altLang="en-US" smtClean="0"/>
-              <a:t>2026/4/16</a:t>
+              <a:t>2026/4/21</a:t>
             </a:fld>
             <a:endParaRPr lang="zh-TW" altLang="en-US"/>
           </a:p>
@@ -908,7 +908,7 @@
           <a:p>
             <a:fld id="{D94E7259-4CE4-4FEC-BE06-AE2B845FD034}" type="datetimeFigureOut">
               <a:rPr lang="zh-TW" altLang="en-US" smtClean="0"/>
-              <a:t>2026/4/16</a:t>
+              <a:t>2026/4/21</a:t>
             </a:fld>
             <a:endParaRPr lang="zh-TW" altLang="en-US"/>
           </a:p>
@@ -1116,7 +1116,7 @@
           <a:p>
             <a:fld id="{D94E7259-4CE4-4FEC-BE06-AE2B845FD034}" type="datetimeFigureOut">
               <a:rPr lang="zh-TW" altLang="en-US" smtClean="0"/>
-              <a:t>2026/4/16</a:t>
+              <a:t>2026/4/21</a:t>
             </a:fld>
             <a:endParaRPr lang="zh-TW" altLang="en-US"/>
           </a:p>
@@ -1314,7 +1314,7 @@
           <a:p>
             <a:fld id="{D94E7259-4CE4-4FEC-BE06-AE2B845FD034}" type="datetimeFigureOut">
               <a:rPr lang="zh-TW" altLang="en-US" smtClean="0"/>
-              <a:t>2026/4/16</a:t>
+              <a:t>2026/4/21</a:t>
             </a:fld>
             <a:endParaRPr lang="zh-TW" altLang="en-US"/>
           </a:p>
@@ -1589,7 +1589,7 @@
           <a:p>
             <a:fld id="{D94E7259-4CE4-4FEC-BE06-AE2B845FD034}" type="datetimeFigureOut">
               <a:rPr lang="zh-TW" altLang="en-US" smtClean="0"/>
-              <a:t>2026/4/16</a:t>
+              <a:t>2026/4/21</a:t>
             </a:fld>
             <a:endParaRPr lang="zh-TW" altLang="en-US"/>
           </a:p>
@@ -1854,7 +1854,7 @@
           <a:p>
             <a:fld id="{D94E7259-4CE4-4FEC-BE06-AE2B845FD034}" type="datetimeFigureOut">
               <a:rPr lang="zh-TW" altLang="en-US" smtClean="0"/>
-              <a:t>2026/4/16</a:t>
+              <a:t>2026/4/21</a:t>
             </a:fld>
             <a:endParaRPr lang="zh-TW" altLang="en-US"/>
           </a:p>
@@ -2266,7 +2266,7 @@
           <a:p>
             <a:fld id="{D94E7259-4CE4-4FEC-BE06-AE2B845FD034}" type="datetimeFigureOut">
               <a:rPr lang="zh-TW" altLang="en-US" smtClean="0"/>
-              <a:t>2026/4/16</a:t>
+              <a:t>2026/4/21</a:t>
             </a:fld>
             <a:endParaRPr lang="zh-TW" altLang="en-US"/>
           </a:p>
@@ -2407,7 +2407,7 @@
           <a:p>
             <a:fld id="{D94E7259-4CE4-4FEC-BE06-AE2B845FD034}" type="datetimeFigureOut">
               <a:rPr lang="zh-TW" altLang="en-US" smtClean="0"/>
-              <a:t>2026/4/16</a:t>
+              <a:t>2026/4/21</a:t>
             </a:fld>
             <a:endParaRPr lang="zh-TW" altLang="en-US"/>
           </a:p>
@@ -2520,7 +2520,7 @@
           <a:p>
             <a:fld id="{D94E7259-4CE4-4FEC-BE06-AE2B845FD034}" type="datetimeFigureOut">
               <a:rPr lang="zh-TW" altLang="en-US" smtClean="0"/>
-              <a:t>2026/4/16</a:t>
+              <a:t>2026/4/21</a:t>
             </a:fld>
             <a:endParaRPr lang="zh-TW" altLang="en-US"/>
           </a:p>
@@ -2831,7 +2831,7 @@
           <a:p>
             <a:fld id="{D94E7259-4CE4-4FEC-BE06-AE2B845FD034}" type="datetimeFigureOut">
               <a:rPr lang="zh-TW" altLang="en-US" smtClean="0"/>
-              <a:t>2026/4/16</a:t>
+              <a:t>2026/4/21</a:t>
             </a:fld>
             <a:endParaRPr lang="zh-TW" altLang="en-US"/>
           </a:p>
@@ -3119,7 +3119,7 @@
           <a:p>
             <a:fld id="{D94E7259-4CE4-4FEC-BE06-AE2B845FD034}" type="datetimeFigureOut">
               <a:rPr lang="zh-TW" altLang="en-US" smtClean="0"/>
-              <a:t>2026/4/16</a:t>
+              <a:t>2026/4/21</a:t>
             </a:fld>
             <a:endParaRPr lang="zh-TW" altLang="en-US"/>
           </a:p>
@@ -3360,7 +3360,7 @@
           <a:p>
             <a:fld id="{D94E7259-4CE4-4FEC-BE06-AE2B845FD034}" type="datetimeFigureOut">
               <a:rPr lang="zh-TW" altLang="en-US" smtClean="0"/>
-              <a:t>2026/4/16</a:t>
+              <a:t>2026/4/21</a:t>
             </a:fld>
             <a:endParaRPr lang="zh-TW" altLang="en-US"/>
           </a:p>

--- a/Steam遊戲市場分析報告.pptx
+++ b/Steam遊戲市場分析報告.pptx
@@ -212,7 +212,7 @@
           <a:p>
             <a:fld id="{4248A3BC-A2A9-4AF2-859B-7C5E966DF741}" type="datetimeFigureOut">
               <a:rPr lang="zh-TW" altLang="en-US" smtClean="0"/>
-              <a:t>2026/4/21</a:t>
+              <a:t>2026/4/22</a:t>
             </a:fld>
             <a:endParaRPr lang="zh-TW" altLang="en-US"/>
           </a:p>
@@ -710,7 +710,7 @@
           <a:p>
             <a:fld id="{D94E7259-4CE4-4FEC-BE06-AE2B845FD034}" type="datetimeFigureOut">
               <a:rPr lang="zh-TW" altLang="en-US" smtClean="0"/>
-              <a:t>2026/4/21</a:t>
+              <a:t>2026/4/22</a:t>
             </a:fld>
             <a:endParaRPr lang="zh-TW" altLang="en-US"/>
           </a:p>
@@ -908,7 +908,7 @@
           <a:p>
             <a:fld id="{D94E7259-4CE4-4FEC-BE06-AE2B845FD034}" type="datetimeFigureOut">
               <a:rPr lang="zh-TW" altLang="en-US" smtClean="0"/>
-              <a:t>2026/4/21</a:t>
+              <a:t>2026/4/22</a:t>
             </a:fld>
             <a:endParaRPr lang="zh-TW" altLang="en-US"/>
           </a:p>
@@ -1116,7 +1116,7 @@
           <a:p>
             <a:fld id="{D94E7259-4CE4-4FEC-BE06-AE2B845FD034}" type="datetimeFigureOut">
               <a:rPr lang="zh-TW" altLang="en-US" smtClean="0"/>
-              <a:t>2026/4/21</a:t>
+              <a:t>2026/4/22</a:t>
             </a:fld>
             <a:endParaRPr lang="zh-TW" altLang="en-US"/>
           </a:p>
@@ -1314,7 +1314,7 @@
           <a:p>
             <a:fld id="{D94E7259-4CE4-4FEC-BE06-AE2B845FD034}" type="datetimeFigureOut">
               <a:rPr lang="zh-TW" altLang="en-US" smtClean="0"/>
-              <a:t>2026/4/21</a:t>
+              <a:t>2026/4/22</a:t>
             </a:fld>
             <a:endParaRPr lang="zh-TW" altLang="en-US"/>
           </a:p>
@@ -1589,7 +1589,7 @@
           <a:p>
             <a:fld id="{D94E7259-4CE4-4FEC-BE06-AE2B845FD034}" type="datetimeFigureOut">
               <a:rPr lang="zh-TW" altLang="en-US" smtClean="0"/>
-              <a:t>2026/4/21</a:t>
+              <a:t>2026/4/22</a:t>
             </a:fld>
             <a:endParaRPr lang="zh-TW" altLang="en-US"/>
           </a:p>
@@ -1854,7 +1854,7 @@
           <a:p>
             <a:fld id="{D94E7259-4CE4-4FEC-BE06-AE2B845FD034}" type="datetimeFigureOut">
               <a:rPr lang="zh-TW" altLang="en-US" smtClean="0"/>
-              <a:t>2026/4/21</a:t>
+              <a:t>2026/4/22</a:t>
             </a:fld>
             <a:endParaRPr lang="zh-TW" altLang="en-US"/>
           </a:p>
@@ -2266,7 +2266,7 @@
           <a:p>
             <a:fld id="{D94E7259-4CE4-4FEC-BE06-AE2B845FD034}" type="datetimeFigureOut">
               <a:rPr lang="zh-TW" altLang="en-US" smtClean="0"/>
-              <a:t>2026/4/21</a:t>
+              <a:t>2026/4/22</a:t>
             </a:fld>
             <a:endParaRPr lang="zh-TW" altLang="en-US"/>
           </a:p>
@@ -2407,7 +2407,7 @@
           <a:p>
             <a:fld id="{D94E7259-4CE4-4FEC-BE06-AE2B845FD034}" type="datetimeFigureOut">
               <a:rPr lang="zh-TW" altLang="en-US" smtClean="0"/>
-              <a:t>2026/4/21</a:t>
+              <a:t>2026/4/22</a:t>
             </a:fld>
             <a:endParaRPr lang="zh-TW" altLang="en-US"/>
           </a:p>
@@ -2520,7 +2520,7 @@
           <a:p>
             <a:fld id="{D94E7259-4CE4-4FEC-BE06-AE2B845FD034}" type="datetimeFigureOut">
               <a:rPr lang="zh-TW" altLang="en-US" smtClean="0"/>
-              <a:t>2026/4/21</a:t>
+              <a:t>2026/4/22</a:t>
             </a:fld>
             <a:endParaRPr lang="zh-TW" altLang="en-US"/>
           </a:p>
@@ -2831,7 +2831,7 @@
           <a:p>
             <a:fld id="{D94E7259-4CE4-4FEC-BE06-AE2B845FD034}" type="datetimeFigureOut">
               <a:rPr lang="zh-TW" altLang="en-US" smtClean="0"/>
-              <a:t>2026/4/21</a:t>
+              <a:t>2026/4/22</a:t>
             </a:fld>
             <a:endParaRPr lang="zh-TW" altLang="en-US"/>
           </a:p>
@@ -3119,7 +3119,7 @@
           <a:p>
             <a:fld id="{D94E7259-4CE4-4FEC-BE06-AE2B845FD034}" type="datetimeFigureOut">
               <a:rPr lang="zh-TW" altLang="en-US" smtClean="0"/>
-              <a:t>2026/4/21</a:t>
+              <a:t>2026/4/22</a:t>
             </a:fld>
             <a:endParaRPr lang="zh-TW" altLang="en-US"/>
           </a:p>
@@ -3360,7 +3360,7 @@
           <a:p>
             <a:fld id="{D94E7259-4CE4-4FEC-BE06-AE2B845FD034}" type="datetimeFigureOut">
               <a:rPr lang="zh-TW" altLang="en-US" smtClean="0"/>
-              <a:t>2026/4/21</a:t>
+              <a:t>2026/4/22</a:t>
             </a:fld>
             <a:endParaRPr lang="zh-TW" altLang="en-US"/>
           </a:p>
@@ -4945,8 +4945,8 @@
         </p:nvSpPr>
         <p:spPr>
           <a:xfrm>
-            <a:off x="4464784" y="1524000"/>
-            <a:ext cx="3262432" cy="707886"/>
+            <a:off x="4977745" y="1524000"/>
+            <a:ext cx="2236510" cy="707886"/>
           </a:xfrm>
           <a:prstGeom prst="rect">
             <a:avLst/>
@@ -4967,7 +4967,7 @@
                 <a:latin typeface="微軟正黑體" panose="020B0604030504040204" pitchFamily="34" charset="-120"/>
                 <a:ea typeface="微軟正黑體" panose="020B0604030504040204" pitchFamily="34" charset="-120"/>
               </a:rPr>
-              <a:t>近期額外分享</a:t>
+              <a:t>額外分享</a:t>
             </a:r>
           </a:p>
         </p:txBody>
